--- a/U1-Distribution-of-Velocities/figures/all-figs.pptx
+++ b/U1-Distribution-of-Velocities/figures/all-figs.pptx
@@ -12,6 +12,8 @@
     <p:sldId id="260" r:id="rId6"/>
     <p:sldId id="261" r:id="rId7"/>
     <p:sldId id="262" r:id="rId8"/>
+    <p:sldId id="263" r:id="rId9"/>
+    <p:sldId id="264" r:id="rId10"/>
   </p:sldIdLst>
   <p:sldSz cx="12192000" cy="6858000"/>
   <p:notesSz cx="6858000" cy="9144000"/>
@@ -278,7 +280,7 @@
           <a:p>
             <a:fld id="{B47390B5-D7E4-4A9A-ABAD-920B3BD530F5}" type="datetimeFigureOut">
               <a:rPr lang="en-IN" smtClean="0"/>
-              <a:t>28-08-2026</a:t>
+              <a:t>25-09-2026</a:t>
             </a:fld>
             <a:endParaRPr lang="en-IN"/>
           </a:p>
@@ -478,7 +480,7 @@
           <a:p>
             <a:fld id="{B47390B5-D7E4-4A9A-ABAD-920B3BD530F5}" type="datetimeFigureOut">
               <a:rPr lang="en-IN" smtClean="0"/>
-              <a:t>28-08-2026</a:t>
+              <a:t>25-09-2026</a:t>
             </a:fld>
             <a:endParaRPr lang="en-IN"/>
           </a:p>
@@ -688,7 +690,7 @@
           <a:p>
             <a:fld id="{B47390B5-D7E4-4A9A-ABAD-920B3BD530F5}" type="datetimeFigureOut">
               <a:rPr lang="en-IN" smtClean="0"/>
-              <a:t>28-08-2026</a:t>
+              <a:t>25-09-2026</a:t>
             </a:fld>
             <a:endParaRPr lang="en-IN"/>
           </a:p>
@@ -888,7 +890,7 @@
           <a:p>
             <a:fld id="{B47390B5-D7E4-4A9A-ABAD-920B3BD530F5}" type="datetimeFigureOut">
               <a:rPr lang="en-IN" smtClean="0"/>
-              <a:t>28-08-2026</a:t>
+              <a:t>25-09-2026</a:t>
             </a:fld>
             <a:endParaRPr lang="en-IN"/>
           </a:p>
@@ -1164,7 +1166,7 @@
           <a:p>
             <a:fld id="{B47390B5-D7E4-4A9A-ABAD-920B3BD530F5}" type="datetimeFigureOut">
               <a:rPr lang="en-IN" smtClean="0"/>
-              <a:t>28-08-2026</a:t>
+              <a:t>25-09-2026</a:t>
             </a:fld>
             <a:endParaRPr lang="en-IN"/>
           </a:p>
@@ -1432,7 +1434,7 @@
           <a:p>
             <a:fld id="{B47390B5-D7E4-4A9A-ABAD-920B3BD530F5}" type="datetimeFigureOut">
               <a:rPr lang="en-IN" smtClean="0"/>
-              <a:t>28-08-2026</a:t>
+              <a:t>25-09-2026</a:t>
             </a:fld>
             <a:endParaRPr lang="en-IN"/>
           </a:p>
@@ -1847,7 +1849,7 @@
           <a:p>
             <a:fld id="{B47390B5-D7E4-4A9A-ABAD-920B3BD530F5}" type="datetimeFigureOut">
               <a:rPr lang="en-IN" smtClean="0"/>
-              <a:t>28-08-2026</a:t>
+              <a:t>25-09-2026</a:t>
             </a:fld>
             <a:endParaRPr lang="en-IN"/>
           </a:p>
@@ -1989,7 +1991,7 @@
           <a:p>
             <a:fld id="{B47390B5-D7E4-4A9A-ABAD-920B3BD530F5}" type="datetimeFigureOut">
               <a:rPr lang="en-IN" smtClean="0"/>
-              <a:t>28-08-2026</a:t>
+              <a:t>25-09-2026</a:t>
             </a:fld>
             <a:endParaRPr lang="en-IN"/>
           </a:p>
@@ -2102,7 +2104,7 @@
           <a:p>
             <a:fld id="{B47390B5-D7E4-4A9A-ABAD-920B3BD530F5}" type="datetimeFigureOut">
               <a:rPr lang="en-IN" smtClean="0"/>
-              <a:t>28-08-2026</a:t>
+              <a:t>25-09-2026</a:t>
             </a:fld>
             <a:endParaRPr lang="en-IN"/>
           </a:p>
@@ -2415,7 +2417,7 @@
           <a:p>
             <a:fld id="{B47390B5-D7E4-4A9A-ABAD-920B3BD530F5}" type="datetimeFigureOut">
               <a:rPr lang="en-IN" smtClean="0"/>
-              <a:t>28-08-2026</a:t>
+              <a:t>25-09-2026</a:t>
             </a:fld>
             <a:endParaRPr lang="en-IN"/>
           </a:p>
@@ -2704,7 +2706,7 @@
           <a:p>
             <a:fld id="{B47390B5-D7E4-4A9A-ABAD-920B3BD530F5}" type="datetimeFigureOut">
               <a:rPr lang="en-IN" smtClean="0"/>
-              <a:t>28-08-2026</a:t>
+              <a:t>25-09-2026</a:t>
             </a:fld>
             <a:endParaRPr lang="en-IN"/>
           </a:p>
@@ -2947,7 +2949,7 @@
           <a:p>
             <a:fld id="{B47390B5-D7E4-4A9A-ABAD-920B3BD530F5}" type="datetimeFigureOut">
               <a:rPr lang="en-IN" smtClean="0"/>
-              <a:t>28-08-2026</a:t>
+              <a:t>25-09-2026</a:t>
             </a:fld>
             <a:endParaRPr lang="en-IN"/>
           </a:p>
@@ -13356,8 +13358,8 @@
           </a:p>
         </p:txBody>
       </p:sp>
-      <mc:AlternateContent xmlns:mc="http://schemas.openxmlformats.org/markup-compatibility/2006">
-        <mc:Choice xmlns:a14="http://schemas.microsoft.com/office/drawing/2010/main" Requires="a14">
+      <mc:AlternateContent xmlns:mc="http://schemas.openxmlformats.org/markup-compatibility/2006" xmlns:a14="http://schemas.microsoft.com/office/drawing/2010/main">
+        <mc:Choice Requires="a14">
           <p:sp>
             <p:nvSpPr>
               <p:cNvPr id="7" name="TextBox 6"/>
@@ -13380,6 +13382,7 @@
               </a:bodyPr>
               <a:lstStyle/>
               <a:p>
+                <a:pPr/>
                 <a14:m>
                   <m:oMathPara xmlns:m="http://schemas.openxmlformats.org/officeDocument/2006/math">
                     <m:oMathParaPr>
@@ -13401,7 +13404,7 @@
             </p:txBody>
           </p:sp>
         </mc:Choice>
-        <mc:Fallback>
+        <mc:Fallback xmlns="">
           <p:sp>
             <p:nvSpPr>
               <p:cNvPr id="7" name="TextBox 6"/>
@@ -13477,8 +13480,8 @@
           </a:p>
         </p:txBody>
       </p:sp>
-      <mc:AlternateContent xmlns:mc="http://schemas.openxmlformats.org/markup-compatibility/2006">
-        <mc:Choice xmlns:a14="http://schemas.microsoft.com/office/drawing/2010/main" Requires="a14">
+      <mc:AlternateContent xmlns:mc="http://schemas.openxmlformats.org/markup-compatibility/2006" xmlns:a14="http://schemas.microsoft.com/office/drawing/2010/main">
+        <mc:Choice Requires="a14">
           <p:sp>
             <p:nvSpPr>
               <p:cNvPr id="9" name="TextBox 8"/>
@@ -13501,6 +13504,7 @@
               </a:bodyPr>
               <a:lstStyle/>
               <a:p>
+                <a:pPr/>
                 <a14:m>
                   <m:oMathPara xmlns:m="http://schemas.openxmlformats.org/officeDocument/2006/math">
                     <m:oMathParaPr>
@@ -13534,7 +13538,7 @@
             </p:txBody>
           </p:sp>
         </mc:Choice>
-        <mc:Fallback>
+        <mc:Fallback xmlns="">
           <p:sp>
             <p:nvSpPr>
               <p:cNvPr id="9" name="TextBox 8"/>
@@ -13573,8 +13577,8 @@
           </p:sp>
         </mc:Fallback>
       </mc:AlternateContent>
-      <mc:AlternateContent xmlns:mc="http://schemas.openxmlformats.org/markup-compatibility/2006">
-        <mc:Choice xmlns:a14="http://schemas.microsoft.com/office/drawing/2010/main" Requires="a14">
+      <mc:AlternateContent xmlns:mc="http://schemas.openxmlformats.org/markup-compatibility/2006" xmlns:a14="http://schemas.microsoft.com/office/drawing/2010/main">
+        <mc:Choice Requires="a14">
           <p:sp>
             <p:nvSpPr>
               <p:cNvPr id="10" name="TextBox 9"/>
@@ -13597,6 +13601,7 @@
               </a:bodyPr>
               <a:lstStyle/>
               <a:p>
+                <a:pPr/>
                 <a14:m>
                   <m:oMathPara xmlns:m="http://schemas.openxmlformats.org/officeDocument/2006/math">
                     <m:oMathParaPr>
@@ -13630,7 +13635,7 @@
             </p:txBody>
           </p:sp>
         </mc:Choice>
-        <mc:Fallback>
+        <mc:Fallback xmlns="">
           <p:sp>
             <p:nvSpPr>
               <p:cNvPr id="10" name="TextBox 9"/>
@@ -13708,8 +13713,8 @@
           </a:fontRef>
         </p:style>
       </p:cxnSp>
-      <mc:AlternateContent xmlns:mc="http://schemas.openxmlformats.org/markup-compatibility/2006">
-        <mc:Choice xmlns:a14="http://schemas.microsoft.com/office/drawing/2010/main" Requires="a14">
+      <mc:AlternateContent xmlns:mc="http://schemas.openxmlformats.org/markup-compatibility/2006" xmlns:a14="http://schemas.microsoft.com/office/drawing/2010/main">
+        <mc:Choice Requires="a14">
           <p:sp>
             <p:nvSpPr>
               <p:cNvPr id="16" name="TextBox 15"/>
@@ -13732,6 +13737,7 @@
               </a:bodyPr>
               <a:lstStyle/>
               <a:p>
+                <a:pPr/>
                 <a14:m>
                   <m:oMathPara xmlns:m="http://schemas.openxmlformats.org/officeDocument/2006/math">
                     <m:oMathParaPr>
@@ -13771,7 +13777,7 @@
             </p:txBody>
           </p:sp>
         </mc:Choice>
-        <mc:Fallback>
+        <mc:Fallback xmlns="">
           <p:sp>
             <p:nvSpPr>
               <p:cNvPr id="16" name="TextBox 15"/>
@@ -13888,6 +13894,2849 @@
     <p:extLst>
       <p:ext uri="{BB962C8B-B14F-4D97-AF65-F5344CB8AC3E}">
         <p14:creationId xmlns:p14="http://schemas.microsoft.com/office/powerpoint/2010/main" val="3750295835"/>
+      </p:ext>
+    </p:extLst>
+  </p:cSld>
+  <p:clrMapOvr>
+    <a:masterClrMapping/>
+  </p:clrMapOvr>
+</p:sld>
+</file>
+
+<file path=ppt/slides/slide8.xml><?xml version="1.0" encoding="utf-8"?>
+<p:sld xmlns:a="http://schemas.openxmlformats.org/drawingml/2006/main" xmlns:r="http://schemas.openxmlformats.org/officeDocument/2006/relationships" xmlns:p="http://schemas.openxmlformats.org/presentationml/2006/main">
+  <p:cSld>
+    <p:spTree>
+      <p:nvGrpSpPr>
+        <p:cNvPr id="1" name=""/>
+        <p:cNvGrpSpPr/>
+        <p:nvPr/>
+      </p:nvGrpSpPr>
+      <p:grpSpPr>
+        <a:xfrm>
+          <a:off x="0" y="0"/>
+          <a:ext cx="0" cy="0"/>
+          <a:chOff x="0" y="0"/>
+          <a:chExt cx="0" cy="0"/>
+        </a:xfrm>
+      </p:grpSpPr>
+      <p:sp>
+        <p:nvSpPr>
+          <p:cNvPr id="2" name="Parallelogram 1"/>
+          <p:cNvSpPr/>
+          <p:nvPr/>
+        </p:nvSpPr>
+        <p:spPr>
+          <a:xfrm>
+            <a:off x="2211977" y="2325189"/>
+            <a:ext cx="6453051" cy="1593668"/>
+          </a:xfrm>
+          <a:prstGeom prst="parallelogram">
+            <a:avLst>
+              <a:gd name="adj" fmla="val 109494"/>
+            </a:avLst>
+          </a:prstGeom>
+          <a:solidFill>
+            <a:schemeClr val="bg1">
+              <a:lumMod val="75000"/>
+            </a:schemeClr>
+          </a:solidFill>
+          <a:ln>
+            <a:noFill/>
+          </a:ln>
+        </p:spPr>
+        <p:style>
+          <a:lnRef idx="2">
+            <a:schemeClr val="accent1">
+              <a:shade val="50000"/>
+            </a:schemeClr>
+          </a:lnRef>
+          <a:fillRef idx="1">
+            <a:schemeClr val="accent1"/>
+          </a:fillRef>
+          <a:effectRef idx="0">
+            <a:schemeClr val="accent1"/>
+          </a:effectRef>
+          <a:fontRef idx="minor">
+            <a:schemeClr val="lt1"/>
+          </a:fontRef>
+        </p:style>
+        <p:txBody>
+          <a:bodyPr rtlCol="0" anchor="ctr"/>
+          <a:lstStyle/>
+          <a:p>
+            <a:pPr algn="ctr"/>
+            <a:endParaRPr lang="en-US"/>
+          </a:p>
+        </p:txBody>
+      </p:sp>
+      <p:sp>
+        <p:nvSpPr>
+          <p:cNvPr id="3" name="Parallelogram 6"/>
+          <p:cNvSpPr/>
+          <p:nvPr/>
+        </p:nvSpPr>
+        <p:spPr>
+          <a:xfrm>
+            <a:off x="4162696" y="2068501"/>
+            <a:ext cx="2304144" cy="2104356"/>
+          </a:xfrm>
+          <a:custGeom>
+            <a:avLst/>
+            <a:gdLst>
+              <a:gd name="connsiteX0" fmla="*/ 0 w 6453051"/>
+              <a:gd name="connsiteY0" fmla="*/ 1593668 h 1593668"/>
+              <a:gd name="connsiteX1" fmla="*/ 1744971 w 6453051"/>
+              <a:gd name="connsiteY1" fmla="*/ 0 h 1593668"/>
+              <a:gd name="connsiteX2" fmla="*/ 6453051 w 6453051"/>
+              <a:gd name="connsiteY2" fmla="*/ 0 h 1593668"/>
+              <a:gd name="connsiteX3" fmla="*/ 4708080 w 6453051"/>
+              <a:gd name="connsiteY3" fmla="*/ 1593668 h 1593668"/>
+              <a:gd name="connsiteX4" fmla="*/ 0 w 6453051"/>
+              <a:gd name="connsiteY4" fmla="*/ 1593668 h 1593668"/>
+              <a:gd name="connsiteX0" fmla="*/ 0 w 4708080"/>
+              <a:gd name="connsiteY0" fmla="*/ 1593668 h 1593668"/>
+              <a:gd name="connsiteX1" fmla="*/ 1744971 w 4708080"/>
+              <a:gd name="connsiteY1" fmla="*/ 0 h 1593668"/>
+              <a:gd name="connsiteX2" fmla="*/ 4708080 w 4708080"/>
+              <a:gd name="connsiteY2" fmla="*/ 1593668 h 1593668"/>
+              <a:gd name="connsiteX3" fmla="*/ 0 w 4708080"/>
+              <a:gd name="connsiteY3" fmla="*/ 1593668 h 1593668"/>
+              <a:gd name="connsiteX0" fmla="*/ 0 w 1744971"/>
+              <a:gd name="connsiteY0" fmla="*/ 1593668 h 1593668"/>
+              <a:gd name="connsiteX1" fmla="*/ 1744971 w 1744971"/>
+              <a:gd name="connsiteY1" fmla="*/ 0 h 1593668"/>
+              <a:gd name="connsiteX2" fmla="*/ 0 w 1744971"/>
+              <a:gd name="connsiteY2" fmla="*/ 1593668 h 1593668"/>
+            </a:gdLst>
+            <a:ahLst/>
+            <a:cxnLst>
+              <a:cxn ang="0">
+                <a:pos x="connsiteX0" y="connsiteY0"/>
+              </a:cxn>
+              <a:cxn ang="0">
+                <a:pos x="connsiteX1" y="connsiteY1"/>
+              </a:cxn>
+              <a:cxn ang="0">
+                <a:pos x="connsiteX2" y="connsiteY2"/>
+              </a:cxn>
+            </a:cxnLst>
+            <a:rect l="l" t="t" r="r" b="b"/>
+            <a:pathLst>
+              <a:path w="1744971" h="1593668">
+                <a:moveTo>
+                  <a:pt x="0" y="1593668"/>
+                </a:moveTo>
+                <a:lnTo>
+                  <a:pt x="1744971" y="0"/>
+                </a:lnTo>
+                <a:lnTo>
+                  <a:pt x="0" y="1593668"/>
+                </a:lnTo>
+                <a:close/>
+              </a:path>
+            </a:pathLst>
+          </a:custGeom>
+          <a:noFill/>
+          <a:ln w="28575">
+            <a:solidFill>
+              <a:schemeClr val="tx1">
+                <a:lumMod val="65000"/>
+                <a:lumOff val="35000"/>
+              </a:schemeClr>
+            </a:solidFill>
+          </a:ln>
+        </p:spPr>
+        <p:style>
+          <a:lnRef idx="2">
+            <a:schemeClr val="accent1">
+              <a:shade val="50000"/>
+            </a:schemeClr>
+          </a:lnRef>
+          <a:fillRef idx="1">
+            <a:schemeClr val="accent1"/>
+          </a:fillRef>
+          <a:effectRef idx="0">
+            <a:schemeClr val="accent1"/>
+          </a:effectRef>
+          <a:fontRef idx="minor">
+            <a:schemeClr val="lt1"/>
+          </a:fontRef>
+        </p:style>
+        <p:txBody>
+          <a:bodyPr rtlCol="0" anchor="ctr"/>
+          <a:lstStyle/>
+          <a:p>
+            <a:pPr algn="ctr"/>
+            <a:endParaRPr lang="en-US" dirty="0"/>
+          </a:p>
+        </p:txBody>
+      </p:sp>
+      <p:sp>
+        <p:nvSpPr>
+          <p:cNvPr id="4" name="Parallelogram 7"/>
+          <p:cNvSpPr/>
+          <p:nvPr/>
+        </p:nvSpPr>
+        <p:spPr>
+          <a:xfrm flipV="1">
+            <a:off x="2577736" y="2958738"/>
+            <a:ext cx="5819503" cy="45719"/>
+          </a:xfrm>
+          <a:custGeom>
+            <a:avLst/>
+            <a:gdLst>
+              <a:gd name="connsiteX0" fmla="*/ 0 w 6453051"/>
+              <a:gd name="connsiteY0" fmla="*/ 1593668 h 1593668"/>
+              <a:gd name="connsiteX1" fmla="*/ 1744971 w 6453051"/>
+              <a:gd name="connsiteY1" fmla="*/ 0 h 1593668"/>
+              <a:gd name="connsiteX2" fmla="*/ 6453051 w 6453051"/>
+              <a:gd name="connsiteY2" fmla="*/ 0 h 1593668"/>
+              <a:gd name="connsiteX3" fmla="*/ 4708080 w 6453051"/>
+              <a:gd name="connsiteY3" fmla="*/ 1593668 h 1593668"/>
+              <a:gd name="connsiteX4" fmla="*/ 0 w 6453051"/>
+              <a:gd name="connsiteY4" fmla="*/ 1593668 h 1593668"/>
+              <a:gd name="connsiteX0" fmla="*/ 0 w 4708080"/>
+              <a:gd name="connsiteY0" fmla="*/ 1593668 h 1593668"/>
+              <a:gd name="connsiteX1" fmla="*/ 1744971 w 4708080"/>
+              <a:gd name="connsiteY1" fmla="*/ 0 h 1593668"/>
+              <a:gd name="connsiteX2" fmla="*/ 4708080 w 4708080"/>
+              <a:gd name="connsiteY2" fmla="*/ 1593668 h 1593668"/>
+              <a:gd name="connsiteX3" fmla="*/ 0 w 4708080"/>
+              <a:gd name="connsiteY3" fmla="*/ 1593668 h 1593668"/>
+              <a:gd name="connsiteX0" fmla="*/ 0 w 4708080"/>
+              <a:gd name="connsiteY0" fmla="*/ 0 h 0"/>
+              <a:gd name="connsiteX1" fmla="*/ 4708080 w 4708080"/>
+              <a:gd name="connsiteY1" fmla="*/ 0 h 0"/>
+              <a:gd name="connsiteX2" fmla="*/ 0 w 4708080"/>
+              <a:gd name="connsiteY2" fmla="*/ 0 h 0"/>
+            </a:gdLst>
+            <a:ahLst/>
+            <a:cxnLst>
+              <a:cxn ang="0">
+                <a:pos x="connsiteX0" y="connsiteY0"/>
+              </a:cxn>
+              <a:cxn ang="0">
+                <a:pos x="connsiteX1" y="connsiteY1"/>
+              </a:cxn>
+              <a:cxn ang="0">
+                <a:pos x="connsiteX2" y="connsiteY2"/>
+              </a:cxn>
+            </a:cxnLst>
+            <a:rect l="l" t="t" r="r" b="b"/>
+            <a:pathLst>
+              <a:path w="4708080">
+                <a:moveTo>
+                  <a:pt x="0" y="0"/>
+                </a:moveTo>
+                <a:lnTo>
+                  <a:pt x="4708080" y="0"/>
+                </a:lnTo>
+                <a:lnTo>
+                  <a:pt x="0" y="0"/>
+                </a:lnTo>
+                <a:close/>
+              </a:path>
+            </a:pathLst>
+          </a:custGeom>
+          <a:noFill/>
+          <a:ln w="28575">
+            <a:solidFill>
+              <a:schemeClr val="tx1">
+                <a:lumMod val="65000"/>
+                <a:lumOff val="35000"/>
+              </a:schemeClr>
+            </a:solidFill>
+          </a:ln>
+        </p:spPr>
+        <p:style>
+          <a:lnRef idx="2">
+            <a:schemeClr val="accent1">
+              <a:shade val="50000"/>
+            </a:schemeClr>
+          </a:lnRef>
+          <a:fillRef idx="1">
+            <a:schemeClr val="accent1"/>
+          </a:fillRef>
+          <a:effectRef idx="0">
+            <a:schemeClr val="accent1"/>
+          </a:effectRef>
+          <a:fontRef idx="minor">
+            <a:schemeClr val="lt1"/>
+          </a:fontRef>
+        </p:style>
+        <p:txBody>
+          <a:bodyPr rtlCol="0" anchor="ctr"/>
+          <a:lstStyle/>
+          <a:p>
+            <a:pPr algn="ctr"/>
+            <a:endParaRPr lang="en-US"/>
+          </a:p>
+        </p:txBody>
+      </p:sp>
+      <mc:AlternateContent xmlns:mc="http://schemas.openxmlformats.org/markup-compatibility/2006">
+        <mc:Choice xmlns:a14="http://schemas.microsoft.com/office/drawing/2010/main" Requires="a14">
+          <p:sp>
+            <p:nvSpPr>
+              <p:cNvPr id="11" name="TextBox 10"/>
+              <p:cNvSpPr txBox="1"/>
+              <p:nvPr/>
+            </p:nvSpPr>
+            <p:spPr>
+              <a:xfrm>
+                <a:off x="8214360" y="3009900"/>
+                <a:ext cx="241733" cy="369332"/>
+              </a:xfrm>
+              <a:prstGeom prst="rect">
+                <a:avLst/>
+              </a:prstGeom>
+              <a:noFill/>
+            </p:spPr>
+            <p:txBody>
+              <a:bodyPr wrap="none" lIns="0" tIns="0" rIns="0" bIns="0" rtlCol="0">
+                <a:spAutoFit/>
+              </a:bodyPr>
+              <a:lstStyle/>
+              <a:p>
+                <a14:m>
+                  <m:oMathPara xmlns:m="http://schemas.openxmlformats.org/officeDocument/2006/math">
+                    <m:oMathParaPr>
+                      <m:jc m:val="centerGroup"/>
+                    </m:oMathParaPr>
+                    <m:oMath xmlns:m="http://schemas.openxmlformats.org/officeDocument/2006/math">
+                      <m:r>
+                        <a:rPr lang="en-US" sz="2400" b="0" i="1" smtClean="0">
+                          <a:solidFill>
+                            <a:schemeClr val="tx1"/>
+                          </a:solidFill>
+                          <a:latin typeface="Cambria Math" panose="02040503050406030204" pitchFamily="18" charset="0"/>
+                        </a:rPr>
+                        <m:t>𝑥</m:t>
+                      </m:r>
+                    </m:oMath>
+                  </m:oMathPara>
+                </a14:m>
+                <a:endParaRPr lang="en-US" sz="2400" dirty="0"/>
+              </a:p>
+            </p:txBody>
+          </p:sp>
+        </mc:Choice>
+        <mc:Fallback>
+          <p:sp>
+            <p:nvSpPr>
+              <p:cNvPr id="11" name="TextBox 10"/>
+              <p:cNvSpPr txBox="1">
+                <a:spLocks noRot="1" noChangeAspect="1" noMove="1" noResize="1" noEditPoints="1" noAdjustHandles="1" noChangeArrowheads="1" noChangeShapeType="1" noTextEdit="1"/>
+              </p:cNvSpPr>
+              <p:nvPr/>
+            </p:nvSpPr>
+            <p:spPr>
+              <a:xfrm>
+                <a:off x="8214360" y="3009900"/>
+                <a:ext cx="241733" cy="369332"/>
+              </a:xfrm>
+              <a:prstGeom prst="rect">
+                <a:avLst/>
+              </a:prstGeom>
+              <a:blipFill>
+                <a:blip r:embed="rId2"/>
+                <a:stretch>
+                  <a:fillRect l="-17949" r="-15385"/>
+                </a:stretch>
+              </a:blipFill>
+            </p:spPr>
+            <p:txBody>
+              <a:bodyPr/>
+              <a:lstStyle/>
+              <a:p>
+                <a:r>
+                  <a:rPr lang="en-US">
+                    <a:noFill/>
+                  </a:rPr>
+                  <a:t> </a:t>
+                </a:r>
+              </a:p>
+            </p:txBody>
+          </p:sp>
+        </mc:Fallback>
+      </mc:AlternateContent>
+      <mc:AlternateContent xmlns:mc="http://schemas.openxmlformats.org/markup-compatibility/2006">
+        <mc:Choice xmlns:a14="http://schemas.microsoft.com/office/drawing/2010/main" Requires="a14">
+          <p:sp>
+            <p:nvSpPr>
+              <p:cNvPr id="12" name="TextBox 11"/>
+              <p:cNvSpPr txBox="1"/>
+              <p:nvPr/>
+            </p:nvSpPr>
+            <p:spPr>
+              <a:xfrm>
+                <a:off x="2446020" y="3009900"/>
+                <a:ext cx="312586" cy="369332"/>
+              </a:xfrm>
+              <a:prstGeom prst="rect">
+                <a:avLst/>
+              </a:prstGeom>
+              <a:noFill/>
+            </p:spPr>
+            <p:txBody>
+              <a:bodyPr wrap="none" lIns="0" tIns="0" rIns="0" bIns="0" rtlCol="0">
+                <a:spAutoFit/>
+              </a:bodyPr>
+              <a:lstStyle/>
+              <a:p>
+                <a14:m>
+                  <m:oMathPara xmlns:m="http://schemas.openxmlformats.org/officeDocument/2006/math">
+                    <m:oMathParaPr>
+                      <m:jc m:val="centerGroup"/>
+                    </m:oMathParaPr>
+                    <m:oMath xmlns:m="http://schemas.openxmlformats.org/officeDocument/2006/math">
+                      <m:r>
+                        <a:rPr lang="en-US" sz="2400" b="0" i="1" smtClean="0">
+                          <a:solidFill>
+                            <a:schemeClr val="tx1"/>
+                          </a:solidFill>
+                          <a:latin typeface="Cambria Math" panose="02040503050406030204" pitchFamily="18" charset="0"/>
+                        </a:rPr>
+                        <m:t>𝑥</m:t>
+                      </m:r>
+                      <m:r>
+                        <a:rPr lang="en-US" sz="2400" b="0" i="1" smtClean="0">
+                          <a:solidFill>
+                            <a:schemeClr val="tx1"/>
+                          </a:solidFill>
+                          <a:latin typeface="Cambria Math" panose="02040503050406030204" pitchFamily="18" charset="0"/>
+                        </a:rPr>
+                        <m:t>′</m:t>
+                      </m:r>
+                    </m:oMath>
+                  </m:oMathPara>
+                </a14:m>
+                <a:endParaRPr lang="en-US" sz="2400" dirty="0"/>
+              </a:p>
+            </p:txBody>
+          </p:sp>
+        </mc:Choice>
+        <mc:Fallback>
+          <p:sp>
+            <p:nvSpPr>
+              <p:cNvPr id="12" name="TextBox 11"/>
+              <p:cNvSpPr txBox="1">
+                <a:spLocks noRot="1" noChangeAspect="1" noMove="1" noResize="1" noEditPoints="1" noAdjustHandles="1" noChangeArrowheads="1" noChangeShapeType="1" noTextEdit="1"/>
+              </p:cNvSpPr>
+              <p:nvPr/>
+            </p:nvSpPr>
+            <p:spPr>
+              <a:xfrm>
+                <a:off x="2446020" y="3009900"/>
+                <a:ext cx="312586" cy="369332"/>
+              </a:xfrm>
+              <a:prstGeom prst="rect">
+                <a:avLst/>
+              </a:prstGeom>
+              <a:blipFill>
+                <a:blip r:embed="rId3"/>
+                <a:stretch>
+                  <a:fillRect l="-25000" t="-1667" r="-26923" b="-10000"/>
+                </a:stretch>
+              </a:blipFill>
+            </p:spPr>
+            <p:txBody>
+              <a:bodyPr/>
+              <a:lstStyle/>
+              <a:p>
+                <a:r>
+                  <a:rPr lang="en-US">
+                    <a:noFill/>
+                  </a:rPr>
+                  <a:t> </a:t>
+                </a:r>
+              </a:p>
+            </p:txBody>
+          </p:sp>
+        </mc:Fallback>
+      </mc:AlternateContent>
+      <mc:AlternateContent xmlns:mc="http://schemas.openxmlformats.org/markup-compatibility/2006">
+        <mc:Choice xmlns:a14="http://schemas.microsoft.com/office/drawing/2010/main" Requires="a14">
+          <p:sp>
+            <p:nvSpPr>
+              <p:cNvPr id="13" name="TextBox 12"/>
+              <p:cNvSpPr txBox="1"/>
+              <p:nvPr/>
+            </p:nvSpPr>
+            <p:spPr>
+              <a:xfrm>
+                <a:off x="4161536" y="1731264"/>
+                <a:ext cx="245708" cy="369332"/>
+              </a:xfrm>
+              <a:prstGeom prst="rect">
+                <a:avLst/>
+              </a:prstGeom>
+              <a:noFill/>
+            </p:spPr>
+            <p:txBody>
+              <a:bodyPr wrap="none" lIns="0" tIns="0" rIns="0" bIns="0" rtlCol="0">
+                <a:spAutoFit/>
+              </a:bodyPr>
+              <a:lstStyle/>
+              <a:p>
+                <a14:m>
+                  <m:oMathPara xmlns:m="http://schemas.openxmlformats.org/officeDocument/2006/math">
+                    <m:oMathParaPr>
+                      <m:jc m:val="centerGroup"/>
+                    </m:oMathParaPr>
+                    <m:oMath xmlns:m="http://schemas.openxmlformats.org/officeDocument/2006/math">
+                      <m:r>
+                        <a:rPr lang="en-US" sz="2400" b="0" i="1" smtClean="0">
+                          <a:solidFill>
+                            <a:schemeClr val="tx1"/>
+                          </a:solidFill>
+                          <a:latin typeface="Cambria Math" panose="02040503050406030204" pitchFamily="18" charset="0"/>
+                          <a:ea typeface="Cambria Math" panose="02040503050406030204" pitchFamily="18" charset="0"/>
+                        </a:rPr>
+                        <m:t>𝛿</m:t>
+                      </m:r>
+                    </m:oMath>
+                  </m:oMathPara>
+                </a14:m>
+                <a:endParaRPr lang="en-US" sz="2400" dirty="0"/>
+              </a:p>
+            </p:txBody>
+          </p:sp>
+        </mc:Choice>
+        <mc:Fallback>
+          <p:sp>
+            <p:nvSpPr>
+              <p:cNvPr id="13" name="TextBox 12"/>
+              <p:cNvSpPr txBox="1">
+                <a:spLocks noRot="1" noChangeAspect="1" noMove="1" noResize="1" noEditPoints="1" noAdjustHandles="1" noChangeArrowheads="1" noChangeShapeType="1" noTextEdit="1"/>
+              </p:cNvSpPr>
+              <p:nvPr/>
+            </p:nvSpPr>
+            <p:spPr>
+              <a:xfrm>
+                <a:off x="4161536" y="1731264"/>
+                <a:ext cx="245708" cy="369332"/>
+              </a:xfrm>
+              <a:prstGeom prst="rect">
+                <a:avLst/>
+              </a:prstGeom>
+              <a:blipFill>
+                <a:blip r:embed="rId4"/>
+                <a:stretch>
+                  <a:fillRect l="-30000" r="-27500" b="-6557"/>
+                </a:stretch>
+              </a:blipFill>
+            </p:spPr>
+            <p:txBody>
+              <a:bodyPr/>
+              <a:lstStyle/>
+              <a:p>
+                <a:r>
+                  <a:rPr lang="en-US">
+                    <a:noFill/>
+                  </a:rPr>
+                  <a:t> </a:t>
+                </a:r>
+              </a:p>
+            </p:txBody>
+          </p:sp>
+        </mc:Fallback>
+      </mc:AlternateContent>
+      <p:sp>
+        <p:nvSpPr>
+          <p:cNvPr id="20" name="Parallelogram 7"/>
+          <p:cNvSpPr/>
+          <p:nvPr/>
+        </p:nvSpPr>
+        <p:spPr>
+          <a:xfrm rot="5400000">
+            <a:off x="3662366" y="2044673"/>
+            <a:ext cx="1621191" cy="88289"/>
+          </a:xfrm>
+          <a:custGeom>
+            <a:avLst/>
+            <a:gdLst>
+              <a:gd name="connsiteX0" fmla="*/ 0 w 6453051"/>
+              <a:gd name="connsiteY0" fmla="*/ 1593668 h 1593668"/>
+              <a:gd name="connsiteX1" fmla="*/ 1744971 w 6453051"/>
+              <a:gd name="connsiteY1" fmla="*/ 0 h 1593668"/>
+              <a:gd name="connsiteX2" fmla="*/ 6453051 w 6453051"/>
+              <a:gd name="connsiteY2" fmla="*/ 0 h 1593668"/>
+              <a:gd name="connsiteX3" fmla="*/ 4708080 w 6453051"/>
+              <a:gd name="connsiteY3" fmla="*/ 1593668 h 1593668"/>
+              <a:gd name="connsiteX4" fmla="*/ 0 w 6453051"/>
+              <a:gd name="connsiteY4" fmla="*/ 1593668 h 1593668"/>
+              <a:gd name="connsiteX0" fmla="*/ 0 w 4708080"/>
+              <a:gd name="connsiteY0" fmla="*/ 1593668 h 1593668"/>
+              <a:gd name="connsiteX1" fmla="*/ 1744971 w 4708080"/>
+              <a:gd name="connsiteY1" fmla="*/ 0 h 1593668"/>
+              <a:gd name="connsiteX2" fmla="*/ 4708080 w 4708080"/>
+              <a:gd name="connsiteY2" fmla="*/ 1593668 h 1593668"/>
+              <a:gd name="connsiteX3" fmla="*/ 0 w 4708080"/>
+              <a:gd name="connsiteY3" fmla="*/ 1593668 h 1593668"/>
+              <a:gd name="connsiteX0" fmla="*/ 0 w 4708080"/>
+              <a:gd name="connsiteY0" fmla="*/ 0 h 0"/>
+              <a:gd name="connsiteX1" fmla="*/ 4708080 w 4708080"/>
+              <a:gd name="connsiteY1" fmla="*/ 0 h 0"/>
+              <a:gd name="connsiteX2" fmla="*/ 0 w 4708080"/>
+              <a:gd name="connsiteY2" fmla="*/ 0 h 0"/>
+            </a:gdLst>
+            <a:ahLst/>
+            <a:cxnLst>
+              <a:cxn ang="0">
+                <a:pos x="connsiteX0" y="connsiteY0"/>
+              </a:cxn>
+              <a:cxn ang="0">
+                <a:pos x="connsiteX1" y="connsiteY1"/>
+              </a:cxn>
+              <a:cxn ang="0">
+                <a:pos x="connsiteX2" y="connsiteY2"/>
+              </a:cxn>
+            </a:cxnLst>
+            <a:rect l="l" t="t" r="r" b="b"/>
+            <a:pathLst>
+              <a:path w="4708080">
+                <a:moveTo>
+                  <a:pt x="0" y="0"/>
+                </a:moveTo>
+                <a:lnTo>
+                  <a:pt x="4708080" y="0"/>
+                </a:lnTo>
+                <a:lnTo>
+                  <a:pt x="0" y="0"/>
+                </a:lnTo>
+                <a:close/>
+              </a:path>
+            </a:pathLst>
+          </a:custGeom>
+          <a:noFill/>
+          <a:ln w="28575">
+            <a:solidFill>
+              <a:schemeClr val="tx1">
+                <a:lumMod val="65000"/>
+                <a:lumOff val="35000"/>
+              </a:schemeClr>
+            </a:solidFill>
+          </a:ln>
+        </p:spPr>
+        <p:style>
+          <a:lnRef idx="2">
+            <a:schemeClr val="accent1">
+              <a:shade val="50000"/>
+            </a:schemeClr>
+          </a:lnRef>
+          <a:fillRef idx="1">
+            <a:schemeClr val="accent1"/>
+          </a:fillRef>
+          <a:effectRef idx="0">
+            <a:schemeClr val="accent1"/>
+          </a:effectRef>
+          <a:fontRef idx="minor">
+            <a:schemeClr val="lt1"/>
+          </a:fontRef>
+        </p:style>
+        <p:txBody>
+          <a:bodyPr rtlCol="0" anchor="ctr"/>
+          <a:lstStyle/>
+          <a:p>
+            <a:pPr algn="ctr"/>
+            <a:endParaRPr lang="en-US"/>
+          </a:p>
+        </p:txBody>
+      </p:sp>
+      <p:cxnSp>
+        <p:nvCxnSpPr>
+          <p:cNvPr id="23" name="Straight Arrow Connector 22"/>
+          <p:cNvCxnSpPr/>
+          <p:nvPr/>
+        </p:nvCxnSpPr>
+        <p:spPr>
+          <a:xfrm flipV="1">
+            <a:off x="5467350" y="2755011"/>
+            <a:ext cx="833628" cy="241554"/>
+          </a:xfrm>
+          <a:prstGeom prst="straightConnector1">
+            <a:avLst/>
+          </a:prstGeom>
+          <a:ln w="19050">
+            <a:solidFill>
+              <a:schemeClr val="tx1"/>
+            </a:solidFill>
+            <a:tailEnd type="triangle"/>
+          </a:ln>
+        </p:spPr>
+        <p:style>
+          <a:lnRef idx="1">
+            <a:schemeClr val="accent1"/>
+          </a:lnRef>
+          <a:fillRef idx="0">
+            <a:schemeClr val="accent1"/>
+          </a:fillRef>
+          <a:effectRef idx="0">
+            <a:schemeClr val="accent1"/>
+          </a:effectRef>
+          <a:fontRef idx="minor">
+            <a:schemeClr val="tx1"/>
+          </a:fontRef>
+        </p:style>
+      </p:cxnSp>
+      <mc:AlternateContent xmlns:mc="http://schemas.openxmlformats.org/markup-compatibility/2006">
+        <mc:Choice xmlns:a14="http://schemas.microsoft.com/office/drawing/2010/main" Requires="a14">
+          <p:sp>
+            <p:nvSpPr>
+              <p:cNvPr id="25" name="TextBox 24"/>
+              <p:cNvSpPr txBox="1"/>
+              <p:nvPr/>
+            </p:nvSpPr>
+            <p:spPr>
+              <a:xfrm>
+                <a:off x="6281928" y="2449068"/>
+                <a:ext cx="253083" cy="369332"/>
+              </a:xfrm>
+              <a:prstGeom prst="rect">
+                <a:avLst/>
+              </a:prstGeom>
+              <a:noFill/>
+            </p:spPr>
+            <p:txBody>
+              <a:bodyPr wrap="none" lIns="0" tIns="0" rIns="0" bIns="0" rtlCol="0">
+                <a:spAutoFit/>
+              </a:bodyPr>
+              <a:lstStyle/>
+              <a:p>
+                <a14:m>
+                  <m:oMathPara xmlns:m="http://schemas.openxmlformats.org/officeDocument/2006/math">
+                    <m:oMathParaPr>
+                      <m:jc m:val="centerGroup"/>
+                    </m:oMathParaPr>
+                    <m:oMath xmlns:m="http://schemas.openxmlformats.org/officeDocument/2006/math">
+                      <m:r>
+                        <a:rPr lang="en-US" sz="2400" b="0" i="1" smtClean="0">
+                          <a:latin typeface="Cambria Math" panose="02040503050406030204" pitchFamily="18" charset="0"/>
+                        </a:rPr>
+                        <m:t>𝑢</m:t>
+                      </m:r>
+                    </m:oMath>
+                  </m:oMathPara>
+                </a14:m>
+                <a:endParaRPr lang="en-US" sz="2400" dirty="0"/>
+              </a:p>
+            </p:txBody>
+          </p:sp>
+        </mc:Choice>
+        <mc:Fallback>
+          <p:sp>
+            <p:nvSpPr>
+              <p:cNvPr id="25" name="TextBox 24"/>
+              <p:cNvSpPr txBox="1">
+                <a:spLocks noRot="1" noChangeAspect="1" noMove="1" noResize="1" noEditPoints="1" noAdjustHandles="1" noChangeArrowheads="1" noChangeShapeType="1" noTextEdit="1"/>
+              </p:cNvSpPr>
+              <p:nvPr/>
+            </p:nvSpPr>
+            <p:spPr>
+              <a:xfrm>
+                <a:off x="6281928" y="2449068"/>
+                <a:ext cx="253083" cy="369332"/>
+              </a:xfrm>
+              <a:prstGeom prst="rect">
+                <a:avLst/>
+              </a:prstGeom>
+              <a:blipFill>
+                <a:blip r:embed="rId5"/>
+                <a:stretch>
+                  <a:fillRect l="-17073" r="-14634"/>
+                </a:stretch>
+              </a:blipFill>
+            </p:spPr>
+            <p:txBody>
+              <a:bodyPr/>
+              <a:lstStyle/>
+              <a:p>
+                <a:r>
+                  <a:rPr lang="en-US">
+                    <a:noFill/>
+                  </a:rPr>
+                  <a:t> </a:t>
+                </a:r>
+              </a:p>
+            </p:txBody>
+          </p:sp>
+        </mc:Fallback>
+      </mc:AlternateContent>
+      <p:cxnSp>
+        <p:nvCxnSpPr>
+          <p:cNvPr id="26" name="Straight Arrow Connector 25"/>
+          <p:cNvCxnSpPr/>
+          <p:nvPr/>
+        </p:nvCxnSpPr>
+        <p:spPr>
+          <a:xfrm>
+            <a:off x="4538726" y="1100709"/>
+            <a:ext cx="945642" cy="185547"/>
+          </a:xfrm>
+          <a:prstGeom prst="straightConnector1">
+            <a:avLst/>
+          </a:prstGeom>
+          <a:ln w="19050">
+            <a:solidFill>
+              <a:schemeClr val="tx1"/>
+            </a:solidFill>
+            <a:tailEnd type="triangle"/>
+          </a:ln>
+        </p:spPr>
+        <p:style>
+          <a:lnRef idx="1">
+            <a:schemeClr val="accent1"/>
+          </a:lnRef>
+          <a:fillRef idx="0">
+            <a:schemeClr val="accent1"/>
+          </a:fillRef>
+          <a:effectRef idx="0">
+            <a:schemeClr val="accent1"/>
+          </a:effectRef>
+          <a:fontRef idx="minor">
+            <a:schemeClr val="tx1"/>
+          </a:fontRef>
+        </p:style>
+      </p:cxnSp>
+      <p:sp>
+        <p:nvSpPr>
+          <p:cNvPr id="27" name="Oval 26"/>
+          <p:cNvSpPr/>
+          <p:nvPr/>
+        </p:nvSpPr>
+        <p:spPr>
+          <a:xfrm>
+            <a:off x="4405376" y="993648"/>
+            <a:ext cx="243840" cy="243840"/>
+          </a:xfrm>
+          <a:prstGeom prst="ellipse">
+            <a:avLst/>
+          </a:prstGeom>
+          <a:gradFill flip="none" rotWithShape="1">
+            <a:gsLst>
+              <a:gs pos="0">
+                <a:schemeClr val="accent1">
+                  <a:shade val="30000"/>
+                  <a:satMod val="115000"/>
+                </a:schemeClr>
+              </a:gs>
+              <a:gs pos="50000">
+                <a:schemeClr val="accent1">
+                  <a:shade val="67500"/>
+                  <a:satMod val="115000"/>
+                </a:schemeClr>
+              </a:gs>
+              <a:gs pos="100000">
+                <a:schemeClr val="accent1">
+                  <a:shade val="100000"/>
+                  <a:satMod val="115000"/>
+                </a:schemeClr>
+              </a:gs>
+            </a:gsLst>
+            <a:lin ang="18900000" scaled="1"/>
+            <a:tileRect/>
+          </a:gradFill>
+          <a:ln>
+            <a:noFill/>
+          </a:ln>
+        </p:spPr>
+        <p:style>
+          <a:lnRef idx="2">
+            <a:schemeClr val="accent1">
+              <a:shade val="50000"/>
+            </a:schemeClr>
+          </a:lnRef>
+          <a:fillRef idx="1">
+            <a:schemeClr val="accent1"/>
+          </a:fillRef>
+          <a:effectRef idx="0">
+            <a:schemeClr val="accent1"/>
+          </a:effectRef>
+          <a:fontRef idx="minor">
+            <a:schemeClr val="lt1"/>
+          </a:fontRef>
+        </p:style>
+        <p:txBody>
+          <a:bodyPr rtlCol="0" anchor="ctr"/>
+          <a:lstStyle/>
+          <a:p>
+            <a:pPr algn="ctr"/>
+            <a:endParaRPr lang="en-US"/>
+          </a:p>
+        </p:txBody>
+      </p:sp>
+      <mc:AlternateContent xmlns:mc="http://schemas.openxmlformats.org/markup-compatibility/2006">
+        <mc:Choice xmlns:a14="http://schemas.microsoft.com/office/drawing/2010/main" Requires="a14">
+          <p:sp>
+            <p:nvSpPr>
+              <p:cNvPr id="28" name="TextBox 27"/>
+              <p:cNvSpPr txBox="1"/>
+              <p:nvPr/>
+            </p:nvSpPr>
+            <p:spPr>
+              <a:xfrm>
+                <a:off x="5499608" y="943356"/>
+                <a:ext cx="1201931" cy="764376"/>
+              </a:xfrm>
+              <a:prstGeom prst="rect">
+                <a:avLst/>
+              </a:prstGeom>
+              <a:noFill/>
+            </p:spPr>
+            <p:txBody>
+              <a:bodyPr wrap="none" lIns="0" tIns="0" rIns="0" bIns="0" rtlCol="0">
+                <a:spAutoFit/>
+              </a:bodyPr>
+              <a:lstStyle/>
+              <a:p>
+                <a14:m>
+                  <m:oMathPara xmlns:m="http://schemas.openxmlformats.org/officeDocument/2006/math">
+                    <m:oMathParaPr>
+                      <m:jc m:val="centerGroup"/>
+                    </m:oMathParaPr>
+                    <m:oMath xmlns:m="http://schemas.openxmlformats.org/officeDocument/2006/math">
+                      <m:r>
+                        <a:rPr lang="en-US" sz="2400" b="0" i="1" smtClean="0">
+                          <a:latin typeface="Cambria Math" panose="02040503050406030204" pitchFamily="18" charset="0"/>
+                        </a:rPr>
+                        <m:t>𝑢</m:t>
+                      </m:r>
+                      <m:r>
+                        <a:rPr lang="en-US" sz="2400" b="0" i="1" smtClean="0">
+                          <a:latin typeface="Cambria Math" panose="02040503050406030204" pitchFamily="18" charset="0"/>
+                        </a:rPr>
+                        <m:t>+</m:t>
+                      </m:r>
+                      <m:r>
+                        <a:rPr lang="en-US" sz="2400" i="1">
+                          <a:latin typeface="Cambria Math" panose="02040503050406030204" pitchFamily="18" charset="0"/>
+                          <a:ea typeface="Cambria Math" panose="02040503050406030204" pitchFamily="18" charset="0"/>
+                        </a:rPr>
+                        <m:t>𝛿</m:t>
+                      </m:r>
+                      <m:f>
+                        <m:fPr>
+                          <m:ctrlPr>
+                            <a:rPr lang="en-US" sz="2400" b="0" i="1" smtClean="0">
+                              <a:latin typeface="Cambria Math" panose="02040503050406030204" pitchFamily="18" charset="0"/>
+                            </a:rPr>
+                          </m:ctrlPr>
+                        </m:fPr>
+                        <m:num>
+                          <m:r>
+                            <m:rPr>
+                              <m:sty m:val="p"/>
+                            </m:rPr>
+                            <a:rPr lang="en-US" sz="2400" b="0" i="0" smtClean="0">
+                              <a:latin typeface="Cambria Math" panose="02040503050406030204" pitchFamily="18" charset="0"/>
+                            </a:rPr>
+                            <m:t>d</m:t>
+                          </m:r>
+                          <m:r>
+                            <a:rPr lang="en-US" sz="2400" b="0" i="1" smtClean="0">
+                              <a:latin typeface="Cambria Math" panose="02040503050406030204" pitchFamily="18" charset="0"/>
+                            </a:rPr>
+                            <m:t>𝑣</m:t>
+                          </m:r>
+                        </m:num>
+                        <m:den>
+                          <m:r>
+                            <m:rPr>
+                              <m:sty m:val="p"/>
+                            </m:rPr>
+                            <a:rPr lang="en-US" sz="2400" b="0" i="0" smtClean="0">
+                              <a:latin typeface="Cambria Math" panose="02040503050406030204" pitchFamily="18" charset="0"/>
+                            </a:rPr>
+                            <m:t>d</m:t>
+                          </m:r>
+                          <m:r>
+                            <a:rPr lang="en-US" sz="2400" b="0" i="1" smtClean="0">
+                              <a:latin typeface="Cambria Math" panose="02040503050406030204" pitchFamily="18" charset="0"/>
+                            </a:rPr>
+                            <m:t>𝑦</m:t>
+                          </m:r>
+                        </m:den>
+                      </m:f>
+                    </m:oMath>
+                  </m:oMathPara>
+                </a14:m>
+                <a:endParaRPr lang="en-US" sz="2400" dirty="0"/>
+              </a:p>
+            </p:txBody>
+          </p:sp>
+        </mc:Choice>
+        <mc:Fallback>
+          <p:sp>
+            <p:nvSpPr>
+              <p:cNvPr id="28" name="TextBox 27"/>
+              <p:cNvSpPr txBox="1">
+                <a:spLocks noRot="1" noChangeAspect="1" noMove="1" noResize="1" noEditPoints="1" noAdjustHandles="1" noChangeArrowheads="1" noChangeShapeType="1" noTextEdit="1"/>
+              </p:cNvSpPr>
+              <p:nvPr/>
+            </p:nvSpPr>
+            <p:spPr>
+              <a:xfrm>
+                <a:off x="5499608" y="943356"/>
+                <a:ext cx="1201931" cy="764376"/>
+              </a:xfrm>
+              <a:prstGeom prst="rect">
+                <a:avLst/>
+              </a:prstGeom>
+              <a:blipFill>
+                <a:blip r:embed="rId6"/>
+                <a:stretch>
+                  <a:fillRect/>
+                </a:stretch>
+              </a:blipFill>
+            </p:spPr>
+            <p:txBody>
+              <a:bodyPr/>
+              <a:lstStyle/>
+              <a:p>
+                <a:r>
+                  <a:rPr lang="en-US">
+                    <a:noFill/>
+                  </a:rPr>
+                  <a:t> </a:t>
+                </a:r>
+              </a:p>
+            </p:txBody>
+          </p:sp>
+        </mc:Fallback>
+      </mc:AlternateContent>
+      <mc:AlternateContent xmlns:mc="http://schemas.openxmlformats.org/markup-compatibility/2006">
+        <mc:Choice xmlns:a14="http://schemas.microsoft.com/office/drawing/2010/main" Requires="a14">
+          <p:sp>
+            <p:nvSpPr>
+              <p:cNvPr id="31" name="TextBox 30"/>
+              <p:cNvSpPr txBox="1"/>
+              <p:nvPr/>
+            </p:nvSpPr>
+            <p:spPr>
+              <a:xfrm>
+                <a:off x="5993130" y="3947160"/>
+                <a:ext cx="245708" cy="369332"/>
+              </a:xfrm>
+              <a:prstGeom prst="rect">
+                <a:avLst/>
+              </a:prstGeom>
+              <a:noFill/>
+            </p:spPr>
+            <p:txBody>
+              <a:bodyPr wrap="none" lIns="0" tIns="0" rIns="0" bIns="0" rtlCol="0">
+                <a:spAutoFit/>
+              </a:bodyPr>
+              <a:lstStyle/>
+              <a:p>
+                <a14:m>
+                  <m:oMathPara xmlns:m="http://schemas.openxmlformats.org/officeDocument/2006/math">
+                    <m:oMathParaPr>
+                      <m:jc m:val="centerGroup"/>
+                    </m:oMathParaPr>
+                    <m:oMath xmlns:m="http://schemas.openxmlformats.org/officeDocument/2006/math">
+                      <m:r>
+                        <a:rPr lang="en-US" sz="2400" i="1">
+                          <a:latin typeface="Cambria Math" panose="02040503050406030204" pitchFamily="18" charset="0"/>
+                          <a:ea typeface="Cambria Math" panose="02040503050406030204" pitchFamily="18" charset="0"/>
+                        </a:rPr>
+                        <m:t>𝛿</m:t>
+                      </m:r>
+                    </m:oMath>
+                  </m:oMathPara>
+                </a14:m>
+                <a:endParaRPr lang="en-US" sz="2400" dirty="0"/>
+              </a:p>
+            </p:txBody>
+          </p:sp>
+        </mc:Choice>
+        <mc:Fallback>
+          <p:sp>
+            <p:nvSpPr>
+              <p:cNvPr id="31" name="TextBox 30"/>
+              <p:cNvSpPr txBox="1">
+                <a:spLocks noRot="1" noChangeAspect="1" noMove="1" noResize="1" noEditPoints="1" noAdjustHandles="1" noChangeArrowheads="1" noChangeShapeType="1" noTextEdit="1"/>
+              </p:cNvSpPr>
+              <p:nvPr/>
+            </p:nvSpPr>
+            <p:spPr>
+              <a:xfrm>
+                <a:off x="5993130" y="3947160"/>
+                <a:ext cx="245708" cy="369332"/>
+              </a:xfrm>
+              <a:prstGeom prst="rect">
+                <a:avLst/>
+              </a:prstGeom>
+              <a:blipFill>
+                <a:blip r:embed="rId7"/>
+                <a:stretch>
+                  <a:fillRect l="-30000" r="-27500" b="-6667"/>
+                </a:stretch>
+              </a:blipFill>
+            </p:spPr>
+            <p:txBody>
+              <a:bodyPr/>
+              <a:lstStyle/>
+              <a:p>
+                <a:r>
+                  <a:rPr lang="en-US">
+                    <a:noFill/>
+                  </a:rPr>
+                  <a:t> </a:t>
+                </a:r>
+              </a:p>
+            </p:txBody>
+          </p:sp>
+        </mc:Fallback>
+      </mc:AlternateContent>
+      <p:sp>
+        <p:nvSpPr>
+          <p:cNvPr id="32" name="Parallelogram 7"/>
+          <p:cNvSpPr/>
+          <p:nvPr/>
+        </p:nvSpPr>
+        <p:spPr>
+          <a:xfrm rot="5400000">
+            <a:off x="5461448" y="3919193"/>
+            <a:ext cx="1621191" cy="88289"/>
+          </a:xfrm>
+          <a:custGeom>
+            <a:avLst/>
+            <a:gdLst>
+              <a:gd name="connsiteX0" fmla="*/ 0 w 6453051"/>
+              <a:gd name="connsiteY0" fmla="*/ 1593668 h 1593668"/>
+              <a:gd name="connsiteX1" fmla="*/ 1744971 w 6453051"/>
+              <a:gd name="connsiteY1" fmla="*/ 0 h 1593668"/>
+              <a:gd name="connsiteX2" fmla="*/ 6453051 w 6453051"/>
+              <a:gd name="connsiteY2" fmla="*/ 0 h 1593668"/>
+              <a:gd name="connsiteX3" fmla="*/ 4708080 w 6453051"/>
+              <a:gd name="connsiteY3" fmla="*/ 1593668 h 1593668"/>
+              <a:gd name="connsiteX4" fmla="*/ 0 w 6453051"/>
+              <a:gd name="connsiteY4" fmla="*/ 1593668 h 1593668"/>
+              <a:gd name="connsiteX0" fmla="*/ 0 w 4708080"/>
+              <a:gd name="connsiteY0" fmla="*/ 1593668 h 1593668"/>
+              <a:gd name="connsiteX1" fmla="*/ 1744971 w 4708080"/>
+              <a:gd name="connsiteY1" fmla="*/ 0 h 1593668"/>
+              <a:gd name="connsiteX2" fmla="*/ 4708080 w 4708080"/>
+              <a:gd name="connsiteY2" fmla="*/ 1593668 h 1593668"/>
+              <a:gd name="connsiteX3" fmla="*/ 0 w 4708080"/>
+              <a:gd name="connsiteY3" fmla="*/ 1593668 h 1593668"/>
+              <a:gd name="connsiteX0" fmla="*/ 0 w 4708080"/>
+              <a:gd name="connsiteY0" fmla="*/ 0 h 0"/>
+              <a:gd name="connsiteX1" fmla="*/ 4708080 w 4708080"/>
+              <a:gd name="connsiteY1" fmla="*/ 0 h 0"/>
+              <a:gd name="connsiteX2" fmla="*/ 0 w 4708080"/>
+              <a:gd name="connsiteY2" fmla="*/ 0 h 0"/>
+            </a:gdLst>
+            <a:ahLst/>
+            <a:cxnLst>
+              <a:cxn ang="0">
+                <a:pos x="connsiteX0" y="connsiteY0"/>
+              </a:cxn>
+              <a:cxn ang="0">
+                <a:pos x="connsiteX1" y="connsiteY1"/>
+              </a:cxn>
+              <a:cxn ang="0">
+                <a:pos x="connsiteX2" y="connsiteY2"/>
+              </a:cxn>
+            </a:cxnLst>
+            <a:rect l="l" t="t" r="r" b="b"/>
+            <a:pathLst>
+              <a:path w="4708080">
+                <a:moveTo>
+                  <a:pt x="0" y="0"/>
+                </a:moveTo>
+                <a:lnTo>
+                  <a:pt x="4708080" y="0"/>
+                </a:lnTo>
+                <a:lnTo>
+                  <a:pt x="0" y="0"/>
+                </a:lnTo>
+                <a:close/>
+              </a:path>
+            </a:pathLst>
+          </a:custGeom>
+          <a:noFill/>
+          <a:ln w="28575">
+            <a:solidFill>
+              <a:schemeClr val="tx1">
+                <a:lumMod val="65000"/>
+                <a:lumOff val="35000"/>
+              </a:schemeClr>
+            </a:solidFill>
+          </a:ln>
+        </p:spPr>
+        <p:style>
+          <a:lnRef idx="2">
+            <a:schemeClr val="accent1">
+              <a:shade val="50000"/>
+            </a:schemeClr>
+          </a:lnRef>
+          <a:fillRef idx="1">
+            <a:schemeClr val="accent1"/>
+          </a:fillRef>
+          <a:effectRef idx="0">
+            <a:schemeClr val="accent1"/>
+          </a:effectRef>
+          <a:fontRef idx="minor">
+            <a:schemeClr val="lt1"/>
+          </a:fontRef>
+        </p:style>
+        <p:txBody>
+          <a:bodyPr rtlCol="0" anchor="ctr"/>
+          <a:lstStyle/>
+          <a:p>
+            <a:pPr algn="ctr"/>
+            <a:endParaRPr lang="en-US"/>
+          </a:p>
+        </p:txBody>
+      </p:sp>
+      <p:sp>
+        <p:nvSpPr>
+          <p:cNvPr id="21" name="Oval 20"/>
+          <p:cNvSpPr/>
+          <p:nvPr/>
+        </p:nvSpPr>
+        <p:spPr>
+          <a:xfrm>
+            <a:off x="5334000" y="2889504"/>
+            <a:ext cx="243840" cy="243840"/>
+          </a:xfrm>
+          <a:prstGeom prst="ellipse">
+            <a:avLst/>
+          </a:prstGeom>
+          <a:gradFill flip="none" rotWithShape="1">
+            <a:gsLst>
+              <a:gs pos="0">
+                <a:schemeClr val="accent1">
+                  <a:shade val="30000"/>
+                  <a:satMod val="115000"/>
+                </a:schemeClr>
+              </a:gs>
+              <a:gs pos="50000">
+                <a:schemeClr val="accent1">
+                  <a:shade val="67500"/>
+                  <a:satMod val="115000"/>
+                </a:schemeClr>
+              </a:gs>
+              <a:gs pos="100000">
+                <a:schemeClr val="accent1">
+                  <a:shade val="100000"/>
+                  <a:satMod val="115000"/>
+                </a:schemeClr>
+              </a:gs>
+            </a:gsLst>
+            <a:lin ang="18900000" scaled="1"/>
+            <a:tileRect/>
+          </a:gradFill>
+          <a:ln>
+            <a:noFill/>
+          </a:ln>
+        </p:spPr>
+        <p:style>
+          <a:lnRef idx="2">
+            <a:schemeClr val="accent1">
+              <a:shade val="50000"/>
+            </a:schemeClr>
+          </a:lnRef>
+          <a:fillRef idx="1">
+            <a:schemeClr val="accent1"/>
+          </a:fillRef>
+          <a:effectRef idx="0">
+            <a:schemeClr val="accent1"/>
+          </a:effectRef>
+          <a:fontRef idx="minor">
+            <a:schemeClr val="lt1"/>
+          </a:fontRef>
+        </p:style>
+        <p:txBody>
+          <a:bodyPr rtlCol="0" anchor="ctr"/>
+          <a:lstStyle/>
+          <a:p>
+            <a:pPr algn="ctr"/>
+            <a:endParaRPr lang="en-US"/>
+          </a:p>
+        </p:txBody>
+      </p:sp>
+      <p:cxnSp>
+        <p:nvCxnSpPr>
+          <p:cNvPr id="33" name="Straight Arrow Connector 32"/>
+          <p:cNvCxnSpPr/>
+          <p:nvPr/>
+        </p:nvCxnSpPr>
+        <p:spPr>
+          <a:xfrm flipH="1" flipV="1">
+            <a:off x="5435600" y="4795520"/>
+            <a:ext cx="890016" cy="115190"/>
+          </a:xfrm>
+          <a:prstGeom prst="straightConnector1">
+            <a:avLst/>
+          </a:prstGeom>
+          <a:ln w="19050">
+            <a:solidFill>
+              <a:schemeClr val="tx1"/>
+            </a:solidFill>
+            <a:tailEnd type="triangle"/>
+          </a:ln>
+        </p:spPr>
+        <p:style>
+          <a:lnRef idx="1">
+            <a:schemeClr val="accent1"/>
+          </a:lnRef>
+          <a:fillRef idx="0">
+            <a:schemeClr val="accent1"/>
+          </a:fillRef>
+          <a:effectRef idx="0">
+            <a:schemeClr val="accent1"/>
+          </a:effectRef>
+          <a:fontRef idx="minor">
+            <a:schemeClr val="tx1"/>
+          </a:fontRef>
+        </p:style>
+      </p:cxnSp>
+      <p:sp>
+        <p:nvSpPr>
+          <p:cNvPr id="34" name="Oval 33"/>
+          <p:cNvSpPr/>
+          <p:nvPr/>
+        </p:nvSpPr>
+        <p:spPr>
+          <a:xfrm>
+            <a:off x="6192266" y="4803648"/>
+            <a:ext cx="243840" cy="243840"/>
+          </a:xfrm>
+          <a:prstGeom prst="ellipse">
+            <a:avLst/>
+          </a:prstGeom>
+          <a:gradFill flip="none" rotWithShape="1">
+            <a:gsLst>
+              <a:gs pos="0">
+                <a:schemeClr val="accent1">
+                  <a:shade val="30000"/>
+                  <a:satMod val="115000"/>
+                </a:schemeClr>
+              </a:gs>
+              <a:gs pos="50000">
+                <a:schemeClr val="accent1">
+                  <a:shade val="67500"/>
+                  <a:satMod val="115000"/>
+                </a:schemeClr>
+              </a:gs>
+              <a:gs pos="100000">
+                <a:schemeClr val="accent1">
+                  <a:shade val="100000"/>
+                  <a:satMod val="115000"/>
+                </a:schemeClr>
+              </a:gs>
+            </a:gsLst>
+            <a:lin ang="18900000" scaled="1"/>
+            <a:tileRect/>
+          </a:gradFill>
+          <a:ln>
+            <a:noFill/>
+          </a:ln>
+        </p:spPr>
+        <p:style>
+          <a:lnRef idx="2">
+            <a:schemeClr val="accent1">
+              <a:shade val="50000"/>
+            </a:schemeClr>
+          </a:lnRef>
+          <a:fillRef idx="1">
+            <a:schemeClr val="accent1"/>
+          </a:fillRef>
+          <a:effectRef idx="0">
+            <a:schemeClr val="accent1"/>
+          </a:effectRef>
+          <a:fontRef idx="minor">
+            <a:schemeClr val="lt1"/>
+          </a:fontRef>
+        </p:style>
+        <p:txBody>
+          <a:bodyPr rtlCol="0" anchor="ctr"/>
+          <a:lstStyle/>
+          <a:p>
+            <a:pPr algn="ctr"/>
+            <a:endParaRPr lang="en-US"/>
+          </a:p>
+        </p:txBody>
+      </p:sp>
+      <mc:AlternateContent xmlns:mc="http://schemas.openxmlformats.org/markup-compatibility/2006">
+        <mc:Choice xmlns:a14="http://schemas.microsoft.com/office/drawing/2010/main" Requires="a14">
+          <p:sp>
+            <p:nvSpPr>
+              <p:cNvPr id="35" name="TextBox 34"/>
+              <p:cNvSpPr txBox="1"/>
+              <p:nvPr/>
+            </p:nvSpPr>
+            <p:spPr>
+              <a:xfrm>
+                <a:off x="4124198" y="4338066"/>
+                <a:ext cx="1201931" cy="764376"/>
+              </a:xfrm>
+              <a:prstGeom prst="rect">
+                <a:avLst/>
+              </a:prstGeom>
+              <a:noFill/>
+            </p:spPr>
+            <p:txBody>
+              <a:bodyPr wrap="none" lIns="0" tIns="0" rIns="0" bIns="0" rtlCol="0">
+                <a:spAutoFit/>
+              </a:bodyPr>
+              <a:lstStyle/>
+              <a:p>
+                <a14:m>
+                  <m:oMathPara xmlns:m="http://schemas.openxmlformats.org/officeDocument/2006/math">
+                    <m:oMathParaPr>
+                      <m:jc m:val="centerGroup"/>
+                    </m:oMathParaPr>
+                    <m:oMath xmlns:m="http://schemas.openxmlformats.org/officeDocument/2006/math">
+                      <m:r>
+                        <a:rPr lang="en-US" sz="2400" b="0" i="1" smtClean="0">
+                          <a:latin typeface="Cambria Math" panose="02040503050406030204" pitchFamily="18" charset="0"/>
+                        </a:rPr>
+                        <m:t>𝑢</m:t>
+                      </m:r>
+                      <m:r>
+                        <a:rPr lang="en-US" sz="2400" b="0" i="1" smtClean="0">
+                          <a:latin typeface="Cambria Math" panose="02040503050406030204" pitchFamily="18" charset="0"/>
+                        </a:rPr>
+                        <m:t>−</m:t>
+                      </m:r>
+                      <m:r>
+                        <a:rPr lang="en-US" sz="2400" i="1">
+                          <a:latin typeface="Cambria Math" panose="02040503050406030204" pitchFamily="18" charset="0"/>
+                          <a:ea typeface="Cambria Math" panose="02040503050406030204" pitchFamily="18" charset="0"/>
+                        </a:rPr>
+                        <m:t>𝛿</m:t>
+                      </m:r>
+                      <m:f>
+                        <m:fPr>
+                          <m:ctrlPr>
+                            <a:rPr lang="en-US" sz="2400" b="0" i="1" smtClean="0">
+                              <a:latin typeface="Cambria Math" panose="02040503050406030204" pitchFamily="18" charset="0"/>
+                            </a:rPr>
+                          </m:ctrlPr>
+                        </m:fPr>
+                        <m:num>
+                          <m:r>
+                            <m:rPr>
+                              <m:sty m:val="p"/>
+                            </m:rPr>
+                            <a:rPr lang="en-US" sz="2400" b="0" i="0" smtClean="0">
+                              <a:latin typeface="Cambria Math" panose="02040503050406030204" pitchFamily="18" charset="0"/>
+                            </a:rPr>
+                            <m:t>d</m:t>
+                          </m:r>
+                          <m:r>
+                            <a:rPr lang="en-US" sz="2400" b="0" i="1" smtClean="0">
+                              <a:latin typeface="Cambria Math" panose="02040503050406030204" pitchFamily="18" charset="0"/>
+                            </a:rPr>
+                            <m:t>𝑣</m:t>
+                          </m:r>
+                        </m:num>
+                        <m:den>
+                          <m:r>
+                            <m:rPr>
+                              <m:sty m:val="p"/>
+                            </m:rPr>
+                            <a:rPr lang="en-US" sz="2400" b="0" i="0" smtClean="0">
+                              <a:latin typeface="Cambria Math" panose="02040503050406030204" pitchFamily="18" charset="0"/>
+                            </a:rPr>
+                            <m:t>d</m:t>
+                          </m:r>
+                          <m:r>
+                            <a:rPr lang="en-US" sz="2400" b="0" i="1" smtClean="0">
+                              <a:latin typeface="Cambria Math" panose="02040503050406030204" pitchFamily="18" charset="0"/>
+                            </a:rPr>
+                            <m:t>𝑦</m:t>
+                          </m:r>
+                        </m:den>
+                      </m:f>
+                    </m:oMath>
+                  </m:oMathPara>
+                </a14:m>
+                <a:endParaRPr lang="en-US" sz="2400" dirty="0"/>
+              </a:p>
+            </p:txBody>
+          </p:sp>
+        </mc:Choice>
+        <mc:Fallback>
+          <p:sp>
+            <p:nvSpPr>
+              <p:cNvPr id="35" name="TextBox 34"/>
+              <p:cNvSpPr txBox="1">
+                <a:spLocks noRot="1" noChangeAspect="1" noMove="1" noResize="1" noEditPoints="1" noAdjustHandles="1" noChangeArrowheads="1" noChangeShapeType="1" noTextEdit="1"/>
+              </p:cNvSpPr>
+              <p:nvPr/>
+            </p:nvSpPr>
+            <p:spPr>
+              <a:xfrm>
+                <a:off x="4124198" y="4338066"/>
+                <a:ext cx="1201931" cy="764376"/>
+              </a:xfrm>
+              <a:prstGeom prst="rect">
+                <a:avLst/>
+              </a:prstGeom>
+              <a:blipFill>
+                <a:blip r:embed="rId8"/>
+                <a:stretch>
+                  <a:fillRect/>
+                </a:stretch>
+              </a:blipFill>
+            </p:spPr>
+            <p:txBody>
+              <a:bodyPr/>
+              <a:lstStyle/>
+              <a:p>
+                <a:r>
+                  <a:rPr lang="en-US">
+                    <a:noFill/>
+                  </a:rPr>
+                  <a:t> </a:t>
+                </a:r>
+              </a:p>
+            </p:txBody>
+          </p:sp>
+        </mc:Fallback>
+      </mc:AlternateContent>
+    </p:spTree>
+    <p:extLst>
+      <p:ext uri="{BB962C8B-B14F-4D97-AF65-F5344CB8AC3E}">
+        <p14:creationId xmlns:p14="http://schemas.microsoft.com/office/powerpoint/2010/main" val="4263982907"/>
+      </p:ext>
+    </p:extLst>
+  </p:cSld>
+  <p:clrMapOvr>
+    <a:masterClrMapping/>
+  </p:clrMapOvr>
+</p:sld>
+</file>
+
+<file path=ppt/slides/slide9.xml><?xml version="1.0" encoding="utf-8"?>
+<p:sld xmlns:a="http://schemas.openxmlformats.org/drawingml/2006/main" xmlns:r="http://schemas.openxmlformats.org/officeDocument/2006/relationships" xmlns:p="http://schemas.openxmlformats.org/presentationml/2006/main">
+  <p:cSld>
+    <p:spTree>
+      <p:nvGrpSpPr>
+        <p:cNvPr id="1" name=""/>
+        <p:cNvGrpSpPr/>
+        <p:nvPr/>
+      </p:nvGrpSpPr>
+      <p:grpSpPr>
+        <a:xfrm>
+          <a:off x="0" y="0"/>
+          <a:ext cx="0" cy="0"/>
+          <a:chOff x="0" y="0"/>
+          <a:chExt cx="0" cy="0"/>
+        </a:xfrm>
+      </p:grpSpPr>
+      <p:sp>
+        <p:nvSpPr>
+          <p:cNvPr id="2" name="Parallelogram 1"/>
+          <p:cNvSpPr/>
+          <p:nvPr/>
+        </p:nvSpPr>
+        <p:spPr>
+          <a:xfrm>
+            <a:off x="2211977" y="2325189"/>
+            <a:ext cx="6453051" cy="1593668"/>
+          </a:xfrm>
+          <a:prstGeom prst="parallelogram">
+            <a:avLst>
+              <a:gd name="adj" fmla="val 109494"/>
+            </a:avLst>
+          </a:prstGeom>
+          <a:solidFill>
+            <a:schemeClr val="bg1">
+              <a:lumMod val="75000"/>
+            </a:schemeClr>
+          </a:solidFill>
+          <a:ln>
+            <a:noFill/>
+          </a:ln>
+        </p:spPr>
+        <p:style>
+          <a:lnRef idx="2">
+            <a:schemeClr val="accent1">
+              <a:shade val="50000"/>
+            </a:schemeClr>
+          </a:lnRef>
+          <a:fillRef idx="1">
+            <a:schemeClr val="accent1"/>
+          </a:fillRef>
+          <a:effectRef idx="0">
+            <a:schemeClr val="accent1"/>
+          </a:effectRef>
+          <a:fontRef idx="minor">
+            <a:schemeClr val="lt1"/>
+          </a:fontRef>
+        </p:style>
+        <p:txBody>
+          <a:bodyPr rtlCol="0" anchor="ctr"/>
+          <a:lstStyle/>
+          <a:p>
+            <a:pPr algn="ctr"/>
+            <a:endParaRPr lang="en-US"/>
+          </a:p>
+        </p:txBody>
+      </p:sp>
+      <p:sp>
+        <p:nvSpPr>
+          <p:cNvPr id="3" name="Parallelogram 6"/>
+          <p:cNvSpPr/>
+          <p:nvPr/>
+        </p:nvSpPr>
+        <p:spPr>
+          <a:xfrm>
+            <a:off x="4162696" y="2068501"/>
+            <a:ext cx="2304144" cy="2104356"/>
+          </a:xfrm>
+          <a:custGeom>
+            <a:avLst/>
+            <a:gdLst>
+              <a:gd name="connsiteX0" fmla="*/ 0 w 6453051"/>
+              <a:gd name="connsiteY0" fmla="*/ 1593668 h 1593668"/>
+              <a:gd name="connsiteX1" fmla="*/ 1744971 w 6453051"/>
+              <a:gd name="connsiteY1" fmla="*/ 0 h 1593668"/>
+              <a:gd name="connsiteX2" fmla="*/ 6453051 w 6453051"/>
+              <a:gd name="connsiteY2" fmla="*/ 0 h 1593668"/>
+              <a:gd name="connsiteX3" fmla="*/ 4708080 w 6453051"/>
+              <a:gd name="connsiteY3" fmla="*/ 1593668 h 1593668"/>
+              <a:gd name="connsiteX4" fmla="*/ 0 w 6453051"/>
+              <a:gd name="connsiteY4" fmla="*/ 1593668 h 1593668"/>
+              <a:gd name="connsiteX0" fmla="*/ 0 w 4708080"/>
+              <a:gd name="connsiteY0" fmla="*/ 1593668 h 1593668"/>
+              <a:gd name="connsiteX1" fmla="*/ 1744971 w 4708080"/>
+              <a:gd name="connsiteY1" fmla="*/ 0 h 1593668"/>
+              <a:gd name="connsiteX2" fmla="*/ 4708080 w 4708080"/>
+              <a:gd name="connsiteY2" fmla="*/ 1593668 h 1593668"/>
+              <a:gd name="connsiteX3" fmla="*/ 0 w 4708080"/>
+              <a:gd name="connsiteY3" fmla="*/ 1593668 h 1593668"/>
+              <a:gd name="connsiteX0" fmla="*/ 0 w 1744971"/>
+              <a:gd name="connsiteY0" fmla="*/ 1593668 h 1593668"/>
+              <a:gd name="connsiteX1" fmla="*/ 1744971 w 1744971"/>
+              <a:gd name="connsiteY1" fmla="*/ 0 h 1593668"/>
+              <a:gd name="connsiteX2" fmla="*/ 0 w 1744971"/>
+              <a:gd name="connsiteY2" fmla="*/ 1593668 h 1593668"/>
+            </a:gdLst>
+            <a:ahLst/>
+            <a:cxnLst>
+              <a:cxn ang="0">
+                <a:pos x="connsiteX0" y="connsiteY0"/>
+              </a:cxn>
+              <a:cxn ang="0">
+                <a:pos x="connsiteX1" y="connsiteY1"/>
+              </a:cxn>
+              <a:cxn ang="0">
+                <a:pos x="connsiteX2" y="connsiteY2"/>
+              </a:cxn>
+            </a:cxnLst>
+            <a:rect l="l" t="t" r="r" b="b"/>
+            <a:pathLst>
+              <a:path w="1744971" h="1593668">
+                <a:moveTo>
+                  <a:pt x="0" y="1593668"/>
+                </a:moveTo>
+                <a:lnTo>
+                  <a:pt x="1744971" y="0"/>
+                </a:lnTo>
+                <a:lnTo>
+                  <a:pt x="0" y="1593668"/>
+                </a:lnTo>
+                <a:close/>
+              </a:path>
+            </a:pathLst>
+          </a:custGeom>
+          <a:noFill/>
+          <a:ln w="28575">
+            <a:solidFill>
+              <a:schemeClr val="tx1">
+                <a:lumMod val="65000"/>
+                <a:lumOff val="35000"/>
+              </a:schemeClr>
+            </a:solidFill>
+          </a:ln>
+        </p:spPr>
+        <p:style>
+          <a:lnRef idx="2">
+            <a:schemeClr val="accent1">
+              <a:shade val="50000"/>
+            </a:schemeClr>
+          </a:lnRef>
+          <a:fillRef idx="1">
+            <a:schemeClr val="accent1"/>
+          </a:fillRef>
+          <a:effectRef idx="0">
+            <a:schemeClr val="accent1"/>
+          </a:effectRef>
+          <a:fontRef idx="minor">
+            <a:schemeClr val="lt1"/>
+          </a:fontRef>
+        </p:style>
+        <p:txBody>
+          <a:bodyPr rtlCol="0" anchor="ctr"/>
+          <a:lstStyle/>
+          <a:p>
+            <a:pPr algn="ctr"/>
+            <a:endParaRPr lang="en-US" dirty="0"/>
+          </a:p>
+        </p:txBody>
+      </p:sp>
+      <p:sp>
+        <p:nvSpPr>
+          <p:cNvPr id="4" name="Parallelogram 7"/>
+          <p:cNvSpPr/>
+          <p:nvPr/>
+        </p:nvSpPr>
+        <p:spPr>
+          <a:xfrm flipV="1">
+            <a:off x="2577736" y="2958738"/>
+            <a:ext cx="5819503" cy="45719"/>
+          </a:xfrm>
+          <a:custGeom>
+            <a:avLst/>
+            <a:gdLst>
+              <a:gd name="connsiteX0" fmla="*/ 0 w 6453051"/>
+              <a:gd name="connsiteY0" fmla="*/ 1593668 h 1593668"/>
+              <a:gd name="connsiteX1" fmla="*/ 1744971 w 6453051"/>
+              <a:gd name="connsiteY1" fmla="*/ 0 h 1593668"/>
+              <a:gd name="connsiteX2" fmla="*/ 6453051 w 6453051"/>
+              <a:gd name="connsiteY2" fmla="*/ 0 h 1593668"/>
+              <a:gd name="connsiteX3" fmla="*/ 4708080 w 6453051"/>
+              <a:gd name="connsiteY3" fmla="*/ 1593668 h 1593668"/>
+              <a:gd name="connsiteX4" fmla="*/ 0 w 6453051"/>
+              <a:gd name="connsiteY4" fmla="*/ 1593668 h 1593668"/>
+              <a:gd name="connsiteX0" fmla="*/ 0 w 4708080"/>
+              <a:gd name="connsiteY0" fmla="*/ 1593668 h 1593668"/>
+              <a:gd name="connsiteX1" fmla="*/ 1744971 w 4708080"/>
+              <a:gd name="connsiteY1" fmla="*/ 0 h 1593668"/>
+              <a:gd name="connsiteX2" fmla="*/ 4708080 w 4708080"/>
+              <a:gd name="connsiteY2" fmla="*/ 1593668 h 1593668"/>
+              <a:gd name="connsiteX3" fmla="*/ 0 w 4708080"/>
+              <a:gd name="connsiteY3" fmla="*/ 1593668 h 1593668"/>
+              <a:gd name="connsiteX0" fmla="*/ 0 w 4708080"/>
+              <a:gd name="connsiteY0" fmla="*/ 0 h 0"/>
+              <a:gd name="connsiteX1" fmla="*/ 4708080 w 4708080"/>
+              <a:gd name="connsiteY1" fmla="*/ 0 h 0"/>
+              <a:gd name="connsiteX2" fmla="*/ 0 w 4708080"/>
+              <a:gd name="connsiteY2" fmla="*/ 0 h 0"/>
+            </a:gdLst>
+            <a:ahLst/>
+            <a:cxnLst>
+              <a:cxn ang="0">
+                <a:pos x="connsiteX0" y="connsiteY0"/>
+              </a:cxn>
+              <a:cxn ang="0">
+                <a:pos x="connsiteX1" y="connsiteY1"/>
+              </a:cxn>
+              <a:cxn ang="0">
+                <a:pos x="connsiteX2" y="connsiteY2"/>
+              </a:cxn>
+            </a:cxnLst>
+            <a:rect l="l" t="t" r="r" b="b"/>
+            <a:pathLst>
+              <a:path w="4708080">
+                <a:moveTo>
+                  <a:pt x="0" y="0"/>
+                </a:moveTo>
+                <a:lnTo>
+                  <a:pt x="4708080" y="0"/>
+                </a:lnTo>
+                <a:lnTo>
+                  <a:pt x="0" y="0"/>
+                </a:lnTo>
+                <a:close/>
+              </a:path>
+            </a:pathLst>
+          </a:custGeom>
+          <a:noFill/>
+          <a:ln w="28575">
+            <a:solidFill>
+              <a:schemeClr val="tx1">
+                <a:lumMod val="65000"/>
+                <a:lumOff val="35000"/>
+              </a:schemeClr>
+            </a:solidFill>
+          </a:ln>
+        </p:spPr>
+        <p:style>
+          <a:lnRef idx="2">
+            <a:schemeClr val="accent1">
+              <a:shade val="50000"/>
+            </a:schemeClr>
+          </a:lnRef>
+          <a:fillRef idx="1">
+            <a:schemeClr val="accent1"/>
+          </a:fillRef>
+          <a:effectRef idx="0">
+            <a:schemeClr val="accent1"/>
+          </a:effectRef>
+          <a:fontRef idx="minor">
+            <a:schemeClr val="lt1"/>
+          </a:fontRef>
+        </p:style>
+        <p:txBody>
+          <a:bodyPr rtlCol="0" anchor="ctr"/>
+          <a:lstStyle/>
+          <a:p>
+            <a:pPr algn="ctr"/>
+            <a:endParaRPr lang="en-US"/>
+          </a:p>
+        </p:txBody>
+      </p:sp>
+      <p:sp>
+        <p:nvSpPr>
+          <p:cNvPr id="19" name="Parallelogram 7"/>
+          <p:cNvSpPr/>
+          <p:nvPr/>
+        </p:nvSpPr>
+        <p:spPr>
+          <a:xfrm rot="5400000">
+            <a:off x="4860621" y="3648037"/>
+            <a:ext cx="1120177" cy="61004"/>
+          </a:xfrm>
+          <a:custGeom>
+            <a:avLst/>
+            <a:gdLst>
+              <a:gd name="connsiteX0" fmla="*/ 0 w 6453051"/>
+              <a:gd name="connsiteY0" fmla="*/ 1593668 h 1593668"/>
+              <a:gd name="connsiteX1" fmla="*/ 1744971 w 6453051"/>
+              <a:gd name="connsiteY1" fmla="*/ 0 h 1593668"/>
+              <a:gd name="connsiteX2" fmla="*/ 6453051 w 6453051"/>
+              <a:gd name="connsiteY2" fmla="*/ 0 h 1593668"/>
+              <a:gd name="connsiteX3" fmla="*/ 4708080 w 6453051"/>
+              <a:gd name="connsiteY3" fmla="*/ 1593668 h 1593668"/>
+              <a:gd name="connsiteX4" fmla="*/ 0 w 6453051"/>
+              <a:gd name="connsiteY4" fmla="*/ 1593668 h 1593668"/>
+              <a:gd name="connsiteX0" fmla="*/ 0 w 4708080"/>
+              <a:gd name="connsiteY0" fmla="*/ 1593668 h 1593668"/>
+              <a:gd name="connsiteX1" fmla="*/ 1744971 w 4708080"/>
+              <a:gd name="connsiteY1" fmla="*/ 0 h 1593668"/>
+              <a:gd name="connsiteX2" fmla="*/ 4708080 w 4708080"/>
+              <a:gd name="connsiteY2" fmla="*/ 1593668 h 1593668"/>
+              <a:gd name="connsiteX3" fmla="*/ 0 w 4708080"/>
+              <a:gd name="connsiteY3" fmla="*/ 1593668 h 1593668"/>
+              <a:gd name="connsiteX0" fmla="*/ 0 w 4708080"/>
+              <a:gd name="connsiteY0" fmla="*/ 0 h 0"/>
+              <a:gd name="connsiteX1" fmla="*/ 4708080 w 4708080"/>
+              <a:gd name="connsiteY1" fmla="*/ 0 h 0"/>
+              <a:gd name="connsiteX2" fmla="*/ 0 w 4708080"/>
+              <a:gd name="connsiteY2" fmla="*/ 0 h 0"/>
+            </a:gdLst>
+            <a:ahLst/>
+            <a:cxnLst>
+              <a:cxn ang="0">
+                <a:pos x="connsiteX0" y="connsiteY0"/>
+              </a:cxn>
+              <a:cxn ang="0">
+                <a:pos x="connsiteX1" y="connsiteY1"/>
+              </a:cxn>
+              <a:cxn ang="0">
+                <a:pos x="connsiteX2" y="connsiteY2"/>
+              </a:cxn>
+            </a:cxnLst>
+            <a:rect l="l" t="t" r="r" b="b"/>
+            <a:pathLst>
+              <a:path w="4708080">
+                <a:moveTo>
+                  <a:pt x="0" y="0"/>
+                </a:moveTo>
+                <a:lnTo>
+                  <a:pt x="4708080" y="0"/>
+                </a:lnTo>
+                <a:lnTo>
+                  <a:pt x="0" y="0"/>
+                </a:lnTo>
+                <a:close/>
+              </a:path>
+            </a:pathLst>
+          </a:custGeom>
+          <a:noFill/>
+          <a:ln w="28575">
+            <a:solidFill>
+              <a:schemeClr val="tx1">
+                <a:lumMod val="65000"/>
+                <a:lumOff val="35000"/>
+              </a:schemeClr>
+            </a:solidFill>
+          </a:ln>
+        </p:spPr>
+        <p:style>
+          <a:lnRef idx="2">
+            <a:schemeClr val="accent1">
+              <a:shade val="50000"/>
+            </a:schemeClr>
+          </a:lnRef>
+          <a:fillRef idx="1">
+            <a:schemeClr val="accent1"/>
+          </a:fillRef>
+          <a:effectRef idx="0">
+            <a:schemeClr val="accent1"/>
+          </a:effectRef>
+          <a:fontRef idx="minor">
+            <a:schemeClr val="lt1"/>
+          </a:fontRef>
+        </p:style>
+        <p:txBody>
+          <a:bodyPr rtlCol="0" anchor="ctr"/>
+          <a:lstStyle/>
+          <a:p>
+            <a:pPr algn="ctr"/>
+            <a:endParaRPr lang="en-US"/>
+          </a:p>
+        </p:txBody>
+      </p:sp>
+      <p:sp>
+        <p:nvSpPr>
+          <p:cNvPr id="5" name="Parallelogram 4"/>
+          <p:cNvSpPr/>
+          <p:nvPr/>
+        </p:nvSpPr>
+        <p:spPr>
+          <a:xfrm>
+            <a:off x="4906410" y="2843349"/>
+            <a:ext cx="1031094" cy="357051"/>
+          </a:xfrm>
+          <a:prstGeom prst="parallelogram">
+            <a:avLst>
+              <a:gd name="adj" fmla="val 109494"/>
+            </a:avLst>
+          </a:prstGeom>
+          <a:solidFill>
+            <a:schemeClr val="bg1">
+              <a:lumMod val="50000"/>
+              <a:alpha val="79000"/>
+            </a:schemeClr>
+          </a:solidFill>
+          <a:ln>
+            <a:solidFill>
+              <a:schemeClr val="tx1"/>
+            </a:solidFill>
+          </a:ln>
+        </p:spPr>
+        <p:style>
+          <a:lnRef idx="2">
+            <a:schemeClr val="accent1">
+              <a:shade val="50000"/>
+            </a:schemeClr>
+          </a:lnRef>
+          <a:fillRef idx="1">
+            <a:schemeClr val="accent1"/>
+          </a:fillRef>
+          <a:effectRef idx="0">
+            <a:schemeClr val="accent1"/>
+          </a:effectRef>
+          <a:fontRef idx="minor">
+            <a:schemeClr val="lt1"/>
+          </a:fontRef>
+        </p:style>
+        <p:txBody>
+          <a:bodyPr rtlCol="0" anchor="ctr"/>
+          <a:lstStyle/>
+          <a:p>
+            <a:pPr algn="ctr"/>
+            <a:endParaRPr lang="en-US"/>
+          </a:p>
+        </p:txBody>
+      </p:sp>
+      <p:cxnSp>
+        <p:nvCxnSpPr>
+          <p:cNvPr id="7" name="Straight Connector 6"/>
+          <p:cNvCxnSpPr/>
+          <p:nvPr/>
+        </p:nvCxnSpPr>
+        <p:spPr>
+          <a:xfrm flipV="1">
+            <a:off x="4918710" y="1501140"/>
+            <a:ext cx="1151890" cy="1693545"/>
+          </a:xfrm>
+          <a:prstGeom prst="line">
+            <a:avLst/>
+          </a:prstGeom>
+          <a:ln w="12700" cap="rnd">
+            <a:solidFill>
+              <a:schemeClr val="tx1">
+                <a:lumMod val="75000"/>
+                <a:lumOff val="25000"/>
+              </a:schemeClr>
+            </a:solidFill>
+            <a:round/>
+          </a:ln>
+        </p:spPr>
+        <p:style>
+          <a:lnRef idx="1">
+            <a:schemeClr val="accent1"/>
+          </a:lnRef>
+          <a:fillRef idx="0">
+            <a:schemeClr val="accent1"/>
+          </a:fillRef>
+          <a:effectRef idx="0">
+            <a:schemeClr val="accent1"/>
+          </a:effectRef>
+          <a:fontRef idx="minor">
+            <a:schemeClr val="tx1"/>
+          </a:fontRef>
+        </p:style>
+      </p:cxnSp>
+      <p:cxnSp>
+        <p:nvCxnSpPr>
+          <p:cNvPr id="8" name="Straight Connector 7"/>
+          <p:cNvCxnSpPr/>
+          <p:nvPr/>
+        </p:nvCxnSpPr>
+        <p:spPr>
+          <a:xfrm flipV="1">
+            <a:off x="5930265" y="1501141"/>
+            <a:ext cx="140335" cy="1341119"/>
+          </a:xfrm>
+          <a:prstGeom prst="line">
+            <a:avLst/>
+          </a:prstGeom>
+          <a:ln w="12700" cap="rnd">
+            <a:solidFill>
+              <a:schemeClr val="tx1">
+                <a:lumMod val="75000"/>
+                <a:lumOff val="25000"/>
+              </a:schemeClr>
+            </a:solidFill>
+            <a:round/>
+          </a:ln>
+        </p:spPr>
+        <p:style>
+          <a:lnRef idx="1">
+            <a:schemeClr val="accent1"/>
+          </a:lnRef>
+          <a:fillRef idx="0">
+            <a:schemeClr val="accent1"/>
+          </a:fillRef>
+          <a:effectRef idx="0">
+            <a:schemeClr val="accent1"/>
+          </a:effectRef>
+          <a:fontRef idx="minor">
+            <a:schemeClr val="tx1"/>
+          </a:fontRef>
+        </p:style>
+      </p:cxnSp>
+      <p:cxnSp>
+        <p:nvCxnSpPr>
+          <p:cNvPr id="9" name="Straight Connector 8"/>
+          <p:cNvCxnSpPr/>
+          <p:nvPr/>
+        </p:nvCxnSpPr>
+        <p:spPr>
+          <a:xfrm flipV="1">
+            <a:off x="5297805" y="1501140"/>
+            <a:ext cx="772795" cy="1341120"/>
+          </a:xfrm>
+          <a:prstGeom prst="line">
+            <a:avLst/>
+          </a:prstGeom>
+          <a:ln w="12700" cap="rnd">
+            <a:solidFill>
+              <a:schemeClr val="tx1">
+                <a:lumMod val="75000"/>
+                <a:lumOff val="25000"/>
+              </a:schemeClr>
+            </a:solidFill>
+            <a:round/>
+          </a:ln>
+        </p:spPr>
+        <p:style>
+          <a:lnRef idx="1">
+            <a:schemeClr val="accent1"/>
+          </a:lnRef>
+          <a:fillRef idx="0">
+            <a:schemeClr val="accent1"/>
+          </a:fillRef>
+          <a:effectRef idx="0">
+            <a:schemeClr val="accent1"/>
+          </a:effectRef>
+          <a:fontRef idx="minor">
+            <a:schemeClr val="tx1"/>
+          </a:fontRef>
+        </p:style>
+      </p:cxnSp>
+      <p:cxnSp>
+        <p:nvCxnSpPr>
+          <p:cNvPr id="10" name="Straight Connector 9"/>
+          <p:cNvCxnSpPr/>
+          <p:nvPr/>
+        </p:nvCxnSpPr>
+        <p:spPr>
+          <a:xfrm flipV="1">
+            <a:off x="5543550" y="1501140"/>
+            <a:ext cx="527050" cy="1695450"/>
+          </a:xfrm>
+          <a:prstGeom prst="line">
+            <a:avLst/>
+          </a:prstGeom>
+          <a:ln w="12700" cap="rnd">
+            <a:solidFill>
+              <a:schemeClr val="tx1">
+                <a:lumMod val="75000"/>
+                <a:lumOff val="25000"/>
+              </a:schemeClr>
+            </a:solidFill>
+            <a:round/>
+          </a:ln>
+        </p:spPr>
+        <p:style>
+          <a:lnRef idx="1">
+            <a:schemeClr val="accent1"/>
+          </a:lnRef>
+          <a:fillRef idx="0">
+            <a:schemeClr val="accent1"/>
+          </a:fillRef>
+          <a:effectRef idx="0">
+            <a:schemeClr val="accent1"/>
+          </a:effectRef>
+          <a:fontRef idx="minor">
+            <a:schemeClr val="tx1"/>
+          </a:fontRef>
+        </p:style>
+      </p:cxnSp>
+      <mc:AlternateContent xmlns:mc="http://schemas.openxmlformats.org/markup-compatibility/2006">
+        <mc:Choice xmlns:a14="http://schemas.microsoft.com/office/drawing/2010/main" Requires="a14">
+          <p:sp>
+            <p:nvSpPr>
+              <p:cNvPr id="11" name="TextBox 10"/>
+              <p:cNvSpPr txBox="1"/>
+              <p:nvPr/>
+            </p:nvSpPr>
+            <p:spPr>
+              <a:xfrm>
+                <a:off x="8214360" y="3009900"/>
+                <a:ext cx="241733" cy="369332"/>
+              </a:xfrm>
+              <a:prstGeom prst="rect">
+                <a:avLst/>
+              </a:prstGeom>
+              <a:noFill/>
+            </p:spPr>
+            <p:txBody>
+              <a:bodyPr wrap="none" lIns="0" tIns="0" rIns="0" bIns="0" rtlCol="0">
+                <a:spAutoFit/>
+              </a:bodyPr>
+              <a:lstStyle/>
+              <a:p>
+                <a14:m>
+                  <m:oMathPara xmlns:m="http://schemas.openxmlformats.org/officeDocument/2006/math">
+                    <m:oMathParaPr>
+                      <m:jc m:val="centerGroup"/>
+                    </m:oMathParaPr>
+                    <m:oMath xmlns:m="http://schemas.openxmlformats.org/officeDocument/2006/math">
+                      <m:r>
+                        <a:rPr lang="en-US" sz="2400" b="0" i="1" smtClean="0">
+                          <a:solidFill>
+                            <a:schemeClr val="tx1"/>
+                          </a:solidFill>
+                          <a:latin typeface="Cambria Math" panose="02040503050406030204" pitchFamily="18" charset="0"/>
+                        </a:rPr>
+                        <m:t>𝑥</m:t>
+                      </m:r>
+                    </m:oMath>
+                  </m:oMathPara>
+                </a14:m>
+                <a:endParaRPr lang="en-US" sz="2400" dirty="0"/>
+              </a:p>
+            </p:txBody>
+          </p:sp>
+        </mc:Choice>
+        <mc:Fallback>
+          <p:sp>
+            <p:nvSpPr>
+              <p:cNvPr id="11" name="TextBox 10"/>
+              <p:cNvSpPr txBox="1">
+                <a:spLocks noRot="1" noChangeAspect="1" noMove="1" noResize="1" noEditPoints="1" noAdjustHandles="1" noChangeArrowheads="1" noChangeShapeType="1" noTextEdit="1"/>
+              </p:cNvSpPr>
+              <p:nvPr/>
+            </p:nvSpPr>
+            <p:spPr>
+              <a:xfrm>
+                <a:off x="8214360" y="3009900"/>
+                <a:ext cx="241733" cy="369332"/>
+              </a:xfrm>
+              <a:prstGeom prst="rect">
+                <a:avLst/>
+              </a:prstGeom>
+              <a:blipFill>
+                <a:blip r:embed="rId2"/>
+                <a:stretch>
+                  <a:fillRect l="-17949" r="-15385"/>
+                </a:stretch>
+              </a:blipFill>
+            </p:spPr>
+            <p:txBody>
+              <a:bodyPr/>
+              <a:lstStyle/>
+              <a:p>
+                <a:r>
+                  <a:rPr lang="en-US">
+                    <a:noFill/>
+                  </a:rPr>
+                  <a:t> </a:t>
+                </a:r>
+              </a:p>
+            </p:txBody>
+          </p:sp>
+        </mc:Fallback>
+      </mc:AlternateContent>
+      <mc:AlternateContent xmlns:mc="http://schemas.openxmlformats.org/markup-compatibility/2006">
+        <mc:Choice xmlns:a14="http://schemas.microsoft.com/office/drawing/2010/main" Requires="a14">
+          <p:sp>
+            <p:nvSpPr>
+              <p:cNvPr id="12" name="TextBox 11"/>
+              <p:cNvSpPr txBox="1"/>
+              <p:nvPr/>
+            </p:nvSpPr>
+            <p:spPr>
+              <a:xfrm>
+                <a:off x="2446020" y="3009900"/>
+                <a:ext cx="312586" cy="369332"/>
+              </a:xfrm>
+              <a:prstGeom prst="rect">
+                <a:avLst/>
+              </a:prstGeom>
+              <a:noFill/>
+            </p:spPr>
+            <p:txBody>
+              <a:bodyPr wrap="none" lIns="0" tIns="0" rIns="0" bIns="0" rtlCol="0">
+                <a:spAutoFit/>
+              </a:bodyPr>
+              <a:lstStyle/>
+              <a:p>
+                <a14:m>
+                  <m:oMathPara xmlns:m="http://schemas.openxmlformats.org/officeDocument/2006/math">
+                    <m:oMathParaPr>
+                      <m:jc m:val="centerGroup"/>
+                    </m:oMathParaPr>
+                    <m:oMath xmlns:m="http://schemas.openxmlformats.org/officeDocument/2006/math">
+                      <m:r>
+                        <a:rPr lang="en-US" sz="2400" b="0" i="1" smtClean="0">
+                          <a:solidFill>
+                            <a:schemeClr val="tx1"/>
+                          </a:solidFill>
+                          <a:latin typeface="Cambria Math" panose="02040503050406030204" pitchFamily="18" charset="0"/>
+                        </a:rPr>
+                        <m:t>𝑥</m:t>
+                      </m:r>
+                      <m:r>
+                        <a:rPr lang="en-US" sz="2400" b="0" i="1" smtClean="0">
+                          <a:solidFill>
+                            <a:schemeClr val="tx1"/>
+                          </a:solidFill>
+                          <a:latin typeface="Cambria Math" panose="02040503050406030204" pitchFamily="18" charset="0"/>
+                        </a:rPr>
+                        <m:t>′</m:t>
+                      </m:r>
+                    </m:oMath>
+                  </m:oMathPara>
+                </a14:m>
+                <a:endParaRPr lang="en-US" sz="2400" dirty="0"/>
+              </a:p>
+            </p:txBody>
+          </p:sp>
+        </mc:Choice>
+        <mc:Fallback>
+          <p:sp>
+            <p:nvSpPr>
+              <p:cNvPr id="12" name="TextBox 11"/>
+              <p:cNvSpPr txBox="1">
+                <a:spLocks noRot="1" noChangeAspect="1" noMove="1" noResize="1" noEditPoints="1" noAdjustHandles="1" noChangeArrowheads="1" noChangeShapeType="1" noTextEdit="1"/>
+              </p:cNvSpPr>
+              <p:nvPr/>
+            </p:nvSpPr>
+            <p:spPr>
+              <a:xfrm>
+                <a:off x="2446020" y="3009900"/>
+                <a:ext cx="312586" cy="369332"/>
+              </a:xfrm>
+              <a:prstGeom prst="rect">
+                <a:avLst/>
+              </a:prstGeom>
+              <a:blipFill>
+                <a:blip r:embed="rId3"/>
+                <a:stretch>
+                  <a:fillRect l="-25000" t="-1667" r="-26923" b="-10000"/>
+                </a:stretch>
+              </a:blipFill>
+            </p:spPr>
+            <p:txBody>
+              <a:bodyPr/>
+              <a:lstStyle/>
+              <a:p>
+                <a:r>
+                  <a:rPr lang="en-US">
+                    <a:noFill/>
+                  </a:rPr>
+                  <a:t> </a:t>
+                </a:r>
+              </a:p>
+            </p:txBody>
+          </p:sp>
+        </mc:Fallback>
+      </mc:AlternateContent>
+      <mc:AlternateContent xmlns:mc="http://schemas.openxmlformats.org/markup-compatibility/2006">
+        <mc:Choice xmlns:a14="http://schemas.microsoft.com/office/drawing/2010/main" Requires="a14">
+          <p:sp>
+            <p:nvSpPr>
+              <p:cNvPr id="13" name="TextBox 12"/>
+              <p:cNvSpPr txBox="1"/>
+              <p:nvPr/>
+            </p:nvSpPr>
+            <p:spPr>
+              <a:xfrm>
+                <a:off x="5090160" y="1005840"/>
+                <a:ext cx="245708" cy="369332"/>
+              </a:xfrm>
+              <a:prstGeom prst="rect">
+                <a:avLst/>
+              </a:prstGeom>
+              <a:noFill/>
+            </p:spPr>
+            <p:txBody>
+              <a:bodyPr wrap="none" lIns="0" tIns="0" rIns="0" bIns="0" rtlCol="0">
+                <a:spAutoFit/>
+              </a:bodyPr>
+              <a:lstStyle/>
+              <a:p>
+                <a14:m>
+                  <m:oMathPara xmlns:m="http://schemas.openxmlformats.org/officeDocument/2006/math">
+                    <m:oMathParaPr>
+                      <m:jc m:val="centerGroup"/>
+                    </m:oMathParaPr>
+                    <m:oMath xmlns:m="http://schemas.openxmlformats.org/officeDocument/2006/math">
+                      <m:r>
+                        <a:rPr lang="en-US" sz="2400" b="0" i="1" smtClean="0">
+                          <a:solidFill>
+                            <a:schemeClr val="tx1"/>
+                          </a:solidFill>
+                          <a:latin typeface="Cambria Math" panose="02040503050406030204" pitchFamily="18" charset="0"/>
+                        </a:rPr>
+                        <m:t>𝑦</m:t>
+                      </m:r>
+                    </m:oMath>
+                  </m:oMathPara>
+                </a14:m>
+                <a:endParaRPr lang="en-US" sz="2400" dirty="0"/>
+              </a:p>
+            </p:txBody>
+          </p:sp>
+        </mc:Choice>
+        <mc:Fallback>
+          <p:sp>
+            <p:nvSpPr>
+              <p:cNvPr id="13" name="TextBox 12"/>
+              <p:cNvSpPr txBox="1">
+                <a:spLocks noRot="1" noChangeAspect="1" noMove="1" noResize="1" noEditPoints="1" noAdjustHandles="1" noChangeArrowheads="1" noChangeShapeType="1" noTextEdit="1"/>
+              </p:cNvSpPr>
+              <p:nvPr/>
+            </p:nvSpPr>
+            <p:spPr>
+              <a:xfrm>
+                <a:off x="5090160" y="1005840"/>
+                <a:ext cx="245708" cy="369332"/>
+              </a:xfrm>
+              <a:prstGeom prst="rect">
+                <a:avLst/>
+              </a:prstGeom>
+              <a:blipFill>
+                <a:blip r:embed="rId4"/>
+                <a:stretch>
+                  <a:fillRect l="-30000" r="-30000" b="-24590"/>
+                </a:stretch>
+              </a:blipFill>
+            </p:spPr>
+            <p:txBody>
+              <a:bodyPr/>
+              <a:lstStyle/>
+              <a:p>
+                <a:r>
+                  <a:rPr lang="en-US">
+                    <a:noFill/>
+                  </a:rPr>
+                  <a:t> </a:t>
+                </a:r>
+              </a:p>
+            </p:txBody>
+          </p:sp>
+        </mc:Fallback>
+      </mc:AlternateContent>
+      <mc:AlternateContent xmlns:mc="http://schemas.openxmlformats.org/markup-compatibility/2006">
+        <mc:Choice xmlns:a14="http://schemas.microsoft.com/office/drawing/2010/main" Requires="a14">
+          <p:sp>
+            <p:nvSpPr>
+              <p:cNvPr id="14" name="TextBox 13"/>
+              <p:cNvSpPr txBox="1"/>
+              <p:nvPr/>
+            </p:nvSpPr>
+            <p:spPr>
+              <a:xfrm>
+                <a:off x="6385560" y="1188720"/>
+                <a:ext cx="448969" cy="369332"/>
+              </a:xfrm>
+              <a:prstGeom prst="rect">
+                <a:avLst/>
+              </a:prstGeom>
+              <a:noFill/>
+            </p:spPr>
+            <p:txBody>
+              <a:bodyPr wrap="none" lIns="0" tIns="0" rIns="0" bIns="0" rtlCol="0">
+                <a:spAutoFit/>
+              </a:bodyPr>
+              <a:lstStyle/>
+              <a:p>
+                <a14:m>
+                  <m:oMathPara xmlns:m="http://schemas.openxmlformats.org/officeDocument/2006/math">
+                    <m:oMathParaPr>
+                      <m:jc m:val="centerGroup"/>
+                    </m:oMathParaPr>
+                    <m:oMath xmlns:m="http://schemas.openxmlformats.org/officeDocument/2006/math">
+                      <m:r>
+                        <m:rPr>
+                          <m:sty m:val="p"/>
+                        </m:rPr>
+                        <a:rPr lang="en-US" sz="2400" b="0" i="0" smtClean="0">
+                          <a:solidFill>
+                            <a:schemeClr val="tx1"/>
+                          </a:solidFill>
+                          <a:latin typeface="Cambria Math" panose="02040503050406030204" pitchFamily="18" charset="0"/>
+                        </a:rPr>
+                        <m:t>d</m:t>
+                      </m:r>
+                      <m:r>
+                        <a:rPr lang="en-US" sz="2400" b="0" i="1" smtClean="0">
+                          <a:solidFill>
+                            <a:schemeClr val="tx1"/>
+                          </a:solidFill>
+                          <a:latin typeface="Cambria Math" panose="02040503050406030204" pitchFamily="18" charset="0"/>
+                        </a:rPr>
+                        <m:t>𝑉</m:t>
+                      </m:r>
+                    </m:oMath>
+                  </m:oMathPara>
+                </a14:m>
+                <a:endParaRPr lang="en-US" sz="2400" dirty="0"/>
+              </a:p>
+            </p:txBody>
+          </p:sp>
+        </mc:Choice>
+        <mc:Fallback>
+          <p:sp>
+            <p:nvSpPr>
+              <p:cNvPr id="14" name="TextBox 13"/>
+              <p:cNvSpPr txBox="1">
+                <a:spLocks noRot="1" noChangeAspect="1" noMove="1" noResize="1" noEditPoints="1" noAdjustHandles="1" noChangeArrowheads="1" noChangeShapeType="1" noTextEdit="1"/>
+              </p:cNvSpPr>
+              <p:nvPr/>
+            </p:nvSpPr>
+            <p:spPr>
+              <a:xfrm>
+                <a:off x="6385560" y="1188720"/>
+                <a:ext cx="448969" cy="369332"/>
+              </a:xfrm>
+              <a:prstGeom prst="rect">
+                <a:avLst/>
+              </a:prstGeom>
+              <a:blipFill>
+                <a:blip r:embed="rId5"/>
+                <a:stretch>
+                  <a:fillRect l="-16438" r="-12329" b="-6557"/>
+                </a:stretch>
+              </a:blipFill>
+            </p:spPr>
+            <p:txBody>
+              <a:bodyPr/>
+              <a:lstStyle/>
+              <a:p>
+                <a:r>
+                  <a:rPr lang="en-US">
+                    <a:noFill/>
+                  </a:rPr>
+                  <a:t> </a:t>
+                </a:r>
+              </a:p>
+            </p:txBody>
+          </p:sp>
+        </mc:Fallback>
+      </mc:AlternateContent>
+      <p:cxnSp>
+        <p:nvCxnSpPr>
+          <p:cNvPr id="15" name="Straight Connector 14"/>
+          <p:cNvCxnSpPr/>
+          <p:nvPr/>
+        </p:nvCxnSpPr>
+        <p:spPr>
+          <a:xfrm flipV="1">
+            <a:off x="5444490" y="1501141"/>
+            <a:ext cx="626745" cy="1508759"/>
+          </a:xfrm>
+          <a:prstGeom prst="line">
+            <a:avLst/>
+          </a:prstGeom>
+          <a:ln w="12700" cap="rnd">
+            <a:solidFill>
+              <a:schemeClr val="tx1">
+                <a:lumMod val="75000"/>
+                <a:lumOff val="25000"/>
+              </a:schemeClr>
+            </a:solidFill>
+            <a:prstDash val="dash"/>
+            <a:round/>
+          </a:ln>
+        </p:spPr>
+        <p:style>
+          <a:lnRef idx="1">
+            <a:schemeClr val="accent1"/>
+          </a:lnRef>
+          <a:fillRef idx="0">
+            <a:schemeClr val="accent1"/>
+          </a:fillRef>
+          <a:effectRef idx="0">
+            <a:schemeClr val="accent1"/>
+          </a:effectRef>
+          <a:fontRef idx="minor">
+            <a:schemeClr val="tx1"/>
+          </a:fontRef>
+        </p:style>
+      </p:cxnSp>
+      <p:sp>
+        <p:nvSpPr>
+          <p:cNvPr id="16" name="Cube 15"/>
+          <p:cNvSpPr/>
+          <p:nvPr/>
+        </p:nvSpPr>
+        <p:spPr>
+          <a:xfrm>
+            <a:off x="5894832" y="1338453"/>
+            <a:ext cx="347472" cy="292608"/>
+          </a:xfrm>
+          <a:prstGeom prst="cube">
+            <a:avLst>
+              <a:gd name="adj" fmla="val 35417"/>
+            </a:avLst>
+          </a:prstGeom>
+          <a:solidFill>
+            <a:schemeClr val="accent1">
+              <a:alpha val="81000"/>
+            </a:schemeClr>
+          </a:solidFill>
+        </p:spPr>
+        <p:style>
+          <a:lnRef idx="2">
+            <a:schemeClr val="accent1">
+              <a:shade val="50000"/>
+            </a:schemeClr>
+          </a:lnRef>
+          <a:fillRef idx="1">
+            <a:schemeClr val="accent1"/>
+          </a:fillRef>
+          <a:effectRef idx="0">
+            <a:schemeClr val="accent1"/>
+          </a:effectRef>
+          <a:fontRef idx="minor">
+            <a:schemeClr val="lt1"/>
+          </a:fontRef>
+        </p:style>
+        <p:txBody>
+          <a:bodyPr rtlCol="0" anchor="ctr"/>
+          <a:lstStyle/>
+          <a:p>
+            <a:pPr algn="ctr"/>
+            <a:endParaRPr lang="en-US"/>
+          </a:p>
+        </p:txBody>
+      </p:sp>
+      <mc:AlternateContent xmlns:mc="http://schemas.openxmlformats.org/markup-compatibility/2006">
+        <mc:Choice xmlns:a14="http://schemas.microsoft.com/office/drawing/2010/main" Requires="a14">
+          <p:sp>
+            <p:nvSpPr>
+              <p:cNvPr id="17" name="TextBox 16"/>
+              <p:cNvSpPr txBox="1"/>
+              <p:nvPr/>
+            </p:nvSpPr>
+            <p:spPr>
+              <a:xfrm>
+                <a:off x="5779008" y="2228088"/>
+                <a:ext cx="221535" cy="369332"/>
+              </a:xfrm>
+              <a:prstGeom prst="rect">
+                <a:avLst/>
+              </a:prstGeom>
+              <a:noFill/>
+            </p:spPr>
+            <p:txBody>
+              <a:bodyPr wrap="none" lIns="0" tIns="0" rIns="0" bIns="0" rtlCol="0">
+                <a:spAutoFit/>
+              </a:bodyPr>
+              <a:lstStyle/>
+              <a:p>
+                <a14:m>
+                  <m:oMathPara xmlns:m="http://schemas.openxmlformats.org/officeDocument/2006/math">
+                    <m:oMathParaPr>
+                      <m:jc m:val="centerGroup"/>
+                    </m:oMathParaPr>
+                    <m:oMath xmlns:m="http://schemas.openxmlformats.org/officeDocument/2006/math">
+                      <m:r>
+                        <a:rPr lang="en-US" sz="2400" b="0" i="1" smtClean="0">
+                          <a:solidFill>
+                            <a:schemeClr val="tx1"/>
+                          </a:solidFill>
+                          <a:latin typeface="Cambria Math" panose="02040503050406030204" pitchFamily="18" charset="0"/>
+                        </a:rPr>
+                        <m:t>𝑟</m:t>
+                      </m:r>
+                    </m:oMath>
+                  </m:oMathPara>
+                </a14:m>
+                <a:endParaRPr lang="en-US" sz="2400" dirty="0"/>
+              </a:p>
+            </p:txBody>
+          </p:sp>
+        </mc:Choice>
+        <mc:Fallback>
+          <p:sp>
+            <p:nvSpPr>
+              <p:cNvPr id="17" name="TextBox 16"/>
+              <p:cNvSpPr txBox="1">
+                <a:spLocks noRot="1" noChangeAspect="1" noMove="1" noResize="1" noEditPoints="1" noAdjustHandles="1" noChangeArrowheads="1" noChangeShapeType="1" noTextEdit="1"/>
+              </p:cNvSpPr>
+              <p:nvPr/>
+            </p:nvSpPr>
+            <p:spPr>
+              <a:xfrm>
+                <a:off x="5779008" y="2228088"/>
+                <a:ext cx="221535" cy="369332"/>
+              </a:xfrm>
+              <a:prstGeom prst="rect">
+                <a:avLst/>
+              </a:prstGeom>
+              <a:blipFill>
+                <a:blip r:embed="rId6"/>
+                <a:stretch>
+                  <a:fillRect l="-16667" r="-16667"/>
+                </a:stretch>
+              </a:blipFill>
+            </p:spPr>
+            <p:txBody>
+              <a:bodyPr/>
+              <a:lstStyle/>
+              <a:p>
+                <a:r>
+                  <a:rPr lang="en-US">
+                    <a:noFill/>
+                  </a:rPr>
+                  <a:t> </a:t>
+                </a:r>
+              </a:p>
+            </p:txBody>
+          </p:sp>
+        </mc:Fallback>
+      </mc:AlternateContent>
+      <mc:AlternateContent xmlns:mc="http://schemas.openxmlformats.org/markup-compatibility/2006">
+        <mc:Choice xmlns:a14="http://schemas.microsoft.com/office/drawing/2010/main" Requires="a14">
+          <p:sp>
+            <p:nvSpPr>
+              <p:cNvPr id="18" name="TextBox 17"/>
+              <p:cNvSpPr txBox="1"/>
+              <p:nvPr/>
+            </p:nvSpPr>
+            <p:spPr>
+              <a:xfrm>
+                <a:off x="5690616" y="3078480"/>
+                <a:ext cx="448969" cy="369332"/>
+              </a:xfrm>
+              <a:prstGeom prst="rect">
+                <a:avLst/>
+              </a:prstGeom>
+              <a:noFill/>
+            </p:spPr>
+            <p:txBody>
+              <a:bodyPr wrap="none" lIns="0" tIns="0" rIns="0" bIns="0" rtlCol="0">
+                <a:spAutoFit/>
+              </a:bodyPr>
+              <a:lstStyle/>
+              <a:p>
+                <a14:m>
+                  <m:oMathPara xmlns:m="http://schemas.openxmlformats.org/officeDocument/2006/math">
+                    <m:oMathParaPr>
+                      <m:jc m:val="centerGroup"/>
+                    </m:oMathParaPr>
+                    <m:oMath xmlns:m="http://schemas.openxmlformats.org/officeDocument/2006/math">
+                      <m:r>
+                        <m:rPr>
+                          <m:sty m:val="p"/>
+                        </m:rPr>
+                        <a:rPr lang="en-US" sz="2400" b="0" i="0" smtClean="0">
+                          <a:solidFill>
+                            <a:schemeClr val="tx1"/>
+                          </a:solidFill>
+                          <a:latin typeface="Cambria Math" panose="02040503050406030204" pitchFamily="18" charset="0"/>
+                        </a:rPr>
+                        <m:t>d</m:t>
+                      </m:r>
+                      <m:r>
+                        <a:rPr lang="en-US" sz="2400" b="0" i="1" smtClean="0">
+                          <a:solidFill>
+                            <a:schemeClr val="tx1"/>
+                          </a:solidFill>
+                          <a:latin typeface="Cambria Math" panose="02040503050406030204" pitchFamily="18" charset="0"/>
+                        </a:rPr>
+                        <m:t>𝐴</m:t>
+                      </m:r>
+                    </m:oMath>
+                  </m:oMathPara>
+                </a14:m>
+                <a:endParaRPr lang="en-US" sz="2400" dirty="0"/>
+              </a:p>
+            </p:txBody>
+          </p:sp>
+        </mc:Choice>
+        <mc:Fallback>
+          <p:sp>
+            <p:nvSpPr>
+              <p:cNvPr id="18" name="TextBox 17"/>
+              <p:cNvSpPr txBox="1">
+                <a:spLocks noRot="1" noChangeAspect="1" noMove="1" noResize="1" noEditPoints="1" noAdjustHandles="1" noChangeArrowheads="1" noChangeShapeType="1" noTextEdit="1"/>
+              </p:cNvSpPr>
+              <p:nvPr/>
+            </p:nvSpPr>
+            <p:spPr>
+              <a:xfrm>
+                <a:off x="5690616" y="3078480"/>
+                <a:ext cx="448969" cy="369332"/>
+              </a:xfrm>
+              <a:prstGeom prst="rect">
+                <a:avLst/>
+              </a:prstGeom>
+              <a:blipFill>
+                <a:blip r:embed="rId7"/>
+                <a:stretch>
+                  <a:fillRect l="-15068" r="-15068" b="-6557"/>
+                </a:stretch>
+              </a:blipFill>
+            </p:spPr>
+            <p:txBody>
+              <a:bodyPr/>
+              <a:lstStyle/>
+              <a:p>
+                <a:r>
+                  <a:rPr lang="en-US">
+                    <a:noFill/>
+                  </a:rPr>
+                  <a:t> </a:t>
+                </a:r>
+              </a:p>
+            </p:txBody>
+          </p:sp>
+        </mc:Fallback>
+      </mc:AlternateContent>
+      <p:sp>
+        <p:nvSpPr>
+          <p:cNvPr id="20" name="Parallelogram 7"/>
+          <p:cNvSpPr/>
+          <p:nvPr/>
+        </p:nvSpPr>
+        <p:spPr>
+          <a:xfrm rot="5400000">
+            <a:off x="4597086" y="2044673"/>
+            <a:ext cx="1621191" cy="88289"/>
+          </a:xfrm>
+          <a:custGeom>
+            <a:avLst/>
+            <a:gdLst>
+              <a:gd name="connsiteX0" fmla="*/ 0 w 6453051"/>
+              <a:gd name="connsiteY0" fmla="*/ 1593668 h 1593668"/>
+              <a:gd name="connsiteX1" fmla="*/ 1744971 w 6453051"/>
+              <a:gd name="connsiteY1" fmla="*/ 0 h 1593668"/>
+              <a:gd name="connsiteX2" fmla="*/ 6453051 w 6453051"/>
+              <a:gd name="connsiteY2" fmla="*/ 0 h 1593668"/>
+              <a:gd name="connsiteX3" fmla="*/ 4708080 w 6453051"/>
+              <a:gd name="connsiteY3" fmla="*/ 1593668 h 1593668"/>
+              <a:gd name="connsiteX4" fmla="*/ 0 w 6453051"/>
+              <a:gd name="connsiteY4" fmla="*/ 1593668 h 1593668"/>
+              <a:gd name="connsiteX0" fmla="*/ 0 w 4708080"/>
+              <a:gd name="connsiteY0" fmla="*/ 1593668 h 1593668"/>
+              <a:gd name="connsiteX1" fmla="*/ 1744971 w 4708080"/>
+              <a:gd name="connsiteY1" fmla="*/ 0 h 1593668"/>
+              <a:gd name="connsiteX2" fmla="*/ 4708080 w 4708080"/>
+              <a:gd name="connsiteY2" fmla="*/ 1593668 h 1593668"/>
+              <a:gd name="connsiteX3" fmla="*/ 0 w 4708080"/>
+              <a:gd name="connsiteY3" fmla="*/ 1593668 h 1593668"/>
+              <a:gd name="connsiteX0" fmla="*/ 0 w 4708080"/>
+              <a:gd name="connsiteY0" fmla="*/ 0 h 0"/>
+              <a:gd name="connsiteX1" fmla="*/ 4708080 w 4708080"/>
+              <a:gd name="connsiteY1" fmla="*/ 0 h 0"/>
+              <a:gd name="connsiteX2" fmla="*/ 0 w 4708080"/>
+              <a:gd name="connsiteY2" fmla="*/ 0 h 0"/>
+            </a:gdLst>
+            <a:ahLst/>
+            <a:cxnLst>
+              <a:cxn ang="0">
+                <a:pos x="connsiteX0" y="connsiteY0"/>
+              </a:cxn>
+              <a:cxn ang="0">
+                <a:pos x="connsiteX1" y="connsiteY1"/>
+              </a:cxn>
+              <a:cxn ang="0">
+                <a:pos x="connsiteX2" y="connsiteY2"/>
+              </a:cxn>
+            </a:cxnLst>
+            <a:rect l="l" t="t" r="r" b="b"/>
+            <a:pathLst>
+              <a:path w="4708080">
+                <a:moveTo>
+                  <a:pt x="0" y="0"/>
+                </a:moveTo>
+                <a:lnTo>
+                  <a:pt x="4708080" y="0"/>
+                </a:lnTo>
+                <a:lnTo>
+                  <a:pt x="0" y="0"/>
+                </a:lnTo>
+                <a:close/>
+              </a:path>
+            </a:pathLst>
+          </a:custGeom>
+          <a:noFill/>
+          <a:ln w="28575">
+            <a:solidFill>
+              <a:schemeClr val="tx1">
+                <a:lumMod val="65000"/>
+                <a:lumOff val="35000"/>
+              </a:schemeClr>
+            </a:solidFill>
+          </a:ln>
+        </p:spPr>
+        <p:style>
+          <a:lnRef idx="2">
+            <a:schemeClr val="accent1">
+              <a:shade val="50000"/>
+            </a:schemeClr>
+          </a:lnRef>
+          <a:fillRef idx="1">
+            <a:schemeClr val="accent1"/>
+          </a:fillRef>
+          <a:effectRef idx="0">
+            <a:schemeClr val="accent1"/>
+          </a:effectRef>
+          <a:fontRef idx="minor">
+            <a:schemeClr val="lt1"/>
+          </a:fontRef>
+        </p:style>
+        <p:txBody>
+          <a:bodyPr rtlCol="0" anchor="ctr"/>
+          <a:lstStyle/>
+          <a:p>
+            <a:pPr algn="ctr"/>
+            <a:endParaRPr lang="en-US"/>
+          </a:p>
+        </p:txBody>
+      </p:sp>
+    </p:spTree>
+    <p:extLst>
+      <p:ext uri="{BB962C8B-B14F-4D97-AF65-F5344CB8AC3E}">
+        <p14:creationId xmlns:p14="http://schemas.microsoft.com/office/powerpoint/2010/main" val="3380216098"/>
       </p:ext>
     </p:extLst>
   </p:cSld>

--- a/U1-Distribution-of-Velocities/figures/all-figs.pptx
+++ b/U1-Distribution-of-Velocities/figures/all-figs.pptx
@@ -14,6 +14,8 @@
     <p:sldId id="262" r:id="rId8"/>
     <p:sldId id="263" r:id="rId9"/>
     <p:sldId id="264" r:id="rId10"/>
+    <p:sldId id="265" r:id="rId11"/>
+    <p:sldId id="266" r:id="rId12"/>
   </p:sldIdLst>
   <p:sldSz cx="12192000" cy="6858000"/>
   <p:notesSz cx="6858000" cy="9144000"/>
@@ -280,7 +282,7 @@
           <a:p>
             <a:fld id="{B47390B5-D7E4-4A9A-ABAD-920B3BD530F5}" type="datetimeFigureOut">
               <a:rPr lang="en-IN" smtClean="0"/>
-              <a:t>25-09-2026</a:t>
+              <a:t>29-09-2026</a:t>
             </a:fld>
             <a:endParaRPr lang="en-IN"/>
           </a:p>
@@ -480,7 +482,7 @@
           <a:p>
             <a:fld id="{B47390B5-D7E4-4A9A-ABAD-920B3BD530F5}" type="datetimeFigureOut">
               <a:rPr lang="en-IN" smtClean="0"/>
-              <a:t>25-09-2026</a:t>
+              <a:t>29-09-2026</a:t>
             </a:fld>
             <a:endParaRPr lang="en-IN"/>
           </a:p>
@@ -690,7 +692,7 @@
           <a:p>
             <a:fld id="{B47390B5-D7E4-4A9A-ABAD-920B3BD530F5}" type="datetimeFigureOut">
               <a:rPr lang="en-IN" smtClean="0"/>
-              <a:t>25-09-2026</a:t>
+              <a:t>29-09-2026</a:t>
             </a:fld>
             <a:endParaRPr lang="en-IN"/>
           </a:p>
@@ -890,7 +892,7 @@
           <a:p>
             <a:fld id="{B47390B5-D7E4-4A9A-ABAD-920B3BD530F5}" type="datetimeFigureOut">
               <a:rPr lang="en-IN" smtClean="0"/>
-              <a:t>25-09-2026</a:t>
+              <a:t>29-09-2026</a:t>
             </a:fld>
             <a:endParaRPr lang="en-IN"/>
           </a:p>
@@ -1166,7 +1168,7 @@
           <a:p>
             <a:fld id="{B47390B5-D7E4-4A9A-ABAD-920B3BD530F5}" type="datetimeFigureOut">
               <a:rPr lang="en-IN" smtClean="0"/>
-              <a:t>25-09-2026</a:t>
+              <a:t>29-09-2026</a:t>
             </a:fld>
             <a:endParaRPr lang="en-IN"/>
           </a:p>
@@ -1434,7 +1436,7 @@
           <a:p>
             <a:fld id="{B47390B5-D7E4-4A9A-ABAD-920B3BD530F5}" type="datetimeFigureOut">
               <a:rPr lang="en-IN" smtClean="0"/>
-              <a:t>25-09-2026</a:t>
+              <a:t>29-09-2026</a:t>
             </a:fld>
             <a:endParaRPr lang="en-IN"/>
           </a:p>
@@ -1849,7 +1851,7 @@
           <a:p>
             <a:fld id="{B47390B5-D7E4-4A9A-ABAD-920B3BD530F5}" type="datetimeFigureOut">
               <a:rPr lang="en-IN" smtClean="0"/>
-              <a:t>25-09-2026</a:t>
+              <a:t>29-09-2026</a:t>
             </a:fld>
             <a:endParaRPr lang="en-IN"/>
           </a:p>
@@ -1991,7 +1993,7 @@
           <a:p>
             <a:fld id="{B47390B5-D7E4-4A9A-ABAD-920B3BD530F5}" type="datetimeFigureOut">
               <a:rPr lang="en-IN" smtClean="0"/>
-              <a:t>25-09-2026</a:t>
+              <a:t>29-09-2026</a:t>
             </a:fld>
             <a:endParaRPr lang="en-IN"/>
           </a:p>
@@ -2104,7 +2106,7 @@
           <a:p>
             <a:fld id="{B47390B5-D7E4-4A9A-ABAD-920B3BD530F5}" type="datetimeFigureOut">
               <a:rPr lang="en-IN" smtClean="0"/>
-              <a:t>25-09-2026</a:t>
+              <a:t>29-09-2026</a:t>
             </a:fld>
             <a:endParaRPr lang="en-IN"/>
           </a:p>
@@ -2417,7 +2419,7 @@
           <a:p>
             <a:fld id="{B47390B5-D7E4-4A9A-ABAD-920B3BD530F5}" type="datetimeFigureOut">
               <a:rPr lang="en-IN" smtClean="0"/>
-              <a:t>25-09-2026</a:t>
+              <a:t>29-09-2026</a:t>
             </a:fld>
             <a:endParaRPr lang="en-IN"/>
           </a:p>
@@ -2706,7 +2708,7 @@
           <a:p>
             <a:fld id="{B47390B5-D7E4-4A9A-ABAD-920B3BD530F5}" type="datetimeFigureOut">
               <a:rPr lang="en-IN" smtClean="0"/>
-              <a:t>25-09-2026</a:t>
+              <a:t>29-09-2026</a:t>
             </a:fld>
             <a:endParaRPr lang="en-IN"/>
           </a:p>
@@ -2949,7 +2951,7 @@
           <a:p>
             <a:fld id="{B47390B5-D7E4-4A9A-ABAD-920B3BD530F5}" type="datetimeFigureOut">
               <a:rPr lang="en-IN" smtClean="0"/>
-              <a:t>25-09-2026</a:t>
+              <a:t>29-09-2026</a:t>
             </a:fld>
             <a:endParaRPr lang="en-IN"/>
           </a:p>
@@ -4755,6 +4757,2279 @@
 </p:sld>
 </file>
 
+<file path=ppt/slides/slide10.xml><?xml version="1.0" encoding="utf-8"?>
+<p:sld xmlns:a="http://schemas.openxmlformats.org/drawingml/2006/main" xmlns:r="http://schemas.openxmlformats.org/officeDocument/2006/relationships" xmlns:p="http://schemas.openxmlformats.org/presentationml/2006/main">
+  <p:cSld>
+    <p:spTree>
+      <p:nvGrpSpPr>
+        <p:cNvPr id="1" name="">
+          <a:extLst>
+            <a:ext uri="{FF2B5EF4-FFF2-40B4-BE49-F238E27FC236}">
+              <a16:creationId xmlns:a16="http://schemas.microsoft.com/office/drawing/2014/main" id="{16B7BEF0-AB5D-A9EE-E5BA-A66976952E6B}"/>
+            </a:ext>
+          </a:extLst>
+        </p:cNvPr>
+        <p:cNvGrpSpPr/>
+        <p:nvPr/>
+      </p:nvGrpSpPr>
+      <p:grpSpPr>
+        <a:xfrm>
+          <a:off x="0" y="0"/>
+          <a:ext cx="0" cy="0"/>
+          <a:chOff x="0" y="0"/>
+          <a:chExt cx="0" cy="0"/>
+        </a:xfrm>
+      </p:grpSpPr>
+      <p:cxnSp>
+        <p:nvCxnSpPr>
+          <p:cNvPr id="35" name="Straight Connector 34">
+            <a:extLst>
+              <a:ext uri="{FF2B5EF4-FFF2-40B4-BE49-F238E27FC236}">
+                <a16:creationId xmlns:a16="http://schemas.microsoft.com/office/drawing/2014/main" id="{DA1F6E4A-2CF4-52F2-5B65-17BD46C08B2A}"/>
+              </a:ext>
+            </a:extLst>
+          </p:cNvPr>
+          <p:cNvCxnSpPr>
+            <a:cxnSpLocks/>
+          </p:cNvCxnSpPr>
+          <p:nvPr/>
+        </p:nvCxnSpPr>
+        <p:spPr>
+          <a:xfrm flipH="1">
+            <a:off x="3668922" y="3026999"/>
+            <a:ext cx="553581" cy="633216"/>
+          </a:xfrm>
+          <a:prstGeom prst="line">
+            <a:avLst/>
+          </a:prstGeom>
+          <a:ln w="28575" cap="rnd">
+            <a:solidFill>
+              <a:schemeClr val="tx1"/>
+            </a:solidFill>
+            <a:prstDash val="solid"/>
+            <a:round/>
+            <a:headEnd type="none" w="med" len="med"/>
+            <a:tailEnd type="triangle" w="lg" len="lg"/>
+          </a:ln>
+        </p:spPr>
+        <p:style>
+          <a:lnRef idx="1">
+            <a:schemeClr val="accent1"/>
+          </a:lnRef>
+          <a:fillRef idx="0">
+            <a:schemeClr val="accent1"/>
+          </a:fillRef>
+          <a:effectRef idx="0">
+            <a:schemeClr val="accent1"/>
+          </a:effectRef>
+          <a:fontRef idx="minor">
+            <a:schemeClr val="tx1"/>
+          </a:fontRef>
+        </p:style>
+      </p:cxnSp>
+      <p:sp>
+        <p:nvSpPr>
+          <p:cNvPr id="2" name="Parallelogram 1">
+            <a:extLst>
+              <a:ext uri="{FF2B5EF4-FFF2-40B4-BE49-F238E27FC236}">
+                <a16:creationId xmlns:a16="http://schemas.microsoft.com/office/drawing/2014/main" id="{0844D4DA-9790-9E71-590D-9C1BB255E76B}"/>
+              </a:ext>
+            </a:extLst>
+          </p:cNvPr>
+          <p:cNvSpPr/>
+          <p:nvPr/>
+        </p:nvSpPr>
+        <p:spPr>
+          <a:xfrm>
+            <a:off x="2211977" y="2325189"/>
+            <a:ext cx="6453051" cy="1593668"/>
+          </a:xfrm>
+          <a:prstGeom prst="parallelogram">
+            <a:avLst>
+              <a:gd name="adj" fmla="val 109494"/>
+            </a:avLst>
+          </a:prstGeom>
+          <a:solidFill>
+            <a:schemeClr val="tx1">
+              <a:lumMod val="65000"/>
+              <a:lumOff val="35000"/>
+              <a:alpha val="50000"/>
+            </a:schemeClr>
+          </a:solidFill>
+          <a:ln>
+            <a:noFill/>
+          </a:ln>
+        </p:spPr>
+        <p:style>
+          <a:lnRef idx="2">
+            <a:schemeClr val="accent1">
+              <a:shade val="50000"/>
+            </a:schemeClr>
+          </a:lnRef>
+          <a:fillRef idx="1">
+            <a:schemeClr val="accent1"/>
+          </a:fillRef>
+          <a:effectRef idx="0">
+            <a:schemeClr val="accent1"/>
+          </a:effectRef>
+          <a:fontRef idx="minor">
+            <a:schemeClr val="lt1"/>
+          </a:fontRef>
+        </p:style>
+        <p:txBody>
+          <a:bodyPr rtlCol="0" anchor="ctr"/>
+          <a:lstStyle/>
+          <a:p>
+            <a:pPr algn="ctr"/>
+            <a:endParaRPr lang="en-US"/>
+          </a:p>
+        </p:txBody>
+      </p:sp>
+      <mc:AlternateContent xmlns:mc="http://schemas.openxmlformats.org/markup-compatibility/2006">
+        <mc:Choice xmlns:a14="http://schemas.microsoft.com/office/drawing/2010/main" Requires="a14">
+          <p:sp>
+            <p:nvSpPr>
+              <p:cNvPr id="11" name="TextBox 10">
+                <a:extLst>
+                  <a:ext uri="{FF2B5EF4-FFF2-40B4-BE49-F238E27FC236}">
+                    <a16:creationId xmlns:a16="http://schemas.microsoft.com/office/drawing/2014/main" id="{636704B2-A120-5D68-1562-1FC7848382F1}"/>
+                  </a:ext>
+                </a:extLst>
+              </p:cNvPr>
+              <p:cNvSpPr txBox="1"/>
+              <p:nvPr/>
+            </p:nvSpPr>
+            <p:spPr>
+              <a:xfrm>
+                <a:off x="8214360" y="3009900"/>
+                <a:ext cx="241733" cy="369332"/>
+              </a:xfrm>
+              <a:prstGeom prst="rect">
+                <a:avLst/>
+              </a:prstGeom>
+              <a:noFill/>
+            </p:spPr>
+            <p:txBody>
+              <a:bodyPr wrap="none" lIns="0" tIns="0" rIns="0" bIns="0" rtlCol="0">
+                <a:spAutoFit/>
+              </a:bodyPr>
+              <a:lstStyle/>
+              <a:p>
+                <a:pPr/>
+                <a14:m>
+                  <m:oMathPara xmlns:m="http://schemas.openxmlformats.org/officeDocument/2006/math">
+                    <m:oMath>
+                      <m:r>
+                        <a:rPr lang="en-US" sz="2400" b="0" i="1" smtClean="0">
+                          <a:solidFill>
+                            <a:schemeClr val="tx1"/>
+                          </a:solidFill>
+                          <a:latin typeface="Cambria Math" panose="02040503050406030204" pitchFamily="18" charset="0"/>
+                        </a:rPr>
+                        <m:t>𝑥</m:t>
+                      </m:r>
+                    </m:oMath>
+                  </m:oMathPara>
+                </a14:m>
+                <a:endParaRPr lang="en-US" sz="2400" dirty="0"/>
+              </a:p>
+            </p:txBody>
+          </p:sp>
+        </mc:Choice>
+        <mc:Fallback>
+          <p:sp>
+            <p:nvSpPr>
+              <p:cNvPr id="11" name="TextBox 10">
+                <a:extLst>
+                  <a:ext uri="{FF2B5EF4-FFF2-40B4-BE49-F238E27FC236}">
+                    <a16:creationId xmlns:a16="http://schemas.microsoft.com/office/drawing/2014/main" id="{636704B2-A120-5D68-1562-1FC7848382F1}"/>
+                  </a:ext>
+                </a:extLst>
+              </p:cNvPr>
+              <p:cNvSpPr txBox="1">
+                <a:spLocks noRot="1" noChangeAspect="1" noMove="1" noResize="1" noEditPoints="1" noAdjustHandles="1" noChangeArrowheads="1" noChangeShapeType="1" noTextEdit="1"/>
+              </p:cNvSpPr>
+              <p:nvPr/>
+            </p:nvSpPr>
+            <p:spPr>
+              <a:xfrm>
+                <a:off x="8214360" y="3009900"/>
+                <a:ext cx="241733" cy="369332"/>
+              </a:xfrm>
+              <a:prstGeom prst="rect">
+                <a:avLst/>
+              </a:prstGeom>
+              <a:blipFill>
+                <a:blip r:embed="rId2"/>
+                <a:stretch>
+                  <a:fillRect l="-17949" r="-15385"/>
+                </a:stretch>
+              </a:blipFill>
+            </p:spPr>
+            <p:txBody>
+              <a:bodyPr/>
+              <a:lstStyle/>
+              <a:p>
+                <a:r>
+                  <a:rPr lang="en-IN">
+                    <a:noFill/>
+                  </a:rPr>
+                  <a:t> </a:t>
+                </a:r>
+              </a:p>
+            </p:txBody>
+          </p:sp>
+        </mc:Fallback>
+      </mc:AlternateContent>
+      <mc:AlternateContent xmlns:mc="http://schemas.openxmlformats.org/markup-compatibility/2006">
+        <mc:Choice xmlns:a14="http://schemas.microsoft.com/office/drawing/2010/main" Requires="a14">
+          <p:sp>
+            <p:nvSpPr>
+              <p:cNvPr id="12" name="TextBox 11">
+                <a:extLst>
+                  <a:ext uri="{FF2B5EF4-FFF2-40B4-BE49-F238E27FC236}">
+                    <a16:creationId xmlns:a16="http://schemas.microsoft.com/office/drawing/2014/main" id="{F9C6BB4F-694B-1DCD-D2DB-5C478BAC0A2B}"/>
+                  </a:ext>
+                </a:extLst>
+              </p:cNvPr>
+              <p:cNvSpPr txBox="1"/>
+              <p:nvPr/>
+            </p:nvSpPr>
+            <p:spPr>
+              <a:xfrm>
+                <a:off x="2446020" y="3009900"/>
+                <a:ext cx="312586" cy="369332"/>
+              </a:xfrm>
+              <a:prstGeom prst="rect">
+                <a:avLst/>
+              </a:prstGeom>
+              <a:noFill/>
+            </p:spPr>
+            <p:txBody>
+              <a:bodyPr wrap="none" lIns="0" tIns="0" rIns="0" bIns="0" rtlCol="0">
+                <a:spAutoFit/>
+              </a:bodyPr>
+              <a:lstStyle/>
+              <a:p>
+                <a:pPr/>
+                <a14:m>
+                  <m:oMathPara xmlns:m="http://schemas.openxmlformats.org/officeDocument/2006/math">
+                    <m:oMath>
+                      <m:r>
+                        <a:rPr lang="en-US" sz="2400" b="0" i="1" smtClean="0">
+                          <a:solidFill>
+                            <a:schemeClr val="tx1"/>
+                          </a:solidFill>
+                          <a:latin typeface="Cambria Math" panose="02040503050406030204" pitchFamily="18" charset="0"/>
+                        </a:rPr>
+                        <m:t>𝑥</m:t>
+                      </m:r>
+                      <m:r>
+                        <a:rPr lang="en-US" sz="2400" b="0" i="1" smtClean="0">
+                          <a:solidFill>
+                            <a:schemeClr val="tx1"/>
+                          </a:solidFill>
+                          <a:latin typeface="Cambria Math" panose="02040503050406030204" pitchFamily="18" charset="0"/>
+                        </a:rPr>
+                        <m:t>′</m:t>
+                      </m:r>
+                    </m:oMath>
+                  </m:oMathPara>
+                </a14:m>
+                <a:endParaRPr lang="en-US" sz="2400" dirty="0"/>
+              </a:p>
+            </p:txBody>
+          </p:sp>
+        </mc:Choice>
+        <mc:Fallback>
+          <p:sp>
+            <p:nvSpPr>
+              <p:cNvPr id="12" name="TextBox 11">
+                <a:extLst>
+                  <a:ext uri="{FF2B5EF4-FFF2-40B4-BE49-F238E27FC236}">
+                    <a16:creationId xmlns:a16="http://schemas.microsoft.com/office/drawing/2014/main" id="{F9C6BB4F-694B-1DCD-D2DB-5C478BAC0A2B}"/>
+                  </a:ext>
+                </a:extLst>
+              </p:cNvPr>
+              <p:cNvSpPr txBox="1">
+                <a:spLocks noRot="1" noChangeAspect="1" noMove="1" noResize="1" noEditPoints="1" noAdjustHandles="1" noChangeArrowheads="1" noChangeShapeType="1" noTextEdit="1"/>
+              </p:cNvSpPr>
+              <p:nvPr/>
+            </p:nvSpPr>
+            <p:spPr>
+              <a:xfrm>
+                <a:off x="2446020" y="3009900"/>
+                <a:ext cx="312586" cy="369332"/>
+              </a:xfrm>
+              <a:prstGeom prst="rect">
+                <a:avLst/>
+              </a:prstGeom>
+              <a:blipFill>
+                <a:blip r:embed="rId3"/>
+                <a:stretch>
+                  <a:fillRect l="-25000" t="-1667" r="-26923" b="-10000"/>
+                </a:stretch>
+              </a:blipFill>
+            </p:spPr>
+            <p:txBody>
+              <a:bodyPr/>
+              <a:lstStyle/>
+              <a:p>
+                <a:r>
+                  <a:rPr lang="en-IN">
+                    <a:noFill/>
+                  </a:rPr>
+                  <a:t> </a:t>
+                </a:r>
+              </a:p>
+            </p:txBody>
+          </p:sp>
+        </mc:Fallback>
+      </mc:AlternateContent>
+      <p:sp>
+        <p:nvSpPr>
+          <p:cNvPr id="21" name="Parallelogram 7">
+            <a:extLst>
+              <a:ext uri="{FF2B5EF4-FFF2-40B4-BE49-F238E27FC236}">
+                <a16:creationId xmlns:a16="http://schemas.microsoft.com/office/drawing/2014/main" id="{6DEAEDFE-AEDE-B2B2-4911-B9D40D1D2AD3}"/>
+              </a:ext>
+            </a:extLst>
+          </p:cNvPr>
+          <p:cNvSpPr/>
+          <p:nvPr/>
+        </p:nvSpPr>
+        <p:spPr>
+          <a:xfrm flipV="1">
+            <a:off x="2577736" y="2958738"/>
+            <a:ext cx="5819503" cy="45719"/>
+          </a:xfrm>
+          <a:custGeom>
+            <a:avLst/>
+            <a:gdLst>
+              <a:gd name="connsiteX0" fmla="*/ 0 w 6453051"/>
+              <a:gd name="connsiteY0" fmla="*/ 1593668 h 1593668"/>
+              <a:gd name="connsiteX1" fmla="*/ 1744971 w 6453051"/>
+              <a:gd name="connsiteY1" fmla="*/ 0 h 1593668"/>
+              <a:gd name="connsiteX2" fmla="*/ 6453051 w 6453051"/>
+              <a:gd name="connsiteY2" fmla="*/ 0 h 1593668"/>
+              <a:gd name="connsiteX3" fmla="*/ 4708080 w 6453051"/>
+              <a:gd name="connsiteY3" fmla="*/ 1593668 h 1593668"/>
+              <a:gd name="connsiteX4" fmla="*/ 0 w 6453051"/>
+              <a:gd name="connsiteY4" fmla="*/ 1593668 h 1593668"/>
+              <a:gd name="connsiteX0" fmla="*/ 0 w 4708080"/>
+              <a:gd name="connsiteY0" fmla="*/ 1593668 h 1593668"/>
+              <a:gd name="connsiteX1" fmla="*/ 1744971 w 4708080"/>
+              <a:gd name="connsiteY1" fmla="*/ 0 h 1593668"/>
+              <a:gd name="connsiteX2" fmla="*/ 4708080 w 4708080"/>
+              <a:gd name="connsiteY2" fmla="*/ 1593668 h 1593668"/>
+              <a:gd name="connsiteX3" fmla="*/ 0 w 4708080"/>
+              <a:gd name="connsiteY3" fmla="*/ 1593668 h 1593668"/>
+              <a:gd name="connsiteX0" fmla="*/ 0 w 4708080"/>
+              <a:gd name="connsiteY0" fmla="*/ 0 h 0"/>
+              <a:gd name="connsiteX1" fmla="*/ 4708080 w 4708080"/>
+              <a:gd name="connsiteY1" fmla="*/ 0 h 0"/>
+              <a:gd name="connsiteX2" fmla="*/ 0 w 4708080"/>
+              <a:gd name="connsiteY2" fmla="*/ 0 h 0"/>
+            </a:gdLst>
+            <a:ahLst/>
+            <a:cxnLst>
+              <a:cxn ang="0">
+                <a:pos x="connsiteX0" y="connsiteY0"/>
+              </a:cxn>
+              <a:cxn ang="0">
+                <a:pos x="connsiteX1" y="connsiteY1"/>
+              </a:cxn>
+              <a:cxn ang="0">
+                <a:pos x="connsiteX2" y="connsiteY2"/>
+              </a:cxn>
+            </a:cxnLst>
+            <a:rect l="l" t="t" r="r" b="b"/>
+            <a:pathLst>
+              <a:path w="4708080">
+                <a:moveTo>
+                  <a:pt x="0" y="0"/>
+                </a:moveTo>
+                <a:lnTo>
+                  <a:pt x="4708080" y="0"/>
+                </a:lnTo>
+                <a:lnTo>
+                  <a:pt x="0" y="0"/>
+                </a:lnTo>
+                <a:close/>
+              </a:path>
+            </a:pathLst>
+          </a:custGeom>
+          <a:noFill/>
+          <a:ln w="28575">
+            <a:solidFill>
+              <a:schemeClr val="bg1">
+                <a:lumMod val="50000"/>
+              </a:schemeClr>
+            </a:solidFill>
+            <a:prstDash val="dashDot"/>
+          </a:ln>
+        </p:spPr>
+        <p:style>
+          <a:lnRef idx="2">
+            <a:schemeClr val="accent1">
+              <a:shade val="50000"/>
+            </a:schemeClr>
+          </a:lnRef>
+          <a:fillRef idx="1">
+            <a:schemeClr val="accent1"/>
+          </a:fillRef>
+          <a:effectRef idx="0">
+            <a:schemeClr val="accent1"/>
+          </a:effectRef>
+          <a:fontRef idx="minor">
+            <a:schemeClr val="lt1"/>
+          </a:fontRef>
+        </p:style>
+        <p:txBody>
+          <a:bodyPr rtlCol="0" anchor="ctr"/>
+          <a:lstStyle/>
+          <a:p>
+            <a:pPr algn="ctr"/>
+            <a:endParaRPr lang="en-US" dirty="0"/>
+          </a:p>
+        </p:txBody>
+      </p:sp>
+      <p:sp>
+        <p:nvSpPr>
+          <p:cNvPr id="25" name="Parallelogram 7">
+            <a:extLst>
+              <a:ext uri="{FF2B5EF4-FFF2-40B4-BE49-F238E27FC236}">
+                <a16:creationId xmlns:a16="http://schemas.microsoft.com/office/drawing/2014/main" id="{C1C0A116-5E3F-5AC2-D9D4-E692A0B81C19}"/>
+              </a:ext>
+            </a:extLst>
+          </p:cNvPr>
+          <p:cNvSpPr/>
+          <p:nvPr/>
+        </p:nvSpPr>
+        <p:spPr>
+          <a:xfrm flipV="1">
+            <a:off x="5560541" y="1480041"/>
+            <a:ext cx="1975839" cy="45719"/>
+          </a:xfrm>
+          <a:custGeom>
+            <a:avLst/>
+            <a:gdLst>
+              <a:gd name="connsiteX0" fmla="*/ 0 w 6453051"/>
+              <a:gd name="connsiteY0" fmla="*/ 1593668 h 1593668"/>
+              <a:gd name="connsiteX1" fmla="*/ 1744971 w 6453051"/>
+              <a:gd name="connsiteY1" fmla="*/ 0 h 1593668"/>
+              <a:gd name="connsiteX2" fmla="*/ 6453051 w 6453051"/>
+              <a:gd name="connsiteY2" fmla="*/ 0 h 1593668"/>
+              <a:gd name="connsiteX3" fmla="*/ 4708080 w 6453051"/>
+              <a:gd name="connsiteY3" fmla="*/ 1593668 h 1593668"/>
+              <a:gd name="connsiteX4" fmla="*/ 0 w 6453051"/>
+              <a:gd name="connsiteY4" fmla="*/ 1593668 h 1593668"/>
+              <a:gd name="connsiteX0" fmla="*/ 0 w 4708080"/>
+              <a:gd name="connsiteY0" fmla="*/ 1593668 h 1593668"/>
+              <a:gd name="connsiteX1" fmla="*/ 1744971 w 4708080"/>
+              <a:gd name="connsiteY1" fmla="*/ 0 h 1593668"/>
+              <a:gd name="connsiteX2" fmla="*/ 4708080 w 4708080"/>
+              <a:gd name="connsiteY2" fmla="*/ 1593668 h 1593668"/>
+              <a:gd name="connsiteX3" fmla="*/ 0 w 4708080"/>
+              <a:gd name="connsiteY3" fmla="*/ 1593668 h 1593668"/>
+              <a:gd name="connsiteX0" fmla="*/ 0 w 4708080"/>
+              <a:gd name="connsiteY0" fmla="*/ 0 h 0"/>
+              <a:gd name="connsiteX1" fmla="*/ 4708080 w 4708080"/>
+              <a:gd name="connsiteY1" fmla="*/ 0 h 0"/>
+              <a:gd name="connsiteX2" fmla="*/ 0 w 4708080"/>
+              <a:gd name="connsiteY2" fmla="*/ 0 h 0"/>
+            </a:gdLst>
+            <a:ahLst/>
+            <a:cxnLst>
+              <a:cxn ang="0">
+                <a:pos x="connsiteX0" y="connsiteY0"/>
+              </a:cxn>
+              <a:cxn ang="0">
+                <a:pos x="connsiteX1" y="connsiteY1"/>
+              </a:cxn>
+              <a:cxn ang="0">
+                <a:pos x="connsiteX2" y="connsiteY2"/>
+              </a:cxn>
+            </a:cxnLst>
+            <a:rect l="l" t="t" r="r" b="b"/>
+            <a:pathLst>
+              <a:path w="4708080">
+                <a:moveTo>
+                  <a:pt x="0" y="0"/>
+                </a:moveTo>
+                <a:lnTo>
+                  <a:pt x="4708080" y="0"/>
+                </a:lnTo>
+                <a:lnTo>
+                  <a:pt x="0" y="0"/>
+                </a:lnTo>
+                <a:close/>
+              </a:path>
+            </a:pathLst>
+          </a:custGeom>
+          <a:noFill/>
+          <a:ln w="28575">
+            <a:solidFill>
+              <a:schemeClr val="bg1">
+                <a:lumMod val="50000"/>
+              </a:schemeClr>
+            </a:solidFill>
+            <a:prstDash val="dashDot"/>
+          </a:ln>
+        </p:spPr>
+        <p:style>
+          <a:lnRef idx="2">
+            <a:schemeClr val="accent1">
+              <a:shade val="50000"/>
+            </a:schemeClr>
+          </a:lnRef>
+          <a:fillRef idx="1">
+            <a:schemeClr val="accent1"/>
+          </a:fillRef>
+          <a:effectRef idx="0">
+            <a:schemeClr val="accent1"/>
+          </a:effectRef>
+          <a:fontRef idx="minor">
+            <a:schemeClr val="lt1"/>
+          </a:fontRef>
+        </p:style>
+        <p:txBody>
+          <a:bodyPr rtlCol="0" anchor="ctr"/>
+          <a:lstStyle/>
+          <a:p>
+            <a:pPr algn="ctr"/>
+            <a:endParaRPr lang="en-US" dirty="0"/>
+          </a:p>
+        </p:txBody>
+      </p:sp>
+      <p:sp>
+        <p:nvSpPr>
+          <p:cNvPr id="23" name="Oval 22">
+            <a:extLst>
+              <a:ext uri="{FF2B5EF4-FFF2-40B4-BE49-F238E27FC236}">
+                <a16:creationId xmlns:a16="http://schemas.microsoft.com/office/drawing/2014/main" id="{5B3E777E-BA07-9885-AE1E-B3F570556BFD}"/>
+              </a:ext>
+            </a:extLst>
+          </p:cNvPr>
+          <p:cNvSpPr/>
+          <p:nvPr/>
+        </p:nvSpPr>
+        <p:spPr>
+          <a:xfrm>
+            <a:off x="5438502" y="1410789"/>
+            <a:ext cx="211288" cy="211288"/>
+          </a:xfrm>
+          <a:prstGeom prst="ellipse">
+            <a:avLst/>
+          </a:prstGeom>
+          <a:gradFill flip="none" rotWithShape="1">
+            <a:gsLst>
+              <a:gs pos="0">
+                <a:schemeClr val="accent1">
+                  <a:lumMod val="20000"/>
+                  <a:lumOff val="80000"/>
+                </a:schemeClr>
+              </a:gs>
+              <a:gs pos="39000">
+                <a:srgbClr val="638ACF"/>
+              </a:gs>
+              <a:gs pos="100000">
+                <a:schemeClr val="accent1">
+                  <a:lumMod val="50000"/>
+                </a:schemeClr>
+              </a:gs>
+            </a:gsLst>
+            <a:path path="circle">
+              <a:fillToRect l="100000" b="100000"/>
+            </a:path>
+            <a:tileRect t="-100000" r="-100000"/>
+          </a:gradFill>
+          <a:ln>
+            <a:noFill/>
+          </a:ln>
+        </p:spPr>
+        <p:style>
+          <a:lnRef idx="2">
+            <a:schemeClr val="accent1">
+              <a:shade val="15000"/>
+            </a:schemeClr>
+          </a:lnRef>
+          <a:fillRef idx="1">
+            <a:schemeClr val="accent1"/>
+          </a:fillRef>
+          <a:effectRef idx="0">
+            <a:schemeClr val="accent1"/>
+          </a:effectRef>
+          <a:fontRef idx="minor">
+            <a:schemeClr val="lt1"/>
+          </a:fontRef>
+        </p:style>
+        <p:txBody>
+          <a:bodyPr rtlCol="0" anchor="ctr"/>
+          <a:lstStyle/>
+          <a:p>
+            <a:pPr algn="ctr"/>
+            <a:endParaRPr lang="en-IN"/>
+          </a:p>
+        </p:txBody>
+      </p:sp>
+      <p:cxnSp>
+        <p:nvCxnSpPr>
+          <p:cNvPr id="27" name="Straight Connector 26">
+            <a:extLst>
+              <a:ext uri="{FF2B5EF4-FFF2-40B4-BE49-F238E27FC236}">
+                <a16:creationId xmlns:a16="http://schemas.microsoft.com/office/drawing/2014/main" id="{56FF81C6-CEAC-E4AE-2124-7D4E3FBDF0CB}"/>
+              </a:ext>
+            </a:extLst>
+          </p:cNvPr>
+          <p:cNvCxnSpPr>
+            <a:cxnSpLocks/>
+            <a:stCxn id="23" idx="3"/>
+          </p:cNvCxnSpPr>
+          <p:nvPr/>
+        </p:nvCxnSpPr>
+        <p:spPr>
+          <a:xfrm flipH="1">
+            <a:off x="4233863" y="1591135"/>
+            <a:ext cx="1235581" cy="1413322"/>
+          </a:xfrm>
+          <a:prstGeom prst="line">
+            <a:avLst/>
+          </a:prstGeom>
+          <a:ln w="19050">
+            <a:solidFill>
+              <a:schemeClr val="bg1">
+                <a:lumMod val="50000"/>
+              </a:schemeClr>
+            </a:solidFill>
+            <a:prstDash val="sysDot"/>
+          </a:ln>
+        </p:spPr>
+        <p:style>
+          <a:lnRef idx="1">
+            <a:schemeClr val="accent1"/>
+          </a:lnRef>
+          <a:fillRef idx="0">
+            <a:schemeClr val="accent1"/>
+          </a:fillRef>
+          <a:effectRef idx="0">
+            <a:schemeClr val="accent1"/>
+          </a:effectRef>
+          <a:fontRef idx="minor">
+            <a:schemeClr val="tx1"/>
+          </a:fontRef>
+        </p:style>
+      </p:cxnSp>
+      <p:cxnSp>
+        <p:nvCxnSpPr>
+          <p:cNvPr id="31" name="Straight Connector 30">
+            <a:extLst>
+              <a:ext uri="{FF2B5EF4-FFF2-40B4-BE49-F238E27FC236}">
+                <a16:creationId xmlns:a16="http://schemas.microsoft.com/office/drawing/2014/main" id="{DCEAF70E-8A2F-9B17-BE3E-73C06FB87ED4}"/>
+              </a:ext>
+            </a:extLst>
+          </p:cNvPr>
+          <p:cNvCxnSpPr>
+            <a:cxnSpLocks/>
+          </p:cNvCxnSpPr>
+          <p:nvPr/>
+        </p:nvCxnSpPr>
+        <p:spPr>
+          <a:xfrm flipH="1">
+            <a:off x="4678770" y="1591135"/>
+            <a:ext cx="790674" cy="904415"/>
+          </a:xfrm>
+          <a:prstGeom prst="line">
+            <a:avLst/>
+          </a:prstGeom>
+          <a:ln w="28575" cap="rnd">
+            <a:solidFill>
+              <a:schemeClr val="tx1"/>
+            </a:solidFill>
+            <a:prstDash val="solid"/>
+            <a:round/>
+            <a:headEnd type="none" w="med" len="med"/>
+            <a:tailEnd type="triangle" w="lg" len="lg"/>
+          </a:ln>
+        </p:spPr>
+        <p:style>
+          <a:lnRef idx="1">
+            <a:schemeClr val="accent1"/>
+          </a:lnRef>
+          <a:fillRef idx="0">
+            <a:schemeClr val="accent1"/>
+          </a:fillRef>
+          <a:effectRef idx="0">
+            <a:schemeClr val="accent1"/>
+          </a:effectRef>
+          <a:fontRef idx="minor">
+            <a:schemeClr val="tx1"/>
+          </a:fontRef>
+        </p:style>
+      </p:cxnSp>
+      <p:sp>
+        <p:nvSpPr>
+          <p:cNvPr id="34" name="Oval 33">
+            <a:extLst>
+              <a:ext uri="{FF2B5EF4-FFF2-40B4-BE49-F238E27FC236}">
+                <a16:creationId xmlns:a16="http://schemas.microsoft.com/office/drawing/2014/main" id="{01781AC4-DDB4-8358-19C0-39A470661EB5}"/>
+              </a:ext>
+            </a:extLst>
+          </p:cNvPr>
+          <p:cNvSpPr/>
+          <p:nvPr/>
+        </p:nvSpPr>
+        <p:spPr>
+          <a:xfrm>
+            <a:off x="4135911" y="2901214"/>
+            <a:ext cx="211288" cy="211288"/>
+          </a:xfrm>
+          <a:prstGeom prst="ellipse">
+            <a:avLst/>
+          </a:prstGeom>
+          <a:gradFill flip="none" rotWithShape="1">
+            <a:gsLst>
+              <a:gs pos="0">
+                <a:schemeClr val="accent1">
+                  <a:lumMod val="20000"/>
+                  <a:lumOff val="80000"/>
+                </a:schemeClr>
+              </a:gs>
+              <a:gs pos="39000">
+                <a:srgbClr val="638ACF"/>
+              </a:gs>
+              <a:gs pos="100000">
+                <a:schemeClr val="accent1">
+                  <a:lumMod val="50000"/>
+                </a:schemeClr>
+              </a:gs>
+            </a:gsLst>
+            <a:path path="circle">
+              <a:fillToRect l="100000" b="100000"/>
+            </a:path>
+            <a:tileRect t="-100000" r="-100000"/>
+          </a:gradFill>
+          <a:ln>
+            <a:noFill/>
+          </a:ln>
+        </p:spPr>
+        <p:style>
+          <a:lnRef idx="2">
+            <a:schemeClr val="accent1">
+              <a:shade val="15000"/>
+            </a:schemeClr>
+          </a:lnRef>
+          <a:fillRef idx="1">
+            <a:schemeClr val="accent1"/>
+          </a:fillRef>
+          <a:effectRef idx="0">
+            <a:schemeClr val="accent1"/>
+          </a:effectRef>
+          <a:fontRef idx="minor">
+            <a:schemeClr val="lt1"/>
+          </a:fontRef>
+        </p:style>
+        <p:txBody>
+          <a:bodyPr rtlCol="0" anchor="ctr"/>
+          <a:lstStyle/>
+          <a:p>
+            <a:pPr algn="ctr"/>
+            <a:endParaRPr lang="en-IN"/>
+          </a:p>
+        </p:txBody>
+      </p:sp>
+      <mc:AlternateContent xmlns:mc="http://schemas.openxmlformats.org/markup-compatibility/2006">
+        <mc:Choice xmlns:a14="http://schemas.microsoft.com/office/drawing/2010/main" Requires="a14">
+          <p:sp>
+            <p:nvSpPr>
+              <p:cNvPr id="38" name="TextBox 37">
+                <a:extLst>
+                  <a:ext uri="{FF2B5EF4-FFF2-40B4-BE49-F238E27FC236}">
+                    <a16:creationId xmlns:a16="http://schemas.microsoft.com/office/drawing/2014/main" id="{91728BFA-8EA4-65C2-2743-DC747D729000}"/>
+                  </a:ext>
+                </a:extLst>
+              </p:cNvPr>
+              <p:cNvSpPr txBox="1"/>
+              <p:nvPr/>
+            </p:nvSpPr>
+            <p:spPr>
+              <a:xfrm>
+                <a:off x="4664674" y="1526059"/>
+                <a:ext cx="479427" cy="430887"/>
+              </a:xfrm>
+              <a:prstGeom prst="rect">
+                <a:avLst/>
+              </a:prstGeom>
+              <a:noFill/>
+            </p:spPr>
+            <p:txBody>
+              <a:bodyPr wrap="none" lIns="0" tIns="0" rIns="0" bIns="0" rtlCol="0">
+                <a:spAutoFit/>
+              </a:bodyPr>
+              <a:lstStyle/>
+              <a:p>
+                <a14:m>
+                  <m:oMathPara xmlns:m="http://schemas.openxmlformats.org/officeDocument/2006/math">
+                    <m:oMath>
+                      <m:sSub>
+                        <m:sSubPr>
+                          <m:ctrlPr>
+                            <a:rPr lang="en-US" sz="2800" b="0" i="1" smtClean="0">
+                              <a:latin typeface="Cambria Math" panose="02040503050406030204" pitchFamily="18" charset="0"/>
+                            </a:rPr>
+                          </m:ctrlPr>
+                        </m:sSubPr>
+                        <m:e>
+                          <m:r>
+                            <a:rPr lang="en-US" sz="2800" b="0" i="1" smtClean="0">
+                              <a:latin typeface="Cambria Math" panose="02040503050406030204" pitchFamily="18" charset="0"/>
+                            </a:rPr>
+                            <m:t>𝑣</m:t>
+                          </m:r>
+                        </m:e>
+                        <m:sub>
+                          <m:r>
+                            <a:rPr lang="en-US" sz="2800" b="0" i="1" smtClean="0">
+                              <a:latin typeface="Cambria Math" panose="02040503050406030204" pitchFamily="18" charset="0"/>
+                            </a:rPr>
+                            <m:t>+</m:t>
+                          </m:r>
+                        </m:sub>
+                      </m:sSub>
+                    </m:oMath>
+                  </m:oMathPara>
+                </a14:m>
+                <a:endParaRPr lang="en-IN" sz="2800" dirty="0"/>
+              </a:p>
+            </p:txBody>
+          </p:sp>
+        </mc:Choice>
+        <mc:Fallback>
+          <p:sp>
+            <p:nvSpPr>
+              <p:cNvPr id="38" name="TextBox 37">
+                <a:extLst>
+                  <a:ext uri="{FF2B5EF4-FFF2-40B4-BE49-F238E27FC236}">
+                    <a16:creationId xmlns:a16="http://schemas.microsoft.com/office/drawing/2014/main" id="{91728BFA-8EA4-65C2-2743-DC747D729000}"/>
+                  </a:ext>
+                </a:extLst>
+              </p:cNvPr>
+              <p:cNvSpPr txBox="1">
+                <a:spLocks noRot="1" noChangeAspect="1" noMove="1" noResize="1" noEditPoints="1" noAdjustHandles="1" noChangeArrowheads="1" noChangeShapeType="1" noTextEdit="1"/>
+              </p:cNvSpPr>
+              <p:nvPr/>
+            </p:nvSpPr>
+            <p:spPr>
+              <a:xfrm>
+                <a:off x="4664674" y="1526059"/>
+                <a:ext cx="479427" cy="430887"/>
+              </a:xfrm>
+              <a:prstGeom prst="rect">
+                <a:avLst/>
+              </a:prstGeom>
+              <a:blipFill>
+                <a:blip r:embed="rId4"/>
+                <a:stretch>
+                  <a:fillRect/>
+                </a:stretch>
+              </a:blipFill>
+            </p:spPr>
+            <p:txBody>
+              <a:bodyPr/>
+              <a:lstStyle/>
+              <a:p>
+                <a:r>
+                  <a:rPr lang="en-IN">
+                    <a:noFill/>
+                  </a:rPr>
+                  <a:t> </a:t>
+                </a:r>
+              </a:p>
+            </p:txBody>
+          </p:sp>
+        </mc:Fallback>
+      </mc:AlternateContent>
+      <p:cxnSp>
+        <p:nvCxnSpPr>
+          <p:cNvPr id="42" name="Straight Arrow Connector 41">
+            <a:extLst>
+              <a:ext uri="{FF2B5EF4-FFF2-40B4-BE49-F238E27FC236}">
+                <a16:creationId xmlns:a16="http://schemas.microsoft.com/office/drawing/2014/main" id="{3FCA4654-D923-6DD0-825A-6F8E9FA73EE0}"/>
+              </a:ext>
+            </a:extLst>
+          </p:cNvPr>
+          <p:cNvCxnSpPr/>
+          <p:nvPr/>
+        </p:nvCxnSpPr>
+        <p:spPr>
+          <a:xfrm>
+            <a:off x="6820930" y="1525760"/>
+            <a:ext cx="0" cy="1501239"/>
+          </a:xfrm>
+          <a:prstGeom prst="straightConnector1">
+            <a:avLst/>
+          </a:prstGeom>
+          <a:ln w="19050">
+            <a:solidFill>
+              <a:schemeClr val="tx1"/>
+            </a:solidFill>
+            <a:headEnd type="triangle" w="lg" len="med"/>
+            <a:tailEnd type="triangle" w="lg" len="med"/>
+          </a:ln>
+        </p:spPr>
+        <p:style>
+          <a:lnRef idx="1">
+            <a:schemeClr val="accent1"/>
+          </a:lnRef>
+          <a:fillRef idx="0">
+            <a:schemeClr val="accent1"/>
+          </a:fillRef>
+          <a:effectRef idx="0">
+            <a:schemeClr val="accent1"/>
+          </a:effectRef>
+          <a:fontRef idx="minor">
+            <a:schemeClr val="tx1"/>
+          </a:fontRef>
+        </p:style>
+      </p:cxnSp>
+      <mc:AlternateContent xmlns:mc="http://schemas.openxmlformats.org/markup-compatibility/2006">
+        <mc:Choice xmlns:a14="http://schemas.microsoft.com/office/drawing/2010/main" Requires="a14">
+          <p:sp>
+            <p:nvSpPr>
+              <p:cNvPr id="44" name="TextBox 43">
+                <a:extLst>
+                  <a:ext uri="{FF2B5EF4-FFF2-40B4-BE49-F238E27FC236}">
+                    <a16:creationId xmlns:a16="http://schemas.microsoft.com/office/drawing/2014/main" id="{E515BFB6-3AC4-8B65-3D4B-AC15AC147A7F}"/>
+                  </a:ext>
+                </a:extLst>
+              </p:cNvPr>
+              <p:cNvSpPr txBox="1"/>
+              <p:nvPr/>
+            </p:nvSpPr>
+            <p:spPr>
+              <a:xfrm>
+                <a:off x="6673207" y="1856509"/>
+                <a:ext cx="297646" cy="430887"/>
+              </a:xfrm>
+              <a:prstGeom prst="rect">
+                <a:avLst/>
+              </a:prstGeom>
+              <a:solidFill>
+                <a:schemeClr val="bg1"/>
+              </a:solidFill>
+            </p:spPr>
+            <p:txBody>
+              <a:bodyPr wrap="none" lIns="0" tIns="0" rIns="0" bIns="0" rtlCol="0">
+                <a:spAutoFit/>
+              </a:bodyPr>
+              <a:lstStyle/>
+              <a:p>
+                <a:pPr/>
+                <a14:m>
+                  <m:oMathPara xmlns:m="http://schemas.openxmlformats.org/officeDocument/2006/math">
+                    <m:oMath>
+                      <m:r>
+                        <a:rPr lang="en-US" sz="2800" b="0" i="1" smtClean="0">
+                          <a:latin typeface="Cambria Math" panose="02040503050406030204" pitchFamily="18" charset="0"/>
+                        </a:rPr>
+                        <m:t>ℎ</m:t>
+                      </m:r>
+                    </m:oMath>
+                  </m:oMathPara>
+                </a14:m>
+                <a:endParaRPr lang="en-IN" sz="2800" dirty="0"/>
+              </a:p>
+            </p:txBody>
+          </p:sp>
+        </mc:Choice>
+        <mc:Fallback>
+          <p:sp>
+            <p:nvSpPr>
+              <p:cNvPr id="44" name="TextBox 43">
+                <a:extLst>
+                  <a:ext uri="{FF2B5EF4-FFF2-40B4-BE49-F238E27FC236}">
+                    <a16:creationId xmlns:a16="http://schemas.microsoft.com/office/drawing/2014/main" id="{E515BFB6-3AC4-8B65-3D4B-AC15AC147A7F}"/>
+                  </a:ext>
+                </a:extLst>
+              </p:cNvPr>
+              <p:cNvSpPr txBox="1">
+                <a:spLocks noRot="1" noChangeAspect="1" noMove="1" noResize="1" noEditPoints="1" noAdjustHandles="1" noChangeArrowheads="1" noChangeShapeType="1" noTextEdit="1"/>
+              </p:cNvSpPr>
+              <p:nvPr/>
+            </p:nvSpPr>
+            <p:spPr>
+              <a:xfrm>
+                <a:off x="6673207" y="1856509"/>
+                <a:ext cx="297646" cy="430887"/>
+              </a:xfrm>
+              <a:prstGeom prst="rect">
+                <a:avLst/>
+              </a:prstGeom>
+              <a:blipFill>
+                <a:blip r:embed="rId5"/>
+                <a:stretch>
+                  <a:fillRect/>
+                </a:stretch>
+              </a:blipFill>
+            </p:spPr>
+            <p:txBody>
+              <a:bodyPr/>
+              <a:lstStyle/>
+              <a:p>
+                <a:r>
+                  <a:rPr lang="en-IN">
+                    <a:noFill/>
+                  </a:rPr>
+                  <a:t> </a:t>
+                </a:r>
+              </a:p>
+            </p:txBody>
+          </p:sp>
+        </mc:Fallback>
+      </mc:AlternateContent>
+      <mc:AlternateContent xmlns:mc="http://schemas.openxmlformats.org/markup-compatibility/2006">
+        <mc:Choice xmlns:a14="http://schemas.microsoft.com/office/drawing/2010/main" Requires="a14">
+          <p:sp>
+            <p:nvSpPr>
+              <p:cNvPr id="40" name="TextBox 39">
+                <a:extLst>
+                  <a:ext uri="{FF2B5EF4-FFF2-40B4-BE49-F238E27FC236}">
+                    <a16:creationId xmlns:a16="http://schemas.microsoft.com/office/drawing/2014/main" id="{F401E4CD-5DFB-5EB5-9EE0-BDB032FE08BB}"/>
+                  </a:ext>
+                </a:extLst>
+              </p:cNvPr>
+              <p:cNvSpPr txBox="1"/>
+              <p:nvPr/>
+            </p:nvSpPr>
+            <p:spPr>
+              <a:xfrm>
+                <a:off x="4042165" y="3229328"/>
+                <a:ext cx="297646" cy="430887"/>
+              </a:xfrm>
+              <a:prstGeom prst="rect">
+                <a:avLst/>
+              </a:prstGeom>
+              <a:noFill/>
+            </p:spPr>
+            <p:txBody>
+              <a:bodyPr wrap="none" lIns="0" tIns="0" rIns="0" bIns="0" rtlCol="0">
+                <a:spAutoFit/>
+              </a:bodyPr>
+              <a:lstStyle/>
+              <a:p>
+                <a:pPr/>
+                <a14:m>
+                  <m:oMathPara xmlns:m="http://schemas.openxmlformats.org/officeDocument/2006/math">
+                    <m:oMath>
+                      <m:r>
+                        <a:rPr lang="en-US" sz="2800" b="0" i="1" smtClean="0">
+                          <a:latin typeface="Cambria Math" panose="02040503050406030204" pitchFamily="18" charset="0"/>
+                        </a:rPr>
+                        <m:t>𝑢</m:t>
+                      </m:r>
+                    </m:oMath>
+                  </m:oMathPara>
+                </a14:m>
+                <a:endParaRPr lang="en-IN" sz="2800" dirty="0"/>
+              </a:p>
+            </p:txBody>
+          </p:sp>
+        </mc:Choice>
+        <mc:Fallback>
+          <p:sp>
+            <p:nvSpPr>
+              <p:cNvPr id="40" name="TextBox 39">
+                <a:extLst>
+                  <a:ext uri="{FF2B5EF4-FFF2-40B4-BE49-F238E27FC236}">
+                    <a16:creationId xmlns:a16="http://schemas.microsoft.com/office/drawing/2014/main" id="{F401E4CD-5DFB-5EB5-9EE0-BDB032FE08BB}"/>
+                  </a:ext>
+                </a:extLst>
+              </p:cNvPr>
+              <p:cNvSpPr txBox="1">
+                <a:spLocks noRot="1" noChangeAspect="1" noMove="1" noResize="1" noEditPoints="1" noAdjustHandles="1" noChangeArrowheads="1" noChangeShapeType="1" noTextEdit="1"/>
+              </p:cNvSpPr>
+              <p:nvPr/>
+            </p:nvSpPr>
+            <p:spPr>
+              <a:xfrm>
+                <a:off x="4042165" y="3229328"/>
+                <a:ext cx="297646" cy="430887"/>
+              </a:xfrm>
+              <a:prstGeom prst="rect">
+                <a:avLst/>
+              </a:prstGeom>
+              <a:blipFill>
+                <a:blip r:embed="rId6"/>
+                <a:stretch>
+                  <a:fillRect/>
+                </a:stretch>
+              </a:blipFill>
+            </p:spPr>
+            <p:txBody>
+              <a:bodyPr/>
+              <a:lstStyle/>
+              <a:p>
+                <a:r>
+                  <a:rPr lang="en-IN">
+                    <a:noFill/>
+                  </a:rPr>
+                  <a:t> </a:t>
+                </a:r>
+              </a:p>
+            </p:txBody>
+          </p:sp>
+        </mc:Fallback>
+      </mc:AlternateContent>
+    </p:spTree>
+    <p:extLst>
+      <p:ext uri="{BB962C8B-B14F-4D97-AF65-F5344CB8AC3E}">
+        <p14:creationId xmlns:p14="http://schemas.microsoft.com/office/powerpoint/2010/main" val="1136909378"/>
+      </p:ext>
+    </p:extLst>
+  </p:cSld>
+  <p:clrMapOvr>
+    <a:masterClrMapping/>
+  </p:clrMapOvr>
+</p:sld>
+</file>
+
+<file path=ppt/slides/slide11.xml><?xml version="1.0" encoding="utf-8"?>
+<p:sld xmlns:a="http://schemas.openxmlformats.org/drawingml/2006/main" xmlns:r="http://schemas.openxmlformats.org/officeDocument/2006/relationships" xmlns:p="http://schemas.openxmlformats.org/presentationml/2006/main">
+  <p:cSld>
+    <p:spTree>
+      <p:nvGrpSpPr>
+        <p:cNvPr id="1" name="">
+          <a:extLst>
+            <a:ext uri="{FF2B5EF4-FFF2-40B4-BE49-F238E27FC236}">
+              <a16:creationId xmlns:a16="http://schemas.microsoft.com/office/drawing/2014/main" id="{557942F0-2878-01F1-F7FE-7C28A0214ACC}"/>
+            </a:ext>
+          </a:extLst>
+        </p:cNvPr>
+        <p:cNvGrpSpPr/>
+        <p:nvPr/>
+      </p:nvGrpSpPr>
+      <p:grpSpPr>
+        <a:xfrm>
+          <a:off x="0" y="0"/>
+          <a:ext cx="0" cy="0"/>
+          <a:chOff x="0" y="0"/>
+          <a:chExt cx="0" cy="0"/>
+        </a:xfrm>
+      </p:grpSpPr>
+      <p:cxnSp>
+        <p:nvCxnSpPr>
+          <p:cNvPr id="42" name="Straight Arrow Connector 41">
+            <a:extLst>
+              <a:ext uri="{FF2B5EF4-FFF2-40B4-BE49-F238E27FC236}">
+                <a16:creationId xmlns:a16="http://schemas.microsoft.com/office/drawing/2014/main" id="{5C43B33A-D428-6ECE-4DF3-07C8BB200755}"/>
+              </a:ext>
+            </a:extLst>
+          </p:cNvPr>
+          <p:cNvCxnSpPr/>
+          <p:nvPr/>
+        </p:nvCxnSpPr>
+        <p:spPr>
+          <a:xfrm>
+            <a:off x="6820930" y="2981180"/>
+            <a:ext cx="0" cy="1501239"/>
+          </a:xfrm>
+          <a:prstGeom prst="straightConnector1">
+            <a:avLst/>
+          </a:prstGeom>
+          <a:ln w="19050">
+            <a:solidFill>
+              <a:schemeClr val="tx1"/>
+            </a:solidFill>
+            <a:headEnd type="triangle" w="lg" len="med"/>
+            <a:tailEnd type="triangle" w="lg" len="med"/>
+          </a:ln>
+        </p:spPr>
+        <p:style>
+          <a:lnRef idx="1">
+            <a:schemeClr val="accent1"/>
+          </a:lnRef>
+          <a:fillRef idx="0">
+            <a:schemeClr val="accent1"/>
+          </a:fillRef>
+          <a:effectRef idx="0">
+            <a:schemeClr val="accent1"/>
+          </a:effectRef>
+          <a:fontRef idx="minor">
+            <a:schemeClr val="tx1"/>
+          </a:fontRef>
+        </p:style>
+      </p:cxnSp>
+      <mc:AlternateContent xmlns:mc="http://schemas.openxmlformats.org/markup-compatibility/2006">
+        <mc:Choice xmlns:a14="http://schemas.microsoft.com/office/drawing/2010/main" Requires="a14">
+          <p:sp>
+            <p:nvSpPr>
+              <p:cNvPr id="44" name="TextBox 43">
+                <a:extLst>
+                  <a:ext uri="{FF2B5EF4-FFF2-40B4-BE49-F238E27FC236}">
+                    <a16:creationId xmlns:a16="http://schemas.microsoft.com/office/drawing/2014/main" id="{3F91FE10-C60F-B5C8-36BD-01C362B0C6B5}"/>
+                  </a:ext>
+                </a:extLst>
+              </p:cNvPr>
+              <p:cNvSpPr txBox="1"/>
+              <p:nvPr/>
+            </p:nvSpPr>
+            <p:spPr>
+              <a:xfrm>
+                <a:off x="6673207" y="3517669"/>
+                <a:ext cx="297646" cy="430887"/>
+              </a:xfrm>
+              <a:prstGeom prst="rect">
+                <a:avLst/>
+              </a:prstGeom>
+              <a:solidFill>
+                <a:schemeClr val="bg1"/>
+              </a:solidFill>
+            </p:spPr>
+            <p:txBody>
+              <a:bodyPr wrap="none" lIns="0" tIns="0" rIns="0" bIns="0" rtlCol="0">
+                <a:spAutoFit/>
+              </a:bodyPr>
+              <a:lstStyle/>
+              <a:p>
+                <a:pPr/>
+                <a14:m>
+                  <m:oMathPara xmlns:m="http://schemas.openxmlformats.org/officeDocument/2006/math">
+                    <m:oMath>
+                      <m:r>
+                        <a:rPr lang="en-US" sz="2800" b="0" i="1" smtClean="0">
+                          <a:latin typeface="Cambria Math" panose="02040503050406030204" pitchFamily="18" charset="0"/>
+                        </a:rPr>
+                        <m:t>ℎ</m:t>
+                      </m:r>
+                    </m:oMath>
+                  </m:oMathPara>
+                </a14:m>
+                <a:endParaRPr lang="en-IN" sz="2800" dirty="0"/>
+              </a:p>
+            </p:txBody>
+          </p:sp>
+        </mc:Choice>
+        <mc:Fallback>
+          <p:sp>
+            <p:nvSpPr>
+              <p:cNvPr id="44" name="TextBox 43">
+                <a:extLst>
+                  <a:ext uri="{FF2B5EF4-FFF2-40B4-BE49-F238E27FC236}">
+                    <a16:creationId xmlns:a16="http://schemas.microsoft.com/office/drawing/2014/main" id="{3F91FE10-C60F-B5C8-36BD-01C362B0C6B5}"/>
+                  </a:ext>
+                </a:extLst>
+              </p:cNvPr>
+              <p:cNvSpPr txBox="1">
+                <a:spLocks noRot="1" noChangeAspect="1" noMove="1" noResize="1" noEditPoints="1" noAdjustHandles="1" noChangeArrowheads="1" noChangeShapeType="1" noTextEdit="1"/>
+              </p:cNvSpPr>
+              <p:nvPr/>
+            </p:nvSpPr>
+            <p:spPr>
+              <a:xfrm>
+                <a:off x="6673207" y="3517669"/>
+                <a:ext cx="297646" cy="430887"/>
+              </a:xfrm>
+              <a:prstGeom prst="rect">
+                <a:avLst/>
+              </a:prstGeom>
+              <a:blipFill>
+                <a:blip r:embed="rId2"/>
+                <a:stretch>
+                  <a:fillRect/>
+                </a:stretch>
+              </a:blipFill>
+            </p:spPr>
+            <p:txBody>
+              <a:bodyPr/>
+              <a:lstStyle/>
+              <a:p>
+                <a:r>
+                  <a:rPr lang="en-IN">
+                    <a:noFill/>
+                  </a:rPr>
+                  <a:t> </a:t>
+                </a:r>
+              </a:p>
+            </p:txBody>
+          </p:sp>
+        </mc:Fallback>
+      </mc:AlternateContent>
+      <p:sp>
+        <p:nvSpPr>
+          <p:cNvPr id="2" name="Parallelogram 1">
+            <a:extLst>
+              <a:ext uri="{FF2B5EF4-FFF2-40B4-BE49-F238E27FC236}">
+                <a16:creationId xmlns:a16="http://schemas.microsoft.com/office/drawing/2014/main" id="{46C3C5D3-CDA0-E02F-960D-D4EBF52B20A0}"/>
+              </a:ext>
+            </a:extLst>
+          </p:cNvPr>
+          <p:cNvSpPr/>
+          <p:nvPr/>
+        </p:nvSpPr>
+        <p:spPr>
+          <a:xfrm>
+            <a:off x="2211977" y="2325189"/>
+            <a:ext cx="6453051" cy="1593668"/>
+          </a:xfrm>
+          <a:prstGeom prst="parallelogram">
+            <a:avLst>
+              <a:gd name="adj" fmla="val 109494"/>
+            </a:avLst>
+          </a:prstGeom>
+          <a:solidFill>
+            <a:schemeClr val="tx1">
+              <a:lumMod val="65000"/>
+              <a:lumOff val="35000"/>
+              <a:alpha val="50000"/>
+            </a:schemeClr>
+          </a:solidFill>
+          <a:ln>
+            <a:noFill/>
+          </a:ln>
+        </p:spPr>
+        <p:style>
+          <a:lnRef idx="2">
+            <a:schemeClr val="accent1">
+              <a:shade val="50000"/>
+            </a:schemeClr>
+          </a:lnRef>
+          <a:fillRef idx="1">
+            <a:schemeClr val="accent1"/>
+          </a:fillRef>
+          <a:effectRef idx="0">
+            <a:schemeClr val="accent1"/>
+          </a:effectRef>
+          <a:fontRef idx="minor">
+            <a:schemeClr val="lt1"/>
+          </a:fontRef>
+        </p:style>
+        <p:txBody>
+          <a:bodyPr rtlCol="0" anchor="ctr"/>
+          <a:lstStyle/>
+          <a:p>
+            <a:pPr algn="ctr"/>
+            <a:endParaRPr lang="en-US"/>
+          </a:p>
+        </p:txBody>
+      </p:sp>
+      <mc:AlternateContent xmlns:mc="http://schemas.openxmlformats.org/markup-compatibility/2006">
+        <mc:Choice xmlns:a14="http://schemas.microsoft.com/office/drawing/2010/main" Requires="a14">
+          <p:sp>
+            <p:nvSpPr>
+              <p:cNvPr id="11" name="TextBox 10">
+                <a:extLst>
+                  <a:ext uri="{FF2B5EF4-FFF2-40B4-BE49-F238E27FC236}">
+                    <a16:creationId xmlns:a16="http://schemas.microsoft.com/office/drawing/2014/main" id="{CF22542F-085A-A0DB-388F-2F4098254199}"/>
+                  </a:ext>
+                </a:extLst>
+              </p:cNvPr>
+              <p:cNvSpPr txBox="1"/>
+              <p:nvPr/>
+            </p:nvSpPr>
+            <p:spPr>
+              <a:xfrm>
+                <a:off x="8214360" y="3009900"/>
+                <a:ext cx="241733" cy="369332"/>
+              </a:xfrm>
+              <a:prstGeom prst="rect">
+                <a:avLst/>
+              </a:prstGeom>
+              <a:noFill/>
+            </p:spPr>
+            <p:txBody>
+              <a:bodyPr wrap="none" lIns="0" tIns="0" rIns="0" bIns="0" rtlCol="0">
+                <a:spAutoFit/>
+              </a:bodyPr>
+              <a:lstStyle/>
+              <a:p>
+                <a:pPr/>
+                <a14:m>
+                  <m:oMathPara xmlns:m="http://schemas.openxmlformats.org/officeDocument/2006/math">
+                    <m:oMath>
+                      <m:r>
+                        <a:rPr lang="en-US" sz="2400" b="0" i="1" smtClean="0">
+                          <a:solidFill>
+                            <a:schemeClr val="tx1"/>
+                          </a:solidFill>
+                          <a:latin typeface="Cambria Math" panose="02040503050406030204" pitchFamily="18" charset="0"/>
+                        </a:rPr>
+                        <m:t>𝑥</m:t>
+                      </m:r>
+                    </m:oMath>
+                  </m:oMathPara>
+                </a14:m>
+                <a:endParaRPr lang="en-US" sz="2400" dirty="0"/>
+              </a:p>
+            </p:txBody>
+          </p:sp>
+        </mc:Choice>
+        <mc:Fallback>
+          <p:sp>
+            <p:nvSpPr>
+              <p:cNvPr id="11" name="TextBox 10">
+                <a:extLst>
+                  <a:ext uri="{FF2B5EF4-FFF2-40B4-BE49-F238E27FC236}">
+                    <a16:creationId xmlns:a16="http://schemas.microsoft.com/office/drawing/2014/main" id="{CF22542F-085A-A0DB-388F-2F4098254199}"/>
+                  </a:ext>
+                </a:extLst>
+              </p:cNvPr>
+              <p:cNvSpPr txBox="1">
+                <a:spLocks noRot="1" noChangeAspect="1" noMove="1" noResize="1" noEditPoints="1" noAdjustHandles="1" noChangeArrowheads="1" noChangeShapeType="1" noTextEdit="1"/>
+              </p:cNvSpPr>
+              <p:nvPr/>
+            </p:nvSpPr>
+            <p:spPr>
+              <a:xfrm>
+                <a:off x="8214360" y="3009900"/>
+                <a:ext cx="241733" cy="369332"/>
+              </a:xfrm>
+              <a:prstGeom prst="rect">
+                <a:avLst/>
+              </a:prstGeom>
+              <a:blipFill>
+                <a:blip r:embed="rId3"/>
+                <a:stretch>
+                  <a:fillRect l="-17949" r="-15385"/>
+                </a:stretch>
+              </a:blipFill>
+            </p:spPr>
+            <p:txBody>
+              <a:bodyPr/>
+              <a:lstStyle/>
+              <a:p>
+                <a:r>
+                  <a:rPr lang="en-IN">
+                    <a:noFill/>
+                  </a:rPr>
+                  <a:t> </a:t>
+                </a:r>
+              </a:p>
+            </p:txBody>
+          </p:sp>
+        </mc:Fallback>
+      </mc:AlternateContent>
+      <mc:AlternateContent xmlns:mc="http://schemas.openxmlformats.org/markup-compatibility/2006">
+        <mc:Choice xmlns:a14="http://schemas.microsoft.com/office/drawing/2010/main" Requires="a14">
+          <p:sp>
+            <p:nvSpPr>
+              <p:cNvPr id="12" name="TextBox 11">
+                <a:extLst>
+                  <a:ext uri="{FF2B5EF4-FFF2-40B4-BE49-F238E27FC236}">
+                    <a16:creationId xmlns:a16="http://schemas.microsoft.com/office/drawing/2014/main" id="{16E28FB9-D0E8-F853-D60B-F39735233611}"/>
+                  </a:ext>
+                </a:extLst>
+              </p:cNvPr>
+              <p:cNvSpPr txBox="1"/>
+              <p:nvPr/>
+            </p:nvSpPr>
+            <p:spPr>
+              <a:xfrm>
+                <a:off x="2446020" y="3009900"/>
+                <a:ext cx="312586" cy="369332"/>
+              </a:xfrm>
+              <a:prstGeom prst="rect">
+                <a:avLst/>
+              </a:prstGeom>
+              <a:noFill/>
+            </p:spPr>
+            <p:txBody>
+              <a:bodyPr wrap="none" lIns="0" tIns="0" rIns="0" bIns="0" rtlCol="0">
+                <a:spAutoFit/>
+              </a:bodyPr>
+              <a:lstStyle/>
+              <a:p>
+                <a:pPr/>
+                <a14:m>
+                  <m:oMathPara xmlns:m="http://schemas.openxmlformats.org/officeDocument/2006/math">
+                    <m:oMath>
+                      <m:r>
+                        <a:rPr lang="en-US" sz="2400" b="0" i="1" smtClean="0">
+                          <a:solidFill>
+                            <a:schemeClr val="tx1"/>
+                          </a:solidFill>
+                          <a:latin typeface="Cambria Math" panose="02040503050406030204" pitchFamily="18" charset="0"/>
+                        </a:rPr>
+                        <m:t>𝑥</m:t>
+                      </m:r>
+                      <m:r>
+                        <a:rPr lang="en-US" sz="2400" b="0" i="1" smtClean="0">
+                          <a:solidFill>
+                            <a:schemeClr val="tx1"/>
+                          </a:solidFill>
+                          <a:latin typeface="Cambria Math" panose="02040503050406030204" pitchFamily="18" charset="0"/>
+                        </a:rPr>
+                        <m:t>′</m:t>
+                      </m:r>
+                    </m:oMath>
+                  </m:oMathPara>
+                </a14:m>
+                <a:endParaRPr lang="en-US" sz="2400" dirty="0"/>
+              </a:p>
+            </p:txBody>
+          </p:sp>
+        </mc:Choice>
+        <mc:Fallback>
+          <p:sp>
+            <p:nvSpPr>
+              <p:cNvPr id="12" name="TextBox 11">
+                <a:extLst>
+                  <a:ext uri="{FF2B5EF4-FFF2-40B4-BE49-F238E27FC236}">
+                    <a16:creationId xmlns:a16="http://schemas.microsoft.com/office/drawing/2014/main" id="{16E28FB9-D0E8-F853-D60B-F39735233611}"/>
+                  </a:ext>
+                </a:extLst>
+              </p:cNvPr>
+              <p:cNvSpPr txBox="1">
+                <a:spLocks noRot="1" noChangeAspect="1" noMove="1" noResize="1" noEditPoints="1" noAdjustHandles="1" noChangeArrowheads="1" noChangeShapeType="1" noTextEdit="1"/>
+              </p:cNvSpPr>
+              <p:nvPr/>
+            </p:nvSpPr>
+            <p:spPr>
+              <a:xfrm>
+                <a:off x="2446020" y="3009900"/>
+                <a:ext cx="312586" cy="369332"/>
+              </a:xfrm>
+              <a:prstGeom prst="rect">
+                <a:avLst/>
+              </a:prstGeom>
+              <a:blipFill>
+                <a:blip r:embed="rId4"/>
+                <a:stretch>
+                  <a:fillRect l="-25000" t="-1667" r="-26923" b="-10000"/>
+                </a:stretch>
+              </a:blipFill>
+            </p:spPr>
+            <p:txBody>
+              <a:bodyPr/>
+              <a:lstStyle/>
+              <a:p>
+                <a:r>
+                  <a:rPr lang="en-IN">
+                    <a:noFill/>
+                  </a:rPr>
+                  <a:t> </a:t>
+                </a:r>
+              </a:p>
+            </p:txBody>
+          </p:sp>
+        </mc:Fallback>
+      </mc:AlternateContent>
+      <p:sp>
+        <p:nvSpPr>
+          <p:cNvPr id="21" name="Parallelogram 7">
+            <a:extLst>
+              <a:ext uri="{FF2B5EF4-FFF2-40B4-BE49-F238E27FC236}">
+                <a16:creationId xmlns:a16="http://schemas.microsoft.com/office/drawing/2014/main" id="{B45ACBAA-5DD9-954E-6F25-6E12CF8CE1E9}"/>
+              </a:ext>
+            </a:extLst>
+          </p:cNvPr>
+          <p:cNvSpPr/>
+          <p:nvPr/>
+        </p:nvSpPr>
+        <p:spPr>
+          <a:xfrm flipV="1">
+            <a:off x="2577736" y="2958738"/>
+            <a:ext cx="5819503" cy="45719"/>
+          </a:xfrm>
+          <a:custGeom>
+            <a:avLst/>
+            <a:gdLst>
+              <a:gd name="connsiteX0" fmla="*/ 0 w 6453051"/>
+              <a:gd name="connsiteY0" fmla="*/ 1593668 h 1593668"/>
+              <a:gd name="connsiteX1" fmla="*/ 1744971 w 6453051"/>
+              <a:gd name="connsiteY1" fmla="*/ 0 h 1593668"/>
+              <a:gd name="connsiteX2" fmla="*/ 6453051 w 6453051"/>
+              <a:gd name="connsiteY2" fmla="*/ 0 h 1593668"/>
+              <a:gd name="connsiteX3" fmla="*/ 4708080 w 6453051"/>
+              <a:gd name="connsiteY3" fmla="*/ 1593668 h 1593668"/>
+              <a:gd name="connsiteX4" fmla="*/ 0 w 6453051"/>
+              <a:gd name="connsiteY4" fmla="*/ 1593668 h 1593668"/>
+              <a:gd name="connsiteX0" fmla="*/ 0 w 4708080"/>
+              <a:gd name="connsiteY0" fmla="*/ 1593668 h 1593668"/>
+              <a:gd name="connsiteX1" fmla="*/ 1744971 w 4708080"/>
+              <a:gd name="connsiteY1" fmla="*/ 0 h 1593668"/>
+              <a:gd name="connsiteX2" fmla="*/ 4708080 w 4708080"/>
+              <a:gd name="connsiteY2" fmla="*/ 1593668 h 1593668"/>
+              <a:gd name="connsiteX3" fmla="*/ 0 w 4708080"/>
+              <a:gd name="connsiteY3" fmla="*/ 1593668 h 1593668"/>
+              <a:gd name="connsiteX0" fmla="*/ 0 w 4708080"/>
+              <a:gd name="connsiteY0" fmla="*/ 0 h 0"/>
+              <a:gd name="connsiteX1" fmla="*/ 4708080 w 4708080"/>
+              <a:gd name="connsiteY1" fmla="*/ 0 h 0"/>
+              <a:gd name="connsiteX2" fmla="*/ 0 w 4708080"/>
+              <a:gd name="connsiteY2" fmla="*/ 0 h 0"/>
+            </a:gdLst>
+            <a:ahLst/>
+            <a:cxnLst>
+              <a:cxn ang="0">
+                <a:pos x="connsiteX0" y="connsiteY0"/>
+              </a:cxn>
+              <a:cxn ang="0">
+                <a:pos x="connsiteX1" y="connsiteY1"/>
+              </a:cxn>
+              <a:cxn ang="0">
+                <a:pos x="connsiteX2" y="connsiteY2"/>
+              </a:cxn>
+            </a:cxnLst>
+            <a:rect l="l" t="t" r="r" b="b"/>
+            <a:pathLst>
+              <a:path w="4708080">
+                <a:moveTo>
+                  <a:pt x="0" y="0"/>
+                </a:moveTo>
+                <a:lnTo>
+                  <a:pt x="4708080" y="0"/>
+                </a:lnTo>
+                <a:lnTo>
+                  <a:pt x="0" y="0"/>
+                </a:lnTo>
+                <a:close/>
+              </a:path>
+            </a:pathLst>
+          </a:custGeom>
+          <a:noFill/>
+          <a:ln w="28575">
+            <a:solidFill>
+              <a:schemeClr val="bg1">
+                <a:lumMod val="50000"/>
+              </a:schemeClr>
+            </a:solidFill>
+            <a:prstDash val="dashDot"/>
+          </a:ln>
+        </p:spPr>
+        <p:style>
+          <a:lnRef idx="2">
+            <a:schemeClr val="accent1">
+              <a:shade val="50000"/>
+            </a:schemeClr>
+          </a:lnRef>
+          <a:fillRef idx="1">
+            <a:schemeClr val="accent1"/>
+          </a:fillRef>
+          <a:effectRef idx="0">
+            <a:schemeClr val="accent1"/>
+          </a:effectRef>
+          <a:fontRef idx="minor">
+            <a:schemeClr val="lt1"/>
+          </a:fontRef>
+        </p:style>
+        <p:txBody>
+          <a:bodyPr rtlCol="0" anchor="ctr"/>
+          <a:lstStyle/>
+          <a:p>
+            <a:pPr algn="ctr"/>
+            <a:endParaRPr lang="en-US" dirty="0"/>
+          </a:p>
+        </p:txBody>
+      </p:sp>
+      <p:cxnSp>
+        <p:nvCxnSpPr>
+          <p:cNvPr id="35" name="Straight Connector 34">
+            <a:extLst>
+              <a:ext uri="{FF2B5EF4-FFF2-40B4-BE49-F238E27FC236}">
+                <a16:creationId xmlns:a16="http://schemas.microsoft.com/office/drawing/2014/main" id="{2C6B5703-F780-E62E-2A2F-C9400AA4A3A9}"/>
+              </a:ext>
+            </a:extLst>
+          </p:cNvPr>
+          <p:cNvCxnSpPr>
+            <a:cxnSpLocks/>
+          </p:cNvCxnSpPr>
+          <p:nvPr/>
+        </p:nvCxnSpPr>
+        <p:spPr>
+          <a:xfrm flipH="1" flipV="1">
+            <a:off x="3668922" y="2340429"/>
+            <a:ext cx="553581" cy="633216"/>
+          </a:xfrm>
+          <a:prstGeom prst="line">
+            <a:avLst/>
+          </a:prstGeom>
+          <a:ln w="28575" cap="rnd">
+            <a:solidFill>
+              <a:schemeClr val="tx1"/>
+            </a:solidFill>
+            <a:prstDash val="solid"/>
+            <a:round/>
+            <a:headEnd type="none" w="med" len="med"/>
+            <a:tailEnd type="triangle" w="lg" len="lg"/>
+          </a:ln>
+        </p:spPr>
+        <p:style>
+          <a:lnRef idx="1">
+            <a:schemeClr val="accent1"/>
+          </a:lnRef>
+          <a:fillRef idx="0">
+            <a:schemeClr val="accent1"/>
+          </a:fillRef>
+          <a:effectRef idx="0">
+            <a:schemeClr val="accent1"/>
+          </a:effectRef>
+          <a:fontRef idx="minor">
+            <a:schemeClr val="tx1"/>
+          </a:fontRef>
+        </p:style>
+      </p:cxnSp>
+      <p:sp>
+        <p:nvSpPr>
+          <p:cNvPr id="25" name="Parallelogram 7">
+            <a:extLst>
+              <a:ext uri="{FF2B5EF4-FFF2-40B4-BE49-F238E27FC236}">
+                <a16:creationId xmlns:a16="http://schemas.microsoft.com/office/drawing/2014/main" id="{60D7C684-B12A-6BB2-2B30-B1BBF46A7E81}"/>
+              </a:ext>
+            </a:extLst>
+          </p:cNvPr>
+          <p:cNvSpPr/>
+          <p:nvPr/>
+        </p:nvSpPr>
+        <p:spPr>
+          <a:xfrm>
+            <a:off x="5560541" y="4474884"/>
+            <a:ext cx="1975839" cy="45719"/>
+          </a:xfrm>
+          <a:custGeom>
+            <a:avLst/>
+            <a:gdLst>
+              <a:gd name="connsiteX0" fmla="*/ 0 w 6453051"/>
+              <a:gd name="connsiteY0" fmla="*/ 1593668 h 1593668"/>
+              <a:gd name="connsiteX1" fmla="*/ 1744971 w 6453051"/>
+              <a:gd name="connsiteY1" fmla="*/ 0 h 1593668"/>
+              <a:gd name="connsiteX2" fmla="*/ 6453051 w 6453051"/>
+              <a:gd name="connsiteY2" fmla="*/ 0 h 1593668"/>
+              <a:gd name="connsiteX3" fmla="*/ 4708080 w 6453051"/>
+              <a:gd name="connsiteY3" fmla="*/ 1593668 h 1593668"/>
+              <a:gd name="connsiteX4" fmla="*/ 0 w 6453051"/>
+              <a:gd name="connsiteY4" fmla="*/ 1593668 h 1593668"/>
+              <a:gd name="connsiteX0" fmla="*/ 0 w 4708080"/>
+              <a:gd name="connsiteY0" fmla="*/ 1593668 h 1593668"/>
+              <a:gd name="connsiteX1" fmla="*/ 1744971 w 4708080"/>
+              <a:gd name="connsiteY1" fmla="*/ 0 h 1593668"/>
+              <a:gd name="connsiteX2" fmla="*/ 4708080 w 4708080"/>
+              <a:gd name="connsiteY2" fmla="*/ 1593668 h 1593668"/>
+              <a:gd name="connsiteX3" fmla="*/ 0 w 4708080"/>
+              <a:gd name="connsiteY3" fmla="*/ 1593668 h 1593668"/>
+              <a:gd name="connsiteX0" fmla="*/ 0 w 4708080"/>
+              <a:gd name="connsiteY0" fmla="*/ 0 h 0"/>
+              <a:gd name="connsiteX1" fmla="*/ 4708080 w 4708080"/>
+              <a:gd name="connsiteY1" fmla="*/ 0 h 0"/>
+              <a:gd name="connsiteX2" fmla="*/ 0 w 4708080"/>
+              <a:gd name="connsiteY2" fmla="*/ 0 h 0"/>
+            </a:gdLst>
+            <a:ahLst/>
+            <a:cxnLst>
+              <a:cxn ang="0">
+                <a:pos x="connsiteX0" y="connsiteY0"/>
+              </a:cxn>
+              <a:cxn ang="0">
+                <a:pos x="connsiteX1" y="connsiteY1"/>
+              </a:cxn>
+              <a:cxn ang="0">
+                <a:pos x="connsiteX2" y="connsiteY2"/>
+              </a:cxn>
+            </a:cxnLst>
+            <a:rect l="l" t="t" r="r" b="b"/>
+            <a:pathLst>
+              <a:path w="4708080">
+                <a:moveTo>
+                  <a:pt x="0" y="0"/>
+                </a:moveTo>
+                <a:lnTo>
+                  <a:pt x="4708080" y="0"/>
+                </a:lnTo>
+                <a:lnTo>
+                  <a:pt x="0" y="0"/>
+                </a:lnTo>
+                <a:close/>
+              </a:path>
+            </a:pathLst>
+          </a:custGeom>
+          <a:noFill/>
+          <a:ln w="28575">
+            <a:solidFill>
+              <a:schemeClr val="bg1">
+                <a:lumMod val="50000"/>
+              </a:schemeClr>
+            </a:solidFill>
+            <a:prstDash val="dashDot"/>
+          </a:ln>
+        </p:spPr>
+        <p:style>
+          <a:lnRef idx="2">
+            <a:schemeClr val="accent1">
+              <a:shade val="50000"/>
+            </a:schemeClr>
+          </a:lnRef>
+          <a:fillRef idx="1">
+            <a:schemeClr val="accent1"/>
+          </a:fillRef>
+          <a:effectRef idx="0">
+            <a:schemeClr val="accent1"/>
+          </a:effectRef>
+          <a:fontRef idx="minor">
+            <a:schemeClr val="lt1"/>
+          </a:fontRef>
+        </p:style>
+        <p:txBody>
+          <a:bodyPr rtlCol="0" anchor="ctr"/>
+          <a:lstStyle/>
+          <a:p>
+            <a:pPr algn="ctr"/>
+            <a:endParaRPr lang="en-US" dirty="0"/>
+          </a:p>
+        </p:txBody>
+      </p:sp>
+      <p:sp>
+        <p:nvSpPr>
+          <p:cNvPr id="23" name="Oval 22">
+            <a:extLst>
+              <a:ext uri="{FF2B5EF4-FFF2-40B4-BE49-F238E27FC236}">
+                <a16:creationId xmlns:a16="http://schemas.microsoft.com/office/drawing/2014/main" id="{321A9AFB-DA03-0903-BF6B-88048E1468E7}"/>
+              </a:ext>
+            </a:extLst>
+          </p:cNvPr>
+          <p:cNvSpPr/>
+          <p:nvPr/>
+        </p:nvSpPr>
+        <p:spPr>
+          <a:xfrm flipV="1">
+            <a:off x="5438502" y="4378567"/>
+            <a:ext cx="211288" cy="211288"/>
+          </a:xfrm>
+          <a:prstGeom prst="ellipse">
+            <a:avLst/>
+          </a:prstGeom>
+          <a:gradFill flip="none" rotWithShape="1">
+            <a:gsLst>
+              <a:gs pos="0">
+                <a:schemeClr val="accent1">
+                  <a:lumMod val="20000"/>
+                  <a:lumOff val="80000"/>
+                </a:schemeClr>
+              </a:gs>
+              <a:gs pos="39000">
+                <a:srgbClr val="638ACF"/>
+              </a:gs>
+              <a:gs pos="100000">
+                <a:schemeClr val="accent1">
+                  <a:lumMod val="50000"/>
+                </a:schemeClr>
+              </a:gs>
+            </a:gsLst>
+            <a:path path="circle">
+              <a:fillToRect l="100000" b="100000"/>
+            </a:path>
+            <a:tileRect t="-100000" r="-100000"/>
+          </a:gradFill>
+          <a:ln>
+            <a:noFill/>
+          </a:ln>
+        </p:spPr>
+        <p:style>
+          <a:lnRef idx="2">
+            <a:schemeClr val="accent1">
+              <a:shade val="15000"/>
+            </a:schemeClr>
+          </a:lnRef>
+          <a:fillRef idx="1">
+            <a:schemeClr val="accent1"/>
+          </a:fillRef>
+          <a:effectRef idx="0">
+            <a:schemeClr val="accent1"/>
+          </a:effectRef>
+          <a:fontRef idx="minor">
+            <a:schemeClr val="lt1"/>
+          </a:fontRef>
+        </p:style>
+        <p:txBody>
+          <a:bodyPr rtlCol="0" anchor="ctr"/>
+          <a:lstStyle/>
+          <a:p>
+            <a:pPr algn="ctr"/>
+            <a:endParaRPr lang="en-IN"/>
+          </a:p>
+        </p:txBody>
+      </p:sp>
+      <p:cxnSp>
+        <p:nvCxnSpPr>
+          <p:cNvPr id="27" name="Straight Connector 26">
+            <a:extLst>
+              <a:ext uri="{FF2B5EF4-FFF2-40B4-BE49-F238E27FC236}">
+                <a16:creationId xmlns:a16="http://schemas.microsoft.com/office/drawing/2014/main" id="{BD7E2B02-2479-557E-B35B-23AED1403A61}"/>
+              </a:ext>
+            </a:extLst>
+          </p:cNvPr>
+          <p:cNvCxnSpPr>
+            <a:cxnSpLocks/>
+            <a:stCxn id="23" idx="3"/>
+          </p:cNvCxnSpPr>
+          <p:nvPr/>
+        </p:nvCxnSpPr>
+        <p:spPr>
+          <a:xfrm flipH="1" flipV="1">
+            <a:off x="4233863" y="2996187"/>
+            <a:ext cx="1235581" cy="1413322"/>
+          </a:xfrm>
+          <a:prstGeom prst="line">
+            <a:avLst/>
+          </a:prstGeom>
+          <a:ln w="19050">
+            <a:solidFill>
+              <a:schemeClr val="bg1">
+                <a:lumMod val="50000"/>
+              </a:schemeClr>
+            </a:solidFill>
+            <a:prstDash val="sysDot"/>
+          </a:ln>
+        </p:spPr>
+        <p:style>
+          <a:lnRef idx="1">
+            <a:schemeClr val="accent1"/>
+          </a:lnRef>
+          <a:fillRef idx="0">
+            <a:schemeClr val="accent1"/>
+          </a:fillRef>
+          <a:effectRef idx="0">
+            <a:schemeClr val="accent1"/>
+          </a:effectRef>
+          <a:fontRef idx="minor">
+            <a:schemeClr val="tx1"/>
+          </a:fontRef>
+        </p:style>
+      </p:cxnSp>
+      <p:cxnSp>
+        <p:nvCxnSpPr>
+          <p:cNvPr id="31" name="Straight Connector 30">
+            <a:extLst>
+              <a:ext uri="{FF2B5EF4-FFF2-40B4-BE49-F238E27FC236}">
+                <a16:creationId xmlns:a16="http://schemas.microsoft.com/office/drawing/2014/main" id="{F9DF4F80-4D8A-1837-B078-560A2429CAF4}"/>
+              </a:ext>
+            </a:extLst>
+          </p:cNvPr>
+          <p:cNvCxnSpPr>
+            <a:cxnSpLocks/>
+          </p:cNvCxnSpPr>
+          <p:nvPr/>
+        </p:nvCxnSpPr>
+        <p:spPr>
+          <a:xfrm flipH="1" flipV="1">
+            <a:off x="5144101" y="4037364"/>
+            <a:ext cx="325343" cy="372145"/>
+          </a:xfrm>
+          <a:prstGeom prst="line">
+            <a:avLst/>
+          </a:prstGeom>
+          <a:ln w="28575" cap="rnd">
+            <a:solidFill>
+              <a:schemeClr val="tx1"/>
+            </a:solidFill>
+            <a:prstDash val="solid"/>
+            <a:round/>
+            <a:headEnd type="none" w="med" len="med"/>
+            <a:tailEnd type="triangle" w="lg" len="lg"/>
+          </a:ln>
+        </p:spPr>
+        <p:style>
+          <a:lnRef idx="1">
+            <a:schemeClr val="accent1"/>
+          </a:lnRef>
+          <a:fillRef idx="0">
+            <a:schemeClr val="accent1"/>
+          </a:fillRef>
+          <a:effectRef idx="0">
+            <a:schemeClr val="accent1"/>
+          </a:effectRef>
+          <a:fontRef idx="minor">
+            <a:schemeClr val="tx1"/>
+          </a:fontRef>
+        </p:style>
+      </p:cxnSp>
+      <p:sp>
+        <p:nvSpPr>
+          <p:cNvPr id="34" name="Oval 33">
+            <a:extLst>
+              <a:ext uri="{FF2B5EF4-FFF2-40B4-BE49-F238E27FC236}">
+                <a16:creationId xmlns:a16="http://schemas.microsoft.com/office/drawing/2014/main" id="{979C4A05-532B-0662-098C-347FDA797E22}"/>
+              </a:ext>
+            </a:extLst>
+          </p:cNvPr>
+          <p:cNvSpPr/>
+          <p:nvPr/>
+        </p:nvSpPr>
+        <p:spPr>
+          <a:xfrm flipV="1">
+            <a:off x="4135911" y="2888142"/>
+            <a:ext cx="211288" cy="211288"/>
+          </a:xfrm>
+          <a:prstGeom prst="ellipse">
+            <a:avLst/>
+          </a:prstGeom>
+          <a:gradFill flip="none" rotWithShape="1">
+            <a:gsLst>
+              <a:gs pos="0">
+                <a:schemeClr val="accent1">
+                  <a:lumMod val="20000"/>
+                  <a:lumOff val="80000"/>
+                </a:schemeClr>
+              </a:gs>
+              <a:gs pos="39000">
+                <a:srgbClr val="638ACF"/>
+              </a:gs>
+              <a:gs pos="100000">
+                <a:schemeClr val="accent1">
+                  <a:lumMod val="50000"/>
+                </a:schemeClr>
+              </a:gs>
+            </a:gsLst>
+            <a:path path="circle">
+              <a:fillToRect l="100000" b="100000"/>
+            </a:path>
+            <a:tileRect t="-100000" r="-100000"/>
+          </a:gradFill>
+          <a:ln>
+            <a:noFill/>
+          </a:ln>
+        </p:spPr>
+        <p:style>
+          <a:lnRef idx="2">
+            <a:schemeClr val="accent1">
+              <a:shade val="15000"/>
+            </a:schemeClr>
+          </a:lnRef>
+          <a:fillRef idx="1">
+            <a:schemeClr val="accent1"/>
+          </a:fillRef>
+          <a:effectRef idx="0">
+            <a:schemeClr val="accent1"/>
+          </a:effectRef>
+          <a:fontRef idx="minor">
+            <a:schemeClr val="lt1"/>
+          </a:fontRef>
+        </p:style>
+        <p:txBody>
+          <a:bodyPr rtlCol="0" anchor="ctr"/>
+          <a:lstStyle/>
+          <a:p>
+            <a:pPr algn="ctr"/>
+            <a:endParaRPr lang="en-IN"/>
+          </a:p>
+        </p:txBody>
+      </p:sp>
+      <mc:AlternateContent xmlns:mc="http://schemas.openxmlformats.org/markup-compatibility/2006">
+        <mc:Choice xmlns:a14="http://schemas.microsoft.com/office/drawing/2010/main" Requires="a14">
+          <p:sp>
+            <p:nvSpPr>
+              <p:cNvPr id="38" name="TextBox 37">
+                <a:extLst>
+                  <a:ext uri="{FF2B5EF4-FFF2-40B4-BE49-F238E27FC236}">
+                    <a16:creationId xmlns:a16="http://schemas.microsoft.com/office/drawing/2014/main" id="{4486DF46-C3CD-F039-AD0F-144A7D03BB39}"/>
+                  </a:ext>
+                </a:extLst>
+              </p:cNvPr>
+              <p:cNvSpPr txBox="1"/>
+              <p:nvPr/>
+            </p:nvSpPr>
+            <p:spPr>
+              <a:xfrm>
+                <a:off x="4664674" y="3964459"/>
+                <a:ext cx="479427" cy="430887"/>
+              </a:xfrm>
+              <a:prstGeom prst="rect">
+                <a:avLst/>
+              </a:prstGeom>
+              <a:noFill/>
+            </p:spPr>
+            <p:txBody>
+              <a:bodyPr wrap="none" lIns="0" tIns="0" rIns="0" bIns="0" rtlCol="0">
+                <a:spAutoFit/>
+              </a:bodyPr>
+              <a:lstStyle/>
+              <a:p>
+                <a:pPr/>
+                <a14:m>
+                  <m:oMathPara xmlns:m="http://schemas.openxmlformats.org/officeDocument/2006/math">
+                    <m:oMath>
+                      <m:sSub>
+                        <m:sSubPr>
+                          <m:ctrlPr>
+                            <a:rPr lang="en-US" sz="2800" b="0" i="1" smtClean="0">
+                              <a:latin typeface="Cambria Math" panose="02040503050406030204" pitchFamily="18" charset="0"/>
+                            </a:rPr>
+                          </m:ctrlPr>
+                        </m:sSubPr>
+                        <m:e>
+                          <m:r>
+                            <a:rPr lang="en-US" sz="2800" b="0" i="1" smtClean="0">
+                              <a:latin typeface="Cambria Math" panose="02040503050406030204" pitchFamily="18" charset="0"/>
+                            </a:rPr>
+                            <m:t>𝑣</m:t>
+                          </m:r>
+                        </m:e>
+                        <m:sub>
+                          <m:r>
+                            <a:rPr lang="en-US" sz="2800" b="0" i="1" smtClean="0">
+                              <a:latin typeface="Cambria Math" panose="02040503050406030204" pitchFamily="18" charset="0"/>
+                            </a:rPr>
+                            <m:t>−</m:t>
+                          </m:r>
+                        </m:sub>
+                      </m:sSub>
+                    </m:oMath>
+                  </m:oMathPara>
+                </a14:m>
+                <a:endParaRPr lang="en-IN" sz="2800" dirty="0"/>
+              </a:p>
+            </p:txBody>
+          </p:sp>
+        </mc:Choice>
+        <mc:Fallback>
+          <p:sp>
+            <p:nvSpPr>
+              <p:cNvPr id="38" name="TextBox 37">
+                <a:extLst>
+                  <a:ext uri="{FF2B5EF4-FFF2-40B4-BE49-F238E27FC236}">
+                    <a16:creationId xmlns:a16="http://schemas.microsoft.com/office/drawing/2014/main" id="{4486DF46-C3CD-F039-AD0F-144A7D03BB39}"/>
+                  </a:ext>
+                </a:extLst>
+              </p:cNvPr>
+              <p:cNvSpPr txBox="1">
+                <a:spLocks noRot="1" noChangeAspect="1" noMove="1" noResize="1" noEditPoints="1" noAdjustHandles="1" noChangeArrowheads="1" noChangeShapeType="1" noTextEdit="1"/>
+              </p:cNvSpPr>
+              <p:nvPr/>
+            </p:nvSpPr>
+            <p:spPr>
+              <a:xfrm>
+                <a:off x="4664674" y="3964459"/>
+                <a:ext cx="479427" cy="430887"/>
+              </a:xfrm>
+              <a:prstGeom prst="rect">
+                <a:avLst/>
+              </a:prstGeom>
+              <a:blipFill>
+                <a:blip r:embed="rId5"/>
+                <a:stretch>
+                  <a:fillRect/>
+                </a:stretch>
+              </a:blipFill>
+            </p:spPr>
+            <p:txBody>
+              <a:bodyPr/>
+              <a:lstStyle/>
+              <a:p>
+                <a:r>
+                  <a:rPr lang="en-IN">
+                    <a:noFill/>
+                  </a:rPr>
+                  <a:t> </a:t>
+                </a:r>
+              </a:p>
+            </p:txBody>
+          </p:sp>
+        </mc:Fallback>
+      </mc:AlternateContent>
+      <mc:AlternateContent xmlns:mc="http://schemas.openxmlformats.org/markup-compatibility/2006">
+        <mc:Choice xmlns:a14="http://schemas.microsoft.com/office/drawing/2010/main" Requires="a14">
+          <p:sp>
+            <p:nvSpPr>
+              <p:cNvPr id="40" name="TextBox 39">
+                <a:extLst>
+                  <a:ext uri="{FF2B5EF4-FFF2-40B4-BE49-F238E27FC236}">
+                    <a16:creationId xmlns:a16="http://schemas.microsoft.com/office/drawing/2014/main" id="{808EA4DE-2159-CD6D-A5BC-68F93F0ABB3F}"/>
+                  </a:ext>
+                </a:extLst>
+              </p:cNvPr>
+              <p:cNvSpPr txBox="1"/>
+              <p:nvPr/>
+            </p:nvSpPr>
+            <p:spPr>
+              <a:xfrm>
+                <a:off x="4042165" y="2360648"/>
+                <a:ext cx="297646" cy="430887"/>
+              </a:xfrm>
+              <a:prstGeom prst="rect">
+                <a:avLst/>
+              </a:prstGeom>
+              <a:noFill/>
+            </p:spPr>
+            <p:txBody>
+              <a:bodyPr wrap="none" lIns="0" tIns="0" rIns="0" bIns="0" rtlCol="0">
+                <a:spAutoFit/>
+              </a:bodyPr>
+              <a:lstStyle/>
+              <a:p>
+                <a:pPr/>
+                <a14:m>
+                  <m:oMathPara xmlns:m="http://schemas.openxmlformats.org/officeDocument/2006/math">
+                    <m:oMath>
+                      <m:r>
+                        <a:rPr lang="en-US" sz="2800" b="0" i="1" smtClean="0">
+                          <a:latin typeface="Cambria Math" panose="02040503050406030204" pitchFamily="18" charset="0"/>
+                        </a:rPr>
+                        <m:t>𝑢</m:t>
+                      </m:r>
+                    </m:oMath>
+                  </m:oMathPara>
+                </a14:m>
+                <a:endParaRPr lang="en-IN" sz="2800" dirty="0"/>
+              </a:p>
+            </p:txBody>
+          </p:sp>
+        </mc:Choice>
+        <mc:Fallback>
+          <p:sp>
+            <p:nvSpPr>
+              <p:cNvPr id="40" name="TextBox 39">
+                <a:extLst>
+                  <a:ext uri="{FF2B5EF4-FFF2-40B4-BE49-F238E27FC236}">
+                    <a16:creationId xmlns:a16="http://schemas.microsoft.com/office/drawing/2014/main" id="{808EA4DE-2159-CD6D-A5BC-68F93F0ABB3F}"/>
+                  </a:ext>
+                </a:extLst>
+              </p:cNvPr>
+              <p:cNvSpPr txBox="1">
+                <a:spLocks noRot="1" noChangeAspect="1" noMove="1" noResize="1" noEditPoints="1" noAdjustHandles="1" noChangeArrowheads="1" noChangeShapeType="1" noTextEdit="1"/>
+              </p:cNvSpPr>
+              <p:nvPr/>
+            </p:nvSpPr>
+            <p:spPr>
+              <a:xfrm>
+                <a:off x="4042165" y="2360648"/>
+                <a:ext cx="297646" cy="430887"/>
+              </a:xfrm>
+              <a:prstGeom prst="rect">
+                <a:avLst/>
+              </a:prstGeom>
+              <a:blipFill>
+                <a:blip r:embed="rId6"/>
+                <a:stretch>
+                  <a:fillRect/>
+                </a:stretch>
+              </a:blipFill>
+            </p:spPr>
+            <p:txBody>
+              <a:bodyPr/>
+              <a:lstStyle/>
+              <a:p>
+                <a:r>
+                  <a:rPr lang="en-IN">
+                    <a:noFill/>
+                  </a:rPr>
+                  <a:t> </a:t>
+                </a:r>
+              </a:p>
+            </p:txBody>
+          </p:sp>
+        </mc:Fallback>
+      </mc:AlternateContent>
+    </p:spTree>
+    <p:extLst>
+      <p:ext uri="{BB962C8B-B14F-4D97-AF65-F5344CB8AC3E}">
+        <p14:creationId xmlns:p14="http://schemas.microsoft.com/office/powerpoint/2010/main" val="2793637850"/>
+      </p:ext>
+    </p:extLst>
+  </p:cSld>
+  <p:clrMapOvr>
+    <a:masterClrMapping/>
+  </p:clrMapOvr>
+</p:sld>
+</file>
+
 <file path=ppt/slides/slide2.xml><?xml version="1.0" encoding="utf-8"?>
 <p:sld xmlns:a="http://schemas.openxmlformats.org/drawingml/2006/main" xmlns:r="http://schemas.openxmlformats.org/officeDocument/2006/relationships" xmlns:p="http://schemas.openxmlformats.org/presentationml/2006/main">
   <p:cSld>
@@ -5037,10 +7312,7 @@
                 <a:pPr/>
                 <a14:m>
                   <m:oMathPara xmlns:m="http://schemas.openxmlformats.org/officeDocument/2006/math">
-                    <m:oMathParaPr>
-                      <m:jc m:val="centerGroup"/>
-                    </m:oMathParaPr>
-                    <m:oMath xmlns:m="http://schemas.openxmlformats.org/officeDocument/2006/math">
+                    <m:oMath>
                       <m:sSub>
                         <m:sSubPr>
                           <m:ctrlPr>
@@ -5152,10 +7424,7 @@
                 <a:pPr/>
                 <a14:m>
                   <m:oMathPara xmlns:m="http://schemas.openxmlformats.org/officeDocument/2006/math">
-                    <m:oMathParaPr>
-                      <m:jc m:val="centerGroup"/>
-                    </m:oMathParaPr>
-                    <m:oMath xmlns:m="http://schemas.openxmlformats.org/officeDocument/2006/math">
+                    <m:oMath>
                       <m:sSub>
                         <m:sSubPr>
                           <m:ctrlPr>
@@ -5267,10 +7536,7 @@
                 <a:pPr/>
                 <a14:m>
                   <m:oMathPara xmlns:m="http://schemas.openxmlformats.org/officeDocument/2006/math">
-                    <m:oMathParaPr>
-                      <m:jc m:val="centerGroup"/>
-                    </m:oMathParaPr>
-                    <m:oMath xmlns:m="http://schemas.openxmlformats.org/officeDocument/2006/math">
+                    <m:oMath>
                       <m:sSub>
                         <m:sSubPr>
                           <m:ctrlPr>
@@ -5382,10 +7648,7 @@
                 <a:pPr/>
                 <a14:m>
                   <m:oMathPara xmlns:m="http://schemas.openxmlformats.org/officeDocument/2006/math">
-                    <m:oMathParaPr>
-                      <m:jc m:val="centerGroup"/>
-                    </m:oMathParaPr>
-                    <m:oMath xmlns:m="http://schemas.openxmlformats.org/officeDocument/2006/math">
+                    <m:oMath>
                       <m:r>
                         <a:rPr lang="en-US" sz="2400" b="0" i="1" smtClean="0">
                           <a:latin typeface="Cambria Math" panose="02040503050406030204" pitchFamily="18" charset="0"/>
@@ -5478,10 +7741,7 @@
                 <a:pPr/>
                 <a14:m>
                   <m:oMathPara xmlns:m="http://schemas.openxmlformats.org/officeDocument/2006/math">
-                    <m:oMathParaPr>
-                      <m:jc m:val="centerGroup"/>
-                    </m:oMathParaPr>
-                    <m:oMath xmlns:m="http://schemas.openxmlformats.org/officeDocument/2006/math">
+                    <m:oMath>
                       <m:acc>
                         <m:accPr>
                           <m:chr m:val="⃗"/>
@@ -5586,10 +7846,7 @@
                 <a:pPr/>
                 <a14:m>
                   <m:oMathPara xmlns:m="http://schemas.openxmlformats.org/officeDocument/2006/math">
-                    <m:oMathParaPr>
-                      <m:jc m:val="centerGroup"/>
-                    </m:oMathParaPr>
-                    <m:oMath xmlns:m="http://schemas.openxmlformats.org/officeDocument/2006/math">
+                    <m:oMath>
                       <m:r>
                         <a:rPr lang="en-US" sz="2400" b="0" i="1" smtClean="0">
                           <a:latin typeface="Cambria Math" panose="02040503050406030204" pitchFamily="18" charset="0"/>
@@ -5974,10 +8231,7 @@
                 <a:pPr/>
                 <a14:m>
                   <m:oMathPara xmlns:m="http://schemas.openxmlformats.org/officeDocument/2006/math">
-                    <m:oMathParaPr>
-                      <m:jc m:val="centerGroup"/>
-                    </m:oMathParaPr>
-                    <m:oMath xmlns:m="http://schemas.openxmlformats.org/officeDocument/2006/math">
+                    <m:oMath>
                       <m:acc>
                         <m:accPr>
                           <m:chr m:val="⃗"/>
@@ -6210,10 +8464,7 @@
                 <a:pPr/>
                 <a14:m>
                   <m:oMathPara xmlns:m="http://schemas.openxmlformats.org/officeDocument/2006/math">
-                    <m:oMathParaPr>
-                      <m:jc m:val="centerGroup"/>
-                    </m:oMathParaPr>
-                    <m:oMath xmlns:m="http://schemas.openxmlformats.org/officeDocument/2006/math">
+                    <m:oMath>
                       <m:sSub>
                         <m:sSubPr>
                           <m:ctrlPr>
@@ -6325,10 +8576,7 @@
                 <a:pPr/>
                 <a14:m>
                   <m:oMathPara xmlns:m="http://schemas.openxmlformats.org/officeDocument/2006/math">
-                    <m:oMathParaPr>
-                      <m:jc m:val="centerGroup"/>
-                    </m:oMathParaPr>
-                    <m:oMath xmlns:m="http://schemas.openxmlformats.org/officeDocument/2006/math">
+                    <m:oMath>
                       <m:sSub>
                         <m:sSubPr>
                           <m:ctrlPr>
@@ -6615,10 +8863,7 @@
                 <a:pPr/>
                 <a14:m>
                   <m:oMathPara xmlns:m="http://schemas.openxmlformats.org/officeDocument/2006/math">
-                    <m:oMathParaPr>
-                      <m:jc m:val="centerGroup"/>
-                    </m:oMathParaPr>
-                    <m:oMath xmlns:m="http://schemas.openxmlformats.org/officeDocument/2006/math">
+                    <m:oMath>
                       <m:r>
                         <a:rPr lang="en-US" sz="2400" b="0" i="1" smtClean="0">
                           <a:latin typeface="Cambria Math" panose="02040503050406030204" pitchFamily="18" charset="0"/>
@@ -6758,10 +9003,7 @@
                 <a:pPr/>
                 <a14:m>
                   <m:oMathPara xmlns:m="http://schemas.openxmlformats.org/officeDocument/2006/math">
-                    <m:oMathParaPr>
-                      <m:jc m:val="centerGroup"/>
-                    </m:oMathParaPr>
-                    <m:oMath xmlns:m="http://schemas.openxmlformats.org/officeDocument/2006/math">
+                    <m:oMath>
                       <m:r>
                         <a:rPr lang="en-US" sz="2400" b="0" i="1" smtClean="0">
                           <a:latin typeface="Cambria Math" panose="02040503050406030204" pitchFamily="18" charset="0"/>
@@ -7034,10 +9276,7 @@
                 <a:pPr/>
                 <a14:m>
                   <m:oMathPara xmlns:m="http://schemas.openxmlformats.org/officeDocument/2006/math">
-                    <m:oMathParaPr>
-                      <m:jc m:val="centerGroup"/>
-                    </m:oMathParaPr>
-                    <m:oMath xmlns:m="http://schemas.openxmlformats.org/officeDocument/2006/math">
+                    <m:oMath>
                       <m:f>
                         <m:fPr>
                           <m:ctrlPr>
@@ -9904,10 +12143,7 @@
                 <a:pPr/>
                 <a14:m>
                   <m:oMathPara xmlns:m="http://schemas.openxmlformats.org/officeDocument/2006/math">
-                    <m:oMathParaPr>
-                      <m:jc m:val="centerGroup"/>
-                    </m:oMathParaPr>
-                    <m:oMath xmlns:m="http://schemas.openxmlformats.org/officeDocument/2006/math">
+                    <m:oMath>
                       <m:sSub>
                         <m:sSubPr>
                           <m:ctrlPr>
@@ -10030,10 +12266,7 @@
                 <a:pPr/>
                 <a14:m>
                   <m:oMathPara xmlns:m="http://schemas.openxmlformats.org/officeDocument/2006/math">
-                    <m:oMathParaPr>
-                      <m:jc m:val="centerGroup"/>
-                    </m:oMathParaPr>
-                    <m:oMath xmlns:m="http://schemas.openxmlformats.org/officeDocument/2006/math">
+                    <m:oMath>
                       <m:sSub>
                         <m:sSubPr>
                           <m:ctrlPr>
@@ -10156,10 +12389,7 @@
                 <a:pPr/>
                 <a14:m>
                   <m:oMathPara xmlns:m="http://schemas.openxmlformats.org/officeDocument/2006/math">
-                    <m:oMathParaPr>
-                      <m:jc m:val="centerGroup"/>
-                    </m:oMathParaPr>
-                    <m:oMath xmlns:m="http://schemas.openxmlformats.org/officeDocument/2006/math">
+                    <m:oMath>
                       <m:sSub>
                         <m:sSubPr>
                           <m:ctrlPr>
@@ -10282,10 +12512,7 @@
                 <a:pPr/>
                 <a14:m>
                   <m:oMathPara xmlns:m="http://schemas.openxmlformats.org/officeDocument/2006/math">
-                    <m:oMathParaPr>
-                      <m:jc m:val="centerGroup"/>
-                    </m:oMathParaPr>
-                    <m:oMath xmlns:m="http://schemas.openxmlformats.org/officeDocument/2006/math">
+                    <m:oMath>
                       <m:sSub>
                         <m:sSubPr>
                           <m:ctrlPr>
@@ -10408,10 +12635,7 @@
                 <a:pPr/>
                 <a14:m>
                   <m:oMathPara xmlns:m="http://schemas.openxmlformats.org/officeDocument/2006/math">
-                    <m:oMathParaPr>
-                      <m:jc m:val="centerGroup"/>
-                    </m:oMathParaPr>
-                    <m:oMath xmlns:m="http://schemas.openxmlformats.org/officeDocument/2006/math">
+                    <m:oMath>
                       <m:sSub>
                         <m:sSubPr>
                           <m:ctrlPr>
@@ -10534,10 +12758,7 @@
                 <a:pPr/>
                 <a14:m>
                   <m:oMathPara xmlns:m="http://schemas.openxmlformats.org/officeDocument/2006/math">
-                    <m:oMathParaPr>
-                      <m:jc m:val="centerGroup"/>
-                    </m:oMathParaPr>
-                    <m:oMath xmlns:m="http://schemas.openxmlformats.org/officeDocument/2006/math">
+                    <m:oMath>
                       <m:sSub>
                         <m:sSubPr>
                           <m:ctrlPr>
@@ -10660,10 +12881,7 @@
                 <a:pPr/>
                 <a14:m>
                   <m:oMathPara xmlns:m="http://schemas.openxmlformats.org/officeDocument/2006/math">
-                    <m:oMathParaPr>
-                      <m:jc m:val="centerGroup"/>
-                    </m:oMathParaPr>
-                    <m:oMath xmlns:m="http://schemas.openxmlformats.org/officeDocument/2006/math">
+                    <m:oMath>
                       <m:sSub>
                         <m:sSubPr>
                           <m:ctrlPr>
@@ -10786,10 +13004,7 @@
                 <a:pPr/>
                 <a14:m>
                   <m:oMathPara xmlns:m="http://schemas.openxmlformats.org/officeDocument/2006/math">
-                    <m:oMathParaPr>
-                      <m:jc m:val="centerGroup"/>
-                    </m:oMathParaPr>
-                    <m:oMath xmlns:m="http://schemas.openxmlformats.org/officeDocument/2006/math">
+                    <m:oMath>
                       <m:sSub>
                         <m:sSubPr>
                           <m:ctrlPr>
@@ -10912,10 +13127,7 @@
                 <a:pPr/>
                 <a14:m>
                   <m:oMathPara xmlns:m="http://schemas.openxmlformats.org/officeDocument/2006/math">
-                    <m:oMathParaPr>
-                      <m:jc m:val="centerGroup"/>
-                    </m:oMathParaPr>
-                    <m:oMath xmlns:m="http://schemas.openxmlformats.org/officeDocument/2006/math">
+                    <m:oMath>
                       <m:sSub>
                         <m:sSubPr>
                           <m:ctrlPr>
@@ -11082,10 +13294,7 @@
                 <a:pPr/>
                 <a14:m>
                   <m:oMathPara xmlns:m="http://schemas.openxmlformats.org/officeDocument/2006/math">
-                    <m:oMathParaPr>
-                      <m:jc m:val="centerGroup"/>
-                    </m:oMathParaPr>
-                    <m:oMath xmlns:m="http://schemas.openxmlformats.org/officeDocument/2006/math">
+                    <m:oMath>
                       <m:sSub>
                         <m:sSubPr>
                           <m:ctrlPr>
@@ -12284,10 +14493,7 @@
                 <a:pPr/>
                 <a14:m>
                   <m:oMathPara xmlns:m="http://schemas.openxmlformats.org/officeDocument/2006/math">
-                    <m:oMathParaPr>
-                      <m:jc m:val="centerGroup"/>
-                    </m:oMathParaPr>
-                    <m:oMath xmlns:m="http://schemas.openxmlformats.org/officeDocument/2006/math">
+                    <m:oMath>
                       <m:r>
                         <a:rPr lang="en-US" sz="2000" b="0" i="1" smtClean="0">
                           <a:latin typeface="Cambria Math" panose="02040503050406030204" pitchFamily="18" charset="0"/>
@@ -12380,10 +14586,7 @@
                 <a:pPr/>
                 <a14:m>
                   <m:oMathPara xmlns:m="http://schemas.openxmlformats.org/officeDocument/2006/math">
-                    <m:oMathParaPr>
-                      <m:jc m:val="centerGroup"/>
-                    </m:oMathParaPr>
-                    <m:oMath xmlns:m="http://schemas.openxmlformats.org/officeDocument/2006/math">
+                    <m:oMath>
                       <m:r>
                         <a:rPr lang="en-US" sz="2000" b="0" i="1" smtClean="0">
                           <a:latin typeface="Cambria Math" panose="02040503050406030204" pitchFamily="18" charset="0"/>
@@ -12470,10 +14673,7 @@
                 <a:pPr/>
                 <a14:m>
                   <m:oMathPara xmlns:m="http://schemas.openxmlformats.org/officeDocument/2006/math">
-                    <m:oMathParaPr>
-                      <m:jc m:val="centerGroup"/>
-                    </m:oMathParaPr>
-                    <m:oMath xmlns:m="http://schemas.openxmlformats.org/officeDocument/2006/math">
+                    <m:oMath>
                       <m:r>
                         <a:rPr lang="en-US" sz="2000" b="0" i="1" smtClean="0">
                           <a:latin typeface="Cambria Math" panose="02040503050406030204" pitchFamily="18" charset="0"/>
@@ -12554,10 +14754,7 @@
                 <a:pPr/>
                 <a14:m>
                   <m:oMathPara xmlns:m="http://schemas.openxmlformats.org/officeDocument/2006/math">
-                    <m:oMathParaPr>
-                      <m:jc m:val="centerGroup"/>
-                    </m:oMathParaPr>
-                    <m:oMath xmlns:m="http://schemas.openxmlformats.org/officeDocument/2006/math">
+                    <m:oMath>
                       <m:r>
                         <a:rPr lang="en-US" sz="2000" b="0" i="1" smtClean="0">
                           <a:latin typeface="Cambria Math" panose="02040503050406030204" pitchFamily="18" charset="0"/>
@@ -12638,10 +14835,7 @@
                 <a:pPr/>
                 <a14:m>
                   <m:oMathPara xmlns:m="http://schemas.openxmlformats.org/officeDocument/2006/math">
-                    <m:oMathParaPr>
-                      <m:jc m:val="centerGroup"/>
-                    </m:oMathParaPr>
-                    <m:oMath xmlns:m="http://schemas.openxmlformats.org/officeDocument/2006/math">
+                    <m:oMath>
                       <m:r>
                         <a:rPr lang="en-US" sz="2000" b="0" i="1" smtClean="0">
                           <a:latin typeface="Cambria Math" panose="02040503050406030204" pitchFamily="18" charset="0"/>
@@ -12734,10 +14928,7 @@
                 <a:pPr/>
                 <a14:m>
                   <m:oMathPara xmlns:m="http://schemas.openxmlformats.org/officeDocument/2006/math">
-                    <m:oMathParaPr>
-                      <m:jc m:val="centerGroup"/>
-                    </m:oMathParaPr>
-                    <m:oMath xmlns:m="http://schemas.openxmlformats.org/officeDocument/2006/math">
+                    <m:oMath>
                       <m:r>
                         <a:rPr lang="en-US" sz="2000" b="0" i="1" smtClean="0">
                           <a:latin typeface="Cambria Math" panose="02040503050406030204" pitchFamily="18" charset="0"/>
@@ -12830,10 +15021,7 @@
                 <a:pPr/>
                 <a14:m>
                   <m:oMathPara xmlns:m="http://schemas.openxmlformats.org/officeDocument/2006/math">
-                    <m:oMathParaPr>
-                      <m:jc m:val="centerGroup"/>
-                    </m:oMathParaPr>
-                    <m:oMath xmlns:m="http://schemas.openxmlformats.org/officeDocument/2006/math">
+                    <m:oMath>
                       <m:r>
                         <a:rPr lang="en-US" sz="2000" b="0" i="1" smtClean="0">
                           <a:latin typeface="Cambria Math" panose="02040503050406030204" pitchFamily="18" charset="0"/>
@@ -12926,10 +15114,7 @@
                 <a:pPr/>
                 <a14:m>
                   <m:oMathPara xmlns:m="http://schemas.openxmlformats.org/officeDocument/2006/math">
-                    <m:oMathParaPr>
-                      <m:jc m:val="centerGroup"/>
-                    </m:oMathParaPr>
-                    <m:oMath xmlns:m="http://schemas.openxmlformats.org/officeDocument/2006/math">
+                    <m:oMath>
                       <m:r>
                         <a:rPr lang="en-US" sz="2000" b="0" i="1" smtClean="0">
                           <a:latin typeface="Cambria Math" panose="02040503050406030204" pitchFamily="18" charset="0"/>
@@ -13121,16 +15306,13 @@
                 <a:pPr/>
                 <a14:m>
                   <m:oMathPara xmlns:m="http://schemas.openxmlformats.org/officeDocument/2006/math">
-                    <m:oMathParaPr>
-                      <m:jc m:val="centerGroup"/>
-                    </m:oMathParaPr>
-                    <m:oMath xmlns:m="http://schemas.openxmlformats.org/officeDocument/2006/math">
+                    <m:oMath>
                       <m:d>
                         <m:dPr>
                           <m:begChr m:val="⟨"/>
                           <m:endChr m:val="⟩"/>
                           <m:ctrlPr>
-                            <a:rPr lang="en-US" i="1" smtClean="0">
+                            <a:rPr lang="en-US" b="0" i="1" smtClean="0">
                               <a:latin typeface="Cambria Math" panose="02040503050406030204" pitchFamily="18" charset="0"/>
                             </a:rPr>
                           </m:ctrlPr>
@@ -13385,10 +15567,7 @@
                 <a:pPr/>
                 <a14:m>
                   <m:oMathPara xmlns:m="http://schemas.openxmlformats.org/officeDocument/2006/math">
-                    <m:oMathParaPr>
-                      <m:jc m:val="centerGroup"/>
-                    </m:oMathParaPr>
-                    <m:oMath xmlns:m="http://schemas.openxmlformats.org/officeDocument/2006/math">
+                    <m:oMath>
                       <m:r>
                         <a:rPr lang="en-US" sz="2800" i="1" smtClean="0">
                           <a:latin typeface="Cambria Math" panose="02040503050406030204" pitchFamily="18" charset="0"/>
@@ -13467,16 +15646,12 @@
           <a:p>
             <a:pPr algn="ctr"/>
             <a:r>
-              <a:rPr lang="en-US" sz="2800" i="1" dirty="0" smtClean="0">
+              <a:rPr lang="en-US" sz="2800" i="1" dirty="0">
                 <a:latin typeface="Cambria Math" panose="02040503050406030204" pitchFamily="18" charset="0"/>
                 <a:ea typeface="Cambria Math" panose="02040503050406030204" pitchFamily="18" charset="0"/>
               </a:rPr>
               <a:t>O</a:t>
             </a:r>
-            <a:endParaRPr lang="en-US" sz="2800" i="1" dirty="0">
-              <a:latin typeface="Cambria Math" panose="02040503050406030204" pitchFamily="18" charset="0"/>
-              <a:ea typeface="Cambria Math" panose="02040503050406030204" pitchFamily="18" charset="0"/>
-            </a:endParaRPr>
           </a:p>
         </p:txBody>
       </p:sp>
@@ -13507,16 +15682,13 @@
                 <a:pPr/>
                 <a14:m>
                   <m:oMathPara xmlns:m="http://schemas.openxmlformats.org/officeDocument/2006/math">
-                    <m:oMathParaPr>
-                      <m:jc m:val="centerGroup"/>
-                    </m:oMathParaPr>
-                    <m:oMath xmlns:m="http://schemas.openxmlformats.org/officeDocument/2006/math">
+                    <m:oMath>
                       <m:d>
                         <m:dPr>
                           <m:begChr m:val="⟨"/>
                           <m:endChr m:val="⟩"/>
                           <m:ctrlPr>
-                            <a:rPr lang="en-US" sz="2800" i="1" smtClean="0">
+                            <a:rPr lang="en-US" sz="2800" b="0" i="1" smtClean="0">
                               <a:latin typeface="Cambria Math" panose="02040503050406030204" pitchFamily="18" charset="0"/>
                             </a:rPr>
                           </m:ctrlPr>
@@ -13604,16 +15776,13 @@
                 <a:pPr/>
                 <a14:m>
                   <m:oMathPara xmlns:m="http://schemas.openxmlformats.org/officeDocument/2006/math">
-                    <m:oMathParaPr>
-                      <m:jc m:val="centerGroup"/>
-                    </m:oMathParaPr>
-                    <m:oMath xmlns:m="http://schemas.openxmlformats.org/officeDocument/2006/math">
+                    <m:oMath>
                       <m:d>
                         <m:dPr>
                           <m:begChr m:val="⟨"/>
                           <m:endChr m:val="⟩"/>
                           <m:ctrlPr>
-                            <a:rPr lang="en-US" sz="2800" i="1" smtClean="0">
+                            <a:rPr lang="en-US" sz="2800" b="0" i="1" smtClean="0">
                               <a:latin typeface="Cambria Math" panose="02040503050406030204" pitchFamily="18" charset="0"/>
                             </a:rPr>
                           </m:ctrlPr>
@@ -13740,14 +15909,11 @@
                 <a:pPr/>
                 <a14:m>
                   <m:oMathPara xmlns:m="http://schemas.openxmlformats.org/officeDocument/2006/math">
-                    <m:oMathParaPr>
-                      <m:jc m:val="centerGroup"/>
-                    </m:oMathParaPr>
-                    <m:oMath xmlns:m="http://schemas.openxmlformats.org/officeDocument/2006/math">
+                    <m:oMath>
                       <m:sSub>
                         <m:sSubPr>
                           <m:ctrlPr>
-                            <a:rPr lang="en-US" sz="2800" i="1" smtClean="0">
+                            <a:rPr lang="en-US" sz="2800" b="0" i="1" smtClean="0">
                               <a:latin typeface="Cambria Math" panose="02040503050406030204" pitchFamily="18" charset="0"/>
                             </a:rPr>
                           </m:ctrlPr>
@@ -13840,16 +16006,12 @@
           <a:p>
             <a:pPr algn="ctr"/>
             <a:r>
-              <a:rPr lang="en-US" sz="2800" i="1" dirty="0" smtClean="0">
+              <a:rPr lang="en-US" sz="2800" i="1" dirty="0">
                 <a:latin typeface="Cambria Math" panose="02040503050406030204" pitchFamily="18" charset="0"/>
                 <a:ea typeface="Cambria Math" panose="02040503050406030204" pitchFamily="18" charset="0"/>
               </a:rPr>
               <a:t>A</a:t>
             </a:r>
-            <a:endParaRPr lang="en-US" sz="2800" i="1" dirty="0">
-              <a:latin typeface="Cambria Math" panose="02040503050406030204" pitchFamily="18" charset="0"/>
-              <a:ea typeface="Cambria Math" panose="02040503050406030204" pitchFamily="18" charset="0"/>
-            </a:endParaRPr>
           </a:p>
         </p:txBody>
       </p:sp>
@@ -13877,16 +16039,12 @@
           <a:p>
             <a:pPr algn="ctr"/>
             <a:r>
-              <a:rPr lang="en-US" sz="2800" i="1" dirty="0" smtClean="0">
+              <a:rPr lang="en-US" sz="2800" i="1" dirty="0">
                 <a:latin typeface="Cambria Math" panose="02040503050406030204" pitchFamily="18" charset="0"/>
                 <a:ea typeface="Cambria Math" panose="02040503050406030204" pitchFamily="18" charset="0"/>
               </a:rPr>
               <a:t>B</a:t>
             </a:r>
-            <a:endParaRPr lang="en-US" sz="2800" i="1" dirty="0">
-              <a:latin typeface="Cambria Math" panose="02040503050406030204" pitchFamily="18" charset="0"/>
-              <a:ea typeface="Cambria Math" panose="02040503050406030204" pitchFamily="18" charset="0"/>
-            </a:endParaRPr>
           </a:p>
         </p:txBody>
       </p:sp>
@@ -14174,8 +16332,8 @@
           </a:p>
         </p:txBody>
       </p:sp>
-      <mc:AlternateContent xmlns:mc="http://schemas.openxmlformats.org/markup-compatibility/2006">
-        <mc:Choice xmlns:a14="http://schemas.microsoft.com/office/drawing/2010/main" Requires="a14">
+      <mc:AlternateContent xmlns:mc="http://schemas.openxmlformats.org/markup-compatibility/2006" xmlns:a14="http://schemas.microsoft.com/office/drawing/2010/main">
+        <mc:Choice Requires="a14">
           <p:sp>
             <p:nvSpPr>
               <p:cNvPr id="11" name="TextBox 10"/>
@@ -14198,12 +16356,10 @@
               </a:bodyPr>
               <a:lstStyle/>
               <a:p>
+                <a:pPr/>
                 <a14:m>
                   <m:oMathPara xmlns:m="http://schemas.openxmlformats.org/officeDocument/2006/math">
-                    <m:oMathParaPr>
-                      <m:jc m:val="centerGroup"/>
-                    </m:oMathParaPr>
-                    <m:oMath xmlns:m="http://schemas.openxmlformats.org/officeDocument/2006/math">
+                    <m:oMath>
                       <m:r>
                         <a:rPr lang="en-US" sz="2400" b="0" i="1" smtClean="0">
                           <a:solidFill>
@@ -14221,7 +16377,7 @@
             </p:txBody>
           </p:sp>
         </mc:Choice>
-        <mc:Fallback>
+        <mc:Fallback xmlns="">
           <p:sp>
             <p:nvSpPr>
               <p:cNvPr id="11" name="TextBox 10"/>
@@ -14260,8 +16416,8 @@
           </p:sp>
         </mc:Fallback>
       </mc:AlternateContent>
-      <mc:AlternateContent xmlns:mc="http://schemas.openxmlformats.org/markup-compatibility/2006">
-        <mc:Choice xmlns:a14="http://schemas.microsoft.com/office/drawing/2010/main" Requires="a14">
+      <mc:AlternateContent xmlns:mc="http://schemas.openxmlformats.org/markup-compatibility/2006" xmlns:a14="http://schemas.microsoft.com/office/drawing/2010/main">
+        <mc:Choice Requires="a14">
           <p:sp>
             <p:nvSpPr>
               <p:cNvPr id="12" name="TextBox 11"/>
@@ -14284,12 +16440,10 @@
               </a:bodyPr>
               <a:lstStyle/>
               <a:p>
+                <a:pPr/>
                 <a14:m>
                   <m:oMathPara xmlns:m="http://schemas.openxmlformats.org/officeDocument/2006/math">
-                    <m:oMathParaPr>
-                      <m:jc m:val="centerGroup"/>
-                    </m:oMathParaPr>
-                    <m:oMath xmlns:m="http://schemas.openxmlformats.org/officeDocument/2006/math">
+                    <m:oMath>
                       <m:r>
                         <a:rPr lang="en-US" sz="2400" b="0" i="1" smtClean="0">
                           <a:solidFill>
@@ -14316,7 +16470,7 @@
             </p:txBody>
           </p:sp>
         </mc:Choice>
-        <mc:Fallback>
+        <mc:Fallback xmlns="">
           <p:sp>
             <p:nvSpPr>
               <p:cNvPr id="12" name="TextBox 11"/>
@@ -14355,8 +16509,8 @@
           </p:sp>
         </mc:Fallback>
       </mc:AlternateContent>
-      <mc:AlternateContent xmlns:mc="http://schemas.openxmlformats.org/markup-compatibility/2006">
-        <mc:Choice xmlns:a14="http://schemas.microsoft.com/office/drawing/2010/main" Requires="a14">
+      <mc:AlternateContent xmlns:mc="http://schemas.openxmlformats.org/markup-compatibility/2006" xmlns:a14="http://schemas.microsoft.com/office/drawing/2010/main">
+        <mc:Choice Requires="a14">
           <p:sp>
             <p:nvSpPr>
               <p:cNvPr id="13" name="TextBox 12"/>
@@ -14379,12 +16533,10 @@
               </a:bodyPr>
               <a:lstStyle/>
               <a:p>
+                <a:pPr/>
                 <a14:m>
                   <m:oMathPara xmlns:m="http://schemas.openxmlformats.org/officeDocument/2006/math">
-                    <m:oMathParaPr>
-                      <m:jc m:val="centerGroup"/>
-                    </m:oMathParaPr>
-                    <m:oMath xmlns:m="http://schemas.openxmlformats.org/officeDocument/2006/math">
+                    <m:oMath>
                       <m:r>
                         <a:rPr lang="en-US" sz="2400" b="0" i="1" smtClean="0">
                           <a:solidFill>
@@ -14403,7 +16555,7 @@
             </p:txBody>
           </p:sp>
         </mc:Choice>
-        <mc:Fallback>
+        <mc:Fallback xmlns="">
           <p:sp>
             <p:nvSpPr>
               <p:cNvPr id="13" name="TextBox 12"/>
@@ -14580,8 +16732,8 @@
           </a:fontRef>
         </p:style>
       </p:cxnSp>
-      <mc:AlternateContent xmlns:mc="http://schemas.openxmlformats.org/markup-compatibility/2006">
-        <mc:Choice xmlns:a14="http://schemas.microsoft.com/office/drawing/2010/main" Requires="a14">
+      <mc:AlternateContent xmlns:mc="http://schemas.openxmlformats.org/markup-compatibility/2006" xmlns:a14="http://schemas.microsoft.com/office/drawing/2010/main">
+        <mc:Choice Requires="a14">
           <p:sp>
             <p:nvSpPr>
               <p:cNvPr id="25" name="TextBox 24"/>
@@ -14604,12 +16756,10 @@
               </a:bodyPr>
               <a:lstStyle/>
               <a:p>
+                <a:pPr/>
                 <a14:m>
                   <m:oMathPara xmlns:m="http://schemas.openxmlformats.org/officeDocument/2006/math">
-                    <m:oMathParaPr>
-                      <m:jc m:val="centerGroup"/>
-                    </m:oMathParaPr>
-                    <m:oMath xmlns:m="http://schemas.openxmlformats.org/officeDocument/2006/math">
+                    <m:oMath>
                       <m:r>
                         <a:rPr lang="en-US" sz="2400" b="0" i="1" smtClean="0">
                           <a:latin typeface="Cambria Math" panose="02040503050406030204" pitchFamily="18" charset="0"/>
@@ -14624,7 +16774,7 @@
             </p:txBody>
           </p:sp>
         </mc:Choice>
-        <mc:Fallback>
+        <mc:Fallback xmlns="">
           <p:sp>
             <p:nvSpPr>
               <p:cNvPr id="25" name="TextBox 24"/>
@@ -14766,8 +16916,8 @@
           </a:p>
         </p:txBody>
       </p:sp>
-      <mc:AlternateContent xmlns:mc="http://schemas.openxmlformats.org/markup-compatibility/2006">
-        <mc:Choice xmlns:a14="http://schemas.microsoft.com/office/drawing/2010/main" Requires="a14">
+      <mc:AlternateContent xmlns:mc="http://schemas.openxmlformats.org/markup-compatibility/2006" xmlns:a14="http://schemas.microsoft.com/office/drawing/2010/main">
+        <mc:Choice Requires="a14">
           <p:sp>
             <p:nvSpPr>
               <p:cNvPr id="28" name="TextBox 27"/>
@@ -14790,12 +16940,10 @@
               </a:bodyPr>
               <a:lstStyle/>
               <a:p>
+                <a:pPr/>
                 <a14:m>
                   <m:oMathPara xmlns:m="http://schemas.openxmlformats.org/officeDocument/2006/math">
-                    <m:oMathParaPr>
-                      <m:jc m:val="centerGroup"/>
-                    </m:oMathParaPr>
-                    <m:oMath xmlns:m="http://schemas.openxmlformats.org/officeDocument/2006/math">
+                    <m:oMath>
                       <m:r>
                         <a:rPr lang="en-US" sz="2400" b="0" i="1" smtClean="0">
                           <a:latin typeface="Cambria Math" panose="02040503050406030204" pitchFamily="18" charset="0"/>
@@ -14818,7 +16966,7 @@
                       <m:f>
                         <m:fPr>
                           <m:ctrlPr>
-                            <a:rPr lang="en-US" sz="2400" b="0" i="1" smtClean="0">
+                            <a:rPr lang="en-US" sz="2400" b="0" i="0" smtClean="0">
                               <a:latin typeface="Cambria Math" panose="02040503050406030204" pitchFamily="18" charset="0"/>
                             </a:rPr>
                           </m:ctrlPr>
@@ -14866,7 +17014,7 @@
             </p:txBody>
           </p:sp>
         </mc:Choice>
-        <mc:Fallback>
+        <mc:Fallback xmlns="">
           <p:sp>
             <p:nvSpPr>
               <p:cNvPr id="28" name="TextBox 27"/>
@@ -14905,8 +17053,8 @@
           </p:sp>
         </mc:Fallback>
       </mc:AlternateContent>
-      <mc:AlternateContent xmlns:mc="http://schemas.openxmlformats.org/markup-compatibility/2006">
-        <mc:Choice xmlns:a14="http://schemas.microsoft.com/office/drawing/2010/main" Requires="a14">
+      <mc:AlternateContent xmlns:mc="http://schemas.openxmlformats.org/markup-compatibility/2006" xmlns:a14="http://schemas.microsoft.com/office/drawing/2010/main">
+        <mc:Choice Requires="a14">
           <p:sp>
             <p:nvSpPr>
               <p:cNvPr id="31" name="TextBox 30"/>
@@ -14929,12 +17077,10 @@
               </a:bodyPr>
               <a:lstStyle/>
               <a:p>
+                <a:pPr/>
                 <a14:m>
                   <m:oMathPara xmlns:m="http://schemas.openxmlformats.org/officeDocument/2006/math">
-                    <m:oMathParaPr>
-                      <m:jc m:val="centerGroup"/>
-                    </m:oMathParaPr>
-                    <m:oMath xmlns:m="http://schemas.openxmlformats.org/officeDocument/2006/math">
+                    <m:oMath>
                       <m:r>
                         <a:rPr lang="en-US" sz="2400" i="1">
                           <a:latin typeface="Cambria Math" panose="02040503050406030204" pitchFamily="18" charset="0"/>
@@ -14950,7 +17096,7 @@
             </p:txBody>
           </p:sp>
         </mc:Choice>
-        <mc:Fallback>
+        <mc:Fallback xmlns="">
           <p:sp>
             <p:nvSpPr>
               <p:cNvPr id="31" name="TextBox 30"/>
@@ -15261,8 +17407,8 @@
           </a:p>
         </p:txBody>
       </p:sp>
-      <mc:AlternateContent xmlns:mc="http://schemas.openxmlformats.org/markup-compatibility/2006">
-        <mc:Choice xmlns:a14="http://schemas.microsoft.com/office/drawing/2010/main" Requires="a14">
+      <mc:AlternateContent xmlns:mc="http://schemas.openxmlformats.org/markup-compatibility/2006" xmlns:a14="http://schemas.microsoft.com/office/drawing/2010/main">
+        <mc:Choice Requires="a14">
           <p:sp>
             <p:nvSpPr>
               <p:cNvPr id="35" name="TextBox 34"/>
@@ -15285,12 +17431,10 @@
               </a:bodyPr>
               <a:lstStyle/>
               <a:p>
+                <a:pPr/>
                 <a14:m>
                   <m:oMathPara xmlns:m="http://schemas.openxmlformats.org/officeDocument/2006/math">
-                    <m:oMathParaPr>
-                      <m:jc m:val="centerGroup"/>
-                    </m:oMathParaPr>
-                    <m:oMath xmlns:m="http://schemas.openxmlformats.org/officeDocument/2006/math">
+                    <m:oMath>
                       <m:r>
                         <a:rPr lang="en-US" sz="2400" b="0" i="1" smtClean="0">
                           <a:latin typeface="Cambria Math" panose="02040503050406030204" pitchFamily="18" charset="0"/>
@@ -15313,7 +17457,7 @@
                       <m:f>
                         <m:fPr>
                           <m:ctrlPr>
-                            <a:rPr lang="en-US" sz="2400" b="0" i="1" smtClean="0">
+                            <a:rPr lang="en-US" sz="2400" b="0" i="0" smtClean="0">
                               <a:latin typeface="Cambria Math" panose="02040503050406030204" pitchFamily="18" charset="0"/>
                             </a:rPr>
                           </m:ctrlPr>
@@ -15361,7 +17505,7 @@
             </p:txBody>
           </p:sp>
         </mc:Choice>
-        <mc:Fallback>
+        <mc:Fallback xmlns="">
           <p:sp>
             <p:nvSpPr>
               <p:cNvPr id="35" name="TextBox 34"/>
@@ -15995,8 +18139,8 @@
           </a:fontRef>
         </p:style>
       </p:cxnSp>
-      <mc:AlternateContent xmlns:mc="http://schemas.openxmlformats.org/markup-compatibility/2006">
-        <mc:Choice xmlns:a14="http://schemas.microsoft.com/office/drawing/2010/main" Requires="a14">
+      <mc:AlternateContent xmlns:mc="http://schemas.openxmlformats.org/markup-compatibility/2006" xmlns:a14="http://schemas.microsoft.com/office/drawing/2010/main">
+        <mc:Choice Requires="a14">
           <p:sp>
             <p:nvSpPr>
               <p:cNvPr id="11" name="TextBox 10"/>
@@ -16019,12 +18163,10 @@
               </a:bodyPr>
               <a:lstStyle/>
               <a:p>
+                <a:pPr/>
                 <a14:m>
                   <m:oMathPara xmlns:m="http://schemas.openxmlformats.org/officeDocument/2006/math">
-                    <m:oMathParaPr>
-                      <m:jc m:val="centerGroup"/>
-                    </m:oMathParaPr>
-                    <m:oMath xmlns:m="http://schemas.openxmlformats.org/officeDocument/2006/math">
+                    <m:oMath>
                       <m:r>
                         <a:rPr lang="en-US" sz="2400" b="0" i="1" smtClean="0">
                           <a:solidFill>
@@ -16042,7 +18184,7 @@
             </p:txBody>
           </p:sp>
         </mc:Choice>
-        <mc:Fallback>
+        <mc:Fallback xmlns="">
           <p:sp>
             <p:nvSpPr>
               <p:cNvPr id="11" name="TextBox 10"/>
@@ -16081,8 +18223,8 @@
           </p:sp>
         </mc:Fallback>
       </mc:AlternateContent>
-      <mc:AlternateContent xmlns:mc="http://schemas.openxmlformats.org/markup-compatibility/2006">
-        <mc:Choice xmlns:a14="http://schemas.microsoft.com/office/drawing/2010/main" Requires="a14">
+      <mc:AlternateContent xmlns:mc="http://schemas.openxmlformats.org/markup-compatibility/2006" xmlns:a14="http://schemas.microsoft.com/office/drawing/2010/main">
+        <mc:Choice Requires="a14">
           <p:sp>
             <p:nvSpPr>
               <p:cNvPr id="12" name="TextBox 11"/>
@@ -16105,12 +18247,10 @@
               </a:bodyPr>
               <a:lstStyle/>
               <a:p>
+                <a:pPr/>
                 <a14:m>
                   <m:oMathPara xmlns:m="http://schemas.openxmlformats.org/officeDocument/2006/math">
-                    <m:oMathParaPr>
-                      <m:jc m:val="centerGroup"/>
-                    </m:oMathParaPr>
-                    <m:oMath xmlns:m="http://schemas.openxmlformats.org/officeDocument/2006/math">
+                    <m:oMath>
                       <m:r>
                         <a:rPr lang="en-US" sz="2400" b="0" i="1" smtClean="0">
                           <a:solidFill>
@@ -16137,7 +18277,7 @@
             </p:txBody>
           </p:sp>
         </mc:Choice>
-        <mc:Fallback>
+        <mc:Fallback xmlns="">
           <p:sp>
             <p:nvSpPr>
               <p:cNvPr id="12" name="TextBox 11"/>
@@ -16176,8 +18316,8 @@
           </p:sp>
         </mc:Fallback>
       </mc:AlternateContent>
-      <mc:AlternateContent xmlns:mc="http://schemas.openxmlformats.org/markup-compatibility/2006">
-        <mc:Choice xmlns:a14="http://schemas.microsoft.com/office/drawing/2010/main" Requires="a14">
+      <mc:AlternateContent xmlns:mc="http://schemas.openxmlformats.org/markup-compatibility/2006" xmlns:a14="http://schemas.microsoft.com/office/drawing/2010/main">
+        <mc:Choice Requires="a14">
           <p:sp>
             <p:nvSpPr>
               <p:cNvPr id="13" name="TextBox 12"/>
@@ -16200,12 +18340,10 @@
               </a:bodyPr>
               <a:lstStyle/>
               <a:p>
+                <a:pPr/>
                 <a14:m>
                   <m:oMathPara xmlns:m="http://schemas.openxmlformats.org/officeDocument/2006/math">
-                    <m:oMathParaPr>
-                      <m:jc m:val="centerGroup"/>
-                    </m:oMathParaPr>
-                    <m:oMath xmlns:m="http://schemas.openxmlformats.org/officeDocument/2006/math">
+                    <m:oMath>
                       <m:r>
                         <a:rPr lang="en-US" sz="2400" b="0" i="1" smtClean="0">
                           <a:solidFill>
@@ -16223,7 +18361,7 @@
             </p:txBody>
           </p:sp>
         </mc:Choice>
-        <mc:Fallback>
+        <mc:Fallback xmlns="">
           <p:sp>
             <p:nvSpPr>
               <p:cNvPr id="13" name="TextBox 12"/>
@@ -16262,8 +18400,8 @@
           </p:sp>
         </mc:Fallback>
       </mc:AlternateContent>
-      <mc:AlternateContent xmlns:mc="http://schemas.openxmlformats.org/markup-compatibility/2006">
-        <mc:Choice xmlns:a14="http://schemas.microsoft.com/office/drawing/2010/main" Requires="a14">
+      <mc:AlternateContent xmlns:mc="http://schemas.openxmlformats.org/markup-compatibility/2006" xmlns:a14="http://schemas.microsoft.com/office/drawing/2010/main">
+        <mc:Choice Requires="a14">
           <p:sp>
             <p:nvSpPr>
               <p:cNvPr id="14" name="TextBox 13"/>
@@ -16286,12 +18424,10 @@
               </a:bodyPr>
               <a:lstStyle/>
               <a:p>
+                <a:pPr/>
                 <a14:m>
                   <m:oMathPara xmlns:m="http://schemas.openxmlformats.org/officeDocument/2006/math">
-                    <m:oMathParaPr>
-                      <m:jc m:val="centerGroup"/>
-                    </m:oMathParaPr>
-                    <m:oMath xmlns:m="http://schemas.openxmlformats.org/officeDocument/2006/math">
+                    <m:oMath>
                       <m:r>
                         <m:rPr>
                           <m:sty m:val="p"/>
@@ -16321,7 +18457,7 @@
             </p:txBody>
           </p:sp>
         </mc:Choice>
-        <mc:Fallback>
+        <mc:Fallback xmlns="">
           <p:sp>
             <p:nvSpPr>
               <p:cNvPr id="14" name="TextBox 13"/>
@@ -16447,8 +18583,8 @@
           </a:p>
         </p:txBody>
       </p:sp>
-      <mc:AlternateContent xmlns:mc="http://schemas.openxmlformats.org/markup-compatibility/2006">
-        <mc:Choice xmlns:a14="http://schemas.microsoft.com/office/drawing/2010/main" Requires="a14">
+      <mc:AlternateContent xmlns:mc="http://schemas.openxmlformats.org/markup-compatibility/2006" xmlns:a14="http://schemas.microsoft.com/office/drawing/2010/main">
+        <mc:Choice Requires="a14">
           <p:sp>
             <p:nvSpPr>
               <p:cNvPr id="17" name="TextBox 16"/>
@@ -16471,12 +18607,10 @@
               </a:bodyPr>
               <a:lstStyle/>
               <a:p>
+                <a:pPr/>
                 <a14:m>
                   <m:oMathPara xmlns:m="http://schemas.openxmlformats.org/officeDocument/2006/math">
-                    <m:oMathParaPr>
-                      <m:jc m:val="centerGroup"/>
-                    </m:oMathParaPr>
-                    <m:oMath xmlns:m="http://schemas.openxmlformats.org/officeDocument/2006/math">
+                    <m:oMath>
                       <m:r>
                         <a:rPr lang="en-US" sz="2400" b="0" i="1" smtClean="0">
                           <a:solidFill>
@@ -16494,7 +18628,7 @@
             </p:txBody>
           </p:sp>
         </mc:Choice>
-        <mc:Fallback>
+        <mc:Fallback xmlns="">
           <p:sp>
             <p:nvSpPr>
               <p:cNvPr id="17" name="TextBox 16"/>
@@ -16533,8 +18667,8 @@
           </p:sp>
         </mc:Fallback>
       </mc:AlternateContent>
-      <mc:AlternateContent xmlns:mc="http://schemas.openxmlformats.org/markup-compatibility/2006">
-        <mc:Choice xmlns:a14="http://schemas.microsoft.com/office/drawing/2010/main" Requires="a14">
+      <mc:AlternateContent xmlns:mc="http://schemas.openxmlformats.org/markup-compatibility/2006" xmlns:a14="http://schemas.microsoft.com/office/drawing/2010/main">
+        <mc:Choice Requires="a14">
           <p:sp>
             <p:nvSpPr>
               <p:cNvPr id="18" name="TextBox 17"/>
@@ -16557,12 +18691,10 @@
               </a:bodyPr>
               <a:lstStyle/>
               <a:p>
+                <a:pPr/>
                 <a14:m>
                   <m:oMathPara xmlns:m="http://schemas.openxmlformats.org/officeDocument/2006/math">
-                    <m:oMathParaPr>
-                      <m:jc m:val="centerGroup"/>
-                    </m:oMathParaPr>
-                    <m:oMath xmlns:m="http://schemas.openxmlformats.org/officeDocument/2006/math">
+                    <m:oMath>
                       <m:r>
                         <m:rPr>
                           <m:sty m:val="p"/>
@@ -16592,7 +18724,7 @@
             </p:txBody>
           </p:sp>
         </mc:Choice>
-        <mc:Fallback>
+        <mc:Fallback xmlns="">
           <p:sp>
             <p:nvSpPr>
               <p:cNvPr id="18" name="TextBox 17"/>

--- a/U1-Distribution-of-Velocities/figures/all-figs.pptx
+++ b/U1-Distribution-of-Velocities/figures/all-figs.pptx
@@ -16,6 +16,8 @@
     <p:sldId id="264" r:id="rId10"/>
     <p:sldId id="265" r:id="rId11"/>
     <p:sldId id="266" r:id="rId12"/>
+    <p:sldId id="267" r:id="rId13"/>
+    <p:sldId id="268" r:id="rId14"/>
   </p:sldIdLst>
   <p:sldSz cx="12192000" cy="6858000"/>
   <p:notesSz cx="6858000" cy="9144000"/>
@@ -282,7 +284,7 @@
           <a:p>
             <a:fld id="{B47390B5-D7E4-4A9A-ABAD-920B3BD530F5}" type="datetimeFigureOut">
               <a:rPr lang="en-IN" smtClean="0"/>
-              <a:t>29-09-2026</a:t>
+              <a:t>30-09-2026</a:t>
             </a:fld>
             <a:endParaRPr lang="en-IN"/>
           </a:p>
@@ -482,7 +484,7 @@
           <a:p>
             <a:fld id="{B47390B5-D7E4-4A9A-ABAD-920B3BD530F5}" type="datetimeFigureOut">
               <a:rPr lang="en-IN" smtClean="0"/>
-              <a:t>29-09-2026</a:t>
+              <a:t>30-09-2026</a:t>
             </a:fld>
             <a:endParaRPr lang="en-IN"/>
           </a:p>
@@ -692,7 +694,7 @@
           <a:p>
             <a:fld id="{B47390B5-D7E4-4A9A-ABAD-920B3BD530F5}" type="datetimeFigureOut">
               <a:rPr lang="en-IN" smtClean="0"/>
-              <a:t>29-09-2026</a:t>
+              <a:t>30-09-2026</a:t>
             </a:fld>
             <a:endParaRPr lang="en-IN"/>
           </a:p>
@@ -892,7 +894,7 @@
           <a:p>
             <a:fld id="{B47390B5-D7E4-4A9A-ABAD-920B3BD530F5}" type="datetimeFigureOut">
               <a:rPr lang="en-IN" smtClean="0"/>
-              <a:t>29-09-2026</a:t>
+              <a:t>30-09-2026</a:t>
             </a:fld>
             <a:endParaRPr lang="en-IN"/>
           </a:p>
@@ -1168,7 +1170,7 @@
           <a:p>
             <a:fld id="{B47390B5-D7E4-4A9A-ABAD-920B3BD530F5}" type="datetimeFigureOut">
               <a:rPr lang="en-IN" smtClean="0"/>
-              <a:t>29-09-2026</a:t>
+              <a:t>30-09-2026</a:t>
             </a:fld>
             <a:endParaRPr lang="en-IN"/>
           </a:p>
@@ -1436,7 +1438,7 @@
           <a:p>
             <a:fld id="{B47390B5-D7E4-4A9A-ABAD-920B3BD530F5}" type="datetimeFigureOut">
               <a:rPr lang="en-IN" smtClean="0"/>
-              <a:t>29-09-2026</a:t>
+              <a:t>30-09-2026</a:t>
             </a:fld>
             <a:endParaRPr lang="en-IN"/>
           </a:p>
@@ -1851,7 +1853,7 @@
           <a:p>
             <a:fld id="{B47390B5-D7E4-4A9A-ABAD-920B3BD530F5}" type="datetimeFigureOut">
               <a:rPr lang="en-IN" smtClean="0"/>
-              <a:t>29-09-2026</a:t>
+              <a:t>30-09-2026</a:t>
             </a:fld>
             <a:endParaRPr lang="en-IN"/>
           </a:p>
@@ -1993,7 +1995,7 @@
           <a:p>
             <a:fld id="{B47390B5-D7E4-4A9A-ABAD-920B3BD530F5}" type="datetimeFigureOut">
               <a:rPr lang="en-IN" smtClean="0"/>
-              <a:t>29-09-2026</a:t>
+              <a:t>30-09-2026</a:t>
             </a:fld>
             <a:endParaRPr lang="en-IN"/>
           </a:p>
@@ -2106,7 +2108,7 @@
           <a:p>
             <a:fld id="{B47390B5-D7E4-4A9A-ABAD-920B3BD530F5}" type="datetimeFigureOut">
               <a:rPr lang="en-IN" smtClean="0"/>
-              <a:t>29-09-2026</a:t>
+              <a:t>30-09-2026</a:t>
             </a:fld>
             <a:endParaRPr lang="en-IN"/>
           </a:p>
@@ -2419,7 +2421,7 @@
           <a:p>
             <a:fld id="{B47390B5-D7E4-4A9A-ABAD-920B3BD530F5}" type="datetimeFigureOut">
               <a:rPr lang="en-IN" smtClean="0"/>
-              <a:t>29-09-2026</a:t>
+              <a:t>30-09-2026</a:t>
             </a:fld>
             <a:endParaRPr lang="en-IN"/>
           </a:p>
@@ -2708,7 +2710,7 @@
           <a:p>
             <a:fld id="{B47390B5-D7E4-4A9A-ABAD-920B3BD530F5}" type="datetimeFigureOut">
               <a:rPr lang="en-IN" smtClean="0"/>
-              <a:t>29-09-2026</a:t>
+              <a:t>30-09-2026</a:t>
             </a:fld>
             <a:endParaRPr lang="en-IN"/>
           </a:p>
@@ -2951,7 +2953,7 @@
           <a:p>
             <a:fld id="{B47390B5-D7E4-4A9A-ABAD-920B3BD530F5}" type="datetimeFigureOut">
               <a:rPr lang="en-IN" smtClean="0"/>
-              <a:t>29-09-2026</a:t>
+              <a:t>30-09-2026</a:t>
             </a:fld>
             <a:endParaRPr lang="en-IN"/>
           </a:p>
@@ -4885,8 +4887,8 @@
           </a:p>
         </p:txBody>
       </p:sp>
-      <mc:AlternateContent xmlns:mc="http://schemas.openxmlformats.org/markup-compatibility/2006">
-        <mc:Choice xmlns:a14="http://schemas.microsoft.com/office/drawing/2010/main" Requires="a14">
+      <mc:AlternateContent xmlns:mc="http://schemas.openxmlformats.org/markup-compatibility/2006" xmlns:a14="http://schemas.microsoft.com/office/drawing/2010/main">
+        <mc:Choice Requires="a14">
           <p:sp>
             <p:nvSpPr>
               <p:cNvPr id="11" name="TextBox 10">
@@ -4918,7 +4920,10 @@
                 <a:pPr/>
                 <a14:m>
                   <m:oMathPara xmlns:m="http://schemas.openxmlformats.org/officeDocument/2006/math">
-                    <m:oMath>
+                    <m:oMathParaPr>
+                      <m:jc m:val="centerGroup"/>
+                    </m:oMathParaPr>
+                    <m:oMath xmlns:m="http://schemas.openxmlformats.org/officeDocument/2006/math">
                       <m:r>
                         <a:rPr lang="en-US" sz="2400" b="0" i="1" smtClean="0">
                           <a:solidFill>
@@ -4936,7 +4941,7 @@
             </p:txBody>
           </p:sp>
         </mc:Choice>
-        <mc:Fallback>
+        <mc:Fallback xmlns="">
           <p:sp>
             <p:nvSpPr>
               <p:cNvPr id="11" name="TextBox 10">
@@ -4981,8 +4986,8 @@
           </p:sp>
         </mc:Fallback>
       </mc:AlternateContent>
-      <mc:AlternateContent xmlns:mc="http://schemas.openxmlformats.org/markup-compatibility/2006">
-        <mc:Choice xmlns:a14="http://schemas.microsoft.com/office/drawing/2010/main" Requires="a14">
+      <mc:AlternateContent xmlns:mc="http://schemas.openxmlformats.org/markup-compatibility/2006" xmlns:a14="http://schemas.microsoft.com/office/drawing/2010/main">
+        <mc:Choice Requires="a14">
           <p:sp>
             <p:nvSpPr>
               <p:cNvPr id="12" name="TextBox 11">
@@ -5014,7 +5019,10 @@
                 <a:pPr/>
                 <a14:m>
                   <m:oMathPara xmlns:m="http://schemas.openxmlformats.org/officeDocument/2006/math">
-                    <m:oMath>
+                    <m:oMathParaPr>
+                      <m:jc m:val="centerGroup"/>
+                    </m:oMathParaPr>
+                    <m:oMath xmlns:m="http://schemas.openxmlformats.org/officeDocument/2006/math">
                       <m:r>
                         <a:rPr lang="en-US" sz="2400" b="0" i="1" smtClean="0">
                           <a:solidFill>
@@ -5041,7 +5049,7 @@
             </p:txBody>
           </p:sp>
         </mc:Choice>
-        <mc:Fallback>
+        <mc:Fallback xmlns="">
           <p:sp>
             <p:nvSpPr>
               <p:cNvPr id="12" name="TextBox 11">
@@ -5538,8 +5546,8 @@
           </a:p>
         </p:txBody>
       </p:sp>
-      <mc:AlternateContent xmlns:mc="http://schemas.openxmlformats.org/markup-compatibility/2006">
-        <mc:Choice xmlns:a14="http://schemas.microsoft.com/office/drawing/2010/main" Requires="a14">
+      <mc:AlternateContent xmlns:mc="http://schemas.openxmlformats.org/markup-compatibility/2006" xmlns:a14="http://schemas.microsoft.com/office/drawing/2010/main">
+        <mc:Choice Requires="a14">
           <p:sp>
             <p:nvSpPr>
               <p:cNvPr id="38" name="TextBox 37">
@@ -5568,9 +5576,13 @@
               </a:bodyPr>
               <a:lstStyle/>
               <a:p>
+                <a:pPr/>
                 <a14:m>
                   <m:oMathPara xmlns:m="http://schemas.openxmlformats.org/officeDocument/2006/math">
-                    <m:oMath>
+                    <m:oMathParaPr>
+                      <m:jc m:val="centerGroup"/>
+                    </m:oMathParaPr>
+                    <m:oMath xmlns:m="http://schemas.openxmlformats.org/officeDocument/2006/math">
                       <m:sSub>
                         <m:sSubPr>
                           <m:ctrlPr>
@@ -5604,7 +5616,7 @@
             </p:txBody>
           </p:sp>
         </mc:Choice>
-        <mc:Fallback>
+        <mc:Fallback xmlns="">
           <p:sp>
             <p:nvSpPr>
               <p:cNvPr id="38" name="TextBox 37">
@@ -5692,8 +5704,8 @@
           </a:fontRef>
         </p:style>
       </p:cxnSp>
-      <mc:AlternateContent xmlns:mc="http://schemas.openxmlformats.org/markup-compatibility/2006">
-        <mc:Choice xmlns:a14="http://schemas.microsoft.com/office/drawing/2010/main" Requires="a14">
+      <mc:AlternateContent xmlns:mc="http://schemas.openxmlformats.org/markup-compatibility/2006" xmlns:a14="http://schemas.microsoft.com/office/drawing/2010/main">
+        <mc:Choice Requires="a14">
           <p:sp>
             <p:nvSpPr>
               <p:cNvPr id="44" name="TextBox 43">
@@ -5727,12 +5739,15 @@
                 <a:pPr/>
                 <a14:m>
                   <m:oMathPara xmlns:m="http://schemas.openxmlformats.org/officeDocument/2006/math">
-                    <m:oMath>
+                    <m:oMathParaPr>
+                      <m:jc m:val="centerGroup"/>
+                    </m:oMathParaPr>
+                    <m:oMath xmlns:m="http://schemas.openxmlformats.org/officeDocument/2006/math">
                       <m:r>
                         <a:rPr lang="en-US" sz="2800" b="0" i="1" smtClean="0">
                           <a:latin typeface="Cambria Math" panose="02040503050406030204" pitchFamily="18" charset="0"/>
                         </a:rPr>
-                        <m:t>ℎ</m:t>
+                        <m:t>h</m:t>
                       </m:r>
                     </m:oMath>
                   </m:oMathPara>
@@ -5742,7 +5757,7 @@
             </p:txBody>
           </p:sp>
         </mc:Choice>
-        <mc:Fallback>
+        <mc:Fallback xmlns="">
           <p:sp>
             <p:nvSpPr>
               <p:cNvPr id="44" name="TextBox 43">
@@ -5787,8 +5802,8 @@
           </p:sp>
         </mc:Fallback>
       </mc:AlternateContent>
-      <mc:AlternateContent xmlns:mc="http://schemas.openxmlformats.org/markup-compatibility/2006">
-        <mc:Choice xmlns:a14="http://schemas.microsoft.com/office/drawing/2010/main" Requires="a14">
+      <mc:AlternateContent xmlns:mc="http://schemas.openxmlformats.org/markup-compatibility/2006" xmlns:a14="http://schemas.microsoft.com/office/drawing/2010/main">
+        <mc:Choice Requires="a14">
           <p:sp>
             <p:nvSpPr>
               <p:cNvPr id="40" name="TextBox 39">
@@ -5820,7 +5835,10 @@
                 <a:pPr/>
                 <a14:m>
                   <m:oMathPara xmlns:m="http://schemas.openxmlformats.org/officeDocument/2006/math">
-                    <m:oMath>
+                    <m:oMathParaPr>
+                      <m:jc m:val="centerGroup"/>
+                    </m:oMathParaPr>
+                    <m:oMath xmlns:m="http://schemas.openxmlformats.org/officeDocument/2006/math">
                       <m:r>
                         <a:rPr lang="en-US" sz="2800" b="0" i="1" smtClean="0">
                           <a:latin typeface="Cambria Math" panose="02040503050406030204" pitchFamily="18" charset="0"/>
@@ -5835,7 +5853,7 @@
             </p:txBody>
           </p:sp>
         </mc:Choice>
-        <mc:Fallback>
+        <mc:Fallback xmlns="">
           <p:sp>
             <p:nvSpPr>
               <p:cNvPr id="40" name="TextBox 39">
@@ -5959,8 +5977,8 @@
           </a:fontRef>
         </p:style>
       </p:cxnSp>
-      <mc:AlternateContent xmlns:mc="http://schemas.openxmlformats.org/markup-compatibility/2006">
-        <mc:Choice xmlns:a14="http://schemas.microsoft.com/office/drawing/2010/main" Requires="a14">
+      <mc:AlternateContent xmlns:mc="http://schemas.openxmlformats.org/markup-compatibility/2006" xmlns:a14="http://schemas.microsoft.com/office/drawing/2010/main">
+        <mc:Choice Requires="a14">
           <p:sp>
             <p:nvSpPr>
               <p:cNvPr id="44" name="TextBox 43">
@@ -5994,12 +6012,15 @@
                 <a:pPr/>
                 <a14:m>
                   <m:oMathPara xmlns:m="http://schemas.openxmlformats.org/officeDocument/2006/math">
-                    <m:oMath>
+                    <m:oMathParaPr>
+                      <m:jc m:val="centerGroup"/>
+                    </m:oMathParaPr>
+                    <m:oMath xmlns:m="http://schemas.openxmlformats.org/officeDocument/2006/math">
                       <m:r>
                         <a:rPr lang="en-US" sz="2800" b="0" i="1" smtClean="0">
                           <a:latin typeface="Cambria Math" panose="02040503050406030204" pitchFamily="18" charset="0"/>
                         </a:rPr>
-                        <m:t>ℎ</m:t>
+                        <m:t>h</m:t>
                       </m:r>
                     </m:oMath>
                   </m:oMathPara>
@@ -6009,7 +6030,7 @@
             </p:txBody>
           </p:sp>
         </mc:Choice>
-        <mc:Fallback>
+        <mc:Fallback xmlns="">
           <p:sp>
             <p:nvSpPr>
               <p:cNvPr id="44" name="TextBox 43">
@@ -6112,8 +6133,8 @@
           </a:p>
         </p:txBody>
       </p:sp>
-      <mc:AlternateContent xmlns:mc="http://schemas.openxmlformats.org/markup-compatibility/2006">
-        <mc:Choice xmlns:a14="http://schemas.microsoft.com/office/drawing/2010/main" Requires="a14">
+      <mc:AlternateContent xmlns:mc="http://schemas.openxmlformats.org/markup-compatibility/2006" xmlns:a14="http://schemas.microsoft.com/office/drawing/2010/main">
+        <mc:Choice Requires="a14">
           <p:sp>
             <p:nvSpPr>
               <p:cNvPr id="11" name="TextBox 10">
@@ -6145,7 +6166,10 @@
                 <a:pPr/>
                 <a14:m>
                   <m:oMathPara xmlns:m="http://schemas.openxmlformats.org/officeDocument/2006/math">
-                    <m:oMath>
+                    <m:oMathParaPr>
+                      <m:jc m:val="centerGroup"/>
+                    </m:oMathParaPr>
+                    <m:oMath xmlns:m="http://schemas.openxmlformats.org/officeDocument/2006/math">
                       <m:r>
                         <a:rPr lang="en-US" sz="2400" b="0" i="1" smtClean="0">
                           <a:solidFill>
@@ -6163,7 +6187,7 @@
             </p:txBody>
           </p:sp>
         </mc:Choice>
-        <mc:Fallback>
+        <mc:Fallback xmlns="">
           <p:sp>
             <p:nvSpPr>
               <p:cNvPr id="11" name="TextBox 10">
@@ -6208,8 +6232,8 @@
           </p:sp>
         </mc:Fallback>
       </mc:AlternateContent>
-      <mc:AlternateContent xmlns:mc="http://schemas.openxmlformats.org/markup-compatibility/2006">
-        <mc:Choice xmlns:a14="http://schemas.microsoft.com/office/drawing/2010/main" Requires="a14">
+      <mc:AlternateContent xmlns:mc="http://schemas.openxmlformats.org/markup-compatibility/2006" xmlns:a14="http://schemas.microsoft.com/office/drawing/2010/main">
+        <mc:Choice Requires="a14">
           <p:sp>
             <p:nvSpPr>
               <p:cNvPr id="12" name="TextBox 11">
@@ -6241,7 +6265,10 @@
                 <a:pPr/>
                 <a14:m>
                   <m:oMathPara xmlns:m="http://schemas.openxmlformats.org/officeDocument/2006/math">
-                    <m:oMath>
+                    <m:oMathParaPr>
+                      <m:jc m:val="centerGroup"/>
+                    </m:oMathParaPr>
+                    <m:oMath xmlns:m="http://schemas.openxmlformats.org/officeDocument/2006/math">
                       <m:r>
                         <a:rPr lang="en-US" sz="2400" b="0" i="1" smtClean="0">
                           <a:solidFill>
@@ -6268,7 +6295,7 @@
             </p:txBody>
           </p:sp>
         </mc:Choice>
-        <mc:Fallback>
+        <mc:Fallback xmlns="">
           <p:sp>
             <p:nvSpPr>
               <p:cNvPr id="12" name="TextBox 11">
@@ -6812,8 +6839,8 @@
           </a:p>
         </p:txBody>
       </p:sp>
-      <mc:AlternateContent xmlns:mc="http://schemas.openxmlformats.org/markup-compatibility/2006">
-        <mc:Choice xmlns:a14="http://schemas.microsoft.com/office/drawing/2010/main" Requires="a14">
+      <mc:AlternateContent xmlns:mc="http://schemas.openxmlformats.org/markup-compatibility/2006" xmlns:a14="http://schemas.microsoft.com/office/drawing/2010/main">
+        <mc:Choice Requires="a14">
           <p:sp>
             <p:nvSpPr>
               <p:cNvPr id="38" name="TextBox 37">
@@ -6845,7 +6872,10 @@
                 <a:pPr/>
                 <a14:m>
                   <m:oMathPara xmlns:m="http://schemas.openxmlformats.org/officeDocument/2006/math">
-                    <m:oMath>
+                    <m:oMathParaPr>
+                      <m:jc m:val="centerGroup"/>
+                    </m:oMathParaPr>
+                    <m:oMath xmlns:m="http://schemas.openxmlformats.org/officeDocument/2006/math">
                       <m:sSub>
                         <m:sSubPr>
                           <m:ctrlPr>
@@ -6879,7 +6909,7 @@
             </p:txBody>
           </p:sp>
         </mc:Choice>
-        <mc:Fallback>
+        <mc:Fallback xmlns="">
           <p:sp>
             <p:nvSpPr>
               <p:cNvPr id="38" name="TextBox 37">
@@ -6924,8 +6954,8 @@
           </p:sp>
         </mc:Fallback>
       </mc:AlternateContent>
-      <mc:AlternateContent xmlns:mc="http://schemas.openxmlformats.org/markup-compatibility/2006">
-        <mc:Choice xmlns:a14="http://schemas.microsoft.com/office/drawing/2010/main" Requires="a14">
+      <mc:AlternateContent xmlns:mc="http://schemas.openxmlformats.org/markup-compatibility/2006" xmlns:a14="http://schemas.microsoft.com/office/drawing/2010/main">
+        <mc:Choice Requires="a14">
           <p:sp>
             <p:nvSpPr>
               <p:cNvPr id="40" name="TextBox 39">
@@ -6957,7 +6987,10 @@
                 <a:pPr/>
                 <a14:m>
                   <m:oMathPara xmlns:m="http://schemas.openxmlformats.org/officeDocument/2006/math">
-                    <m:oMath>
+                    <m:oMathParaPr>
+                      <m:jc m:val="centerGroup"/>
+                    </m:oMathParaPr>
+                    <m:oMath xmlns:m="http://schemas.openxmlformats.org/officeDocument/2006/math">
                       <m:r>
                         <a:rPr lang="en-US" sz="2800" b="0" i="1" smtClean="0">
                           <a:latin typeface="Cambria Math" panose="02040503050406030204" pitchFamily="18" charset="0"/>
@@ -6972,7 +7005,7 @@
             </p:txBody>
           </p:sp>
         </mc:Choice>
-        <mc:Fallback>
+        <mc:Fallback xmlns="">
           <p:sp>
             <p:nvSpPr>
               <p:cNvPr id="40" name="TextBox 39">
@@ -7030,6 +7063,1529 @@
 </p:sld>
 </file>
 
+<file path=ppt/slides/slide12.xml><?xml version="1.0" encoding="utf-8"?>
+<p:sld xmlns:a="http://schemas.openxmlformats.org/drawingml/2006/main" xmlns:r="http://schemas.openxmlformats.org/officeDocument/2006/relationships" xmlns:p="http://schemas.openxmlformats.org/presentationml/2006/main">
+  <p:cSld>
+    <p:spTree>
+      <p:nvGrpSpPr>
+        <p:cNvPr id="1" name=""/>
+        <p:cNvGrpSpPr/>
+        <p:nvPr/>
+      </p:nvGrpSpPr>
+      <p:grpSpPr>
+        <a:xfrm>
+          <a:off x="0" y="0"/>
+          <a:ext cx="0" cy="0"/>
+          <a:chOff x="0" y="0"/>
+          <a:chExt cx="0" cy="0"/>
+        </a:xfrm>
+      </p:grpSpPr>
+      <mc:AlternateContent xmlns:mc="http://schemas.openxmlformats.org/markup-compatibility/2006">
+        <mc:Choice xmlns:a14="http://schemas.microsoft.com/office/drawing/2010/main" Requires="a14">
+          <p:sp>
+            <p:nvSpPr>
+              <p:cNvPr id="11" name="TextBox 10"/>
+              <p:cNvSpPr txBox="1"/>
+              <p:nvPr/>
+            </p:nvSpPr>
+            <p:spPr>
+              <a:xfrm>
+                <a:off x="7838440" y="3682308"/>
+                <a:ext cx="258404" cy="369332"/>
+              </a:xfrm>
+              <a:prstGeom prst="rect">
+                <a:avLst/>
+              </a:prstGeom>
+              <a:noFill/>
+            </p:spPr>
+            <p:txBody>
+              <a:bodyPr wrap="none" lIns="0" tIns="0" rIns="0" bIns="0" rtlCol="0">
+                <a:spAutoFit/>
+              </a:bodyPr>
+              <a:lstStyle/>
+              <a:p>
+                <a:pPr/>
+                <a14:m>
+                  <m:oMathPara xmlns:m="http://schemas.openxmlformats.org/officeDocument/2006/math">
+                    <m:oMathParaPr>
+                      <m:jc m:val="centerGroup"/>
+                    </m:oMathParaPr>
+                    <m:oMath xmlns:m="http://schemas.openxmlformats.org/officeDocument/2006/math">
+                      <m:r>
+                        <a:rPr lang="en-US" sz="2400" b="0" i="1" smtClean="0">
+                          <a:solidFill>
+                            <a:schemeClr val="tx1"/>
+                          </a:solidFill>
+                          <a:latin typeface="Cambria Math" panose="02040503050406030204" pitchFamily="18" charset="0"/>
+                        </a:rPr>
+                        <m:t>𝑇</m:t>
+                      </m:r>
+                    </m:oMath>
+                  </m:oMathPara>
+                </a14:m>
+                <a:endParaRPr lang="en-US" sz="2400" dirty="0"/>
+              </a:p>
+            </p:txBody>
+          </p:sp>
+        </mc:Choice>
+        <mc:Fallback>
+          <p:sp>
+            <p:nvSpPr>
+              <p:cNvPr id="11" name="TextBox 10"/>
+              <p:cNvSpPr txBox="1">
+                <a:spLocks noRot="1" noChangeAspect="1" noMove="1" noResize="1" noEditPoints="1" noAdjustHandles="1" noChangeArrowheads="1" noChangeShapeType="1" noTextEdit="1"/>
+              </p:cNvSpPr>
+              <p:nvPr/>
+            </p:nvSpPr>
+            <p:spPr>
+              <a:xfrm>
+                <a:off x="7838440" y="3682308"/>
+                <a:ext cx="258404" cy="369332"/>
+              </a:xfrm>
+              <a:prstGeom prst="rect">
+                <a:avLst/>
+              </a:prstGeom>
+              <a:blipFill>
+                <a:blip r:embed="rId2"/>
+                <a:stretch>
+                  <a:fillRect l="-28571" r="-26190" b="-6557"/>
+                </a:stretch>
+              </a:blipFill>
+            </p:spPr>
+            <p:txBody>
+              <a:bodyPr/>
+              <a:lstStyle/>
+              <a:p>
+                <a:r>
+                  <a:rPr lang="en-US">
+                    <a:noFill/>
+                  </a:rPr>
+                  <a:t> </a:t>
+                </a:r>
+              </a:p>
+            </p:txBody>
+          </p:sp>
+        </mc:Fallback>
+      </mc:AlternateContent>
+      <p:sp>
+        <p:nvSpPr>
+          <p:cNvPr id="22" name="Parallelogram 21"/>
+          <p:cNvSpPr/>
+          <p:nvPr/>
+        </p:nvSpPr>
+        <p:spPr>
+          <a:xfrm>
+            <a:off x="2288177" y="3216498"/>
+            <a:ext cx="6453051" cy="1009138"/>
+          </a:xfrm>
+          <a:prstGeom prst="parallelogram">
+            <a:avLst>
+              <a:gd name="adj" fmla="val 172976"/>
+            </a:avLst>
+          </a:prstGeom>
+          <a:solidFill>
+            <a:schemeClr val="bg1">
+              <a:lumMod val="50000"/>
+              <a:alpha val="50000"/>
+            </a:schemeClr>
+          </a:solidFill>
+          <a:ln>
+            <a:noFill/>
+          </a:ln>
+        </p:spPr>
+        <p:style>
+          <a:lnRef idx="2">
+            <a:schemeClr val="accent1">
+              <a:shade val="50000"/>
+            </a:schemeClr>
+          </a:lnRef>
+          <a:fillRef idx="1">
+            <a:schemeClr val="accent1"/>
+          </a:fillRef>
+          <a:effectRef idx="0">
+            <a:schemeClr val="accent1"/>
+          </a:effectRef>
+          <a:fontRef idx="minor">
+            <a:schemeClr val="lt1"/>
+          </a:fontRef>
+        </p:style>
+        <p:txBody>
+          <a:bodyPr rtlCol="0" anchor="ctr"/>
+          <a:lstStyle/>
+          <a:p>
+            <a:pPr algn="ctr"/>
+            <a:endParaRPr lang="en-US"/>
+          </a:p>
+        </p:txBody>
+      </p:sp>
+      <p:grpSp>
+        <p:nvGrpSpPr>
+          <p:cNvPr id="9" name="Group 8"/>
+          <p:cNvGrpSpPr/>
+          <p:nvPr/>
+        </p:nvGrpSpPr>
+        <p:grpSpPr>
+          <a:xfrm>
+            <a:off x="4977130" y="1853969"/>
+            <a:ext cx="383118" cy="1819564"/>
+            <a:chOff x="2104390" y="2394989"/>
+            <a:chExt cx="383118" cy="1819564"/>
+          </a:xfrm>
+        </p:grpSpPr>
+        <p:cxnSp>
+          <p:nvCxnSpPr>
+            <p:cNvPr id="6" name="Straight Arrow Connector 5"/>
+            <p:cNvCxnSpPr/>
+            <p:nvPr/>
+          </p:nvCxnSpPr>
+          <p:spPr>
+            <a:xfrm>
+              <a:off x="2299855" y="2394989"/>
+              <a:ext cx="0" cy="1819564"/>
+            </a:xfrm>
+            <a:prstGeom prst="straightConnector1">
+              <a:avLst/>
+            </a:prstGeom>
+            <a:ln w="19050" cap="rnd">
+              <a:solidFill>
+                <a:schemeClr val="tx1"/>
+              </a:solidFill>
+              <a:prstDash val="dash"/>
+              <a:round/>
+              <a:headEnd type="triangle" w="med" len="med"/>
+              <a:tailEnd type="triangle"/>
+            </a:ln>
+          </p:spPr>
+          <p:style>
+            <a:lnRef idx="1">
+              <a:schemeClr val="accent1"/>
+            </a:lnRef>
+            <a:fillRef idx="0">
+              <a:schemeClr val="accent1"/>
+            </a:fillRef>
+            <a:effectRef idx="0">
+              <a:schemeClr val="accent1"/>
+            </a:effectRef>
+            <a:fontRef idx="minor">
+              <a:schemeClr val="tx1"/>
+            </a:fontRef>
+          </p:style>
+        </p:cxnSp>
+        <mc:AlternateContent xmlns:mc="http://schemas.openxmlformats.org/markup-compatibility/2006">
+          <mc:Choice xmlns:a14="http://schemas.microsoft.com/office/drawing/2010/main" Requires="a14">
+            <p:sp>
+              <p:nvSpPr>
+                <p:cNvPr id="7" name="TextBox 6"/>
+                <p:cNvSpPr txBox="1"/>
+                <p:nvPr/>
+              </p:nvSpPr>
+              <p:spPr>
+                <a:xfrm>
+                  <a:off x="2104390" y="3147060"/>
+                  <a:ext cx="383118" cy="338554"/>
+                </a:xfrm>
+                <a:prstGeom prst="rect">
+                  <a:avLst/>
+                </a:prstGeom>
+                <a:solidFill>
+                  <a:schemeClr val="bg1"/>
+                </a:solidFill>
+              </p:spPr>
+              <p:txBody>
+                <a:bodyPr wrap="none" lIns="0" tIns="0" rIns="0" bIns="0" rtlCol="0">
+                  <a:spAutoFit/>
+                </a:bodyPr>
+                <a:lstStyle/>
+                <a:p>
+                  <a14:m>
+                    <m:oMathPara xmlns:m="http://schemas.openxmlformats.org/officeDocument/2006/math">
+                      <m:oMathParaPr>
+                        <m:jc m:val="centerGroup"/>
+                      </m:oMathParaPr>
+                      <m:oMath xmlns:m="http://schemas.openxmlformats.org/officeDocument/2006/math">
+                        <m:r>
+                          <m:rPr>
+                            <m:sty m:val="p"/>
+                          </m:rPr>
+                          <a:rPr lang="en-US" sz="2200" b="0" i="0" smtClean="0">
+                            <a:latin typeface="Cambria Math" panose="02040503050406030204" pitchFamily="18" charset="0"/>
+                          </a:rPr>
+                          <m:t>d</m:t>
+                        </m:r>
+                        <m:r>
+                          <a:rPr lang="en-US" sz="2200" b="0" i="1" smtClean="0">
+                            <a:latin typeface="Cambria Math" panose="02040503050406030204" pitchFamily="18" charset="0"/>
+                          </a:rPr>
+                          <m:t>𝑦</m:t>
+                        </m:r>
+                      </m:oMath>
+                    </m:oMathPara>
+                  </a14:m>
+                  <a:endParaRPr lang="en-US" sz="2200" dirty="0"/>
+                </a:p>
+              </p:txBody>
+            </p:sp>
+          </mc:Choice>
+          <mc:Fallback>
+            <p:sp>
+              <p:nvSpPr>
+                <p:cNvPr id="7" name="TextBox 6"/>
+                <p:cNvSpPr txBox="1">
+                  <a:spLocks noRot="1" noChangeAspect="1" noMove="1" noResize="1" noEditPoints="1" noAdjustHandles="1" noChangeArrowheads="1" noChangeShapeType="1" noTextEdit="1"/>
+                </p:cNvSpPr>
+                <p:nvPr/>
+              </p:nvSpPr>
+              <p:spPr>
+                <a:xfrm>
+                  <a:off x="2104390" y="3147060"/>
+                  <a:ext cx="383118" cy="338554"/>
+                </a:xfrm>
+                <a:prstGeom prst="rect">
+                  <a:avLst/>
+                </a:prstGeom>
+                <a:blipFill>
+                  <a:blip r:embed="rId3"/>
+                  <a:stretch>
+                    <a:fillRect l="-17460" r="-17460" b="-25455"/>
+                  </a:stretch>
+                </a:blipFill>
+              </p:spPr>
+              <p:txBody>
+                <a:bodyPr/>
+                <a:lstStyle/>
+                <a:p>
+                  <a:r>
+                    <a:rPr lang="en-US">
+                      <a:noFill/>
+                    </a:rPr>
+                    <a:t> </a:t>
+                  </a:r>
+                </a:p>
+              </p:txBody>
+            </p:sp>
+          </mc:Fallback>
+        </mc:AlternateContent>
+      </p:grpSp>
+      <p:sp>
+        <p:nvSpPr>
+          <p:cNvPr id="2" name="Parallelogram 1"/>
+          <p:cNvSpPr/>
+          <p:nvPr/>
+        </p:nvSpPr>
+        <p:spPr>
+          <a:xfrm>
+            <a:off x="2288177" y="1392318"/>
+            <a:ext cx="6453051" cy="1009138"/>
+          </a:xfrm>
+          <a:prstGeom prst="parallelogram">
+            <a:avLst>
+              <a:gd name="adj" fmla="val 172976"/>
+            </a:avLst>
+          </a:prstGeom>
+          <a:solidFill>
+            <a:schemeClr val="bg1">
+              <a:lumMod val="50000"/>
+              <a:alpha val="50000"/>
+            </a:schemeClr>
+          </a:solidFill>
+          <a:ln>
+            <a:noFill/>
+          </a:ln>
+        </p:spPr>
+        <p:style>
+          <a:lnRef idx="2">
+            <a:schemeClr val="accent1">
+              <a:shade val="50000"/>
+            </a:schemeClr>
+          </a:lnRef>
+          <a:fillRef idx="1">
+            <a:schemeClr val="accent1"/>
+          </a:fillRef>
+          <a:effectRef idx="0">
+            <a:schemeClr val="accent1"/>
+          </a:effectRef>
+          <a:fontRef idx="minor">
+            <a:schemeClr val="lt1"/>
+          </a:fontRef>
+        </p:style>
+        <p:txBody>
+          <a:bodyPr rtlCol="0" anchor="ctr"/>
+          <a:lstStyle/>
+          <a:p>
+            <a:pPr algn="ctr"/>
+            <a:endParaRPr lang="en-US"/>
+          </a:p>
+        </p:txBody>
+      </p:sp>
+      <mc:AlternateContent xmlns:mc="http://schemas.openxmlformats.org/markup-compatibility/2006">
+        <mc:Choice xmlns:a14="http://schemas.microsoft.com/office/drawing/2010/main" Requires="a14">
+          <p:sp>
+            <p:nvSpPr>
+              <p:cNvPr id="29" name="TextBox 28"/>
+              <p:cNvSpPr txBox="1"/>
+              <p:nvPr/>
+            </p:nvSpPr>
+            <p:spPr>
+              <a:xfrm>
+                <a:off x="7777480" y="1894148"/>
+                <a:ext cx="991875" cy="369332"/>
+              </a:xfrm>
+              <a:prstGeom prst="rect">
+                <a:avLst/>
+              </a:prstGeom>
+              <a:noFill/>
+            </p:spPr>
+            <p:txBody>
+              <a:bodyPr wrap="none" lIns="0" tIns="0" rIns="0" bIns="0" rtlCol="0">
+                <a:spAutoFit/>
+              </a:bodyPr>
+              <a:lstStyle/>
+              <a:p>
+                <a:pPr/>
+                <a14:m>
+                  <m:oMathPara xmlns:m="http://schemas.openxmlformats.org/officeDocument/2006/math">
+                    <m:oMathParaPr>
+                      <m:jc m:val="centerGroup"/>
+                    </m:oMathParaPr>
+                    <m:oMath xmlns:m="http://schemas.openxmlformats.org/officeDocument/2006/math">
+                      <m:r>
+                        <a:rPr lang="en-US" sz="2400" b="0" i="1" smtClean="0">
+                          <a:solidFill>
+                            <a:schemeClr val="tx1"/>
+                          </a:solidFill>
+                          <a:latin typeface="Cambria Math" panose="02040503050406030204" pitchFamily="18" charset="0"/>
+                        </a:rPr>
+                        <m:t>𝑇</m:t>
+                      </m:r>
+                      <m:r>
+                        <a:rPr lang="en-US" sz="2400" b="0" i="1" smtClean="0">
+                          <a:solidFill>
+                            <a:schemeClr val="tx1"/>
+                          </a:solidFill>
+                          <a:latin typeface="Cambria Math" panose="02040503050406030204" pitchFamily="18" charset="0"/>
+                        </a:rPr>
+                        <m:t>+</m:t>
+                      </m:r>
+                      <m:r>
+                        <m:rPr>
+                          <m:sty m:val="p"/>
+                        </m:rPr>
+                        <a:rPr lang="en-US" sz="2400" b="0" i="0" smtClean="0">
+                          <a:solidFill>
+                            <a:schemeClr val="tx1"/>
+                          </a:solidFill>
+                          <a:latin typeface="Cambria Math" panose="02040503050406030204" pitchFamily="18" charset="0"/>
+                        </a:rPr>
+                        <m:t>d</m:t>
+                      </m:r>
+                      <m:r>
+                        <a:rPr lang="en-US" sz="2400" b="0" i="1" smtClean="0">
+                          <a:solidFill>
+                            <a:schemeClr val="tx1"/>
+                          </a:solidFill>
+                          <a:latin typeface="Cambria Math" panose="02040503050406030204" pitchFamily="18" charset="0"/>
+                        </a:rPr>
+                        <m:t>𝑇</m:t>
+                      </m:r>
+                    </m:oMath>
+                  </m:oMathPara>
+                </a14:m>
+                <a:endParaRPr lang="en-US" sz="2400" dirty="0"/>
+              </a:p>
+            </p:txBody>
+          </p:sp>
+        </mc:Choice>
+        <mc:Fallback>
+          <p:sp>
+            <p:nvSpPr>
+              <p:cNvPr id="29" name="TextBox 28"/>
+              <p:cNvSpPr txBox="1">
+                <a:spLocks noRot="1" noChangeAspect="1" noMove="1" noResize="1" noEditPoints="1" noAdjustHandles="1" noChangeArrowheads="1" noChangeShapeType="1" noTextEdit="1"/>
+              </p:cNvSpPr>
+              <p:nvPr/>
+            </p:nvSpPr>
+            <p:spPr>
+              <a:xfrm>
+                <a:off x="7777480" y="1894148"/>
+                <a:ext cx="991875" cy="369332"/>
+              </a:xfrm>
+              <a:prstGeom prst="rect">
+                <a:avLst/>
+              </a:prstGeom>
+              <a:blipFill>
+                <a:blip r:embed="rId4"/>
+                <a:stretch>
+                  <a:fillRect l="-6748" r="-5521" b="-8333"/>
+                </a:stretch>
+              </a:blipFill>
+            </p:spPr>
+            <p:txBody>
+              <a:bodyPr/>
+              <a:lstStyle/>
+              <a:p>
+                <a:r>
+                  <a:rPr lang="en-US">
+                    <a:noFill/>
+                  </a:rPr>
+                  <a:t> </a:t>
+                </a:r>
+              </a:p>
+            </p:txBody>
+          </p:sp>
+        </mc:Fallback>
+      </mc:AlternateContent>
+    </p:spTree>
+    <p:extLst>
+      <p:ext uri="{BB962C8B-B14F-4D97-AF65-F5344CB8AC3E}">
+        <p14:creationId xmlns:p14="http://schemas.microsoft.com/office/powerpoint/2010/main" val="1163708460"/>
+      </p:ext>
+    </p:extLst>
+  </p:cSld>
+  <p:clrMapOvr>
+    <a:masterClrMapping/>
+  </p:clrMapOvr>
+</p:sld>
+</file>
+
+<file path=ppt/slides/slide13.xml><?xml version="1.0" encoding="utf-8"?>
+<p:sld xmlns:a="http://schemas.openxmlformats.org/drawingml/2006/main" xmlns:r="http://schemas.openxmlformats.org/officeDocument/2006/relationships" xmlns:p="http://schemas.openxmlformats.org/presentationml/2006/main">
+  <p:cSld>
+    <p:spTree>
+      <p:nvGrpSpPr>
+        <p:cNvPr id="1" name="">
+          <a:extLst>
+            <a:ext uri="{FF2B5EF4-FFF2-40B4-BE49-F238E27FC236}">
+              <a16:creationId xmlns:a16="http://schemas.microsoft.com/office/drawing/2014/main" id="{16B7BEF0-AB5D-A9EE-E5BA-A66976952E6B}"/>
+            </a:ext>
+          </a:extLst>
+        </p:cNvPr>
+        <p:cNvGrpSpPr/>
+        <p:nvPr/>
+      </p:nvGrpSpPr>
+      <p:grpSpPr>
+        <a:xfrm>
+          <a:off x="0" y="0"/>
+          <a:ext cx="0" cy="0"/>
+          <a:chOff x="0" y="0"/>
+          <a:chExt cx="0" cy="0"/>
+        </a:xfrm>
+      </p:grpSpPr>
+      <p:cxnSp>
+        <p:nvCxnSpPr>
+          <p:cNvPr id="7" name="Straight Connector 6"/>
+          <p:cNvCxnSpPr/>
+          <p:nvPr/>
+        </p:nvCxnSpPr>
+        <p:spPr>
+          <a:xfrm>
+            <a:off x="5543296" y="1509776"/>
+            <a:ext cx="955040" cy="0"/>
+          </a:xfrm>
+          <a:prstGeom prst="line">
+            <a:avLst/>
+          </a:prstGeom>
+          <a:ln w="28575">
+            <a:solidFill>
+              <a:schemeClr val="bg2">
+                <a:lumMod val="50000"/>
+              </a:schemeClr>
+            </a:solidFill>
+            <a:prstDash val="sysDash"/>
+          </a:ln>
+        </p:spPr>
+        <p:style>
+          <a:lnRef idx="1">
+            <a:schemeClr val="accent1"/>
+          </a:lnRef>
+          <a:fillRef idx="0">
+            <a:schemeClr val="accent1"/>
+          </a:fillRef>
+          <a:effectRef idx="0">
+            <a:schemeClr val="accent1"/>
+          </a:effectRef>
+          <a:fontRef idx="minor">
+            <a:schemeClr val="tx1"/>
+          </a:fontRef>
+        </p:style>
+      </p:cxnSp>
+      <p:sp>
+        <p:nvSpPr>
+          <p:cNvPr id="2" name="Parallelogram 1">
+            <a:extLst>
+              <a:ext uri="{FF2B5EF4-FFF2-40B4-BE49-F238E27FC236}">
+                <a16:creationId xmlns:a16="http://schemas.microsoft.com/office/drawing/2014/main" id="{0844D4DA-9790-9E71-590D-9C1BB255E76B}"/>
+              </a:ext>
+            </a:extLst>
+          </p:cNvPr>
+          <p:cNvSpPr/>
+          <p:nvPr/>
+        </p:nvSpPr>
+        <p:spPr>
+          <a:xfrm>
+            <a:off x="2211977" y="2325189"/>
+            <a:ext cx="6453051" cy="1593668"/>
+          </a:xfrm>
+          <a:prstGeom prst="parallelogram">
+            <a:avLst>
+              <a:gd name="adj" fmla="val 109494"/>
+            </a:avLst>
+          </a:prstGeom>
+          <a:solidFill>
+            <a:schemeClr val="tx1">
+              <a:lumMod val="65000"/>
+              <a:lumOff val="35000"/>
+              <a:alpha val="50000"/>
+            </a:schemeClr>
+          </a:solidFill>
+          <a:ln>
+            <a:noFill/>
+          </a:ln>
+        </p:spPr>
+        <p:style>
+          <a:lnRef idx="2">
+            <a:schemeClr val="accent1">
+              <a:shade val="50000"/>
+            </a:schemeClr>
+          </a:lnRef>
+          <a:fillRef idx="1">
+            <a:schemeClr val="accent1"/>
+          </a:fillRef>
+          <a:effectRef idx="0">
+            <a:schemeClr val="accent1"/>
+          </a:effectRef>
+          <a:fontRef idx="minor">
+            <a:schemeClr val="lt1"/>
+          </a:fontRef>
+        </p:style>
+        <p:txBody>
+          <a:bodyPr rtlCol="0" anchor="ctr"/>
+          <a:lstStyle/>
+          <a:p>
+            <a:pPr algn="ctr"/>
+            <a:endParaRPr lang="en-US"/>
+          </a:p>
+        </p:txBody>
+      </p:sp>
+      <mc:AlternateContent xmlns:mc="http://schemas.openxmlformats.org/markup-compatibility/2006" xmlns:a14="http://schemas.microsoft.com/office/drawing/2010/main">
+        <mc:Choice Requires="a14">
+          <p:sp>
+            <p:nvSpPr>
+              <p:cNvPr id="11" name="TextBox 10">
+                <a:extLst>
+                  <a:ext uri="{FF2B5EF4-FFF2-40B4-BE49-F238E27FC236}">
+                    <a16:creationId xmlns:a16="http://schemas.microsoft.com/office/drawing/2014/main" id="{636704B2-A120-5D68-1562-1FC7848382F1}"/>
+                  </a:ext>
+                </a:extLst>
+              </p:cNvPr>
+              <p:cNvSpPr txBox="1"/>
+              <p:nvPr/>
+            </p:nvSpPr>
+            <p:spPr>
+              <a:xfrm>
+                <a:off x="8214360" y="3009900"/>
+                <a:ext cx="241733" cy="369332"/>
+              </a:xfrm>
+              <a:prstGeom prst="rect">
+                <a:avLst/>
+              </a:prstGeom>
+              <a:noFill/>
+            </p:spPr>
+            <p:txBody>
+              <a:bodyPr wrap="none" lIns="0" tIns="0" rIns="0" bIns="0" rtlCol="0">
+                <a:spAutoFit/>
+              </a:bodyPr>
+              <a:lstStyle/>
+              <a:p>
+                <a:pPr/>
+                <a14:m>
+                  <m:oMathPara xmlns:m="http://schemas.openxmlformats.org/officeDocument/2006/math">
+                    <m:oMathParaPr>
+                      <m:jc m:val="centerGroup"/>
+                    </m:oMathParaPr>
+                    <m:oMath xmlns:m="http://schemas.openxmlformats.org/officeDocument/2006/math">
+                      <m:r>
+                        <a:rPr lang="en-US" sz="2400" b="0" i="1" smtClean="0">
+                          <a:solidFill>
+                            <a:schemeClr val="tx1"/>
+                          </a:solidFill>
+                          <a:latin typeface="Cambria Math" panose="02040503050406030204" pitchFamily="18" charset="0"/>
+                        </a:rPr>
+                        <m:t>𝑥</m:t>
+                      </m:r>
+                    </m:oMath>
+                  </m:oMathPara>
+                </a14:m>
+                <a:endParaRPr lang="en-US" sz="2400" dirty="0"/>
+              </a:p>
+            </p:txBody>
+          </p:sp>
+        </mc:Choice>
+        <mc:Fallback xmlns="">
+          <p:sp>
+            <p:nvSpPr>
+              <p:cNvPr id="11" name="TextBox 10">
+                <a:extLst>
+                  <a:ext uri="{FF2B5EF4-FFF2-40B4-BE49-F238E27FC236}">
+                    <a16:creationId xmlns:a16="http://schemas.microsoft.com/office/drawing/2014/main" id="{636704B2-A120-5D68-1562-1FC7848382F1}"/>
+                  </a:ext>
+                </a:extLst>
+              </p:cNvPr>
+              <p:cNvSpPr txBox="1">
+                <a:spLocks noRot="1" noChangeAspect="1" noMove="1" noResize="1" noEditPoints="1" noAdjustHandles="1" noChangeArrowheads="1" noChangeShapeType="1" noTextEdit="1"/>
+              </p:cNvSpPr>
+              <p:nvPr/>
+            </p:nvSpPr>
+            <p:spPr>
+              <a:xfrm>
+                <a:off x="8214360" y="3009900"/>
+                <a:ext cx="241733" cy="369332"/>
+              </a:xfrm>
+              <a:prstGeom prst="rect">
+                <a:avLst/>
+              </a:prstGeom>
+              <a:blipFill>
+                <a:blip r:embed="rId2"/>
+                <a:stretch>
+                  <a:fillRect l="-17949" r="-15385"/>
+                </a:stretch>
+              </a:blipFill>
+            </p:spPr>
+            <p:txBody>
+              <a:bodyPr/>
+              <a:lstStyle/>
+              <a:p>
+                <a:r>
+                  <a:rPr lang="en-IN">
+                    <a:noFill/>
+                  </a:rPr>
+                  <a:t> </a:t>
+                </a:r>
+              </a:p>
+            </p:txBody>
+          </p:sp>
+        </mc:Fallback>
+      </mc:AlternateContent>
+      <mc:AlternateContent xmlns:mc="http://schemas.openxmlformats.org/markup-compatibility/2006" xmlns:a14="http://schemas.microsoft.com/office/drawing/2010/main">
+        <mc:Choice Requires="a14">
+          <p:sp>
+            <p:nvSpPr>
+              <p:cNvPr id="12" name="TextBox 11">
+                <a:extLst>
+                  <a:ext uri="{FF2B5EF4-FFF2-40B4-BE49-F238E27FC236}">
+                    <a16:creationId xmlns:a16="http://schemas.microsoft.com/office/drawing/2014/main" id="{F9C6BB4F-694B-1DCD-D2DB-5C478BAC0A2B}"/>
+                  </a:ext>
+                </a:extLst>
+              </p:cNvPr>
+              <p:cNvSpPr txBox="1"/>
+              <p:nvPr/>
+            </p:nvSpPr>
+            <p:spPr>
+              <a:xfrm>
+                <a:off x="2446020" y="3009900"/>
+                <a:ext cx="312586" cy="369332"/>
+              </a:xfrm>
+              <a:prstGeom prst="rect">
+                <a:avLst/>
+              </a:prstGeom>
+              <a:noFill/>
+            </p:spPr>
+            <p:txBody>
+              <a:bodyPr wrap="none" lIns="0" tIns="0" rIns="0" bIns="0" rtlCol="0">
+                <a:spAutoFit/>
+              </a:bodyPr>
+              <a:lstStyle/>
+              <a:p>
+                <a:pPr/>
+                <a14:m>
+                  <m:oMathPara xmlns:m="http://schemas.openxmlformats.org/officeDocument/2006/math">
+                    <m:oMathParaPr>
+                      <m:jc m:val="centerGroup"/>
+                    </m:oMathParaPr>
+                    <m:oMath xmlns:m="http://schemas.openxmlformats.org/officeDocument/2006/math">
+                      <m:r>
+                        <a:rPr lang="en-US" sz="2400" b="0" i="1" smtClean="0">
+                          <a:solidFill>
+                            <a:schemeClr val="tx1"/>
+                          </a:solidFill>
+                          <a:latin typeface="Cambria Math" panose="02040503050406030204" pitchFamily="18" charset="0"/>
+                        </a:rPr>
+                        <m:t>𝑥</m:t>
+                      </m:r>
+                      <m:r>
+                        <a:rPr lang="en-US" sz="2400" b="0" i="1" smtClean="0">
+                          <a:solidFill>
+                            <a:schemeClr val="tx1"/>
+                          </a:solidFill>
+                          <a:latin typeface="Cambria Math" panose="02040503050406030204" pitchFamily="18" charset="0"/>
+                        </a:rPr>
+                        <m:t>′</m:t>
+                      </m:r>
+                    </m:oMath>
+                  </m:oMathPara>
+                </a14:m>
+                <a:endParaRPr lang="en-US" sz="2400" dirty="0"/>
+              </a:p>
+            </p:txBody>
+          </p:sp>
+        </mc:Choice>
+        <mc:Fallback xmlns="">
+          <p:sp>
+            <p:nvSpPr>
+              <p:cNvPr id="12" name="TextBox 11">
+                <a:extLst>
+                  <a:ext uri="{FF2B5EF4-FFF2-40B4-BE49-F238E27FC236}">
+                    <a16:creationId xmlns:a16="http://schemas.microsoft.com/office/drawing/2014/main" id="{F9C6BB4F-694B-1DCD-D2DB-5C478BAC0A2B}"/>
+                  </a:ext>
+                </a:extLst>
+              </p:cNvPr>
+              <p:cNvSpPr txBox="1">
+                <a:spLocks noRot="1" noChangeAspect="1" noMove="1" noResize="1" noEditPoints="1" noAdjustHandles="1" noChangeArrowheads="1" noChangeShapeType="1" noTextEdit="1"/>
+              </p:cNvSpPr>
+              <p:nvPr/>
+            </p:nvSpPr>
+            <p:spPr>
+              <a:xfrm>
+                <a:off x="2446020" y="3009900"/>
+                <a:ext cx="312586" cy="369332"/>
+              </a:xfrm>
+              <a:prstGeom prst="rect">
+                <a:avLst/>
+              </a:prstGeom>
+              <a:blipFill>
+                <a:blip r:embed="rId3"/>
+                <a:stretch>
+                  <a:fillRect l="-25000" t="-1667" r="-26923" b="-10000"/>
+                </a:stretch>
+              </a:blipFill>
+            </p:spPr>
+            <p:txBody>
+              <a:bodyPr/>
+              <a:lstStyle/>
+              <a:p>
+                <a:r>
+                  <a:rPr lang="en-IN">
+                    <a:noFill/>
+                  </a:rPr>
+                  <a:t> </a:t>
+                </a:r>
+              </a:p>
+            </p:txBody>
+          </p:sp>
+        </mc:Fallback>
+      </mc:AlternateContent>
+      <p:sp>
+        <p:nvSpPr>
+          <p:cNvPr id="21" name="Parallelogram 7">
+            <a:extLst>
+              <a:ext uri="{FF2B5EF4-FFF2-40B4-BE49-F238E27FC236}">
+                <a16:creationId xmlns:a16="http://schemas.microsoft.com/office/drawing/2014/main" id="{6DEAEDFE-AEDE-B2B2-4911-B9D40D1D2AD3}"/>
+              </a:ext>
+            </a:extLst>
+          </p:cNvPr>
+          <p:cNvSpPr/>
+          <p:nvPr/>
+        </p:nvSpPr>
+        <p:spPr>
+          <a:xfrm flipV="1">
+            <a:off x="2577736" y="2958738"/>
+            <a:ext cx="5819503" cy="45719"/>
+          </a:xfrm>
+          <a:custGeom>
+            <a:avLst/>
+            <a:gdLst>
+              <a:gd name="connsiteX0" fmla="*/ 0 w 6453051"/>
+              <a:gd name="connsiteY0" fmla="*/ 1593668 h 1593668"/>
+              <a:gd name="connsiteX1" fmla="*/ 1744971 w 6453051"/>
+              <a:gd name="connsiteY1" fmla="*/ 0 h 1593668"/>
+              <a:gd name="connsiteX2" fmla="*/ 6453051 w 6453051"/>
+              <a:gd name="connsiteY2" fmla="*/ 0 h 1593668"/>
+              <a:gd name="connsiteX3" fmla="*/ 4708080 w 6453051"/>
+              <a:gd name="connsiteY3" fmla="*/ 1593668 h 1593668"/>
+              <a:gd name="connsiteX4" fmla="*/ 0 w 6453051"/>
+              <a:gd name="connsiteY4" fmla="*/ 1593668 h 1593668"/>
+              <a:gd name="connsiteX0" fmla="*/ 0 w 4708080"/>
+              <a:gd name="connsiteY0" fmla="*/ 1593668 h 1593668"/>
+              <a:gd name="connsiteX1" fmla="*/ 1744971 w 4708080"/>
+              <a:gd name="connsiteY1" fmla="*/ 0 h 1593668"/>
+              <a:gd name="connsiteX2" fmla="*/ 4708080 w 4708080"/>
+              <a:gd name="connsiteY2" fmla="*/ 1593668 h 1593668"/>
+              <a:gd name="connsiteX3" fmla="*/ 0 w 4708080"/>
+              <a:gd name="connsiteY3" fmla="*/ 1593668 h 1593668"/>
+              <a:gd name="connsiteX0" fmla="*/ 0 w 4708080"/>
+              <a:gd name="connsiteY0" fmla="*/ 0 h 0"/>
+              <a:gd name="connsiteX1" fmla="*/ 4708080 w 4708080"/>
+              <a:gd name="connsiteY1" fmla="*/ 0 h 0"/>
+              <a:gd name="connsiteX2" fmla="*/ 0 w 4708080"/>
+              <a:gd name="connsiteY2" fmla="*/ 0 h 0"/>
+            </a:gdLst>
+            <a:ahLst/>
+            <a:cxnLst>
+              <a:cxn ang="0">
+                <a:pos x="connsiteX0" y="connsiteY0"/>
+              </a:cxn>
+              <a:cxn ang="0">
+                <a:pos x="connsiteX1" y="connsiteY1"/>
+              </a:cxn>
+              <a:cxn ang="0">
+                <a:pos x="connsiteX2" y="connsiteY2"/>
+              </a:cxn>
+            </a:cxnLst>
+            <a:rect l="l" t="t" r="r" b="b"/>
+            <a:pathLst>
+              <a:path w="4708080">
+                <a:moveTo>
+                  <a:pt x="0" y="0"/>
+                </a:moveTo>
+                <a:lnTo>
+                  <a:pt x="4708080" y="0"/>
+                </a:lnTo>
+                <a:lnTo>
+                  <a:pt x="0" y="0"/>
+                </a:lnTo>
+                <a:close/>
+              </a:path>
+            </a:pathLst>
+          </a:custGeom>
+          <a:noFill/>
+          <a:ln w="28575">
+            <a:solidFill>
+              <a:schemeClr val="bg1">
+                <a:lumMod val="50000"/>
+              </a:schemeClr>
+            </a:solidFill>
+            <a:prstDash val="dashDot"/>
+          </a:ln>
+        </p:spPr>
+        <p:style>
+          <a:lnRef idx="2">
+            <a:schemeClr val="accent1">
+              <a:shade val="50000"/>
+            </a:schemeClr>
+          </a:lnRef>
+          <a:fillRef idx="1">
+            <a:schemeClr val="accent1"/>
+          </a:fillRef>
+          <a:effectRef idx="0">
+            <a:schemeClr val="accent1"/>
+          </a:effectRef>
+          <a:fontRef idx="minor">
+            <a:schemeClr val="lt1"/>
+          </a:fontRef>
+        </p:style>
+        <p:txBody>
+          <a:bodyPr rtlCol="0" anchor="ctr"/>
+          <a:lstStyle/>
+          <a:p>
+            <a:pPr algn="ctr"/>
+            <a:endParaRPr lang="en-US" dirty="0"/>
+          </a:p>
+        </p:txBody>
+      </p:sp>
+      <p:sp>
+        <p:nvSpPr>
+          <p:cNvPr id="23" name="Oval 22">
+            <a:extLst>
+              <a:ext uri="{FF2B5EF4-FFF2-40B4-BE49-F238E27FC236}">
+                <a16:creationId xmlns:a16="http://schemas.microsoft.com/office/drawing/2014/main" id="{5B3E777E-BA07-9885-AE1E-B3F570556BFD}"/>
+              </a:ext>
+            </a:extLst>
+          </p:cNvPr>
+          <p:cNvSpPr/>
+          <p:nvPr/>
+        </p:nvSpPr>
+        <p:spPr>
+          <a:xfrm>
+            <a:off x="5438502" y="1410789"/>
+            <a:ext cx="211288" cy="211288"/>
+          </a:xfrm>
+          <a:prstGeom prst="ellipse">
+            <a:avLst/>
+          </a:prstGeom>
+          <a:gradFill flip="none" rotWithShape="1">
+            <a:gsLst>
+              <a:gs pos="0">
+                <a:schemeClr val="accent1">
+                  <a:lumMod val="20000"/>
+                  <a:lumOff val="80000"/>
+                </a:schemeClr>
+              </a:gs>
+              <a:gs pos="39000">
+                <a:srgbClr val="638ACF"/>
+              </a:gs>
+              <a:gs pos="100000">
+                <a:schemeClr val="accent1">
+                  <a:lumMod val="50000"/>
+                </a:schemeClr>
+              </a:gs>
+            </a:gsLst>
+            <a:path path="circle">
+              <a:fillToRect l="100000" b="100000"/>
+            </a:path>
+            <a:tileRect t="-100000" r="-100000"/>
+          </a:gradFill>
+          <a:ln>
+            <a:noFill/>
+          </a:ln>
+        </p:spPr>
+        <p:style>
+          <a:lnRef idx="2">
+            <a:schemeClr val="accent1">
+              <a:shade val="15000"/>
+            </a:schemeClr>
+          </a:lnRef>
+          <a:fillRef idx="1">
+            <a:schemeClr val="accent1"/>
+          </a:fillRef>
+          <a:effectRef idx="0">
+            <a:schemeClr val="accent1"/>
+          </a:effectRef>
+          <a:fontRef idx="minor">
+            <a:schemeClr val="lt1"/>
+          </a:fontRef>
+        </p:style>
+        <p:txBody>
+          <a:bodyPr rtlCol="0" anchor="ctr"/>
+          <a:lstStyle/>
+          <a:p>
+            <a:pPr algn="ctr"/>
+            <a:endParaRPr lang="en-IN"/>
+          </a:p>
+        </p:txBody>
+      </p:sp>
+      <p:cxnSp>
+        <p:nvCxnSpPr>
+          <p:cNvPr id="27" name="Straight Connector 26">
+            <a:extLst>
+              <a:ext uri="{FF2B5EF4-FFF2-40B4-BE49-F238E27FC236}">
+                <a16:creationId xmlns:a16="http://schemas.microsoft.com/office/drawing/2014/main" id="{56FF81C6-CEAC-E4AE-2124-7D4E3FBDF0CB}"/>
+              </a:ext>
+            </a:extLst>
+          </p:cNvPr>
+          <p:cNvCxnSpPr>
+            <a:cxnSpLocks/>
+            <a:stCxn id="23" idx="3"/>
+          </p:cNvCxnSpPr>
+          <p:nvPr/>
+        </p:nvCxnSpPr>
+        <p:spPr>
+          <a:xfrm flipH="1">
+            <a:off x="4233863" y="1591135"/>
+            <a:ext cx="1235581" cy="1413322"/>
+          </a:xfrm>
+          <a:prstGeom prst="line">
+            <a:avLst/>
+          </a:prstGeom>
+          <a:ln w="19050">
+            <a:solidFill>
+              <a:schemeClr val="bg1">
+                <a:lumMod val="50000"/>
+              </a:schemeClr>
+            </a:solidFill>
+            <a:prstDash val="sysDot"/>
+          </a:ln>
+        </p:spPr>
+        <p:style>
+          <a:lnRef idx="1">
+            <a:schemeClr val="accent1"/>
+          </a:lnRef>
+          <a:fillRef idx="0">
+            <a:schemeClr val="accent1"/>
+          </a:fillRef>
+          <a:effectRef idx="0">
+            <a:schemeClr val="accent1"/>
+          </a:effectRef>
+          <a:fontRef idx="minor">
+            <a:schemeClr val="tx1"/>
+          </a:fontRef>
+        </p:style>
+      </p:cxnSp>
+      <p:sp>
+        <p:nvSpPr>
+          <p:cNvPr id="34" name="Oval 33">
+            <a:extLst>
+              <a:ext uri="{FF2B5EF4-FFF2-40B4-BE49-F238E27FC236}">
+                <a16:creationId xmlns:a16="http://schemas.microsoft.com/office/drawing/2014/main" id="{01781AC4-DDB4-8358-19C0-39A470661EB5}"/>
+              </a:ext>
+            </a:extLst>
+          </p:cNvPr>
+          <p:cNvSpPr/>
+          <p:nvPr/>
+        </p:nvSpPr>
+        <p:spPr>
+          <a:xfrm>
+            <a:off x="4135911" y="2901214"/>
+            <a:ext cx="211288" cy="211288"/>
+          </a:xfrm>
+          <a:prstGeom prst="ellipse">
+            <a:avLst/>
+          </a:prstGeom>
+          <a:gradFill flip="none" rotWithShape="1">
+            <a:gsLst>
+              <a:gs pos="0">
+                <a:schemeClr val="accent1">
+                  <a:lumMod val="20000"/>
+                  <a:lumOff val="80000"/>
+                </a:schemeClr>
+              </a:gs>
+              <a:gs pos="39000">
+                <a:srgbClr val="638ACF"/>
+              </a:gs>
+              <a:gs pos="100000">
+                <a:schemeClr val="accent1">
+                  <a:lumMod val="50000"/>
+                </a:schemeClr>
+              </a:gs>
+            </a:gsLst>
+            <a:path path="circle">
+              <a:fillToRect l="100000" b="100000"/>
+            </a:path>
+            <a:tileRect t="-100000" r="-100000"/>
+          </a:gradFill>
+          <a:ln>
+            <a:noFill/>
+          </a:ln>
+        </p:spPr>
+        <p:style>
+          <a:lnRef idx="2">
+            <a:schemeClr val="accent1">
+              <a:shade val="15000"/>
+            </a:schemeClr>
+          </a:lnRef>
+          <a:fillRef idx="1">
+            <a:schemeClr val="accent1"/>
+          </a:fillRef>
+          <a:effectRef idx="0">
+            <a:schemeClr val="accent1"/>
+          </a:effectRef>
+          <a:fontRef idx="minor">
+            <a:schemeClr val="lt1"/>
+          </a:fontRef>
+        </p:style>
+        <p:txBody>
+          <a:bodyPr rtlCol="0" anchor="ctr"/>
+          <a:lstStyle/>
+          <a:p>
+            <a:pPr algn="ctr"/>
+            <a:endParaRPr lang="en-IN"/>
+          </a:p>
+        </p:txBody>
+      </p:sp>
+      <p:grpSp>
+        <p:nvGrpSpPr>
+          <p:cNvPr id="3" name="Group 2"/>
+          <p:cNvGrpSpPr/>
+          <p:nvPr/>
+        </p:nvGrpSpPr>
+        <p:grpSpPr>
+          <a:xfrm>
+            <a:off x="6022967" y="1525760"/>
+            <a:ext cx="297646" cy="1501239"/>
+            <a:chOff x="6673207" y="1525760"/>
+            <a:chExt cx="297646" cy="1501239"/>
+          </a:xfrm>
+        </p:grpSpPr>
+        <p:cxnSp>
+          <p:nvCxnSpPr>
+            <p:cNvPr id="42" name="Straight Arrow Connector 41">
+              <a:extLst>
+                <a:ext uri="{FF2B5EF4-FFF2-40B4-BE49-F238E27FC236}">
+                  <a16:creationId xmlns:a16="http://schemas.microsoft.com/office/drawing/2014/main" id="{3FCA4654-D923-6DD0-825A-6F8E9FA73EE0}"/>
+                </a:ext>
+              </a:extLst>
+            </p:cNvPr>
+            <p:cNvCxnSpPr/>
+            <p:nvPr/>
+          </p:nvCxnSpPr>
+          <p:spPr>
+            <a:xfrm>
+              <a:off x="6820930" y="1525760"/>
+              <a:ext cx="0" cy="1501239"/>
+            </a:xfrm>
+            <a:prstGeom prst="straightConnector1">
+              <a:avLst/>
+            </a:prstGeom>
+            <a:ln w="19050">
+              <a:solidFill>
+                <a:schemeClr val="tx1"/>
+              </a:solidFill>
+              <a:headEnd type="triangle" w="lg" len="med"/>
+              <a:tailEnd type="triangle" w="lg" len="med"/>
+            </a:ln>
+          </p:spPr>
+          <p:style>
+            <a:lnRef idx="1">
+              <a:schemeClr val="accent1"/>
+            </a:lnRef>
+            <a:fillRef idx="0">
+              <a:schemeClr val="accent1"/>
+            </a:fillRef>
+            <a:effectRef idx="0">
+              <a:schemeClr val="accent1"/>
+            </a:effectRef>
+            <a:fontRef idx="minor">
+              <a:schemeClr val="tx1"/>
+            </a:fontRef>
+          </p:style>
+        </p:cxnSp>
+        <mc:AlternateContent xmlns:mc="http://schemas.openxmlformats.org/markup-compatibility/2006">
+          <mc:Choice xmlns:a14="http://schemas.microsoft.com/office/drawing/2010/main" Requires="a14">
+            <p:sp>
+              <p:nvSpPr>
+                <p:cNvPr id="44" name="TextBox 43">
+                  <a:extLst>
+                    <a:ext uri="{FF2B5EF4-FFF2-40B4-BE49-F238E27FC236}">
+                      <a16:creationId xmlns:a16="http://schemas.microsoft.com/office/drawing/2014/main" id="{E515BFB6-3AC4-8B65-3D4B-AC15AC147A7F}"/>
+                    </a:ext>
+                  </a:extLst>
+                </p:cNvPr>
+                <p:cNvSpPr txBox="1"/>
+                <p:nvPr/>
+              </p:nvSpPr>
+              <p:spPr>
+                <a:xfrm>
+                  <a:off x="6673207" y="1856509"/>
+                  <a:ext cx="297646" cy="430887"/>
+                </a:xfrm>
+                <a:prstGeom prst="rect">
+                  <a:avLst/>
+                </a:prstGeom>
+                <a:solidFill>
+                  <a:schemeClr val="bg1"/>
+                </a:solidFill>
+              </p:spPr>
+              <p:txBody>
+                <a:bodyPr wrap="none" lIns="0" tIns="0" rIns="0" bIns="0" rtlCol="0">
+                  <a:spAutoFit/>
+                </a:bodyPr>
+                <a:lstStyle/>
+                <a:p>
+                  <a:pPr/>
+                  <a14:m>
+                    <m:oMathPara xmlns:m="http://schemas.openxmlformats.org/officeDocument/2006/math">
+                      <m:oMathParaPr>
+                        <m:jc m:val="centerGroup"/>
+                      </m:oMathParaPr>
+                      <m:oMath xmlns:m="http://schemas.openxmlformats.org/officeDocument/2006/math">
+                        <m:r>
+                          <a:rPr lang="en-US" sz="2800" b="0" i="1" smtClean="0">
+                            <a:latin typeface="Cambria Math" panose="02040503050406030204" pitchFamily="18" charset="0"/>
+                          </a:rPr>
+                          <m:t>h</m:t>
+                        </m:r>
+                      </m:oMath>
+                    </m:oMathPara>
+                  </a14:m>
+                  <a:endParaRPr lang="en-IN" sz="2800" dirty="0"/>
+                </a:p>
+              </p:txBody>
+            </p:sp>
+          </mc:Choice>
+          <mc:Fallback>
+            <p:sp>
+              <p:nvSpPr>
+                <p:cNvPr id="44" name="TextBox 43">
+                  <a:extLst>
+                    <a:ext uri="{FF2B5EF4-FFF2-40B4-BE49-F238E27FC236}">
+                      <a16:creationId xmlns:a16="http://schemas.microsoft.com/office/drawing/2014/main" id="{E515BFB6-3AC4-8B65-3D4B-AC15AC147A7F}"/>
+                    </a:ext>
+                  </a:extLst>
+                </p:cNvPr>
+                <p:cNvSpPr txBox="1">
+                  <a:spLocks noRot="1" noChangeAspect="1" noMove="1" noResize="1" noEditPoints="1" noAdjustHandles="1" noChangeArrowheads="1" noChangeShapeType="1" noTextEdit="1"/>
+                </p:cNvSpPr>
+                <p:nvPr/>
+              </p:nvSpPr>
+              <p:spPr>
+                <a:xfrm>
+                  <a:off x="6673207" y="1856509"/>
+                  <a:ext cx="297646" cy="430887"/>
+                </a:xfrm>
+                <a:prstGeom prst="rect">
+                  <a:avLst/>
+                </a:prstGeom>
+                <a:blipFill>
+                  <a:blip r:embed="rId4"/>
+                  <a:stretch>
+                    <a:fillRect/>
+                  </a:stretch>
+                </a:blipFill>
+              </p:spPr>
+              <p:txBody>
+                <a:bodyPr/>
+                <a:lstStyle/>
+                <a:p>
+                  <a:r>
+                    <a:rPr lang="en-US">
+                      <a:noFill/>
+                    </a:rPr>
+                    <a:t> </a:t>
+                  </a:r>
+                </a:p>
+              </p:txBody>
+            </p:sp>
+          </mc:Fallback>
+        </mc:AlternateContent>
+      </p:grpSp>
+      <mc:AlternateContent xmlns:mc="http://schemas.openxmlformats.org/markup-compatibility/2006">
+        <mc:Choice xmlns:a14="http://schemas.microsoft.com/office/drawing/2010/main" Requires="a14">
+          <p:sp>
+            <p:nvSpPr>
+              <p:cNvPr id="40" name="TextBox 39">
+                <a:extLst>
+                  <a:ext uri="{FF2B5EF4-FFF2-40B4-BE49-F238E27FC236}">
+                    <a16:creationId xmlns:a16="http://schemas.microsoft.com/office/drawing/2014/main" id="{F401E4CD-5DFB-5EB5-9EE0-BDB032FE08BB}"/>
+                  </a:ext>
+                </a:extLst>
+              </p:cNvPr>
+              <p:cNvSpPr txBox="1"/>
+              <p:nvPr/>
+            </p:nvSpPr>
+            <p:spPr>
+              <a:xfrm>
+                <a:off x="7019045" y="3087088"/>
+                <a:ext cx="302840" cy="430887"/>
+              </a:xfrm>
+              <a:prstGeom prst="rect">
+                <a:avLst/>
+              </a:prstGeom>
+              <a:noFill/>
+            </p:spPr>
+            <p:txBody>
+              <a:bodyPr wrap="none" lIns="0" tIns="0" rIns="0" bIns="0" rtlCol="0">
+                <a:spAutoFit/>
+              </a:bodyPr>
+              <a:lstStyle/>
+              <a:p>
+                <a:pPr/>
+                <a14:m>
+                  <m:oMathPara xmlns:m="http://schemas.openxmlformats.org/officeDocument/2006/math">
+                    <m:oMathParaPr>
+                      <m:jc m:val="centerGroup"/>
+                    </m:oMathParaPr>
+                    <m:oMath xmlns:m="http://schemas.openxmlformats.org/officeDocument/2006/math">
+                      <m:r>
+                        <a:rPr lang="en-US" sz="2800" b="0" i="1" smtClean="0">
+                          <a:latin typeface="Cambria Math" panose="02040503050406030204" pitchFamily="18" charset="0"/>
+                        </a:rPr>
+                        <m:t>𝑇</m:t>
+                      </m:r>
+                    </m:oMath>
+                  </m:oMathPara>
+                </a14:m>
+                <a:endParaRPr lang="en-IN" sz="2800" dirty="0"/>
+              </a:p>
+            </p:txBody>
+          </p:sp>
+        </mc:Choice>
+        <mc:Fallback>
+          <p:sp>
+            <p:nvSpPr>
+              <p:cNvPr id="40" name="TextBox 39">
+                <a:extLst>
+                  <a:ext uri="{FF2B5EF4-FFF2-40B4-BE49-F238E27FC236}">
+                    <a16:creationId xmlns:a16="http://schemas.microsoft.com/office/drawing/2014/main" id="{F401E4CD-5DFB-5EB5-9EE0-BDB032FE08BB}"/>
+                  </a:ext>
+                </a:extLst>
+              </p:cNvPr>
+              <p:cNvSpPr txBox="1">
+                <a:spLocks noRot="1" noChangeAspect="1" noMove="1" noResize="1" noEditPoints="1" noAdjustHandles="1" noChangeArrowheads="1" noChangeShapeType="1" noTextEdit="1"/>
+              </p:cNvSpPr>
+              <p:nvPr/>
+            </p:nvSpPr>
+            <p:spPr>
+              <a:xfrm>
+                <a:off x="7019045" y="3087088"/>
+                <a:ext cx="302840" cy="430887"/>
+              </a:xfrm>
+              <a:prstGeom prst="rect">
+                <a:avLst/>
+              </a:prstGeom>
+              <a:blipFill>
+                <a:blip r:embed="rId5"/>
+                <a:stretch>
+                  <a:fillRect/>
+                </a:stretch>
+              </a:blipFill>
+            </p:spPr>
+            <p:txBody>
+              <a:bodyPr/>
+              <a:lstStyle/>
+              <a:p>
+                <a:r>
+                  <a:rPr lang="en-US">
+                    <a:noFill/>
+                  </a:rPr>
+                  <a:t> </a:t>
+                </a:r>
+              </a:p>
+            </p:txBody>
+          </p:sp>
+        </mc:Fallback>
+      </mc:AlternateContent>
+      <mc:AlternateContent xmlns:mc="http://schemas.openxmlformats.org/markup-compatibility/2006">
+        <mc:Choice xmlns:a14="http://schemas.microsoft.com/office/drawing/2010/main" Requires="a14">
+          <p:sp>
+            <p:nvSpPr>
+              <p:cNvPr id="22" name="TextBox 21">
+                <a:extLst>
+                  <a:ext uri="{FF2B5EF4-FFF2-40B4-BE49-F238E27FC236}">
+                    <a16:creationId xmlns:a16="http://schemas.microsoft.com/office/drawing/2014/main" id="{F401E4CD-5DFB-5EB5-9EE0-BDB032FE08BB}"/>
+                  </a:ext>
+                </a:extLst>
+              </p:cNvPr>
+              <p:cNvSpPr txBox="1"/>
+              <p:nvPr/>
+            </p:nvSpPr>
+            <p:spPr>
+              <a:xfrm>
+                <a:off x="6543557" y="1075408"/>
+                <a:ext cx="1414683" cy="891847"/>
+              </a:xfrm>
+              <a:prstGeom prst="rect">
+                <a:avLst/>
+              </a:prstGeom>
+              <a:noFill/>
+            </p:spPr>
+            <p:txBody>
+              <a:bodyPr wrap="none" lIns="0" tIns="0" rIns="0" bIns="0" rtlCol="0">
+                <a:spAutoFit/>
+              </a:bodyPr>
+              <a:lstStyle/>
+              <a:p>
+                <a:pPr/>
+                <a14:m>
+                  <m:oMathPara xmlns:m="http://schemas.openxmlformats.org/officeDocument/2006/math">
+                    <m:oMathParaPr>
+                      <m:jc m:val="centerGroup"/>
+                    </m:oMathParaPr>
+                    <m:oMath xmlns:m="http://schemas.openxmlformats.org/officeDocument/2006/math">
+                      <m:r>
+                        <a:rPr lang="en-US" sz="2800" b="0" i="1" smtClean="0">
+                          <a:latin typeface="Cambria Math" panose="02040503050406030204" pitchFamily="18" charset="0"/>
+                        </a:rPr>
+                        <m:t>𝑇</m:t>
+                      </m:r>
+                      <m:r>
+                        <a:rPr lang="en-US" sz="2800" b="0" i="1" smtClean="0">
+                          <a:latin typeface="Cambria Math" panose="02040503050406030204" pitchFamily="18" charset="0"/>
+                        </a:rPr>
+                        <m:t>+</m:t>
+                      </m:r>
+                      <m:r>
+                        <a:rPr lang="en-US" sz="2800" b="0" i="1" smtClean="0">
+                          <a:latin typeface="Cambria Math" panose="02040503050406030204" pitchFamily="18" charset="0"/>
+                        </a:rPr>
+                        <m:t>h</m:t>
+                      </m:r>
+                      <m:f>
+                        <m:fPr>
+                          <m:ctrlPr>
+                            <a:rPr lang="en-US" sz="2800" b="0" i="1" smtClean="0">
+                              <a:latin typeface="Cambria Math" panose="02040503050406030204" pitchFamily="18" charset="0"/>
+                            </a:rPr>
+                          </m:ctrlPr>
+                        </m:fPr>
+                        <m:num>
+                          <m:r>
+                            <m:rPr>
+                              <m:sty m:val="p"/>
+                            </m:rPr>
+                            <a:rPr lang="en-US" sz="2800" b="0" i="0" smtClean="0">
+                              <a:latin typeface="Cambria Math" panose="02040503050406030204" pitchFamily="18" charset="0"/>
+                            </a:rPr>
+                            <m:t>d</m:t>
+                          </m:r>
+                          <m:r>
+                            <a:rPr lang="en-US" sz="2800" b="0" i="1" smtClean="0">
+                              <a:latin typeface="Cambria Math" panose="02040503050406030204" pitchFamily="18" charset="0"/>
+                            </a:rPr>
+                            <m:t>𝑇</m:t>
+                          </m:r>
+                        </m:num>
+                        <m:den>
+                          <m:r>
+                            <m:rPr>
+                              <m:sty m:val="p"/>
+                            </m:rPr>
+                            <a:rPr lang="en-US" sz="2800" b="0" i="0" smtClean="0">
+                              <a:latin typeface="Cambria Math" panose="02040503050406030204" pitchFamily="18" charset="0"/>
+                            </a:rPr>
+                            <m:t>d</m:t>
+                          </m:r>
+                          <m:r>
+                            <a:rPr lang="en-US" sz="2800" b="0" i="1" smtClean="0">
+                              <a:latin typeface="Cambria Math" panose="02040503050406030204" pitchFamily="18" charset="0"/>
+                            </a:rPr>
+                            <m:t>𝑦</m:t>
+                          </m:r>
+                        </m:den>
+                      </m:f>
+                    </m:oMath>
+                  </m:oMathPara>
+                </a14:m>
+                <a:endParaRPr lang="en-IN" sz="2800" dirty="0"/>
+              </a:p>
+            </p:txBody>
+          </p:sp>
+        </mc:Choice>
+        <mc:Fallback>
+          <p:sp>
+            <p:nvSpPr>
+              <p:cNvPr id="22" name="TextBox 21">
+                <a:extLst>
+                  <a:ext uri="{FF2B5EF4-FFF2-40B4-BE49-F238E27FC236}">
+                    <a16:creationId xmlns:a16="http://schemas.microsoft.com/office/drawing/2014/main" id="{F401E4CD-5DFB-5EB5-9EE0-BDB032FE08BB}"/>
+                  </a:ext>
+                </a:extLst>
+              </p:cNvPr>
+              <p:cNvSpPr txBox="1">
+                <a:spLocks noRot="1" noChangeAspect="1" noMove="1" noResize="1" noEditPoints="1" noAdjustHandles="1" noChangeArrowheads="1" noChangeShapeType="1" noTextEdit="1"/>
+              </p:cNvSpPr>
+              <p:nvPr/>
+            </p:nvSpPr>
+            <p:spPr>
+              <a:xfrm>
+                <a:off x="6543557" y="1075408"/>
+                <a:ext cx="1414683" cy="891847"/>
+              </a:xfrm>
+              <a:prstGeom prst="rect">
+                <a:avLst/>
+              </a:prstGeom>
+              <a:blipFill>
+                <a:blip r:embed="rId6"/>
+                <a:stretch>
+                  <a:fillRect/>
+                </a:stretch>
+              </a:blipFill>
+            </p:spPr>
+            <p:txBody>
+              <a:bodyPr/>
+              <a:lstStyle/>
+              <a:p>
+                <a:r>
+                  <a:rPr lang="en-US">
+                    <a:noFill/>
+                  </a:rPr>
+                  <a:t> </a:t>
+                </a:r>
+              </a:p>
+            </p:txBody>
+          </p:sp>
+        </mc:Fallback>
+      </mc:AlternateContent>
+    </p:spTree>
+    <p:extLst>
+      <p:ext uri="{BB962C8B-B14F-4D97-AF65-F5344CB8AC3E}">
+        <p14:creationId xmlns:p14="http://schemas.microsoft.com/office/powerpoint/2010/main" val="2437898623"/>
+      </p:ext>
+    </p:extLst>
+  </p:cSld>
+  <p:clrMapOvr>
+    <a:masterClrMapping/>
+  </p:clrMapOvr>
+</p:sld>
+</file>
+
 <file path=ppt/slides/slide2.xml><?xml version="1.0" encoding="utf-8"?>
 <p:sld xmlns:a="http://schemas.openxmlformats.org/drawingml/2006/main" xmlns:r="http://schemas.openxmlformats.org/officeDocument/2006/relationships" xmlns:p="http://schemas.openxmlformats.org/presentationml/2006/main">
   <p:cSld>
@@ -7312,7 +8868,10 @@
                 <a:pPr/>
                 <a14:m>
                   <m:oMathPara xmlns:m="http://schemas.openxmlformats.org/officeDocument/2006/math">
-                    <m:oMath>
+                    <m:oMathParaPr>
+                      <m:jc m:val="centerGroup"/>
+                    </m:oMathParaPr>
+                    <m:oMath xmlns:m="http://schemas.openxmlformats.org/officeDocument/2006/math">
                       <m:sSub>
                         <m:sSubPr>
                           <m:ctrlPr>
@@ -7424,7 +8983,10 @@
                 <a:pPr/>
                 <a14:m>
                   <m:oMathPara xmlns:m="http://schemas.openxmlformats.org/officeDocument/2006/math">
-                    <m:oMath>
+                    <m:oMathParaPr>
+                      <m:jc m:val="centerGroup"/>
+                    </m:oMathParaPr>
+                    <m:oMath xmlns:m="http://schemas.openxmlformats.org/officeDocument/2006/math">
                       <m:sSub>
                         <m:sSubPr>
                           <m:ctrlPr>
@@ -7536,7 +9098,10 @@
                 <a:pPr/>
                 <a14:m>
                   <m:oMathPara xmlns:m="http://schemas.openxmlformats.org/officeDocument/2006/math">
-                    <m:oMath>
+                    <m:oMathParaPr>
+                      <m:jc m:val="centerGroup"/>
+                    </m:oMathParaPr>
+                    <m:oMath xmlns:m="http://schemas.openxmlformats.org/officeDocument/2006/math">
                       <m:sSub>
                         <m:sSubPr>
                           <m:ctrlPr>
@@ -7648,7 +9213,10 @@
                 <a:pPr/>
                 <a14:m>
                   <m:oMathPara xmlns:m="http://schemas.openxmlformats.org/officeDocument/2006/math">
-                    <m:oMath>
+                    <m:oMathParaPr>
+                      <m:jc m:val="centerGroup"/>
+                    </m:oMathParaPr>
+                    <m:oMath xmlns:m="http://schemas.openxmlformats.org/officeDocument/2006/math">
                       <m:r>
                         <a:rPr lang="en-US" sz="2400" b="0" i="1" smtClean="0">
                           <a:latin typeface="Cambria Math" panose="02040503050406030204" pitchFamily="18" charset="0"/>
@@ -7741,7 +9309,10 @@
                 <a:pPr/>
                 <a14:m>
                   <m:oMathPara xmlns:m="http://schemas.openxmlformats.org/officeDocument/2006/math">
-                    <m:oMath>
+                    <m:oMathParaPr>
+                      <m:jc m:val="centerGroup"/>
+                    </m:oMathParaPr>
+                    <m:oMath xmlns:m="http://schemas.openxmlformats.org/officeDocument/2006/math">
                       <m:acc>
                         <m:accPr>
                           <m:chr m:val="⃗"/>
@@ -7846,7 +9417,10 @@
                 <a:pPr/>
                 <a14:m>
                   <m:oMathPara xmlns:m="http://schemas.openxmlformats.org/officeDocument/2006/math">
-                    <m:oMath>
+                    <m:oMathParaPr>
+                      <m:jc m:val="centerGroup"/>
+                    </m:oMathParaPr>
+                    <m:oMath xmlns:m="http://schemas.openxmlformats.org/officeDocument/2006/math">
                       <m:r>
                         <a:rPr lang="en-US" sz="2400" b="0" i="1" smtClean="0">
                           <a:latin typeface="Cambria Math" panose="02040503050406030204" pitchFamily="18" charset="0"/>
@@ -8231,7 +9805,10 @@
                 <a:pPr/>
                 <a14:m>
                   <m:oMathPara xmlns:m="http://schemas.openxmlformats.org/officeDocument/2006/math">
-                    <m:oMath>
+                    <m:oMathParaPr>
+                      <m:jc m:val="centerGroup"/>
+                    </m:oMathParaPr>
+                    <m:oMath xmlns:m="http://schemas.openxmlformats.org/officeDocument/2006/math">
                       <m:acc>
                         <m:accPr>
                           <m:chr m:val="⃗"/>
@@ -8464,7 +10041,10 @@
                 <a:pPr/>
                 <a14:m>
                   <m:oMathPara xmlns:m="http://schemas.openxmlformats.org/officeDocument/2006/math">
-                    <m:oMath>
+                    <m:oMathParaPr>
+                      <m:jc m:val="centerGroup"/>
+                    </m:oMathParaPr>
+                    <m:oMath xmlns:m="http://schemas.openxmlformats.org/officeDocument/2006/math">
                       <m:sSub>
                         <m:sSubPr>
                           <m:ctrlPr>
@@ -8576,7 +10156,10 @@
                 <a:pPr/>
                 <a14:m>
                   <m:oMathPara xmlns:m="http://schemas.openxmlformats.org/officeDocument/2006/math">
-                    <m:oMath>
+                    <m:oMathParaPr>
+                      <m:jc m:val="centerGroup"/>
+                    </m:oMathParaPr>
+                    <m:oMath xmlns:m="http://schemas.openxmlformats.org/officeDocument/2006/math">
                       <m:sSub>
                         <m:sSubPr>
                           <m:ctrlPr>
@@ -8863,7 +10446,10 @@
                 <a:pPr/>
                 <a14:m>
                   <m:oMathPara xmlns:m="http://schemas.openxmlformats.org/officeDocument/2006/math">
-                    <m:oMath>
+                    <m:oMathParaPr>
+                      <m:jc m:val="centerGroup"/>
+                    </m:oMathParaPr>
+                    <m:oMath xmlns:m="http://schemas.openxmlformats.org/officeDocument/2006/math">
                       <m:r>
                         <a:rPr lang="en-US" sz="2400" b="0" i="1" smtClean="0">
                           <a:latin typeface="Cambria Math" panose="02040503050406030204" pitchFamily="18" charset="0"/>
@@ -9003,7 +10589,10 @@
                 <a:pPr/>
                 <a14:m>
                   <m:oMathPara xmlns:m="http://schemas.openxmlformats.org/officeDocument/2006/math">
-                    <m:oMath>
+                    <m:oMathParaPr>
+                      <m:jc m:val="centerGroup"/>
+                    </m:oMathParaPr>
+                    <m:oMath xmlns:m="http://schemas.openxmlformats.org/officeDocument/2006/math">
                       <m:r>
                         <a:rPr lang="en-US" sz="2400" b="0" i="1" smtClean="0">
                           <a:latin typeface="Cambria Math" panose="02040503050406030204" pitchFamily="18" charset="0"/>
@@ -9276,7 +10865,10 @@
                 <a:pPr/>
                 <a14:m>
                   <m:oMathPara xmlns:m="http://schemas.openxmlformats.org/officeDocument/2006/math">
-                    <m:oMath>
+                    <m:oMathParaPr>
+                      <m:jc m:val="centerGroup"/>
+                    </m:oMathParaPr>
+                    <m:oMath xmlns:m="http://schemas.openxmlformats.org/officeDocument/2006/math">
                       <m:f>
                         <m:fPr>
                           <m:ctrlPr>
@@ -12143,7 +13735,10 @@
                 <a:pPr/>
                 <a14:m>
                   <m:oMathPara xmlns:m="http://schemas.openxmlformats.org/officeDocument/2006/math">
-                    <m:oMath>
+                    <m:oMathParaPr>
+                      <m:jc m:val="centerGroup"/>
+                    </m:oMathParaPr>
+                    <m:oMath xmlns:m="http://schemas.openxmlformats.org/officeDocument/2006/math">
                       <m:sSub>
                         <m:sSubPr>
                           <m:ctrlPr>
@@ -12266,7 +13861,10 @@
                 <a:pPr/>
                 <a14:m>
                   <m:oMathPara xmlns:m="http://schemas.openxmlformats.org/officeDocument/2006/math">
-                    <m:oMath>
+                    <m:oMathParaPr>
+                      <m:jc m:val="centerGroup"/>
+                    </m:oMathParaPr>
+                    <m:oMath xmlns:m="http://schemas.openxmlformats.org/officeDocument/2006/math">
                       <m:sSub>
                         <m:sSubPr>
                           <m:ctrlPr>
@@ -12389,7 +13987,10 @@
                 <a:pPr/>
                 <a14:m>
                   <m:oMathPara xmlns:m="http://schemas.openxmlformats.org/officeDocument/2006/math">
-                    <m:oMath>
+                    <m:oMathParaPr>
+                      <m:jc m:val="centerGroup"/>
+                    </m:oMathParaPr>
+                    <m:oMath xmlns:m="http://schemas.openxmlformats.org/officeDocument/2006/math">
                       <m:sSub>
                         <m:sSubPr>
                           <m:ctrlPr>
@@ -12512,7 +14113,10 @@
                 <a:pPr/>
                 <a14:m>
                   <m:oMathPara xmlns:m="http://schemas.openxmlformats.org/officeDocument/2006/math">
-                    <m:oMath>
+                    <m:oMathParaPr>
+                      <m:jc m:val="centerGroup"/>
+                    </m:oMathParaPr>
+                    <m:oMath xmlns:m="http://schemas.openxmlformats.org/officeDocument/2006/math">
                       <m:sSub>
                         <m:sSubPr>
                           <m:ctrlPr>
@@ -12635,7 +14239,10 @@
                 <a:pPr/>
                 <a14:m>
                   <m:oMathPara xmlns:m="http://schemas.openxmlformats.org/officeDocument/2006/math">
-                    <m:oMath>
+                    <m:oMathParaPr>
+                      <m:jc m:val="centerGroup"/>
+                    </m:oMathParaPr>
+                    <m:oMath xmlns:m="http://schemas.openxmlformats.org/officeDocument/2006/math">
                       <m:sSub>
                         <m:sSubPr>
                           <m:ctrlPr>
@@ -12758,7 +14365,10 @@
                 <a:pPr/>
                 <a14:m>
                   <m:oMathPara xmlns:m="http://schemas.openxmlformats.org/officeDocument/2006/math">
-                    <m:oMath>
+                    <m:oMathParaPr>
+                      <m:jc m:val="centerGroup"/>
+                    </m:oMathParaPr>
+                    <m:oMath xmlns:m="http://schemas.openxmlformats.org/officeDocument/2006/math">
                       <m:sSub>
                         <m:sSubPr>
                           <m:ctrlPr>
@@ -12881,7 +14491,10 @@
                 <a:pPr/>
                 <a14:m>
                   <m:oMathPara xmlns:m="http://schemas.openxmlformats.org/officeDocument/2006/math">
-                    <m:oMath>
+                    <m:oMathParaPr>
+                      <m:jc m:val="centerGroup"/>
+                    </m:oMathParaPr>
+                    <m:oMath xmlns:m="http://schemas.openxmlformats.org/officeDocument/2006/math">
                       <m:sSub>
                         <m:sSubPr>
                           <m:ctrlPr>
@@ -13004,7 +14617,10 @@
                 <a:pPr/>
                 <a14:m>
                   <m:oMathPara xmlns:m="http://schemas.openxmlformats.org/officeDocument/2006/math">
-                    <m:oMath>
+                    <m:oMathParaPr>
+                      <m:jc m:val="centerGroup"/>
+                    </m:oMathParaPr>
+                    <m:oMath xmlns:m="http://schemas.openxmlformats.org/officeDocument/2006/math">
                       <m:sSub>
                         <m:sSubPr>
                           <m:ctrlPr>
@@ -13127,7 +14743,10 @@
                 <a:pPr/>
                 <a14:m>
                   <m:oMathPara xmlns:m="http://schemas.openxmlformats.org/officeDocument/2006/math">
-                    <m:oMath>
+                    <m:oMathParaPr>
+                      <m:jc m:val="centerGroup"/>
+                    </m:oMathParaPr>
+                    <m:oMath xmlns:m="http://schemas.openxmlformats.org/officeDocument/2006/math">
                       <m:sSub>
                         <m:sSubPr>
                           <m:ctrlPr>
@@ -13294,7 +14913,10 @@
                 <a:pPr/>
                 <a14:m>
                   <m:oMathPara xmlns:m="http://schemas.openxmlformats.org/officeDocument/2006/math">
-                    <m:oMath>
+                    <m:oMathParaPr>
+                      <m:jc m:val="centerGroup"/>
+                    </m:oMathParaPr>
+                    <m:oMath xmlns:m="http://schemas.openxmlformats.org/officeDocument/2006/math">
                       <m:sSub>
                         <m:sSubPr>
                           <m:ctrlPr>
@@ -14493,7 +16115,10 @@
                 <a:pPr/>
                 <a14:m>
                   <m:oMathPara xmlns:m="http://schemas.openxmlformats.org/officeDocument/2006/math">
-                    <m:oMath>
+                    <m:oMathParaPr>
+                      <m:jc m:val="centerGroup"/>
+                    </m:oMathParaPr>
+                    <m:oMath xmlns:m="http://schemas.openxmlformats.org/officeDocument/2006/math">
                       <m:r>
                         <a:rPr lang="en-US" sz="2000" b="0" i="1" smtClean="0">
                           <a:latin typeface="Cambria Math" panose="02040503050406030204" pitchFamily="18" charset="0"/>
@@ -14586,7 +16211,10 @@
                 <a:pPr/>
                 <a14:m>
                   <m:oMathPara xmlns:m="http://schemas.openxmlformats.org/officeDocument/2006/math">
-                    <m:oMath>
+                    <m:oMathParaPr>
+                      <m:jc m:val="centerGroup"/>
+                    </m:oMathParaPr>
+                    <m:oMath xmlns:m="http://schemas.openxmlformats.org/officeDocument/2006/math">
                       <m:r>
                         <a:rPr lang="en-US" sz="2000" b="0" i="1" smtClean="0">
                           <a:latin typeface="Cambria Math" panose="02040503050406030204" pitchFamily="18" charset="0"/>
@@ -14673,7 +16301,10 @@
                 <a:pPr/>
                 <a14:m>
                   <m:oMathPara xmlns:m="http://schemas.openxmlformats.org/officeDocument/2006/math">
-                    <m:oMath>
+                    <m:oMathParaPr>
+                      <m:jc m:val="centerGroup"/>
+                    </m:oMathParaPr>
+                    <m:oMath xmlns:m="http://schemas.openxmlformats.org/officeDocument/2006/math">
                       <m:r>
                         <a:rPr lang="en-US" sz="2000" b="0" i="1" smtClean="0">
                           <a:latin typeface="Cambria Math" panose="02040503050406030204" pitchFamily="18" charset="0"/>
@@ -14754,7 +16385,10 @@
                 <a:pPr/>
                 <a14:m>
                   <m:oMathPara xmlns:m="http://schemas.openxmlformats.org/officeDocument/2006/math">
-                    <m:oMath>
+                    <m:oMathParaPr>
+                      <m:jc m:val="centerGroup"/>
+                    </m:oMathParaPr>
+                    <m:oMath xmlns:m="http://schemas.openxmlformats.org/officeDocument/2006/math">
                       <m:r>
                         <a:rPr lang="en-US" sz="2000" b="0" i="1" smtClean="0">
                           <a:latin typeface="Cambria Math" panose="02040503050406030204" pitchFamily="18" charset="0"/>
@@ -14835,7 +16469,10 @@
                 <a:pPr/>
                 <a14:m>
                   <m:oMathPara xmlns:m="http://schemas.openxmlformats.org/officeDocument/2006/math">
-                    <m:oMath>
+                    <m:oMathParaPr>
+                      <m:jc m:val="centerGroup"/>
+                    </m:oMathParaPr>
+                    <m:oMath xmlns:m="http://schemas.openxmlformats.org/officeDocument/2006/math">
                       <m:r>
                         <a:rPr lang="en-US" sz="2000" b="0" i="1" smtClean="0">
                           <a:latin typeface="Cambria Math" panose="02040503050406030204" pitchFamily="18" charset="0"/>
@@ -14928,7 +16565,10 @@
                 <a:pPr/>
                 <a14:m>
                   <m:oMathPara xmlns:m="http://schemas.openxmlformats.org/officeDocument/2006/math">
-                    <m:oMath>
+                    <m:oMathParaPr>
+                      <m:jc m:val="centerGroup"/>
+                    </m:oMathParaPr>
+                    <m:oMath xmlns:m="http://schemas.openxmlformats.org/officeDocument/2006/math">
                       <m:r>
                         <a:rPr lang="en-US" sz="2000" b="0" i="1" smtClean="0">
                           <a:latin typeface="Cambria Math" panose="02040503050406030204" pitchFamily="18" charset="0"/>
@@ -15021,7 +16661,10 @@
                 <a:pPr/>
                 <a14:m>
                   <m:oMathPara xmlns:m="http://schemas.openxmlformats.org/officeDocument/2006/math">
-                    <m:oMath>
+                    <m:oMathParaPr>
+                      <m:jc m:val="centerGroup"/>
+                    </m:oMathParaPr>
+                    <m:oMath xmlns:m="http://schemas.openxmlformats.org/officeDocument/2006/math">
                       <m:r>
                         <a:rPr lang="en-US" sz="2000" b="0" i="1" smtClean="0">
                           <a:latin typeface="Cambria Math" panose="02040503050406030204" pitchFamily="18" charset="0"/>
@@ -15114,7 +16757,10 @@
                 <a:pPr/>
                 <a14:m>
                   <m:oMathPara xmlns:m="http://schemas.openxmlformats.org/officeDocument/2006/math">
-                    <m:oMath>
+                    <m:oMathParaPr>
+                      <m:jc m:val="centerGroup"/>
+                    </m:oMathParaPr>
+                    <m:oMath xmlns:m="http://schemas.openxmlformats.org/officeDocument/2006/math">
                       <m:r>
                         <a:rPr lang="en-US" sz="2000" b="0" i="1" smtClean="0">
                           <a:latin typeface="Cambria Math" panose="02040503050406030204" pitchFamily="18" charset="0"/>
@@ -15306,7 +16952,10 @@
                 <a:pPr/>
                 <a14:m>
                   <m:oMathPara xmlns:m="http://schemas.openxmlformats.org/officeDocument/2006/math">
-                    <m:oMath>
+                    <m:oMathParaPr>
+                      <m:jc m:val="centerGroup"/>
+                    </m:oMathParaPr>
+                    <m:oMath xmlns:m="http://schemas.openxmlformats.org/officeDocument/2006/math">
                       <m:d>
                         <m:dPr>
                           <m:begChr m:val="⟨"/>
@@ -15567,7 +17216,10 @@
                 <a:pPr/>
                 <a14:m>
                   <m:oMathPara xmlns:m="http://schemas.openxmlformats.org/officeDocument/2006/math">
-                    <m:oMath>
+                    <m:oMathParaPr>
+                      <m:jc m:val="centerGroup"/>
+                    </m:oMathParaPr>
+                    <m:oMath xmlns:m="http://schemas.openxmlformats.org/officeDocument/2006/math">
                       <m:r>
                         <a:rPr lang="en-US" sz="2800" i="1" smtClean="0">
                           <a:latin typeface="Cambria Math" panose="02040503050406030204" pitchFamily="18" charset="0"/>
@@ -15682,7 +17334,10 @@
                 <a:pPr/>
                 <a14:m>
                   <m:oMathPara xmlns:m="http://schemas.openxmlformats.org/officeDocument/2006/math">
-                    <m:oMath>
+                    <m:oMathParaPr>
+                      <m:jc m:val="centerGroup"/>
+                    </m:oMathParaPr>
+                    <m:oMath xmlns:m="http://schemas.openxmlformats.org/officeDocument/2006/math">
                       <m:d>
                         <m:dPr>
                           <m:begChr m:val="⟨"/>
@@ -15776,7 +17431,10 @@
                 <a:pPr/>
                 <a14:m>
                   <m:oMathPara xmlns:m="http://schemas.openxmlformats.org/officeDocument/2006/math">
-                    <m:oMath>
+                    <m:oMathParaPr>
+                      <m:jc m:val="centerGroup"/>
+                    </m:oMathParaPr>
+                    <m:oMath xmlns:m="http://schemas.openxmlformats.org/officeDocument/2006/math">
                       <m:d>
                         <m:dPr>
                           <m:begChr m:val="⟨"/>
@@ -15909,7 +17567,10 @@
                 <a:pPr/>
                 <a14:m>
                   <m:oMathPara xmlns:m="http://schemas.openxmlformats.org/officeDocument/2006/math">
-                    <m:oMath>
+                    <m:oMathParaPr>
+                      <m:jc m:val="centerGroup"/>
+                    </m:oMathParaPr>
+                    <m:oMath xmlns:m="http://schemas.openxmlformats.org/officeDocument/2006/math">
                       <m:sSub>
                         <m:sSubPr>
                           <m:ctrlPr>
@@ -16359,7 +18020,10 @@
                 <a:pPr/>
                 <a14:m>
                   <m:oMathPara xmlns:m="http://schemas.openxmlformats.org/officeDocument/2006/math">
-                    <m:oMath>
+                    <m:oMathParaPr>
+                      <m:jc m:val="centerGroup"/>
+                    </m:oMathParaPr>
+                    <m:oMath xmlns:m="http://schemas.openxmlformats.org/officeDocument/2006/math">
                       <m:r>
                         <a:rPr lang="en-US" sz="2400" b="0" i="1" smtClean="0">
                           <a:solidFill>
@@ -16443,7 +18107,10 @@
                 <a:pPr/>
                 <a14:m>
                   <m:oMathPara xmlns:m="http://schemas.openxmlformats.org/officeDocument/2006/math">
-                    <m:oMath>
+                    <m:oMathParaPr>
+                      <m:jc m:val="centerGroup"/>
+                    </m:oMathParaPr>
+                    <m:oMath xmlns:m="http://schemas.openxmlformats.org/officeDocument/2006/math">
                       <m:r>
                         <a:rPr lang="en-US" sz="2400" b="0" i="1" smtClean="0">
                           <a:solidFill>
@@ -16536,7 +18203,10 @@
                 <a:pPr/>
                 <a14:m>
                   <m:oMathPara xmlns:m="http://schemas.openxmlformats.org/officeDocument/2006/math">
-                    <m:oMath>
+                    <m:oMathParaPr>
+                      <m:jc m:val="centerGroup"/>
+                    </m:oMathParaPr>
+                    <m:oMath xmlns:m="http://schemas.openxmlformats.org/officeDocument/2006/math">
                       <m:r>
                         <a:rPr lang="en-US" sz="2400" b="0" i="1" smtClean="0">
                           <a:solidFill>
@@ -16759,7 +18429,10 @@
                 <a:pPr/>
                 <a14:m>
                   <m:oMathPara xmlns:m="http://schemas.openxmlformats.org/officeDocument/2006/math">
-                    <m:oMath>
+                    <m:oMathParaPr>
+                      <m:jc m:val="centerGroup"/>
+                    </m:oMathParaPr>
+                    <m:oMath xmlns:m="http://schemas.openxmlformats.org/officeDocument/2006/math">
                       <m:r>
                         <a:rPr lang="en-US" sz="2400" b="0" i="1" smtClean="0">
                           <a:latin typeface="Cambria Math" panose="02040503050406030204" pitchFamily="18" charset="0"/>
@@ -16943,7 +18616,10 @@
                 <a:pPr/>
                 <a14:m>
                   <m:oMathPara xmlns:m="http://schemas.openxmlformats.org/officeDocument/2006/math">
-                    <m:oMath>
+                    <m:oMathParaPr>
+                      <m:jc m:val="centerGroup"/>
+                    </m:oMathParaPr>
+                    <m:oMath xmlns:m="http://schemas.openxmlformats.org/officeDocument/2006/math">
                       <m:r>
                         <a:rPr lang="en-US" sz="2400" b="0" i="1" smtClean="0">
                           <a:latin typeface="Cambria Math" panose="02040503050406030204" pitchFamily="18" charset="0"/>
@@ -16966,7 +18642,7 @@
                       <m:f>
                         <m:fPr>
                           <m:ctrlPr>
-                            <a:rPr lang="en-US" sz="2400" b="0" i="0" smtClean="0">
+                            <a:rPr lang="en-US" sz="2400" b="0" i="1" smtClean="0">
                               <a:latin typeface="Cambria Math" panose="02040503050406030204" pitchFamily="18" charset="0"/>
                             </a:rPr>
                           </m:ctrlPr>
@@ -17080,7 +18756,10 @@
                 <a:pPr/>
                 <a14:m>
                   <m:oMathPara xmlns:m="http://schemas.openxmlformats.org/officeDocument/2006/math">
-                    <m:oMath>
+                    <m:oMathParaPr>
+                      <m:jc m:val="centerGroup"/>
+                    </m:oMathParaPr>
+                    <m:oMath xmlns:m="http://schemas.openxmlformats.org/officeDocument/2006/math">
                       <m:r>
                         <a:rPr lang="en-US" sz="2400" i="1">
                           <a:latin typeface="Cambria Math" panose="02040503050406030204" pitchFamily="18" charset="0"/>
@@ -17434,7 +19113,10 @@
                 <a:pPr/>
                 <a14:m>
                   <m:oMathPara xmlns:m="http://schemas.openxmlformats.org/officeDocument/2006/math">
-                    <m:oMath>
+                    <m:oMathParaPr>
+                      <m:jc m:val="centerGroup"/>
+                    </m:oMathParaPr>
+                    <m:oMath xmlns:m="http://schemas.openxmlformats.org/officeDocument/2006/math">
                       <m:r>
                         <a:rPr lang="en-US" sz="2400" b="0" i="1" smtClean="0">
                           <a:latin typeface="Cambria Math" panose="02040503050406030204" pitchFamily="18" charset="0"/>
@@ -17457,7 +19139,7 @@
                       <m:f>
                         <m:fPr>
                           <m:ctrlPr>
-                            <a:rPr lang="en-US" sz="2400" b="0" i="0" smtClean="0">
+                            <a:rPr lang="en-US" sz="2400" b="0" i="1" smtClean="0">
                               <a:latin typeface="Cambria Math" panose="02040503050406030204" pitchFamily="18" charset="0"/>
                             </a:rPr>
                           </m:ctrlPr>
@@ -18166,7 +19848,10 @@
                 <a:pPr/>
                 <a14:m>
                   <m:oMathPara xmlns:m="http://schemas.openxmlformats.org/officeDocument/2006/math">
-                    <m:oMath>
+                    <m:oMathParaPr>
+                      <m:jc m:val="centerGroup"/>
+                    </m:oMathParaPr>
+                    <m:oMath xmlns:m="http://schemas.openxmlformats.org/officeDocument/2006/math">
                       <m:r>
                         <a:rPr lang="en-US" sz="2400" b="0" i="1" smtClean="0">
                           <a:solidFill>
@@ -18250,7 +19935,10 @@
                 <a:pPr/>
                 <a14:m>
                   <m:oMathPara xmlns:m="http://schemas.openxmlformats.org/officeDocument/2006/math">
-                    <m:oMath>
+                    <m:oMathParaPr>
+                      <m:jc m:val="centerGroup"/>
+                    </m:oMathParaPr>
+                    <m:oMath xmlns:m="http://schemas.openxmlformats.org/officeDocument/2006/math">
                       <m:r>
                         <a:rPr lang="en-US" sz="2400" b="0" i="1" smtClean="0">
                           <a:solidFill>
@@ -18343,7 +20031,10 @@
                 <a:pPr/>
                 <a14:m>
                   <m:oMathPara xmlns:m="http://schemas.openxmlformats.org/officeDocument/2006/math">
-                    <m:oMath>
+                    <m:oMathParaPr>
+                      <m:jc m:val="centerGroup"/>
+                    </m:oMathParaPr>
+                    <m:oMath xmlns:m="http://schemas.openxmlformats.org/officeDocument/2006/math">
                       <m:r>
                         <a:rPr lang="en-US" sz="2400" b="0" i="1" smtClean="0">
                           <a:solidFill>
@@ -18427,7 +20118,10 @@
                 <a:pPr/>
                 <a14:m>
                   <m:oMathPara xmlns:m="http://schemas.openxmlformats.org/officeDocument/2006/math">
-                    <m:oMath>
+                    <m:oMathParaPr>
+                      <m:jc m:val="centerGroup"/>
+                    </m:oMathParaPr>
+                    <m:oMath xmlns:m="http://schemas.openxmlformats.org/officeDocument/2006/math">
                       <m:r>
                         <m:rPr>
                           <m:sty m:val="p"/>
@@ -18610,7 +20304,10 @@
                 <a:pPr/>
                 <a14:m>
                   <m:oMathPara xmlns:m="http://schemas.openxmlformats.org/officeDocument/2006/math">
-                    <m:oMath>
+                    <m:oMathParaPr>
+                      <m:jc m:val="centerGroup"/>
+                    </m:oMathParaPr>
+                    <m:oMath xmlns:m="http://schemas.openxmlformats.org/officeDocument/2006/math">
                       <m:r>
                         <a:rPr lang="en-US" sz="2400" b="0" i="1" smtClean="0">
                           <a:solidFill>
@@ -18694,7 +20391,10 @@
                 <a:pPr/>
                 <a14:m>
                   <m:oMathPara xmlns:m="http://schemas.openxmlformats.org/officeDocument/2006/math">
-                    <m:oMath>
+                    <m:oMathParaPr>
+                      <m:jc m:val="centerGroup"/>
+                    </m:oMathParaPr>
+                    <m:oMath xmlns:m="http://schemas.openxmlformats.org/officeDocument/2006/math">
                       <m:r>
                         <m:rPr>
                           <m:sty m:val="p"/>

--- a/U1-Distribution-of-Velocities/figures/all-figs.pptx
+++ b/U1-Distribution-of-Velocities/figures/all-figs.pptx
@@ -8342,7 +8342,7 @@
             </p:nvSpPr>
             <p:spPr>
               <a:xfrm>
-                <a:off x="7019045" y="3087088"/>
+                <a:off x="6541525" y="3015968"/>
                 <a:ext cx="302840" cy="430887"/>
               </a:xfrm>
               <a:prstGeom prst="rect">
@@ -8394,7 +8394,7 @@
             </p:nvSpPr>
             <p:spPr>
               <a:xfrm>
-                <a:off x="7019045" y="3087088"/>
+                <a:off x="6541525" y="3015968"/>
                 <a:ext cx="302840" cy="430887"/>
               </a:xfrm>
               <a:prstGeom prst="rect">

--- a/U1-Distribution-of-Velocities/figures/all-figs.pptx
+++ b/U1-Distribution-of-Velocities/figures/all-figs.pptx
@@ -18,6 +18,8 @@
     <p:sldId id="266" r:id="rId12"/>
     <p:sldId id="267" r:id="rId13"/>
     <p:sldId id="268" r:id="rId14"/>
+    <p:sldId id="269" r:id="rId15"/>
+    <p:sldId id="270" r:id="rId16"/>
   </p:sldIdLst>
   <p:sldSz cx="12192000" cy="6858000"/>
   <p:notesSz cx="6858000" cy="9144000"/>
@@ -4920,10 +4922,7 @@
                 <a:pPr/>
                 <a14:m>
                   <m:oMathPara xmlns:m="http://schemas.openxmlformats.org/officeDocument/2006/math">
-                    <m:oMathParaPr>
-                      <m:jc m:val="centerGroup"/>
-                    </m:oMathParaPr>
-                    <m:oMath xmlns:m="http://schemas.openxmlformats.org/officeDocument/2006/math">
+                    <m:oMath>
                       <m:r>
                         <a:rPr lang="en-US" sz="2400" b="0" i="1" smtClean="0">
                           <a:solidFill>
@@ -5019,10 +5018,7 @@
                 <a:pPr/>
                 <a14:m>
                   <m:oMathPara xmlns:m="http://schemas.openxmlformats.org/officeDocument/2006/math">
-                    <m:oMathParaPr>
-                      <m:jc m:val="centerGroup"/>
-                    </m:oMathParaPr>
-                    <m:oMath xmlns:m="http://schemas.openxmlformats.org/officeDocument/2006/math">
+                    <m:oMath>
                       <m:r>
                         <a:rPr lang="en-US" sz="2400" b="0" i="1" smtClean="0">
                           <a:solidFill>
@@ -5579,10 +5575,7 @@
                 <a:pPr/>
                 <a14:m>
                   <m:oMathPara xmlns:m="http://schemas.openxmlformats.org/officeDocument/2006/math">
-                    <m:oMathParaPr>
-                      <m:jc m:val="centerGroup"/>
-                    </m:oMathParaPr>
-                    <m:oMath xmlns:m="http://schemas.openxmlformats.org/officeDocument/2006/math">
+                    <m:oMath>
                       <m:sSub>
                         <m:sSubPr>
                           <m:ctrlPr>
@@ -5739,15 +5732,12 @@
                 <a:pPr/>
                 <a14:m>
                   <m:oMathPara xmlns:m="http://schemas.openxmlformats.org/officeDocument/2006/math">
-                    <m:oMathParaPr>
-                      <m:jc m:val="centerGroup"/>
-                    </m:oMathParaPr>
-                    <m:oMath xmlns:m="http://schemas.openxmlformats.org/officeDocument/2006/math">
+                    <m:oMath>
                       <m:r>
                         <a:rPr lang="en-US" sz="2800" b="0" i="1" smtClean="0">
                           <a:latin typeface="Cambria Math" panose="02040503050406030204" pitchFamily="18" charset="0"/>
                         </a:rPr>
-                        <m:t>h</m:t>
+                        <m:t>ℎ</m:t>
                       </m:r>
                     </m:oMath>
                   </m:oMathPara>
@@ -5835,10 +5825,7 @@
                 <a:pPr/>
                 <a14:m>
                   <m:oMathPara xmlns:m="http://schemas.openxmlformats.org/officeDocument/2006/math">
-                    <m:oMathParaPr>
-                      <m:jc m:val="centerGroup"/>
-                    </m:oMathParaPr>
-                    <m:oMath xmlns:m="http://schemas.openxmlformats.org/officeDocument/2006/math">
+                    <m:oMath>
                       <m:r>
                         <a:rPr lang="en-US" sz="2800" b="0" i="1" smtClean="0">
                           <a:latin typeface="Cambria Math" panose="02040503050406030204" pitchFamily="18" charset="0"/>
@@ -6012,15 +5999,12 @@
                 <a:pPr/>
                 <a14:m>
                   <m:oMathPara xmlns:m="http://schemas.openxmlformats.org/officeDocument/2006/math">
-                    <m:oMathParaPr>
-                      <m:jc m:val="centerGroup"/>
-                    </m:oMathParaPr>
-                    <m:oMath xmlns:m="http://schemas.openxmlformats.org/officeDocument/2006/math">
+                    <m:oMath>
                       <m:r>
                         <a:rPr lang="en-US" sz="2800" b="0" i="1" smtClean="0">
                           <a:latin typeface="Cambria Math" panose="02040503050406030204" pitchFamily="18" charset="0"/>
                         </a:rPr>
-                        <m:t>h</m:t>
+                        <m:t>ℎ</m:t>
                       </m:r>
                     </m:oMath>
                   </m:oMathPara>
@@ -6166,10 +6150,7 @@
                 <a:pPr/>
                 <a14:m>
                   <m:oMathPara xmlns:m="http://schemas.openxmlformats.org/officeDocument/2006/math">
-                    <m:oMathParaPr>
-                      <m:jc m:val="centerGroup"/>
-                    </m:oMathParaPr>
-                    <m:oMath xmlns:m="http://schemas.openxmlformats.org/officeDocument/2006/math">
+                    <m:oMath>
                       <m:r>
                         <a:rPr lang="en-US" sz="2400" b="0" i="1" smtClean="0">
                           <a:solidFill>
@@ -6265,10 +6246,7 @@
                 <a:pPr/>
                 <a14:m>
                   <m:oMathPara xmlns:m="http://schemas.openxmlformats.org/officeDocument/2006/math">
-                    <m:oMathParaPr>
-                      <m:jc m:val="centerGroup"/>
-                    </m:oMathParaPr>
-                    <m:oMath xmlns:m="http://schemas.openxmlformats.org/officeDocument/2006/math">
+                    <m:oMath>
                       <m:r>
                         <a:rPr lang="en-US" sz="2400" b="0" i="1" smtClean="0">
                           <a:solidFill>
@@ -6872,10 +6850,7 @@
                 <a:pPr/>
                 <a14:m>
                   <m:oMathPara xmlns:m="http://schemas.openxmlformats.org/officeDocument/2006/math">
-                    <m:oMathParaPr>
-                      <m:jc m:val="centerGroup"/>
-                    </m:oMathParaPr>
-                    <m:oMath xmlns:m="http://schemas.openxmlformats.org/officeDocument/2006/math">
+                    <m:oMath>
                       <m:sSub>
                         <m:sSubPr>
                           <m:ctrlPr>
@@ -6987,10 +6962,7 @@
                 <a:pPr/>
                 <a14:m>
                   <m:oMathPara xmlns:m="http://schemas.openxmlformats.org/officeDocument/2006/math">
-                    <m:oMathParaPr>
-                      <m:jc m:val="centerGroup"/>
-                    </m:oMathParaPr>
-                    <m:oMath xmlns:m="http://schemas.openxmlformats.org/officeDocument/2006/math">
+                    <m:oMath>
                       <m:r>
                         <a:rPr lang="en-US" sz="2800" b="0" i="1" smtClean="0">
                           <a:latin typeface="Cambria Math" panose="02040503050406030204" pitchFamily="18" charset="0"/>
@@ -7080,8 +7052,8 @@
           <a:chExt cx="0" cy="0"/>
         </a:xfrm>
       </p:grpSpPr>
-      <mc:AlternateContent xmlns:mc="http://schemas.openxmlformats.org/markup-compatibility/2006">
-        <mc:Choice xmlns:a14="http://schemas.microsoft.com/office/drawing/2010/main" Requires="a14">
+      <mc:AlternateContent xmlns:mc="http://schemas.openxmlformats.org/markup-compatibility/2006" xmlns:a14="http://schemas.microsoft.com/office/drawing/2010/main">
+        <mc:Choice Requires="a14">
           <p:sp>
             <p:nvSpPr>
               <p:cNvPr id="11" name="TextBox 10"/>
@@ -7107,10 +7079,7 @@
                 <a:pPr/>
                 <a14:m>
                   <m:oMathPara xmlns:m="http://schemas.openxmlformats.org/officeDocument/2006/math">
-                    <m:oMathParaPr>
-                      <m:jc m:val="centerGroup"/>
-                    </m:oMathParaPr>
-                    <m:oMath xmlns:m="http://schemas.openxmlformats.org/officeDocument/2006/math">
+                    <m:oMath>
                       <m:r>
                         <a:rPr lang="en-US" sz="2400" b="0" i="1" smtClean="0">
                           <a:solidFill>
@@ -7128,7 +7097,7 @@
             </p:txBody>
           </p:sp>
         </mc:Choice>
-        <mc:Fallback>
+        <mc:Fallback xmlns="">
           <p:sp>
             <p:nvSpPr>
               <p:cNvPr id="11" name="TextBox 10"/>
@@ -7271,8 +7240,8 @@
             </a:fontRef>
           </p:style>
         </p:cxnSp>
-        <mc:AlternateContent xmlns:mc="http://schemas.openxmlformats.org/markup-compatibility/2006">
-          <mc:Choice xmlns:a14="http://schemas.microsoft.com/office/drawing/2010/main" Requires="a14">
+        <mc:AlternateContent xmlns:mc="http://schemas.openxmlformats.org/markup-compatibility/2006" xmlns:a14="http://schemas.microsoft.com/office/drawing/2010/main">
+          <mc:Choice Requires="a14">
             <p:sp>
               <p:nvSpPr>
                 <p:cNvPr id="7" name="TextBox 6"/>
@@ -7297,12 +7266,10 @@
                 </a:bodyPr>
                 <a:lstStyle/>
                 <a:p>
+                  <a:pPr/>
                   <a14:m>
                     <m:oMathPara xmlns:m="http://schemas.openxmlformats.org/officeDocument/2006/math">
-                      <m:oMathParaPr>
-                        <m:jc m:val="centerGroup"/>
-                      </m:oMathParaPr>
-                      <m:oMath xmlns:m="http://schemas.openxmlformats.org/officeDocument/2006/math">
+                      <m:oMath>
                         <m:r>
                           <m:rPr>
                             <m:sty m:val="p"/>
@@ -7326,7 +7293,7 @@
               </p:txBody>
             </p:sp>
           </mc:Choice>
-          <mc:Fallback>
+          <mc:Fallback xmlns="">
             <p:sp>
               <p:nvSpPr>
                 <p:cNvPr id="7" name="TextBox 6"/>
@@ -7417,8 +7384,8 @@
           </a:p>
         </p:txBody>
       </p:sp>
-      <mc:AlternateContent xmlns:mc="http://schemas.openxmlformats.org/markup-compatibility/2006">
-        <mc:Choice xmlns:a14="http://schemas.microsoft.com/office/drawing/2010/main" Requires="a14">
+      <mc:AlternateContent xmlns:mc="http://schemas.openxmlformats.org/markup-compatibility/2006" xmlns:a14="http://schemas.microsoft.com/office/drawing/2010/main">
+        <mc:Choice Requires="a14">
           <p:sp>
             <p:nvSpPr>
               <p:cNvPr id="29" name="TextBox 28"/>
@@ -7444,10 +7411,7 @@
                 <a:pPr/>
                 <a14:m>
                   <m:oMathPara xmlns:m="http://schemas.openxmlformats.org/officeDocument/2006/math">
-                    <m:oMathParaPr>
-                      <m:jc m:val="centerGroup"/>
-                    </m:oMathParaPr>
-                    <m:oMath xmlns:m="http://schemas.openxmlformats.org/officeDocument/2006/math">
+                    <m:oMath>
                       <m:r>
                         <a:rPr lang="en-US" sz="2400" b="0" i="1" smtClean="0">
                           <a:solidFill>
@@ -7495,7 +7459,7 @@
             </p:txBody>
           </p:sp>
         </mc:Choice>
-        <mc:Fallback>
+        <mc:Fallback xmlns="">
           <p:sp>
             <p:nvSpPr>
               <p:cNvPr id="29" name="TextBox 28"/>
@@ -7525,6 +7489,144 @@
               <a:p>
                 <a:r>
                   <a:rPr lang="en-US">
+                    <a:noFill/>
+                  </a:rPr>
+                  <a:t> </a:t>
+                </a:r>
+              </a:p>
+            </p:txBody>
+          </p:sp>
+        </mc:Fallback>
+      </mc:AlternateContent>
+      <p:cxnSp>
+        <p:nvCxnSpPr>
+          <p:cNvPr id="4" name="Straight Arrow Connector 3">
+            <a:extLst>
+              <a:ext uri="{FF2B5EF4-FFF2-40B4-BE49-F238E27FC236}">
+                <a16:creationId xmlns:a16="http://schemas.microsoft.com/office/drawing/2014/main" id="{9D4C7B3E-B886-F8CF-123F-92CAF463D194}"/>
+              </a:ext>
+            </a:extLst>
+          </p:cNvPr>
+          <p:cNvCxnSpPr/>
+          <p:nvPr/>
+        </p:nvCxnSpPr>
+        <p:spPr>
+          <a:xfrm>
+            <a:off x="3536349" y="2483338"/>
+            <a:ext cx="0" cy="922512"/>
+          </a:xfrm>
+          <a:prstGeom prst="straightConnector1">
+            <a:avLst/>
+          </a:prstGeom>
+          <a:ln w="28575">
+            <a:solidFill>
+              <a:schemeClr val="tx1"/>
+            </a:solidFill>
+            <a:tailEnd type="triangle" w="lg" len="lg"/>
+          </a:ln>
+        </p:spPr>
+        <p:style>
+          <a:lnRef idx="1">
+            <a:schemeClr val="accent1"/>
+          </a:lnRef>
+          <a:fillRef idx="0">
+            <a:schemeClr val="accent1"/>
+          </a:fillRef>
+          <a:effectRef idx="0">
+            <a:schemeClr val="accent1"/>
+          </a:effectRef>
+          <a:fontRef idx="minor">
+            <a:schemeClr val="tx1"/>
+          </a:fontRef>
+        </p:style>
+      </p:cxnSp>
+      <mc:AlternateContent xmlns:mc="http://schemas.openxmlformats.org/markup-compatibility/2006">
+        <mc:Choice xmlns:a14="http://schemas.microsoft.com/office/drawing/2010/main" Requires="a14">
+          <p:sp>
+            <p:nvSpPr>
+              <p:cNvPr id="12" name="TextBox 11">
+                <a:extLst>
+                  <a:ext uri="{FF2B5EF4-FFF2-40B4-BE49-F238E27FC236}">
+                    <a16:creationId xmlns:a16="http://schemas.microsoft.com/office/drawing/2014/main" id="{64E69452-5B34-5BF7-D6AC-18FB41AD589F}"/>
+                  </a:ext>
+                </a:extLst>
+              </p:cNvPr>
+              <p:cNvSpPr txBox="1"/>
+              <p:nvPr/>
+            </p:nvSpPr>
+            <p:spPr>
+              <a:xfrm>
+                <a:off x="3147315" y="2730510"/>
+                <a:ext cx="286360" cy="369332"/>
+              </a:xfrm>
+              <a:prstGeom prst="rect">
+                <a:avLst/>
+              </a:prstGeom>
+              <a:noFill/>
+            </p:spPr>
+            <p:txBody>
+              <a:bodyPr wrap="none" lIns="0" tIns="0" rIns="0" bIns="0" rtlCol="0">
+                <a:spAutoFit/>
+              </a:bodyPr>
+              <a:lstStyle/>
+              <a:p>
+                <a:pPr/>
+                <a14:m>
+                  <m:oMathPara xmlns:m="http://schemas.openxmlformats.org/officeDocument/2006/math">
+                    <m:oMath>
+                      <m:r>
+                        <a:rPr lang="en-US" sz="2400" b="0" i="1" smtClean="0">
+                          <a:solidFill>
+                            <a:schemeClr val="tx1"/>
+                          </a:solidFill>
+                          <a:latin typeface="Cambria Math" panose="02040503050406030204" pitchFamily="18" charset="0"/>
+                        </a:rPr>
+                        <m:t>𝑄</m:t>
+                      </m:r>
+                    </m:oMath>
+                  </m:oMathPara>
+                </a14:m>
+                <a:endParaRPr lang="en-US" sz="2400" dirty="0"/>
+              </a:p>
+            </p:txBody>
+          </p:sp>
+        </mc:Choice>
+        <mc:Fallback>
+          <p:sp>
+            <p:nvSpPr>
+              <p:cNvPr id="12" name="TextBox 11">
+                <a:extLst>
+                  <a:ext uri="{FF2B5EF4-FFF2-40B4-BE49-F238E27FC236}">
+                    <a16:creationId xmlns:a16="http://schemas.microsoft.com/office/drawing/2014/main" id="{64E69452-5B34-5BF7-D6AC-18FB41AD589F}"/>
+                  </a:ext>
+                </a:extLst>
+              </p:cNvPr>
+              <p:cNvSpPr txBox="1">
+                <a:spLocks noRot="1" noChangeAspect="1" noMove="1" noResize="1" noEditPoints="1" noAdjustHandles="1" noChangeArrowheads="1" noChangeShapeType="1" noTextEdit="1"/>
+              </p:cNvSpPr>
+              <p:nvPr/>
+            </p:nvSpPr>
+            <p:spPr>
+              <a:xfrm>
+                <a:off x="3147315" y="2730510"/>
+                <a:ext cx="286360" cy="369332"/>
+              </a:xfrm>
+              <a:prstGeom prst="rect">
+                <a:avLst/>
+              </a:prstGeom>
+              <a:blipFill>
+                <a:blip r:embed="rId5"/>
+                <a:stretch>
+                  <a:fillRect l="-34043" r="-31915" b="-27869"/>
+                </a:stretch>
+              </a:blipFill>
+            </p:spPr>
+            <p:txBody>
+              <a:bodyPr/>
+              <a:lstStyle/>
+              <a:p>
+                <a:r>
+                  <a:rPr lang="en-IN">
                     <a:noFill/>
                   </a:rPr>
                   <a:t> </a:t>
@@ -7699,10 +7801,7 @@
                 <a:pPr/>
                 <a14:m>
                   <m:oMathPara xmlns:m="http://schemas.openxmlformats.org/officeDocument/2006/math">
-                    <m:oMathParaPr>
-                      <m:jc m:val="centerGroup"/>
-                    </m:oMathParaPr>
-                    <m:oMath xmlns:m="http://schemas.openxmlformats.org/officeDocument/2006/math">
+                    <m:oMath>
                       <m:r>
                         <a:rPr lang="en-US" sz="2400" b="0" i="1" smtClean="0">
                           <a:solidFill>
@@ -7798,10 +7897,7 @@
                 <a:pPr/>
                 <a14:m>
                   <m:oMathPara xmlns:m="http://schemas.openxmlformats.org/officeDocument/2006/math">
-                    <m:oMathParaPr>
-                      <m:jc m:val="centerGroup"/>
-                    </m:oMathParaPr>
-                    <m:oMath xmlns:m="http://schemas.openxmlformats.org/officeDocument/2006/math">
+                    <m:oMath>
                       <m:r>
                         <a:rPr lang="en-US" sz="2400" b="0" i="1" smtClean="0">
                           <a:solidFill>
@@ -8227,8 +8323,8 @@
             </a:fontRef>
           </p:style>
         </p:cxnSp>
-        <mc:AlternateContent xmlns:mc="http://schemas.openxmlformats.org/markup-compatibility/2006">
-          <mc:Choice xmlns:a14="http://schemas.microsoft.com/office/drawing/2010/main" Requires="a14">
+        <mc:AlternateContent xmlns:mc="http://schemas.openxmlformats.org/markup-compatibility/2006" xmlns:a14="http://schemas.microsoft.com/office/drawing/2010/main">
+          <mc:Choice Requires="a14">
             <p:sp>
               <p:nvSpPr>
                 <p:cNvPr id="44" name="TextBox 43">
@@ -8262,15 +8358,12 @@
                   <a:pPr/>
                   <a14:m>
                     <m:oMathPara xmlns:m="http://schemas.openxmlformats.org/officeDocument/2006/math">
-                      <m:oMathParaPr>
-                        <m:jc m:val="centerGroup"/>
-                      </m:oMathParaPr>
-                      <m:oMath xmlns:m="http://schemas.openxmlformats.org/officeDocument/2006/math">
+                      <m:oMath>
                         <m:r>
                           <a:rPr lang="en-US" sz="2800" b="0" i="1" smtClean="0">
                             <a:latin typeface="Cambria Math" panose="02040503050406030204" pitchFamily="18" charset="0"/>
                           </a:rPr>
-                          <m:t>h</m:t>
+                          <m:t>ℎ</m:t>
                         </m:r>
                       </m:oMath>
                     </m:oMathPara>
@@ -8280,7 +8373,7 @@
               </p:txBody>
             </p:sp>
           </mc:Choice>
-          <mc:Fallback>
+          <mc:Fallback xmlns="">
             <p:sp>
               <p:nvSpPr>
                 <p:cNvPr id="44" name="TextBox 43">
@@ -8326,8 +8419,8 @@
           </mc:Fallback>
         </mc:AlternateContent>
       </p:grpSp>
-      <mc:AlternateContent xmlns:mc="http://schemas.openxmlformats.org/markup-compatibility/2006">
-        <mc:Choice xmlns:a14="http://schemas.microsoft.com/office/drawing/2010/main" Requires="a14">
+      <mc:AlternateContent xmlns:mc="http://schemas.openxmlformats.org/markup-compatibility/2006" xmlns:a14="http://schemas.microsoft.com/office/drawing/2010/main">
+        <mc:Choice Requires="a14">
           <p:sp>
             <p:nvSpPr>
               <p:cNvPr id="40" name="TextBox 39">
@@ -8359,10 +8452,7 @@
                 <a:pPr/>
                 <a14:m>
                   <m:oMathPara xmlns:m="http://schemas.openxmlformats.org/officeDocument/2006/math">
-                    <m:oMathParaPr>
-                      <m:jc m:val="centerGroup"/>
-                    </m:oMathParaPr>
-                    <m:oMath xmlns:m="http://schemas.openxmlformats.org/officeDocument/2006/math">
+                    <m:oMath>
                       <m:r>
                         <a:rPr lang="en-US" sz="2800" b="0" i="1" smtClean="0">
                           <a:latin typeface="Cambria Math" panose="02040503050406030204" pitchFamily="18" charset="0"/>
@@ -8377,7 +8467,7 @@
             </p:txBody>
           </p:sp>
         </mc:Choice>
-        <mc:Fallback>
+        <mc:Fallback xmlns="">
           <p:sp>
             <p:nvSpPr>
               <p:cNvPr id="40" name="TextBox 39">
@@ -8422,8 +8512,8 @@
           </p:sp>
         </mc:Fallback>
       </mc:AlternateContent>
-      <mc:AlternateContent xmlns:mc="http://schemas.openxmlformats.org/markup-compatibility/2006">
-        <mc:Choice xmlns:a14="http://schemas.microsoft.com/office/drawing/2010/main" Requires="a14">
+      <mc:AlternateContent xmlns:mc="http://schemas.openxmlformats.org/markup-compatibility/2006" xmlns:a14="http://schemas.microsoft.com/office/drawing/2010/main">
+        <mc:Choice Requires="a14">
           <p:sp>
             <p:nvSpPr>
               <p:cNvPr id="22" name="TextBox 21">
@@ -8455,10 +8545,7 @@
                 <a:pPr/>
                 <a14:m>
                   <m:oMathPara xmlns:m="http://schemas.openxmlformats.org/officeDocument/2006/math">
-                    <m:oMathParaPr>
-                      <m:jc m:val="centerGroup"/>
-                    </m:oMathParaPr>
-                    <m:oMath xmlns:m="http://schemas.openxmlformats.org/officeDocument/2006/math">
+                    <m:oMath>
                       <m:r>
                         <a:rPr lang="en-US" sz="2800" b="0" i="1" smtClean="0">
                           <a:latin typeface="Cambria Math" panose="02040503050406030204" pitchFamily="18" charset="0"/>
@@ -8475,12 +8562,12 @@
                         <a:rPr lang="en-US" sz="2800" b="0" i="1" smtClean="0">
                           <a:latin typeface="Cambria Math" panose="02040503050406030204" pitchFamily="18" charset="0"/>
                         </a:rPr>
-                        <m:t>h</m:t>
+                        <m:t>ℎ</m:t>
                       </m:r>
                       <m:f>
                         <m:fPr>
                           <m:ctrlPr>
-                            <a:rPr lang="en-US" sz="2800" b="0" i="1" smtClean="0">
+                            <a:rPr lang="en-US" sz="2800" b="0" i="0" smtClean="0">
                               <a:latin typeface="Cambria Math" panose="02040503050406030204" pitchFamily="18" charset="0"/>
                             </a:rPr>
                           </m:ctrlPr>
@@ -8528,7 +8615,7 @@
             </p:txBody>
           </p:sp>
         </mc:Choice>
-        <mc:Fallback>
+        <mc:Fallback xmlns="">
           <p:sp>
             <p:nvSpPr>
               <p:cNvPr id="22" name="TextBox 21">
@@ -8586,6 +8673,1963 @@
 </p:sld>
 </file>
 
+<file path=ppt/slides/slide14.xml><?xml version="1.0" encoding="utf-8"?>
+<p:sld xmlns:a="http://schemas.openxmlformats.org/drawingml/2006/main" xmlns:r="http://schemas.openxmlformats.org/officeDocument/2006/relationships" xmlns:p="http://schemas.openxmlformats.org/presentationml/2006/main">
+  <p:cSld>
+    <p:spTree>
+      <p:nvGrpSpPr>
+        <p:cNvPr id="1" name="">
+          <a:extLst>
+            <a:ext uri="{FF2B5EF4-FFF2-40B4-BE49-F238E27FC236}">
+              <a16:creationId xmlns:a16="http://schemas.microsoft.com/office/drawing/2014/main" id="{AF5282CD-A41B-3918-2250-12078587F3BF}"/>
+            </a:ext>
+          </a:extLst>
+        </p:cNvPr>
+        <p:cNvGrpSpPr/>
+        <p:nvPr/>
+      </p:nvGrpSpPr>
+      <p:grpSpPr>
+        <a:xfrm>
+          <a:off x="0" y="0"/>
+          <a:ext cx="0" cy="0"/>
+          <a:chOff x="0" y="0"/>
+          <a:chExt cx="0" cy="0"/>
+        </a:xfrm>
+      </p:grpSpPr>
+      <mc:AlternateContent xmlns:mc="http://schemas.openxmlformats.org/markup-compatibility/2006">
+        <mc:Choice xmlns:a14="http://schemas.microsoft.com/office/drawing/2010/main" Requires="a14">
+          <p:sp>
+            <p:nvSpPr>
+              <p:cNvPr id="11" name="TextBox 10">
+                <a:extLst>
+                  <a:ext uri="{FF2B5EF4-FFF2-40B4-BE49-F238E27FC236}">
+                    <a16:creationId xmlns:a16="http://schemas.microsoft.com/office/drawing/2014/main" id="{9528536E-9A92-33FE-4B1E-B945B2D5B129}"/>
+                  </a:ext>
+                </a:extLst>
+              </p:cNvPr>
+              <p:cNvSpPr txBox="1"/>
+              <p:nvPr/>
+            </p:nvSpPr>
+            <p:spPr>
+              <a:xfrm>
+                <a:off x="7838440" y="3682308"/>
+                <a:ext cx="258404" cy="369332"/>
+              </a:xfrm>
+              <a:prstGeom prst="rect">
+                <a:avLst/>
+              </a:prstGeom>
+              <a:noFill/>
+            </p:spPr>
+            <p:txBody>
+              <a:bodyPr wrap="none" lIns="0" tIns="0" rIns="0" bIns="0" rtlCol="0">
+                <a:spAutoFit/>
+              </a:bodyPr>
+              <a:lstStyle/>
+              <a:p>
+                <a:pPr/>
+                <a14:m>
+                  <m:oMathPara xmlns:m="http://schemas.openxmlformats.org/officeDocument/2006/math">
+                    <m:oMath>
+                      <m:r>
+                        <a:rPr lang="en-US" sz="2400" b="0" i="1" smtClean="0">
+                          <a:solidFill>
+                            <a:schemeClr val="tx1"/>
+                          </a:solidFill>
+                          <a:latin typeface="Cambria Math" panose="02040503050406030204" pitchFamily="18" charset="0"/>
+                        </a:rPr>
+                        <m:t>𝑛</m:t>
+                      </m:r>
+                    </m:oMath>
+                  </m:oMathPara>
+                </a14:m>
+                <a:endParaRPr lang="en-US" sz="2400" dirty="0"/>
+              </a:p>
+            </p:txBody>
+          </p:sp>
+        </mc:Choice>
+        <mc:Fallback>
+          <p:sp>
+            <p:nvSpPr>
+              <p:cNvPr id="11" name="TextBox 10">
+                <a:extLst>
+                  <a:ext uri="{FF2B5EF4-FFF2-40B4-BE49-F238E27FC236}">
+                    <a16:creationId xmlns:a16="http://schemas.microsoft.com/office/drawing/2014/main" id="{9528536E-9A92-33FE-4B1E-B945B2D5B129}"/>
+                  </a:ext>
+                </a:extLst>
+              </p:cNvPr>
+              <p:cNvSpPr txBox="1">
+                <a:spLocks noRot="1" noChangeAspect="1" noMove="1" noResize="1" noEditPoints="1" noAdjustHandles="1" noChangeArrowheads="1" noChangeShapeType="1" noTextEdit="1"/>
+              </p:cNvSpPr>
+              <p:nvPr/>
+            </p:nvSpPr>
+            <p:spPr>
+              <a:xfrm>
+                <a:off x="7838440" y="3682308"/>
+                <a:ext cx="258404" cy="369332"/>
+              </a:xfrm>
+              <a:prstGeom prst="rect">
+                <a:avLst/>
+              </a:prstGeom>
+              <a:blipFill>
+                <a:blip r:embed="rId2"/>
+                <a:stretch>
+                  <a:fillRect l="-16667" r="-11905"/>
+                </a:stretch>
+              </a:blipFill>
+            </p:spPr>
+            <p:txBody>
+              <a:bodyPr/>
+              <a:lstStyle/>
+              <a:p>
+                <a:r>
+                  <a:rPr lang="en-IN">
+                    <a:noFill/>
+                  </a:rPr>
+                  <a:t> </a:t>
+                </a:r>
+              </a:p>
+            </p:txBody>
+          </p:sp>
+        </mc:Fallback>
+      </mc:AlternateContent>
+      <p:sp>
+        <p:nvSpPr>
+          <p:cNvPr id="22" name="Parallelogram 21">
+            <a:extLst>
+              <a:ext uri="{FF2B5EF4-FFF2-40B4-BE49-F238E27FC236}">
+                <a16:creationId xmlns:a16="http://schemas.microsoft.com/office/drawing/2014/main" id="{66F07A27-B9EF-B5D8-26EB-EB888235D3C5}"/>
+              </a:ext>
+            </a:extLst>
+          </p:cNvPr>
+          <p:cNvSpPr/>
+          <p:nvPr/>
+        </p:nvSpPr>
+        <p:spPr>
+          <a:xfrm>
+            <a:off x="2288177" y="3216498"/>
+            <a:ext cx="6453051" cy="1009138"/>
+          </a:xfrm>
+          <a:prstGeom prst="parallelogram">
+            <a:avLst>
+              <a:gd name="adj" fmla="val 172976"/>
+            </a:avLst>
+          </a:prstGeom>
+          <a:solidFill>
+            <a:schemeClr val="bg1">
+              <a:lumMod val="50000"/>
+              <a:alpha val="50000"/>
+            </a:schemeClr>
+          </a:solidFill>
+          <a:ln>
+            <a:noFill/>
+          </a:ln>
+        </p:spPr>
+        <p:style>
+          <a:lnRef idx="2">
+            <a:schemeClr val="accent1">
+              <a:shade val="50000"/>
+            </a:schemeClr>
+          </a:lnRef>
+          <a:fillRef idx="1">
+            <a:schemeClr val="accent1"/>
+          </a:fillRef>
+          <a:effectRef idx="0">
+            <a:schemeClr val="accent1"/>
+          </a:effectRef>
+          <a:fontRef idx="minor">
+            <a:schemeClr val="lt1"/>
+          </a:fontRef>
+        </p:style>
+        <p:txBody>
+          <a:bodyPr rtlCol="0" anchor="ctr"/>
+          <a:lstStyle/>
+          <a:p>
+            <a:pPr algn="ctr"/>
+            <a:endParaRPr lang="en-US"/>
+          </a:p>
+        </p:txBody>
+      </p:sp>
+      <p:grpSp>
+        <p:nvGrpSpPr>
+          <p:cNvPr id="9" name="Group 8">
+            <a:extLst>
+              <a:ext uri="{FF2B5EF4-FFF2-40B4-BE49-F238E27FC236}">
+                <a16:creationId xmlns:a16="http://schemas.microsoft.com/office/drawing/2014/main" id="{19644574-57FC-E56D-88AD-DD8923E4E601}"/>
+              </a:ext>
+            </a:extLst>
+          </p:cNvPr>
+          <p:cNvGrpSpPr/>
+          <p:nvPr/>
+        </p:nvGrpSpPr>
+        <p:grpSpPr>
+          <a:xfrm>
+            <a:off x="4977130" y="1853969"/>
+            <a:ext cx="383118" cy="1819564"/>
+            <a:chOff x="2104390" y="2394989"/>
+            <a:chExt cx="383118" cy="1819564"/>
+          </a:xfrm>
+        </p:grpSpPr>
+        <p:cxnSp>
+          <p:nvCxnSpPr>
+            <p:cNvPr id="6" name="Straight Arrow Connector 5">
+              <a:extLst>
+                <a:ext uri="{FF2B5EF4-FFF2-40B4-BE49-F238E27FC236}">
+                  <a16:creationId xmlns:a16="http://schemas.microsoft.com/office/drawing/2014/main" id="{A245D79C-51C2-7EFE-038C-31B81764B0C9}"/>
+                </a:ext>
+              </a:extLst>
+            </p:cNvPr>
+            <p:cNvCxnSpPr/>
+            <p:nvPr/>
+          </p:nvCxnSpPr>
+          <p:spPr>
+            <a:xfrm>
+              <a:off x="2299855" y="2394989"/>
+              <a:ext cx="0" cy="1819564"/>
+            </a:xfrm>
+            <a:prstGeom prst="straightConnector1">
+              <a:avLst/>
+            </a:prstGeom>
+            <a:ln w="19050" cap="rnd">
+              <a:solidFill>
+                <a:schemeClr val="tx1"/>
+              </a:solidFill>
+              <a:prstDash val="dash"/>
+              <a:round/>
+              <a:headEnd type="triangle" w="med" len="med"/>
+              <a:tailEnd type="triangle"/>
+            </a:ln>
+          </p:spPr>
+          <p:style>
+            <a:lnRef idx="1">
+              <a:schemeClr val="accent1"/>
+            </a:lnRef>
+            <a:fillRef idx="0">
+              <a:schemeClr val="accent1"/>
+            </a:fillRef>
+            <a:effectRef idx="0">
+              <a:schemeClr val="accent1"/>
+            </a:effectRef>
+            <a:fontRef idx="minor">
+              <a:schemeClr val="tx1"/>
+            </a:fontRef>
+          </p:style>
+        </p:cxnSp>
+        <mc:AlternateContent xmlns:mc="http://schemas.openxmlformats.org/markup-compatibility/2006">
+          <mc:Choice xmlns:a14="http://schemas.microsoft.com/office/drawing/2010/main" Requires="a14">
+            <p:sp>
+              <p:nvSpPr>
+                <p:cNvPr id="7" name="TextBox 6">
+                  <a:extLst>
+                    <a:ext uri="{FF2B5EF4-FFF2-40B4-BE49-F238E27FC236}">
+                      <a16:creationId xmlns:a16="http://schemas.microsoft.com/office/drawing/2014/main" id="{CAC772BA-7527-62F6-FD2E-9AC924462D90}"/>
+                    </a:ext>
+                  </a:extLst>
+                </p:cNvPr>
+                <p:cNvSpPr txBox="1"/>
+                <p:nvPr/>
+              </p:nvSpPr>
+              <p:spPr>
+                <a:xfrm>
+                  <a:off x="2104390" y="3147060"/>
+                  <a:ext cx="383118" cy="338554"/>
+                </a:xfrm>
+                <a:prstGeom prst="rect">
+                  <a:avLst/>
+                </a:prstGeom>
+                <a:solidFill>
+                  <a:schemeClr val="bg1"/>
+                </a:solidFill>
+              </p:spPr>
+              <p:txBody>
+                <a:bodyPr wrap="none" lIns="0" tIns="0" rIns="0" bIns="0" rtlCol="0">
+                  <a:spAutoFit/>
+                </a:bodyPr>
+                <a:lstStyle/>
+                <a:p>
+                  <a:pPr/>
+                  <a14:m>
+                    <m:oMathPara xmlns:m="http://schemas.openxmlformats.org/officeDocument/2006/math">
+                      <m:oMath>
+                        <m:r>
+                          <m:rPr>
+                            <m:sty m:val="p"/>
+                          </m:rPr>
+                          <a:rPr lang="en-US" sz="2200" b="0" i="0" smtClean="0">
+                            <a:latin typeface="Cambria Math" panose="02040503050406030204" pitchFamily="18" charset="0"/>
+                          </a:rPr>
+                          <m:t>d</m:t>
+                        </m:r>
+                        <m:r>
+                          <a:rPr lang="en-US" sz="2200" b="0" i="1" smtClean="0">
+                            <a:latin typeface="Cambria Math" panose="02040503050406030204" pitchFamily="18" charset="0"/>
+                          </a:rPr>
+                          <m:t>𝑦</m:t>
+                        </m:r>
+                      </m:oMath>
+                    </m:oMathPara>
+                  </a14:m>
+                  <a:endParaRPr lang="en-US" sz="2200" dirty="0"/>
+                </a:p>
+              </p:txBody>
+            </p:sp>
+          </mc:Choice>
+          <mc:Fallback>
+            <p:sp>
+              <p:nvSpPr>
+                <p:cNvPr id="7" name="TextBox 6">
+                  <a:extLst>
+                    <a:ext uri="{FF2B5EF4-FFF2-40B4-BE49-F238E27FC236}">
+                      <a16:creationId xmlns:a16="http://schemas.microsoft.com/office/drawing/2014/main" id="{CAC772BA-7527-62F6-FD2E-9AC924462D90}"/>
+                    </a:ext>
+                  </a:extLst>
+                </p:cNvPr>
+                <p:cNvSpPr txBox="1">
+                  <a:spLocks noRot="1" noChangeAspect="1" noMove="1" noResize="1" noEditPoints="1" noAdjustHandles="1" noChangeArrowheads="1" noChangeShapeType="1" noTextEdit="1"/>
+                </p:cNvSpPr>
+                <p:nvPr/>
+              </p:nvSpPr>
+              <p:spPr>
+                <a:xfrm>
+                  <a:off x="2104390" y="3147060"/>
+                  <a:ext cx="383118" cy="338554"/>
+                </a:xfrm>
+                <a:prstGeom prst="rect">
+                  <a:avLst/>
+                </a:prstGeom>
+                <a:blipFill>
+                  <a:blip r:embed="rId3"/>
+                  <a:stretch>
+                    <a:fillRect l="-17460" r="-17460" b="-25455"/>
+                  </a:stretch>
+                </a:blipFill>
+              </p:spPr>
+              <p:txBody>
+                <a:bodyPr/>
+                <a:lstStyle/>
+                <a:p>
+                  <a:r>
+                    <a:rPr lang="en-IN">
+                      <a:noFill/>
+                    </a:rPr>
+                    <a:t> </a:t>
+                  </a:r>
+                </a:p>
+              </p:txBody>
+            </p:sp>
+          </mc:Fallback>
+        </mc:AlternateContent>
+      </p:grpSp>
+      <p:sp>
+        <p:nvSpPr>
+          <p:cNvPr id="2" name="Parallelogram 1">
+            <a:extLst>
+              <a:ext uri="{FF2B5EF4-FFF2-40B4-BE49-F238E27FC236}">
+                <a16:creationId xmlns:a16="http://schemas.microsoft.com/office/drawing/2014/main" id="{C270D5FA-7F4F-D105-31A8-7D522C579C06}"/>
+              </a:ext>
+            </a:extLst>
+          </p:cNvPr>
+          <p:cNvSpPr/>
+          <p:nvPr/>
+        </p:nvSpPr>
+        <p:spPr>
+          <a:xfrm>
+            <a:off x="2288177" y="1392318"/>
+            <a:ext cx="6453051" cy="1009138"/>
+          </a:xfrm>
+          <a:prstGeom prst="parallelogram">
+            <a:avLst>
+              <a:gd name="adj" fmla="val 172976"/>
+            </a:avLst>
+          </a:prstGeom>
+          <a:solidFill>
+            <a:schemeClr val="bg1">
+              <a:lumMod val="50000"/>
+              <a:alpha val="50000"/>
+            </a:schemeClr>
+          </a:solidFill>
+          <a:ln>
+            <a:noFill/>
+          </a:ln>
+        </p:spPr>
+        <p:style>
+          <a:lnRef idx="2">
+            <a:schemeClr val="accent1">
+              <a:shade val="50000"/>
+            </a:schemeClr>
+          </a:lnRef>
+          <a:fillRef idx="1">
+            <a:schemeClr val="accent1"/>
+          </a:fillRef>
+          <a:effectRef idx="0">
+            <a:schemeClr val="accent1"/>
+          </a:effectRef>
+          <a:fontRef idx="minor">
+            <a:schemeClr val="lt1"/>
+          </a:fontRef>
+        </p:style>
+        <p:txBody>
+          <a:bodyPr rtlCol="0" anchor="ctr"/>
+          <a:lstStyle/>
+          <a:p>
+            <a:pPr algn="ctr"/>
+            <a:endParaRPr lang="en-US"/>
+          </a:p>
+        </p:txBody>
+      </p:sp>
+      <mc:AlternateContent xmlns:mc="http://schemas.openxmlformats.org/markup-compatibility/2006">
+        <mc:Choice xmlns:a14="http://schemas.microsoft.com/office/drawing/2010/main" Requires="a14">
+          <p:sp>
+            <p:nvSpPr>
+              <p:cNvPr id="29" name="TextBox 28">
+                <a:extLst>
+                  <a:ext uri="{FF2B5EF4-FFF2-40B4-BE49-F238E27FC236}">
+                    <a16:creationId xmlns:a16="http://schemas.microsoft.com/office/drawing/2014/main" id="{C2544670-F0F9-76F5-19E0-DDBBBB53FB27}"/>
+                  </a:ext>
+                </a:extLst>
+              </p:cNvPr>
+              <p:cNvSpPr txBox="1"/>
+              <p:nvPr/>
+            </p:nvSpPr>
+            <p:spPr>
+              <a:xfrm>
+                <a:off x="7777480" y="1894148"/>
+                <a:ext cx="991875" cy="369332"/>
+              </a:xfrm>
+              <a:prstGeom prst="rect">
+                <a:avLst/>
+              </a:prstGeom>
+              <a:noFill/>
+            </p:spPr>
+            <p:txBody>
+              <a:bodyPr wrap="none" lIns="0" tIns="0" rIns="0" bIns="0" rtlCol="0">
+                <a:spAutoFit/>
+              </a:bodyPr>
+              <a:lstStyle/>
+              <a:p>
+                <a:pPr/>
+                <a14:m>
+                  <m:oMathPara xmlns:m="http://schemas.openxmlformats.org/officeDocument/2006/math">
+                    <m:oMath>
+                      <m:r>
+                        <a:rPr lang="en-US" sz="2400" b="0" i="1" smtClean="0">
+                          <a:solidFill>
+                            <a:schemeClr val="tx1"/>
+                          </a:solidFill>
+                          <a:latin typeface="Cambria Math" panose="02040503050406030204" pitchFamily="18" charset="0"/>
+                        </a:rPr>
+                        <m:t>𝑛</m:t>
+                      </m:r>
+                      <m:r>
+                        <a:rPr lang="en-US" sz="2400" b="0" i="1" smtClean="0">
+                          <a:solidFill>
+                            <a:schemeClr val="tx1"/>
+                          </a:solidFill>
+                          <a:latin typeface="Cambria Math" panose="02040503050406030204" pitchFamily="18" charset="0"/>
+                        </a:rPr>
+                        <m:t>+</m:t>
+                      </m:r>
+                      <m:r>
+                        <m:rPr>
+                          <m:sty m:val="p"/>
+                        </m:rPr>
+                        <a:rPr lang="en-US" sz="2400" b="0" i="0" smtClean="0">
+                          <a:solidFill>
+                            <a:schemeClr val="tx1"/>
+                          </a:solidFill>
+                          <a:latin typeface="Cambria Math" panose="02040503050406030204" pitchFamily="18" charset="0"/>
+                        </a:rPr>
+                        <m:t>d</m:t>
+                      </m:r>
+                      <m:r>
+                        <a:rPr lang="en-US" sz="2400" b="0" i="1" smtClean="0">
+                          <a:solidFill>
+                            <a:schemeClr val="tx1"/>
+                          </a:solidFill>
+                          <a:latin typeface="Cambria Math" panose="02040503050406030204" pitchFamily="18" charset="0"/>
+                        </a:rPr>
+                        <m:t>𝑛</m:t>
+                      </m:r>
+                    </m:oMath>
+                  </m:oMathPara>
+                </a14:m>
+                <a:endParaRPr lang="en-US" sz="2400" dirty="0"/>
+              </a:p>
+            </p:txBody>
+          </p:sp>
+        </mc:Choice>
+        <mc:Fallback>
+          <p:sp>
+            <p:nvSpPr>
+              <p:cNvPr id="29" name="TextBox 28">
+                <a:extLst>
+                  <a:ext uri="{FF2B5EF4-FFF2-40B4-BE49-F238E27FC236}">
+                    <a16:creationId xmlns:a16="http://schemas.microsoft.com/office/drawing/2014/main" id="{C2544670-F0F9-76F5-19E0-DDBBBB53FB27}"/>
+                  </a:ext>
+                </a:extLst>
+              </p:cNvPr>
+              <p:cNvSpPr txBox="1">
+                <a:spLocks noRot="1" noChangeAspect="1" noMove="1" noResize="1" noEditPoints="1" noAdjustHandles="1" noChangeArrowheads="1" noChangeShapeType="1" noTextEdit="1"/>
+              </p:cNvSpPr>
+              <p:nvPr/>
+            </p:nvSpPr>
+            <p:spPr>
+              <a:xfrm>
+                <a:off x="7777480" y="1894148"/>
+                <a:ext cx="991875" cy="369332"/>
+              </a:xfrm>
+              <a:prstGeom prst="rect">
+                <a:avLst/>
+              </a:prstGeom>
+              <a:blipFill>
+                <a:blip r:embed="rId4"/>
+                <a:stretch>
+                  <a:fillRect l="-3067" r="-1840" b="-8333"/>
+                </a:stretch>
+              </a:blipFill>
+            </p:spPr>
+            <p:txBody>
+              <a:bodyPr/>
+              <a:lstStyle/>
+              <a:p>
+                <a:r>
+                  <a:rPr lang="en-IN">
+                    <a:noFill/>
+                  </a:rPr>
+                  <a:t> </a:t>
+                </a:r>
+              </a:p>
+            </p:txBody>
+          </p:sp>
+        </mc:Fallback>
+      </mc:AlternateContent>
+      <p:cxnSp>
+        <p:nvCxnSpPr>
+          <p:cNvPr id="4" name="Straight Arrow Connector 3">
+            <a:extLst>
+              <a:ext uri="{FF2B5EF4-FFF2-40B4-BE49-F238E27FC236}">
+                <a16:creationId xmlns:a16="http://schemas.microsoft.com/office/drawing/2014/main" id="{2A0B76FA-06E2-3640-E50E-743A4DA5CD24}"/>
+              </a:ext>
+            </a:extLst>
+          </p:cNvPr>
+          <p:cNvCxnSpPr/>
+          <p:nvPr/>
+        </p:nvCxnSpPr>
+        <p:spPr>
+          <a:xfrm>
+            <a:off x="3536349" y="2483338"/>
+            <a:ext cx="0" cy="922512"/>
+          </a:xfrm>
+          <a:prstGeom prst="straightConnector1">
+            <a:avLst/>
+          </a:prstGeom>
+          <a:ln w="28575">
+            <a:solidFill>
+              <a:schemeClr val="tx1"/>
+            </a:solidFill>
+            <a:tailEnd type="triangle" w="lg" len="lg"/>
+          </a:ln>
+        </p:spPr>
+        <p:style>
+          <a:lnRef idx="1">
+            <a:schemeClr val="accent1"/>
+          </a:lnRef>
+          <a:fillRef idx="0">
+            <a:schemeClr val="accent1"/>
+          </a:fillRef>
+          <a:effectRef idx="0">
+            <a:schemeClr val="accent1"/>
+          </a:effectRef>
+          <a:fontRef idx="minor">
+            <a:schemeClr val="tx1"/>
+          </a:fontRef>
+        </p:style>
+      </p:cxnSp>
+      <mc:AlternateContent xmlns:mc="http://schemas.openxmlformats.org/markup-compatibility/2006">
+        <mc:Choice xmlns:a14="http://schemas.microsoft.com/office/drawing/2010/main" Requires="a14">
+          <p:sp>
+            <p:nvSpPr>
+              <p:cNvPr id="12" name="TextBox 11">
+                <a:extLst>
+                  <a:ext uri="{FF2B5EF4-FFF2-40B4-BE49-F238E27FC236}">
+                    <a16:creationId xmlns:a16="http://schemas.microsoft.com/office/drawing/2014/main" id="{4B5A34BE-C52D-EF69-89D2-4787A0D532FB}"/>
+                  </a:ext>
+                </a:extLst>
+              </p:cNvPr>
+              <p:cNvSpPr txBox="1"/>
+              <p:nvPr/>
+            </p:nvSpPr>
+            <p:spPr>
+              <a:xfrm>
+                <a:off x="3210815" y="2730510"/>
+                <a:ext cx="234038" cy="369332"/>
+              </a:xfrm>
+              <a:prstGeom prst="rect">
+                <a:avLst/>
+              </a:prstGeom>
+              <a:noFill/>
+            </p:spPr>
+            <p:txBody>
+              <a:bodyPr wrap="none" lIns="0" tIns="0" rIns="0" bIns="0" rtlCol="0">
+                <a:spAutoFit/>
+              </a:bodyPr>
+              <a:lstStyle/>
+              <a:p>
+                <a:pPr/>
+                <a14:m>
+                  <m:oMathPara xmlns:m="http://schemas.openxmlformats.org/officeDocument/2006/math">
+                    <m:oMath>
+                      <m:r>
+                        <m:rPr>
+                          <m:sty m:val="p"/>
+                        </m:rPr>
+                        <a:rPr lang="el-GR" sz="2400" b="0" i="0" smtClean="0">
+                          <a:solidFill>
+                            <a:schemeClr val="tx1"/>
+                          </a:solidFill>
+                          <a:latin typeface="Cambria Math" panose="02040503050406030204" pitchFamily="18" charset="0"/>
+                          <a:ea typeface="Cambria Math" panose="02040503050406030204" pitchFamily="18" charset="0"/>
+                        </a:rPr>
+                        <m:t>Γ</m:t>
+                      </m:r>
+                    </m:oMath>
+                  </m:oMathPara>
+                </a14:m>
+                <a:endParaRPr lang="en-US" sz="2400" dirty="0"/>
+              </a:p>
+            </p:txBody>
+          </p:sp>
+        </mc:Choice>
+        <mc:Fallback>
+          <p:sp>
+            <p:nvSpPr>
+              <p:cNvPr id="12" name="TextBox 11">
+                <a:extLst>
+                  <a:ext uri="{FF2B5EF4-FFF2-40B4-BE49-F238E27FC236}">
+                    <a16:creationId xmlns:a16="http://schemas.microsoft.com/office/drawing/2014/main" id="{4B5A34BE-C52D-EF69-89D2-4787A0D532FB}"/>
+                  </a:ext>
+                </a:extLst>
+              </p:cNvPr>
+              <p:cNvSpPr txBox="1">
+                <a:spLocks noRot="1" noChangeAspect="1" noMove="1" noResize="1" noEditPoints="1" noAdjustHandles="1" noChangeArrowheads="1" noChangeShapeType="1" noTextEdit="1"/>
+              </p:cNvSpPr>
+              <p:nvPr/>
+            </p:nvSpPr>
+            <p:spPr>
+              <a:xfrm>
+                <a:off x="3210815" y="2730510"/>
+                <a:ext cx="234038" cy="369332"/>
+              </a:xfrm>
+              <a:prstGeom prst="rect">
+                <a:avLst/>
+              </a:prstGeom>
+              <a:blipFill>
+                <a:blip r:embed="rId5"/>
+                <a:stretch>
+                  <a:fillRect l="-31579" r="-31579" b="-4918"/>
+                </a:stretch>
+              </a:blipFill>
+            </p:spPr>
+            <p:txBody>
+              <a:bodyPr/>
+              <a:lstStyle/>
+              <a:p>
+                <a:r>
+                  <a:rPr lang="en-IN">
+                    <a:noFill/>
+                  </a:rPr>
+                  <a:t> </a:t>
+                </a:r>
+              </a:p>
+            </p:txBody>
+          </p:sp>
+        </mc:Fallback>
+      </mc:AlternateContent>
+    </p:spTree>
+    <p:extLst>
+      <p:ext uri="{BB962C8B-B14F-4D97-AF65-F5344CB8AC3E}">
+        <p14:creationId xmlns:p14="http://schemas.microsoft.com/office/powerpoint/2010/main" val="838707751"/>
+      </p:ext>
+    </p:extLst>
+  </p:cSld>
+  <p:clrMapOvr>
+    <a:masterClrMapping/>
+  </p:clrMapOvr>
+</p:sld>
+</file>
+
+<file path=ppt/slides/slide15.xml><?xml version="1.0" encoding="utf-8"?>
+<p:sld xmlns:a="http://schemas.openxmlformats.org/drawingml/2006/main" xmlns:r="http://schemas.openxmlformats.org/officeDocument/2006/relationships" xmlns:p="http://schemas.openxmlformats.org/presentationml/2006/main">
+  <p:cSld>
+    <p:spTree>
+      <p:nvGrpSpPr>
+        <p:cNvPr id="1" name="">
+          <a:extLst>
+            <a:ext uri="{FF2B5EF4-FFF2-40B4-BE49-F238E27FC236}">
+              <a16:creationId xmlns:a16="http://schemas.microsoft.com/office/drawing/2014/main" id="{2AD40C99-F544-17AD-C33D-69E5104F045D}"/>
+            </a:ext>
+          </a:extLst>
+        </p:cNvPr>
+        <p:cNvGrpSpPr/>
+        <p:nvPr/>
+      </p:nvGrpSpPr>
+      <p:grpSpPr>
+        <a:xfrm>
+          <a:off x="0" y="0"/>
+          <a:ext cx="0" cy="0"/>
+          <a:chOff x="0" y="0"/>
+          <a:chExt cx="0" cy="0"/>
+        </a:xfrm>
+      </p:grpSpPr>
+      <p:grpSp>
+        <p:nvGrpSpPr>
+          <p:cNvPr id="4" name="Group 3">
+            <a:extLst>
+              <a:ext uri="{FF2B5EF4-FFF2-40B4-BE49-F238E27FC236}">
+                <a16:creationId xmlns:a16="http://schemas.microsoft.com/office/drawing/2014/main" id="{060FA4EB-93DD-C4F6-14F8-89B9ACF8BFF9}"/>
+              </a:ext>
+            </a:extLst>
+          </p:cNvPr>
+          <p:cNvGrpSpPr/>
+          <p:nvPr/>
+        </p:nvGrpSpPr>
+        <p:grpSpPr>
+          <a:xfrm>
+            <a:off x="6137267" y="3024360"/>
+            <a:ext cx="297646" cy="1501239"/>
+            <a:chOff x="6673207" y="1525760"/>
+            <a:chExt cx="297646" cy="1501239"/>
+          </a:xfrm>
+        </p:grpSpPr>
+        <p:cxnSp>
+          <p:nvCxnSpPr>
+            <p:cNvPr id="5" name="Straight Arrow Connector 4">
+              <a:extLst>
+                <a:ext uri="{FF2B5EF4-FFF2-40B4-BE49-F238E27FC236}">
+                  <a16:creationId xmlns:a16="http://schemas.microsoft.com/office/drawing/2014/main" id="{434631B1-6020-B416-82D0-D606B01D2079}"/>
+                </a:ext>
+              </a:extLst>
+            </p:cNvPr>
+            <p:cNvCxnSpPr/>
+            <p:nvPr/>
+          </p:nvCxnSpPr>
+          <p:spPr>
+            <a:xfrm>
+              <a:off x="6820930" y="1525760"/>
+              <a:ext cx="0" cy="1501239"/>
+            </a:xfrm>
+            <a:prstGeom prst="straightConnector1">
+              <a:avLst/>
+            </a:prstGeom>
+            <a:ln w="19050">
+              <a:solidFill>
+                <a:schemeClr val="tx1"/>
+              </a:solidFill>
+              <a:headEnd type="triangle" w="lg" len="med"/>
+              <a:tailEnd type="triangle" w="lg" len="med"/>
+            </a:ln>
+          </p:spPr>
+          <p:style>
+            <a:lnRef idx="1">
+              <a:schemeClr val="accent1"/>
+            </a:lnRef>
+            <a:fillRef idx="0">
+              <a:schemeClr val="accent1"/>
+            </a:fillRef>
+            <a:effectRef idx="0">
+              <a:schemeClr val="accent1"/>
+            </a:effectRef>
+            <a:fontRef idx="minor">
+              <a:schemeClr val="tx1"/>
+            </a:fontRef>
+          </p:style>
+        </p:cxnSp>
+        <mc:AlternateContent xmlns:mc="http://schemas.openxmlformats.org/markup-compatibility/2006">
+          <mc:Choice xmlns:a14="http://schemas.microsoft.com/office/drawing/2010/main" Requires="a14">
+            <p:sp>
+              <p:nvSpPr>
+                <p:cNvPr id="6" name="TextBox 5">
+                  <a:extLst>
+                    <a:ext uri="{FF2B5EF4-FFF2-40B4-BE49-F238E27FC236}">
+                      <a16:creationId xmlns:a16="http://schemas.microsoft.com/office/drawing/2014/main" id="{C7793CF0-2933-85B7-4CDD-627B23364DB9}"/>
+                    </a:ext>
+                  </a:extLst>
+                </p:cNvPr>
+                <p:cNvSpPr txBox="1"/>
+                <p:nvPr/>
+              </p:nvSpPr>
+              <p:spPr>
+                <a:xfrm>
+                  <a:off x="6673207" y="2186709"/>
+                  <a:ext cx="297646" cy="430887"/>
+                </a:xfrm>
+                <a:prstGeom prst="rect">
+                  <a:avLst/>
+                </a:prstGeom>
+                <a:solidFill>
+                  <a:schemeClr val="bg1"/>
+                </a:solidFill>
+              </p:spPr>
+              <p:txBody>
+                <a:bodyPr wrap="none" lIns="0" tIns="0" rIns="0" bIns="0" rtlCol="0">
+                  <a:spAutoFit/>
+                </a:bodyPr>
+                <a:lstStyle/>
+                <a:p>
+                  <a:pPr/>
+                  <a14:m>
+                    <m:oMathPara xmlns:m="http://schemas.openxmlformats.org/officeDocument/2006/math">
+                      <m:oMath>
+                        <m:r>
+                          <a:rPr lang="en-US" sz="2800" b="0" i="1" smtClean="0">
+                            <a:latin typeface="Cambria Math" panose="02040503050406030204" pitchFamily="18" charset="0"/>
+                          </a:rPr>
+                          <m:t>ℎ</m:t>
+                        </m:r>
+                      </m:oMath>
+                    </m:oMathPara>
+                  </a14:m>
+                  <a:endParaRPr lang="en-IN" sz="2800" dirty="0"/>
+                </a:p>
+              </p:txBody>
+            </p:sp>
+          </mc:Choice>
+          <mc:Fallback>
+            <p:sp>
+              <p:nvSpPr>
+                <p:cNvPr id="6" name="TextBox 5">
+                  <a:extLst>
+                    <a:ext uri="{FF2B5EF4-FFF2-40B4-BE49-F238E27FC236}">
+                      <a16:creationId xmlns:a16="http://schemas.microsoft.com/office/drawing/2014/main" id="{C7793CF0-2933-85B7-4CDD-627B23364DB9}"/>
+                    </a:ext>
+                  </a:extLst>
+                </p:cNvPr>
+                <p:cNvSpPr txBox="1">
+                  <a:spLocks noRot="1" noChangeAspect="1" noMove="1" noResize="1" noEditPoints="1" noAdjustHandles="1" noChangeArrowheads="1" noChangeShapeType="1" noTextEdit="1"/>
+                </p:cNvSpPr>
+                <p:nvPr/>
+              </p:nvSpPr>
+              <p:spPr>
+                <a:xfrm>
+                  <a:off x="6673207" y="2186709"/>
+                  <a:ext cx="297646" cy="430887"/>
+                </a:xfrm>
+                <a:prstGeom prst="rect">
+                  <a:avLst/>
+                </a:prstGeom>
+                <a:blipFill>
+                  <a:blip r:embed="rId2"/>
+                  <a:stretch>
+                    <a:fillRect/>
+                  </a:stretch>
+                </a:blipFill>
+              </p:spPr>
+              <p:txBody>
+                <a:bodyPr/>
+                <a:lstStyle/>
+                <a:p>
+                  <a:r>
+                    <a:rPr lang="en-IN">
+                      <a:noFill/>
+                    </a:rPr>
+                    <a:t> </a:t>
+                  </a:r>
+                </a:p>
+              </p:txBody>
+            </p:sp>
+          </mc:Fallback>
+        </mc:AlternateContent>
+      </p:grpSp>
+      <p:sp>
+        <p:nvSpPr>
+          <p:cNvPr id="2" name="Parallelogram 1">
+            <a:extLst>
+              <a:ext uri="{FF2B5EF4-FFF2-40B4-BE49-F238E27FC236}">
+                <a16:creationId xmlns:a16="http://schemas.microsoft.com/office/drawing/2014/main" id="{2C926FCC-87F4-B4E3-A619-7DC15AEE3631}"/>
+              </a:ext>
+            </a:extLst>
+          </p:cNvPr>
+          <p:cNvSpPr/>
+          <p:nvPr/>
+        </p:nvSpPr>
+        <p:spPr>
+          <a:xfrm>
+            <a:off x="2211977" y="2325189"/>
+            <a:ext cx="6453051" cy="1593668"/>
+          </a:xfrm>
+          <a:prstGeom prst="parallelogram">
+            <a:avLst>
+              <a:gd name="adj" fmla="val 109494"/>
+            </a:avLst>
+          </a:prstGeom>
+          <a:solidFill>
+            <a:schemeClr val="tx1">
+              <a:lumMod val="65000"/>
+              <a:lumOff val="35000"/>
+              <a:alpha val="50000"/>
+            </a:schemeClr>
+          </a:solidFill>
+          <a:ln>
+            <a:noFill/>
+          </a:ln>
+        </p:spPr>
+        <p:style>
+          <a:lnRef idx="2">
+            <a:schemeClr val="accent1">
+              <a:shade val="50000"/>
+            </a:schemeClr>
+          </a:lnRef>
+          <a:fillRef idx="1">
+            <a:schemeClr val="accent1"/>
+          </a:fillRef>
+          <a:effectRef idx="0">
+            <a:schemeClr val="accent1"/>
+          </a:effectRef>
+          <a:fontRef idx="minor">
+            <a:schemeClr val="lt1"/>
+          </a:fontRef>
+        </p:style>
+        <p:txBody>
+          <a:bodyPr rtlCol="0" anchor="ctr"/>
+          <a:lstStyle/>
+          <a:p>
+            <a:pPr algn="ctr"/>
+            <a:endParaRPr lang="en-US"/>
+          </a:p>
+        </p:txBody>
+      </p:sp>
+      <mc:AlternateContent xmlns:mc="http://schemas.openxmlformats.org/markup-compatibility/2006">
+        <mc:Choice xmlns:a14="http://schemas.microsoft.com/office/drawing/2010/main" Requires="a14">
+          <p:sp>
+            <p:nvSpPr>
+              <p:cNvPr id="11" name="TextBox 10">
+                <a:extLst>
+                  <a:ext uri="{FF2B5EF4-FFF2-40B4-BE49-F238E27FC236}">
+                    <a16:creationId xmlns:a16="http://schemas.microsoft.com/office/drawing/2014/main" id="{CA9469D5-BE54-7A32-155D-47A963797BA1}"/>
+                  </a:ext>
+                </a:extLst>
+              </p:cNvPr>
+              <p:cNvSpPr txBox="1"/>
+              <p:nvPr/>
+            </p:nvSpPr>
+            <p:spPr>
+              <a:xfrm>
+                <a:off x="8214360" y="3009900"/>
+                <a:ext cx="241733" cy="369332"/>
+              </a:xfrm>
+              <a:prstGeom prst="rect">
+                <a:avLst/>
+              </a:prstGeom>
+              <a:noFill/>
+            </p:spPr>
+            <p:txBody>
+              <a:bodyPr wrap="none" lIns="0" tIns="0" rIns="0" bIns="0" rtlCol="0">
+                <a:spAutoFit/>
+              </a:bodyPr>
+              <a:lstStyle/>
+              <a:p>
+                <a:pPr/>
+                <a14:m>
+                  <m:oMathPara xmlns:m="http://schemas.openxmlformats.org/officeDocument/2006/math">
+                    <m:oMath>
+                      <m:r>
+                        <a:rPr lang="en-US" sz="2400" b="0" i="1" smtClean="0">
+                          <a:solidFill>
+                            <a:schemeClr val="tx1"/>
+                          </a:solidFill>
+                          <a:latin typeface="Cambria Math" panose="02040503050406030204" pitchFamily="18" charset="0"/>
+                        </a:rPr>
+                        <m:t>𝑥</m:t>
+                      </m:r>
+                    </m:oMath>
+                  </m:oMathPara>
+                </a14:m>
+                <a:endParaRPr lang="en-US" sz="2400" dirty="0"/>
+              </a:p>
+            </p:txBody>
+          </p:sp>
+        </mc:Choice>
+        <mc:Fallback>
+          <p:sp>
+            <p:nvSpPr>
+              <p:cNvPr id="11" name="TextBox 10">
+                <a:extLst>
+                  <a:ext uri="{FF2B5EF4-FFF2-40B4-BE49-F238E27FC236}">
+                    <a16:creationId xmlns:a16="http://schemas.microsoft.com/office/drawing/2014/main" id="{CA9469D5-BE54-7A32-155D-47A963797BA1}"/>
+                  </a:ext>
+                </a:extLst>
+              </p:cNvPr>
+              <p:cNvSpPr txBox="1">
+                <a:spLocks noRot="1" noChangeAspect="1" noMove="1" noResize="1" noEditPoints="1" noAdjustHandles="1" noChangeArrowheads="1" noChangeShapeType="1" noTextEdit="1"/>
+              </p:cNvSpPr>
+              <p:nvPr/>
+            </p:nvSpPr>
+            <p:spPr>
+              <a:xfrm>
+                <a:off x="8214360" y="3009900"/>
+                <a:ext cx="241733" cy="369332"/>
+              </a:xfrm>
+              <a:prstGeom prst="rect">
+                <a:avLst/>
+              </a:prstGeom>
+              <a:blipFill>
+                <a:blip r:embed="rId3"/>
+                <a:stretch>
+                  <a:fillRect l="-17949" r="-15385"/>
+                </a:stretch>
+              </a:blipFill>
+            </p:spPr>
+            <p:txBody>
+              <a:bodyPr/>
+              <a:lstStyle/>
+              <a:p>
+                <a:r>
+                  <a:rPr lang="en-IN">
+                    <a:noFill/>
+                  </a:rPr>
+                  <a:t> </a:t>
+                </a:r>
+              </a:p>
+            </p:txBody>
+          </p:sp>
+        </mc:Fallback>
+      </mc:AlternateContent>
+      <mc:AlternateContent xmlns:mc="http://schemas.openxmlformats.org/markup-compatibility/2006">
+        <mc:Choice xmlns:a14="http://schemas.microsoft.com/office/drawing/2010/main" Requires="a14">
+          <p:sp>
+            <p:nvSpPr>
+              <p:cNvPr id="12" name="TextBox 11">
+                <a:extLst>
+                  <a:ext uri="{FF2B5EF4-FFF2-40B4-BE49-F238E27FC236}">
+                    <a16:creationId xmlns:a16="http://schemas.microsoft.com/office/drawing/2014/main" id="{C7A51F7F-9964-7750-4F24-F71DAA362B7B}"/>
+                  </a:ext>
+                </a:extLst>
+              </p:cNvPr>
+              <p:cNvSpPr txBox="1"/>
+              <p:nvPr/>
+            </p:nvSpPr>
+            <p:spPr>
+              <a:xfrm>
+                <a:off x="2446020" y="3009900"/>
+                <a:ext cx="312586" cy="369332"/>
+              </a:xfrm>
+              <a:prstGeom prst="rect">
+                <a:avLst/>
+              </a:prstGeom>
+              <a:noFill/>
+            </p:spPr>
+            <p:txBody>
+              <a:bodyPr wrap="none" lIns="0" tIns="0" rIns="0" bIns="0" rtlCol="0">
+                <a:spAutoFit/>
+              </a:bodyPr>
+              <a:lstStyle/>
+              <a:p>
+                <a:pPr/>
+                <a14:m>
+                  <m:oMathPara xmlns:m="http://schemas.openxmlformats.org/officeDocument/2006/math">
+                    <m:oMath>
+                      <m:r>
+                        <a:rPr lang="en-US" sz="2400" b="0" i="1" smtClean="0">
+                          <a:solidFill>
+                            <a:schemeClr val="tx1"/>
+                          </a:solidFill>
+                          <a:latin typeface="Cambria Math" panose="02040503050406030204" pitchFamily="18" charset="0"/>
+                        </a:rPr>
+                        <m:t>𝑥</m:t>
+                      </m:r>
+                      <m:r>
+                        <a:rPr lang="en-US" sz="2400" b="0" i="1" smtClean="0">
+                          <a:solidFill>
+                            <a:schemeClr val="tx1"/>
+                          </a:solidFill>
+                          <a:latin typeface="Cambria Math" panose="02040503050406030204" pitchFamily="18" charset="0"/>
+                        </a:rPr>
+                        <m:t>′</m:t>
+                      </m:r>
+                    </m:oMath>
+                  </m:oMathPara>
+                </a14:m>
+                <a:endParaRPr lang="en-US" sz="2400" dirty="0"/>
+              </a:p>
+            </p:txBody>
+          </p:sp>
+        </mc:Choice>
+        <mc:Fallback>
+          <p:sp>
+            <p:nvSpPr>
+              <p:cNvPr id="12" name="TextBox 11">
+                <a:extLst>
+                  <a:ext uri="{FF2B5EF4-FFF2-40B4-BE49-F238E27FC236}">
+                    <a16:creationId xmlns:a16="http://schemas.microsoft.com/office/drawing/2014/main" id="{C7A51F7F-9964-7750-4F24-F71DAA362B7B}"/>
+                  </a:ext>
+                </a:extLst>
+              </p:cNvPr>
+              <p:cNvSpPr txBox="1">
+                <a:spLocks noRot="1" noChangeAspect="1" noMove="1" noResize="1" noEditPoints="1" noAdjustHandles="1" noChangeArrowheads="1" noChangeShapeType="1" noTextEdit="1"/>
+              </p:cNvSpPr>
+              <p:nvPr/>
+            </p:nvSpPr>
+            <p:spPr>
+              <a:xfrm>
+                <a:off x="2446020" y="3009900"/>
+                <a:ext cx="312586" cy="369332"/>
+              </a:xfrm>
+              <a:prstGeom prst="rect">
+                <a:avLst/>
+              </a:prstGeom>
+              <a:blipFill>
+                <a:blip r:embed="rId4"/>
+                <a:stretch>
+                  <a:fillRect l="-25000" t="-1667" r="-26923" b="-10000"/>
+                </a:stretch>
+              </a:blipFill>
+            </p:spPr>
+            <p:txBody>
+              <a:bodyPr/>
+              <a:lstStyle/>
+              <a:p>
+                <a:r>
+                  <a:rPr lang="en-IN">
+                    <a:noFill/>
+                  </a:rPr>
+                  <a:t> </a:t>
+                </a:r>
+              </a:p>
+            </p:txBody>
+          </p:sp>
+        </mc:Fallback>
+      </mc:AlternateContent>
+      <p:sp>
+        <p:nvSpPr>
+          <p:cNvPr id="21" name="Parallelogram 7">
+            <a:extLst>
+              <a:ext uri="{FF2B5EF4-FFF2-40B4-BE49-F238E27FC236}">
+                <a16:creationId xmlns:a16="http://schemas.microsoft.com/office/drawing/2014/main" id="{97304420-F1C0-2A47-0AEF-67735CF615D5}"/>
+              </a:ext>
+            </a:extLst>
+          </p:cNvPr>
+          <p:cNvSpPr/>
+          <p:nvPr/>
+        </p:nvSpPr>
+        <p:spPr>
+          <a:xfrm flipV="1">
+            <a:off x="2577736" y="2958738"/>
+            <a:ext cx="5819503" cy="45719"/>
+          </a:xfrm>
+          <a:custGeom>
+            <a:avLst/>
+            <a:gdLst>
+              <a:gd name="connsiteX0" fmla="*/ 0 w 6453051"/>
+              <a:gd name="connsiteY0" fmla="*/ 1593668 h 1593668"/>
+              <a:gd name="connsiteX1" fmla="*/ 1744971 w 6453051"/>
+              <a:gd name="connsiteY1" fmla="*/ 0 h 1593668"/>
+              <a:gd name="connsiteX2" fmla="*/ 6453051 w 6453051"/>
+              <a:gd name="connsiteY2" fmla="*/ 0 h 1593668"/>
+              <a:gd name="connsiteX3" fmla="*/ 4708080 w 6453051"/>
+              <a:gd name="connsiteY3" fmla="*/ 1593668 h 1593668"/>
+              <a:gd name="connsiteX4" fmla="*/ 0 w 6453051"/>
+              <a:gd name="connsiteY4" fmla="*/ 1593668 h 1593668"/>
+              <a:gd name="connsiteX0" fmla="*/ 0 w 4708080"/>
+              <a:gd name="connsiteY0" fmla="*/ 1593668 h 1593668"/>
+              <a:gd name="connsiteX1" fmla="*/ 1744971 w 4708080"/>
+              <a:gd name="connsiteY1" fmla="*/ 0 h 1593668"/>
+              <a:gd name="connsiteX2" fmla="*/ 4708080 w 4708080"/>
+              <a:gd name="connsiteY2" fmla="*/ 1593668 h 1593668"/>
+              <a:gd name="connsiteX3" fmla="*/ 0 w 4708080"/>
+              <a:gd name="connsiteY3" fmla="*/ 1593668 h 1593668"/>
+              <a:gd name="connsiteX0" fmla="*/ 0 w 4708080"/>
+              <a:gd name="connsiteY0" fmla="*/ 0 h 0"/>
+              <a:gd name="connsiteX1" fmla="*/ 4708080 w 4708080"/>
+              <a:gd name="connsiteY1" fmla="*/ 0 h 0"/>
+              <a:gd name="connsiteX2" fmla="*/ 0 w 4708080"/>
+              <a:gd name="connsiteY2" fmla="*/ 0 h 0"/>
+            </a:gdLst>
+            <a:ahLst/>
+            <a:cxnLst>
+              <a:cxn ang="0">
+                <a:pos x="connsiteX0" y="connsiteY0"/>
+              </a:cxn>
+              <a:cxn ang="0">
+                <a:pos x="connsiteX1" y="connsiteY1"/>
+              </a:cxn>
+              <a:cxn ang="0">
+                <a:pos x="connsiteX2" y="connsiteY2"/>
+              </a:cxn>
+            </a:cxnLst>
+            <a:rect l="l" t="t" r="r" b="b"/>
+            <a:pathLst>
+              <a:path w="4708080">
+                <a:moveTo>
+                  <a:pt x="0" y="0"/>
+                </a:moveTo>
+                <a:lnTo>
+                  <a:pt x="4708080" y="0"/>
+                </a:lnTo>
+                <a:lnTo>
+                  <a:pt x="0" y="0"/>
+                </a:lnTo>
+                <a:close/>
+              </a:path>
+            </a:pathLst>
+          </a:custGeom>
+          <a:noFill/>
+          <a:ln w="28575">
+            <a:solidFill>
+              <a:schemeClr val="bg1">
+                <a:lumMod val="50000"/>
+              </a:schemeClr>
+            </a:solidFill>
+            <a:prstDash val="dashDot"/>
+          </a:ln>
+        </p:spPr>
+        <p:style>
+          <a:lnRef idx="2">
+            <a:schemeClr val="accent1">
+              <a:shade val="50000"/>
+            </a:schemeClr>
+          </a:lnRef>
+          <a:fillRef idx="1">
+            <a:schemeClr val="accent1"/>
+          </a:fillRef>
+          <a:effectRef idx="0">
+            <a:schemeClr val="accent1"/>
+          </a:effectRef>
+          <a:fontRef idx="minor">
+            <a:schemeClr val="lt1"/>
+          </a:fontRef>
+        </p:style>
+        <p:txBody>
+          <a:bodyPr rtlCol="0" anchor="ctr"/>
+          <a:lstStyle/>
+          <a:p>
+            <a:pPr algn="ctr"/>
+            <a:endParaRPr lang="en-US" dirty="0"/>
+          </a:p>
+        </p:txBody>
+      </p:sp>
+      <p:sp>
+        <p:nvSpPr>
+          <p:cNvPr id="34" name="Oval 33">
+            <a:extLst>
+              <a:ext uri="{FF2B5EF4-FFF2-40B4-BE49-F238E27FC236}">
+                <a16:creationId xmlns:a16="http://schemas.microsoft.com/office/drawing/2014/main" id="{70AB3027-BCE8-0C71-6F3F-5D73A2882A35}"/>
+              </a:ext>
+            </a:extLst>
+          </p:cNvPr>
+          <p:cNvSpPr/>
+          <p:nvPr/>
+        </p:nvSpPr>
+        <p:spPr>
+          <a:xfrm>
+            <a:off x="4398643" y="2932965"/>
+            <a:ext cx="148374" cy="148374"/>
+          </a:xfrm>
+          <a:prstGeom prst="ellipse">
+            <a:avLst/>
+          </a:prstGeom>
+          <a:gradFill flip="none" rotWithShape="1">
+            <a:gsLst>
+              <a:gs pos="0">
+                <a:schemeClr val="tx1">
+                  <a:lumMod val="50000"/>
+                  <a:lumOff val="50000"/>
+                </a:schemeClr>
+              </a:gs>
+              <a:gs pos="39000">
+                <a:schemeClr val="tx1">
+                  <a:lumMod val="85000"/>
+                  <a:lumOff val="15000"/>
+                </a:schemeClr>
+              </a:gs>
+              <a:gs pos="100000">
+                <a:schemeClr val="tx1"/>
+              </a:gs>
+            </a:gsLst>
+            <a:path path="circle">
+              <a:fillToRect l="100000" b="100000"/>
+            </a:path>
+            <a:tileRect t="-100000" r="-100000"/>
+          </a:gradFill>
+          <a:ln>
+            <a:noFill/>
+          </a:ln>
+        </p:spPr>
+        <p:style>
+          <a:lnRef idx="2">
+            <a:schemeClr val="accent1">
+              <a:shade val="15000"/>
+            </a:schemeClr>
+          </a:lnRef>
+          <a:fillRef idx="1">
+            <a:schemeClr val="accent1"/>
+          </a:fillRef>
+          <a:effectRef idx="0">
+            <a:schemeClr val="accent1"/>
+          </a:effectRef>
+          <a:fontRef idx="minor">
+            <a:schemeClr val="lt1"/>
+          </a:fontRef>
+        </p:style>
+        <p:txBody>
+          <a:bodyPr rtlCol="0" anchor="ctr"/>
+          <a:lstStyle/>
+          <a:p>
+            <a:pPr algn="ctr"/>
+            <a:endParaRPr lang="en-IN"/>
+          </a:p>
+        </p:txBody>
+      </p:sp>
+      <p:grpSp>
+        <p:nvGrpSpPr>
+          <p:cNvPr id="3" name="Group 2">
+            <a:extLst>
+              <a:ext uri="{FF2B5EF4-FFF2-40B4-BE49-F238E27FC236}">
+                <a16:creationId xmlns:a16="http://schemas.microsoft.com/office/drawing/2014/main" id="{002FBCA7-C00A-764A-727E-3CDE5BA3953B}"/>
+              </a:ext>
+            </a:extLst>
+          </p:cNvPr>
+          <p:cNvGrpSpPr/>
+          <p:nvPr/>
+        </p:nvGrpSpPr>
+        <p:grpSpPr>
+          <a:xfrm>
+            <a:off x="5324467" y="1525760"/>
+            <a:ext cx="297646" cy="1501239"/>
+            <a:chOff x="6673207" y="1525760"/>
+            <a:chExt cx="297646" cy="1501239"/>
+          </a:xfrm>
+        </p:grpSpPr>
+        <p:cxnSp>
+          <p:nvCxnSpPr>
+            <p:cNvPr id="42" name="Straight Arrow Connector 41">
+              <a:extLst>
+                <a:ext uri="{FF2B5EF4-FFF2-40B4-BE49-F238E27FC236}">
+                  <a16:creationId xmlns:a16="http://schemas.microsoft.com/office/drawing/2014/main" id="{8BB5665F-C238-4B59-CA47-38683D3A71E7}"/>
+                </a:ext>
+              </a:extLst>
+            </p:cNvPr>
+            <p:cNvCxnSpPr/>
+            <p:nvPr/>
+          </p:nvCxnSpPr>
+          <p:spPr>
+            <a:xfrm>
+              <a:off x="6820930" y="1525760"/>
+              <a:ext cx="0" cy="1501239"/>
+            </a:xfrm>
+            <a:prstGeom prst="straightConnector1">
+              <a:avLst/>
+            </a:prstGeom>
+            <a:ln w="19050">
+              <a:solidFill>
+                <a:schemeClr val="tx1"/>
+              </a:solidFill>
+              <a:headEnd type="triangle" w="lg" len="med"/>
+              <a:tailEnd type="triangle" w="lg" len="med"/>
+            </a:ln>
+          </p:spPr>
+          <p:style>
+            <a:lnRef idx="1">
+              <a:schemeClr val="accent1"/>
+            </a:lnRef>
+            <a:fillRef idx="0">
+              <a:schemeClr val="accent1"/>
+            </a:fillRef>
+            <a:effectRef idx="0">
+              <a:schemeClr val="accent1"/>
+            </a:effectRef>
+            <a:fontRef idx="minor">
+              <a:schemeClr val="tx1"/>
+            </a:fontRef>
+          </p:style>
+        </p:cxnSp>
+        <mc:AlternateContent xmlns:mc="http://schemas.openxmlformats.org/markup-compatibility/2006">
+          <mc:Choice xmlns:a14="http://schemas.microsoft.com/office/drawing/2010/main" Requires="a14">
+            <p:sp>
+              <p:nvSpPr>
+                <p:cNvPr id="44" name="TextBox 43">
+                  <a:extLst>
+                    <a:ext uri="{FF2B5EF4-FFF2-40B4-BE49-F238E27FC236}">
+                      <a16:creationId xmlns:a16="http://schemas.microsoft.com/office/drawing/2014/main" id="{86B27F91-CBE2-F398-581F-7FC396E571B8}"/>
+                    </a:ext>
+                  </a:extLst>
+                </p:cNvPr>
+                <p:cNvSpPr txBox="1"/>
+                <p:nvPr/>
+              </p:nvSpPr>
+              <p:spPr>
+                <a:xfrm>
+                  <a:off x="6673207" y="1856509"/>
+                  <a:ext cx="297646" cy="430887"/>
+                </a:xfrm>
+                <a:prstGeom prst="rect">
+                  <a:avLst/>
+                </a:prstGeom>
+                <a:solidFill>
+                  <a:schemeClr val="bg1"/>
+                </a:solidFill>
+              </p:spPr>
+              <p:txBody>
+                <a:bodyPr wrap="none" lIns="0" tIns="0" rIns="0" bIns="0" rtlCol="0">
+                  <a:spAutoFit/>
+                </a:bodyPr>
+                <a:lstStyle/>
+                <a:p>
+                  <a:pPr/>
+                  <a14:m>
+                    <m:oMathPara xmlns:m="http://schemas.openxmlformats.org/officeDocument/2006/math">
+                      <m:oMath>
+                        <m:r>
+                          <a:rPr lang="en-US" sz="2800" b="0" i="1" smtClean="0">
+                            <a:latin typeface="Cambria Math" panose="02040503050406030204" pitchFamily="18" charset="0"/>
+                          </a:rPr>
+                          <m:t>ℎ</m:t>
+                        </m:r>
+                      </m:oMath>
+                    </m:oMathPara>
+                  </a14:m>
+                  <a:endParaRPr lang="en-IN" sz="2800" dirty="0"/>
+                </a:p>
+              </p:txBody>
+            </p:sp>
+          </mc:Choice>
+          <mc:Fallback>
+            <p:sp>
+              <p:nvSpPr>
+                <p:cNvPr id="44" name="TextBox 43">
+                  <a:extLst>
+                    <a:ext uri="{FF2B5EF4-FFF2-40B4-BE49-F238E27FC236}">
+                      <a16:creationId xmlns:a16="http://schemas.microsoft.com/office/drawing/2014/main" id="{86B27F91-CBE2-F398-581F-7FC396E571B8}"/>
+                    </a:ext>
+                  </a:extLst>
+                </p:cNvPr>
+                <p:cNvSpPr txBox="1">
+                  <a:spLocks noRot="1" noChangeAspect="1" noMove="1" noResize="1" noEditPoints="1" noAdjustHandles="1" noChangeArrowheads="1" noChangeShapeType="1" noTextEdit="1"/>
+                </p:cNvSpPr>
+                <p:nvPr/>
+              </p:nvSpPr>
+              <p:spPr>
+                <a:xfrm>
+                  <a:off x="6673207" y="1856509"/>
+                  <a:ext cx="297646" cy="430887"/>
+                </a:xfrm>
+                <a:prstGeom prst="rect">
+                  <a:avLst/>
+                </a:prstGeom>
+                <a:blipFill>
+                  <a:blip r:embed="rId5"/>
+                  <a:stretch>
+                    <a:fillRect/>
+                  </a:stretch>
+                </a:blipFill>
+              </p:spPr>
+              <p:txBody>
+                <a:bodyPr/>
+                <a:lstStyle/>
+                <a:p>
+                  <a:r>
+                    <a:rPr lang="en-IN">
+                      <a:noFill/>
+                    </a:rPr>
+                    <a:t> </a:t>
+                  </a:r>
+                </a:p>
+              </p:txBody>
+            </p:sp>
+          </mc:Fallback>
+        </mc:AlternateContent>
+      </p:grpSp>
+      <mc:AlternateContent xmlns:mc="http://schemas.openxmlformats.org/markup-compatibility/2006">
+        <mc:Choice xmlns:a14="http://schemas.microsoft.com/office/drawing/2010/main" Requires="a14">
+          <p:sp>
+            <p:nvSpPr>
+              <p:cNvPr id="40" name="TextBox 39">
+                <a:extLst>
+                  <a:ext uri="{FF2B5EF4-FFF2-40B4-BE49-F238E27FC236}">
+                    <a16:creationId xmlns:a16="http://schemas.microsoft.com/office/drawing/2014/main" id="{7D766116-8765-F886-14D5-F22F70817B65}"/>
+                  </a:ext>
+                </a:extLst>
+              </p:cNvPr>
+              <p:cNvSpPr txBox="1"/>
+              <p:nvPr/>
+            </p:nvSpPr>
+            <p:spPr>
+              <a:xfrm>
+                <a:off x="3997556" y="2930242"/>
+                <a:ext cx="455701" cy="430887"/>
+              </a:xfrm>
+              <a:prstGeom prst="rect">
+                <a:avLst/>
+              </a:prstGeom>
+              <a:noFill/>
+            </p:spPr>
+            <p:txBody>
+              <a:bodyPr wrap="none" lIns="0" tIns="0" rIns="0" bIns="0" rtlCol="0">
+                <a:spAutoFit/>
+              </a:bodyPr>
+              <a:lstStyle/>
+              <a:p>
+                <a:pPr/>
+                <a14:m>
+                  <m:oMathPara xmlns:m="http://schemas.openxmlformats.org/officeDocument/2006/math">
+                    <m:oMath>
+                      <m:sSub>
+                        <m:sSubPr>
+                          <m:ctrlPr>
+                            <a:rPr lang="en-US" sz="2800" b="0" i="1" smtClean="0">
+                              <a:latin typeface="Cambria Math" panose="02040503050406030204" pitchFamily="18" charset="0"/>
+                            </a:rPr>
+                          </m:ctrlPr>
+                        </m:sSubPr>
+                        <m:e>
+                          <m:r>
+                            <a:rPr lang="en-US" sz="2800" b="0" i="1" smtClean="0">
+                              <a:latin typeface="Cambria Math" panose="02040503050406030204" pitchFamily="18" charset="0"/>
+                            </a:rPr>
+                            <m:t>𝑛</m:t>
+                          </m:r>
+                        </m:e>
+                        <m:sub>
+                          <m:r>
+                            <a:rPr lang="en-US" sz="2800" b="0" i="1" smtClean="0">
+                              <a:latin typeface="Cambria Math" panose="02040503050406030204" pitchFamily="18" charset="0"/>
+                            </a:rPr>
+                            <m:t>0</m:t>
+                          </m:r>
+                        </m:sub>
+                      </m:sSub>
+                    </m:oMath>
+                  </m:oMathPara>
+                </a14:m>
+                <a:endParaRPr lang="en-IN" sz="2800" dirty="0"/>
+              </a:p>
+            </p:txBody>
+          </p:sp>
+        </mc:Choice>
+        <mc:Fallback>
+          <p:sp>
+            <p:nvSpPr>
+              <p:cNvPr id="40" name="TextBox 39">
+                <a:extLst>
+                  <a:ext uri="{FF2B5EF4-FFF2-40B4-BE49-F238E27FC236}">
+                    <a16:creationId xmlns:a16="http://schemas.microsoft.com/office/drawing/2014/main" id="{7D766116-8765-F886-14D5-F22F70817B65}"/>
+                  </a:ext>
+                </a:extLst>
+              </p:cNvPr>
+              <p:cNvSpPr txBox="1">
+                <a:spLocks noRot="1" noChangeAspect="1" noMove="1" noResize="1" noEditPoints="1" noAdjustHandles="1" noChangeArrowheads="1" noChangeShapeType="1" noTextEdit="1"/>
+              </p:cNvSpPr>
+              <p:nvPr/>
+            </p:nvSpPr>
+            <p:spPr>
+              <a:xfrm>
+                <a:off x="3997556" y="2930242"/>
+                <a:ext cx="455701" cy="430887"/>
+              </a:xfrm>
+              <a:prstGeom prst="rect">
+                <a:avLst/>
+              </a:prstGeom>
+              <a:blipFill>
+                <a:blip r:embed="rId6"/>
+                <a:stretch>
+                  <a:fillRect/>
+                </a:stretch>
+              </a:blipFill>
+            </p:spPr>
+            <p:txBody>
+              <a:bodyPr/>
+              <a:lstStyle/>
+              <a:p>
+                <a:r>
+                  <a:rPr lang="en-IN">
+                    <a:noFill/>
+                  </a:rPr>
+                  <a:t> </a:t>
+                </a:r>
+              </a:p>
+            </p:txBody>
+          </p:sp>
+        </mc:Fallback>
+      </mc:AlternateContent>
+      <mc:AlternateContent xmlns:mc="http://schemas.openxmlformats.org/markup-compatibility/2006">
+        <mc:Choice xmlns:a14="http://schemas.microsoft.com/office/drawing/2010/main" Requires="a14">
+          <p:sp>
+            <p:nvSpPr>
+              <p:cNvPr id="22" name="TextBox 21">
+                <a:extLst>
+                  <a:ext uri="{FF2B5EF4-FFF2-40B4-BE49-F238E27FC236}">
+                    <a16:creationId xmlns:a16="http://schemas.microsoft.com/office/drawing/2014/main" id="{E48CE0E0-C7B0-324E-7ADF-052736F7FBCF}"/>
+                  </a:ext>
+                </a:extLst>
+              </p:cNvPr>
+              <p:cNvSpPr txBox="1"/>
+              <p:nvPr/>
+            </p:nvSpPr>
+            <p:spPr>
+              <a:xfrm>
+                <a:off x="5591057" y="1164308"/>
+                <a:ext cx="494173" cy="430887"/>
+              </a:xfrm>
+              <a:prstGeom prst="rect">
+                <a:avLst/>
+              </a:prstGeom>
+              <a:noFill/>
+            </p:spPr>
+            <p:txBody>
+              <a:bodyPr wrap="none" lIns="0" tIns="0" rIns="0" bIns="0" rtlCol="0">
+                <a:spAutoFit/>
+              </a:bodyPr>
+              <a:lstStyle/>
+              <a:p>
+                <a:pPr/>
+                <a14:m>
+                  <m:oMathPara xmlns:m="http://schemas.openxmlformats.org/officeDocument/2006/math">
+                    <m:oMath>
+                      <m:sSub>
+                        <m:sSubPr>
+                          <m:ctrlPr>
+                            <a:rPr lang="en-US" sz="2800" b="0" i="1" smtClean="0">
+                              <a:latin typeface="Cambria Math" panose="02040503050406030204" pitchFamily="18" charset="0"/>
+                            </a:rPr>
+                          </m:ctrlPr>
+                        </m:sSubPr>
+                        <m:e>
+                          <m:r>
+                            <a:rPr lang="en-US" sz="2800" b="0" i="1" smtClean="0">
+                              <a:latin typeface="Cambria Math" panose="02040503050406030204" pitchFamily="18" charset="0"/>
+                            </a:rPr>
+                            <m:t>𝑛</m:t>
+                          </m:r>
+                        </m:e>
+                        <m:sub>
+                          <m:r>
+                            <a:rPr lang="en-US" sz="2800" b="0" i="1" smtClean="0">
+                              <a:latin typeface="Cambria Math" panose="02040503050406030204" pitchFamily="18" charset="0"/>
+                            </a:rPr>
+                            <m:t>+</m:t>
+                          </m:r>
+                        </m:sub>
+                      </m:sSub>
+                    </m:oMath>
+                  </m:oMathPara>
+                </a14:m>
+                <a:endParaRPr lang="en-IN" sz="2800" dirty="0"/>
+              </a:p>
+            </p:txBody>
+          </p:sp>
+        </mc:Choice>
+        <mc:Fallback>
+          <p:sp>
+            <p:nvSpPr>
+              <p:cNvPr id="22" name="TextBox 21">
+                <a:extLst>
+                  <a:ext uri="{FF2B5EF4-FFF2-40B4-BE49-F238E27FC236}">
+                    <a16:creationId xmlns:a16="http://schemas.microsoft.com/office/drawing/2014/main" id="{E48CE0E0-C7B0-324E-7ADF-052736F7FBCF}"/>
+                  </a:ext>
+                </a:extLst>
+              </p:cNvPr>
+              <p:cNvSpPr txBox="1">
+                <a:spLocks noRot="1" noChangeAspect="1" noMove="1" noResize="1" noEditPoints="1" noAdjustHandles="1" noChangeArrowheads="1" noChangeShapeType="1" noTextEdit="1"/>
+              </p:cNvSpPr>
+              <p:nvPr/>
+            </p:nvSpPr>
+            <p:spPr>
+              <a:xfrm>
+                <a:off x="5591057" y="1164308"/>
+                <a:ext cx="494173" cy="430887"/>
+              </a:xfrm>
+              <a:prstGeom prst="rect">
+                <a:avLst/>
+              </a:prstGeom>
+              <a:blipFill>
+                <a:blip r:embed="rId7"/>
+                <a:stretch>
+                  <a:fillRect/>
+                </a:stretch>
+              </a:blipFill>
+            </p:spPr>
+            <p:txBody>
+              <a:bodyPr/>
+              <a:lstStyle/>
+              <a:p>
+                <a:r>
+                  <a:rPr lang="en-IN">
+                    <a:noFill/>
+                  </a:rPr>
+                  <a:t> </a:t>
+                </a:r>
+              </a:p>
+            </p:txBody>
+          </p:sp>
+        </mc:Fallback>
+      </mc:AlternateContent>
+      <mc:AlternateContent xmlns:mc="http://schemas.openxmlformats.org/markup-compatibility/2006">
+        <mc:Choice xmlns:a14="http://schemas.microsoft.com/office/drawing/2010/main" Requires="a14">
+          <p:sp>
+            <p:nvSpPr>
+              <p:cNvPr id="16" name="TextBox 15">
+                <a:extLst>
+                  <a:ext uri="{FF2B5EF4-FFF2-40B4-BE49-F238E27FC236}">
+                    <a16:creationId xmlns:a16="http://schemas.microsoft.com/office/drawing/2014/main" id="{FF20F90C-D735-818C-DB92-7A136D2AA17D}"/>
+                  </a:ext>
+                </a:extLst>
+              </p:cNvPr>
+              <p:cNvSpPr txBox="1"/>
+              <p:nvPr/>
+            </p:nvSpPr>
+            <p:spPr>
+              <a:xfrm>
+                <a:off x="6416557" y="4352008"/>
+                <a:ext cx="494173" cy="430887"/>
+              </a:xfrm>
+              <a:prstGeom prst="rect">
+                <a:avLst/>
+              </a:prstGeom>
+              <a:noFill/>
+            </p:spPr>
+            <p:txBody>
+              <a:bodyPr wrap="none" lIns="0" tIns="0" rIns="0" bIns="0" rtlCol="0">
+                <a:spAutoFit/>
+              </a:bodyPr>
+              <a:lstStyle/>
+              <a:p>
+                <a:pPr/>
+                <a14:m>
+                  <m:oMathPara xmlns:m="http://schemas.openxmlformats.org/officeDocument/2006/math">
+                    <m:oMath>
+                      <m:sSub>
+                        <m:sSubPr>
+                          <m:ctrlPr>
+                            <a:rPr lang="en-US" sz="2800" b="0" i="1" smtClean="0">
+                              <a:latin typeface="Cambria Math" panose="02040503050406030204" pitchFamily="18" charset="0"/>
+                            </a:rPr>
+                          </m:ctrlPr>
+                        </m:sSubPr>
+                        <m:e>
+                          <m:r>
+                            <a:rPr lang="en-US" sz="2800" b="0" i="1" smtClean="0">
+                              <a:latin typeface="Cambria Math" panose="02040503050406030204" pitchFamily="18" charset="0"/>
+                            </a:rPr>
+                            <m:t>𝑛</m:t>
+                          </m:r>
+                        </m:e>
+                        <m:sub>
+                          <m:r>
+                            <a:rPr lang="en-US" sz="2800" b="0" i="1" smtClean="0">
+                              <a:latin typeface="Cambria Math" panose="02040503050406030204" pitchFamily="18" charset="0"/>
+                            </a:rPr>
+                            <m:t>−</m:t>
+                          </m:r>
+                        </m:sub>
+                      </m:sSub>
+                    </m:oMath>
+                  </m:oMathPara>
+                </a14:m>
+                <a:endParaRPr lang="en-IN" sz="2800" dirty="0"/>
+              </a:p>
+            </p:txBody>
+          </p:sp>
+        </mc:Choice>
+        <mc:Fallback>
+          <p:sp>
+            <p:nvSpPr>
+              <p:cNvPr id="16" name="TextBox 15">
+                <a:extLst>
+                  <a:ext uri="{FF2B5EF4-FFF2-40B4-BE49-F238E27FC236}">
+                    <a16:creationId xmlns:a16="http://schemas.microsoft.com/office/drawing/2014/main" id="{FF20F90C-D735-818C-DB92-7A136D2AA17D}"/>
+                  </a:ext>
+                </a:extLst>
+              </p:cNvPr>
+              <p:cNvSpPr txBox="1">
+                <a:spLocks noRot="1" noChangeAspect="1" noMove="1" noResize="1" noEditPoints="1" noAdjustHandles="1" noChangeArrowheads="1" noChangeShapeType="1" noTextEdit="1"/>
+              </p:cNvSpPr>
+              <p:nvPr/>
+            </p:nvSpPr>
+            <p:spPr>
+              <a:xfrm>
+                <a:off x="6416557" y="4352008"/>
+                <a:ext cx="494173" cy="430887"/>
+              </a:xfrm>
+              <a:prstGeom prst="rect">
+                <a:avLst/>
+              </a:prstGeom>
+              <a:blipFill>
+                <a:blip r:embed="rId8"/>
+                <a:stretch>
+                  <a:fillRect/>
+                </a:stretch>
+              </a:blipFill>
+            </p:spPr>
+            <p:txBody>
+              <a:bodyPr/>
+              <a:lstStyle/>
+              <a:p>
+                <a:r>
+                  <a:rPr lang="en-IN">
+                    <a:noFill/>
+                  </a:rPr>
+                  <a:t> </a:t>
+                </a:r>
+              </a:p>
+            </p:txBody>
+          </p:sp>
+        </mc:Fallback>
+      </mc:AlternateContent>
+      <p:sp>
+        <p:nvSpPr>
+          <p:cNvPr id="18" name="Oval 17">
+            <a:extLst>
+              <a:ext uri="{FF2B5EF4-FFF2-40B4-BE49-F238E27FC236}">
+                <a16:creationId xmlns:a16="http://schemas.microsoft.com/office/drawing/2014/main" id="{7CF0B52E-0195-2C6F-564C-5E6C0F64B117}"/>
+              </a:ext>
+            </a:extLst>
+          </p:cNvPr>
+          <p:cNvSpPr/>
+          <p:nvPr/>
+        </p:nvSpPr>
+        <p:spPr>
+          <a:xfrm>
+            <a:off x="5400015" y="1377320"/>
+            <a:ext cx="148374" cy="148374"/>
+          </a:xfrm>
+          <a:prstGeom prst="ellipse">
+            <a:avLst/>
+          </a:prstGeom>
+          <a:gradFill flip="none" rotWithShape="1">
+            <a:gsLst>
+              <a:gs pos="0">
+                <a:schemeClr val="tx1">
+                  <a:lumMod val="50000"/>
+                  <a:lumOff val="50000"/>
+                </a:schemeClr>
+              </a:gs>
+              <a:gs pos="39000">
+                <a:schemeClr val="tx1">
+                  <a:lumMod val="85000"/>
+                  <a:lumOff val="15000"/>
+                </a:schemeClr>
+              </a:gs>
+              <a:gs pos="100000">
+                <a:schemeClr val="tx1"/>
+              </a:gs>
+            </a:gsLst>
+            <a:path path="circle">
+              <a:fillToRect l="100000" b="100000"/>
+            </a:path>
+            <a:tileRect t="-100000" r="-100000"/>
+          </a:gradFill>
+          <a:ln>
+            <a:noFill/>
+          </a:ln>
+        </p:spPr>
+        <p:style>
+          <a:lnRef idx="2">
+            <a:schemeClr val="accent1">
+              <a:shade val="15000"/>
+            </a:schemeClr>
+          </a:lnRef>
+          <a:fillRef idx="1">
+            <a:schemeClr val="accent1"/>
+          </a:fillRef>
+          <a:effectRef idx="0">
+            <a:schemeClr val="accent1"/>
+          </a:effectRef>
+          <a:fontRef idx="minor">
+            <a:schemeClr val="lt1"/>
+          </a:fontRef>
+        </p:style>
+        <p:txBody>
+          <a:bodyPr rtlCol="0" anchor="ctr"/>
+          <a:lstStyle/>
+          <a:p>
+            <a:pPr algn="ctr"/>
+            <a:endParaRPr lang="en-IN"/>
+          </a:p>
+        </p:txBody>
+      </p:sp>
+      <p:sp>
+        <p:nvSpPr>
+          <p:cNvPr id="20" name="Oval 19">
+            <a:extLst>
+              <a:ext uri="{FF2B5EF4-FFF2-40B4-BE49-F238E27FC236}">
+                <a16:creationId xmlns:a16="http://schemas.microsoft.com/office/drawing/2014/main" id="{9AD5904A-04C0-9268-B851-C65CCE9893FE}"/>
+              </a:ext>
+            </a:extLst>
+          </p:cNvPr>
+          <p:cNvSpPr/>
+          <p:nvPr/>
+        </p:nvSpPr>
+        <p:spPr>
+          <a:xfrm>
+            <a:off x="6212027" y="4523780"/>
+            <a:ext cx="148374" cy="148374"/>
+          </a:xfrm>
+          <a:prstGeom prst="ellipse">
+            <a:avLst/>
+          </a:prstGeom>
+          <a:gradFill flip="none" rotWithShape="1">
+            <a:gsLst>
+              <a:gs pos="0">
+                <a:schemeClr val="tx1">
+                  <a:lumMod val="50000"/>
+                  <a:lumOff val="50000"/>
+                </a:schemeClr>
+              </a:gs>
+              <a:gs pos="39000">
+                <a:schemeClr val="tx1">
+                  <a:lumMod val="85000"/>
+                  <a:lumOff val="15000"/>
+                </a:schemeClr>
+              </a:gs>
+              <a:gs pos="100000">
+                <a:schemeClr val="tx1"/>
+              </a:gs>
+            </a:gsLst>
+            <a:path path="circle">
+              <a:fillToRect l="100000" b="100000"/>
+            </a:path>
+            <a:tileRect t="-100000" r="-100000"/>
+          </a:gradFill>
+          <a:ln>
+            <a:noFill/>
+          </a:ln>
+        </p:spPr>
+        <p:style>
+          <a:lnRef idx="2">
+            <a:schemeClr val="accent1">
+              <a:shade val="15000"/>
+            </a:schemeClr>
+          </a:lnRef>
+          <a:fillRef idx="1">
+            <a:schemeClr val="accent1"/>
+          </a:fillRef>
+          <a:effectRef idx="0">
+            <a:schemeClr val="accent1"/>
+          </a:effectRef>
+          <a:fontRef idx="minor">
+            <a:schemeClr val="lt1"/>
+          </a:fontRef>
+        </p:style>
+        <p:txBody>
+          <a:bodyPr rtlCol="0" anchor="ctr"/>
+          <a:lstStyle/>
+          <a:p>
+            <a:pPr algn="ctr"/>
+            <a:endParaRPr lang="en-IN"/>
+          </a:p>
+        </p:txBody>
+      </p:sp>
+    </p:spTree>
+    <p:extLst>
+      <p:ext uri="{BB962C8B-B14F-4D97-AF65-F5344CB8AC3E}">
+        <p14:creationId xmlns:p14="http://schemas.microsoft.com/office/powerpoint/2010/main" val="1693501438"/>
+      </p:ext>
+    </p:extLst>
+  </p:cSld>
+  <p:clrMapOvr>
+    <a:masterClrMapping/>
+  </p:clrMapOvr>
+</p:sld>
+</file>
+
 <file path=ppt/slides/slide2.xml><?xml version="1.0" encoding="utf-8"?>
 <p:sld xmlns:a="http://schemas.openxmlformats.org/drawingml/2006/main" xmlns:r="http://schemas.openxmlformats.org/officeDocument/2006/relationships" xmlns:p="http://schemas.openxmlformats.org/presentationml/2006/main">
   <p:cSld>
@@ -8868,10 +10912,7 @@
                 <a:pPr/>
                 <a14:m>
                   <m:oMathPara xmlns:m="http://schemas.openxmlformats.org/officeDocument/2006/math">
-                    <m:oMathParaPr>
-                      <m:jc m:val="centerGroup"/>
-                    </m:oMathParaPr>
-                    <m:oMath xmlns:m="http://schemas.openxmlformats.org/officeDocument/2006/math">
+                    <m:oMath>
                       <m:sSub>
                         <m:sSubPr>
                           <m:ctrlPr>
@@ -8983,10 +11024,7 @@
                 <a:pPr/>
                 <a14:m>
                   <m:oMathPara xmlns:m="http://schemas.openxmlformats.org/officeDocument/2006/math">
-                    <m:oMathParaPr>
-                      <m:jc m:val="centerGroup"/>
-                    </m:oMathParaPr>
-                    <m:oMath xmlns:m="http://schemas.openxmlformats.org/officeDocument/2006/math">
+                    <m:oMath>
                       <m:sSub>
                         <m:sSubPr>
                           <m:ctrlPr>
@@ -9098,10 +11136,7 @@
                 <a:pPr/>
                 <a14:m>
                   <m:oMathPara xmlns:m="http://schemas.openxmlformats.org/officeDocument/2006/math">
-                    <m:oMathParaPr>
-                      <m:jc m:val="centerGroup"/>
-                    </m:oMathParaPr>
-                    <m:oMath xmlns:m="http://schemas.openxmlformats.org/officeDocument/2006/math">
+                    <m:oMath>
                       <m:sSub>
                         <m:sSubPr>
                           <m:ctrlPr>
@@ -9213,10 +11248,7 @@
                 <a:pPr/>
                 <a14:m>
                   <m:oMathPara xmlns:m="http://schemas.openxmlformats.org/officeDocument/2006/math">
-                    <m:oMathParaPr>
-                      <m:jc m:val="centerGroup"/>
-                    </m:oMathParaPr>
-                    <m:oMath xmlns:m="http://schemas.openxmlformats.org/officeDocument/2006/math">
+                    <m:oMath>
                       <m:r>
                         <a:rPr lang="en-US" sz="2400" b="0" i="1" smtClean="0">
                           <a:latin typeface="Cambria Math" panose="02040503050406030204" pitchFamily="18" charset="0"/>
@@ -9309,10 +11341,7 @@
                 <a:pPr/>
                 <a14:m>
                   <m:oMathPara xmlns:m="http://schemas.openxmlformats.org/officeDocument/2006/math">
-                    <m:oMathParaPr>
-                      <m:jc m:val="centerGroup"/>
-                    </m:oMathParaPr>
-                    <m:oMath xmlns:m="http://schemas.openxmlformats.org/officeDocument/2006/math">
+                    <m:oMath>
                       <m:acc>
                         <m:accPr>
                           <m:chr m:val="⃗"/>
@@ -9417,10 +11446,7 @@
                 <a:pPr/>
                 <a14:m>
                   <m:oMathPara xmlns:m="http://schemas.openxmlformats.org/officeDocument/2006/math">
-                    <m:oMathParaPr>
-                      <m:jc m:val="centerGroup"/>
-                    </m:oMathParaPr>
-                    <m:oMath xmlns:m="http://schemas.openxmlformats.org/officeDocument/2006/math">
+                    <m:oMath>
                       <m:r>
                         <a:rPr lang="en-US" sz="2400" b="0" i="1" smtClean="0">
                           <a:latin typeface="Cambria Math" panose="02040503050406030204" pitchFamily="18" charset="0"/>
@@ -9805,10 +11831,7 @@
                 <a:pPr/>
                 <a14:m>
                   <m:oMathPara xmlns:m="http://schemas.openxmlformats.org/officeDocument/2006/math">
-                    <m:oMathParaPr>
-                      <m:jc m:val="centerGroup"/>
-                    </m:oMathParaPr>
-                    <m:oMath xmlns:m="http://schemas.openxmlformats.org/officeDocument/2006/math">
+                    <m:oMath>
                       <m:acc>
                         <m:accPr>
                           <m:chr m:val="⃗"/>
@@ -10041,10 +12064,7 @@
                 <a:pPr/>
                 <a14:m>
                   <m:oMathPara xmlns:m="http://schemas.openxmlformats.org/officeDocument/2006/math">
-                    <m:oMathParaPr>
-                      <m:jc m:val="centerGroup"/>
-                    </m:oMathParaPr>
-                    <m:oMath xmlns:m="http://schemas.openxmlformats.org/officeDocument/2006/math">
+                    <m:oMath>
                       <m:sSub>
                         <m:sSubPr>
                           <m:ctrlPr>
@@ -10156,10 +12176,7 @@
                 <a:pPr/>
                 <a14:m>
                   <m:oMathPara xmlns:m="http://schemas.openxmlformats.org/officeDocument/2006/math">
-                    <m:oMathParaPr>
-                      <m:jc m:val="centerGroup"/>
-                    </m:oMathParaPr>
-                    <m:oMath xmlns:m="http://schemas.openxmlformats.org/officeDocument/2006/math">
+                    <m:oMath>
                       <m:sSub>
                         <m:sSubPr>
                           <m:ctrlPr>
@@ -10446,10 +12463,7 @@
                 <a:pPr/>
                 <a14:m>
                   <m:oMathPara xmlns:m="http://schemas.openxmlformats.org/officeDocument/2006/math">
-                    <m:oMathParaPr>
-                      <m:jc m:val="centerGroup"/>
-                    </m:oMathParaPr>
-                    <m:oMath xmlns:m="http://schemas.openxmlformats.org/officeDocument/2006/math">
+                    <m:oMath>
                       <m:r>
                         <a:rPr lang="en-US" sz="2400" b="0" i="1" smtClean="0">
                           <a:latin typeface="Cambria Math" panose="02040503050406030204" pitchFamily="18" charset="0"/>
@@ -10589,10 +12603,7 @@
                 <a:pPr/>
                 <a14:m>
                   <m:oMathPara xmlns:m="http://schemas.openxmlformats.org/officeDocument/2006/math">
-                    <m:oMathParaPr>
-                      <m:jc m:val="centerGroup"/>
-                    </m:oMathParaPr>
-                    <m:oMath xmlns:m="http://schemas.openxmlformats.org/officeDocument/2006/math">
+                    <m:oMath>
                       <m:r>
                         <a:rPr lang="en-US" sz="2400" b="0" i="1" smtClean="0">
                           <a:latin typeface="Cambria Math" panose="02040503050406030204" pitchFamily="18" charset="0"/>
@@ -10865,10 +12876,7 @@
                 <a:pPr/>
                 <a14:m>
                   <m:oMathPara xmlns:m="http://schemas.openxmlformats.org/officeDocument/2006/math">
-                    <m:oMathParaPr>
-                      <m:jc m:val="centerGroup"/>
-                    </m:oMathParaPr>
-                    <m:oMath xmlns:m="http://schemas.openxmlformats.org/officeDocument/2006/math">
+                    <m:oMath>
                       <m:f>
                         <m:fPr>
                           <m:ctrlPr>
@@ -13735,10 +15743,7 @@
                 <a:pPr/>
                 <a14:m>
                   <m:oMathPara xmlns:m="http://schemas.openxmlformats.org/officeDocument/2006/math">
-                    <m:oMathParaPr>
-                      <m:jc m:val="centerGroup"/>
-                    </m:oMathParaPr>
-                    <m:oMath xmlns:m="http://schemas.openxmlformats.org/officeDocument/2006/math">
+                    <m:oMath>
                       <m:sSub>
                         <m:sSubPr>
                           <m:ctrlPr>
@@ -13861,10 +15866,7 @@
                 <a:pPr/>
                 <a14:m>
                   <m:oMathPara xmlns:m="http://schemas.openxmlformats.org/officeDocument/2006/math">
-                    <m:oMathParaPr>
-                      <m:jc m:val="centerGroup"/>
-                    </m:oMathParaPr>
-                    <m:oMath xmlns:m="http://schemas.openxmlformats.org/officeDocument/2006/math">
+                    <m:oMath>
                       <m:sSub>
                         <m:sSubPr>
                           <m:ctrlPr>
@@ -13987,10 +15989,7 @@
                 <a:pPr/>
                 <a14:m>
                   <m:oMathPara xmlns:m="http://schemas.openxmlformats.org/officeDocument/2006/math">
-                    <m:oMathParaPr>
-                      <m:jc m:val="centerGroup"/>
-                    </m:oMathParaPr>
-                    <m:oMath xmlns:m="http://schemas.openxmlformats.org/officeDocument/2006/math">
+                    <m:oMath>
                       <m:sSub>
                         <m:sSubPr>
                           <m:ctrlPr>
@@ -14113,10 +16112,7 @@
                 <a:pPr/>
                 <a14:m>
                   <m:oMathPara xmlns:m="http://schemas.openxmlformats.org/officeDocument/2006/math">
-                    <m:oMathParaPr>
-                      <m:jc m:val="centerGroup"/>
-                    </m:oMathParaPr>
-                    <m:oMath xmlns:m="http://schemas.openxmlformats.org/officeDocument/2006/math">
+                    <m:oMath>
                       <m:sSub>
                         <m:sSubPr>
                           <m:ctrlPr>
@@ -14239,10 +16235,7 @@
                 <a:pPr/>
                 <a14:m>
                   <m:oMathPara xmlns:m="http://schemas.openxmlformats.org/officeDocument/2006/math">
-                    <m:oMathParaPr>
-                      <m:jc m:val="centerGroup"/>
-                    </m:oMathParaPr>
-                    <m:oMath xmlns:m="http://schemas.openxmlformats.org/officeDocument/2006/math">
+                    <m:oMath>
                       <m:sSub>
                         <m:sSubPr>
                           <m:ctrlPr>
@@ -14365,10 +16358,7 @@
                 <a:pPr/>
                 <a14:m>
                   <m:oMathPara xmlns:m="http://schemas.openxmlformats.org/officeDocument/2006/math">
-                    <m:oMathParaPr>
-                      <m:jc m:val="centerGroup"/>
-                    </m:oMathParaPr>
-                    <m:oMath xmlns:m="http://schemas.openxmlformats.org/officeDocument/2006/math">
+                    <m:oMath>
                       <m:sSub>
                         <m:sSubPr>
                           <m:ctrlPr>
@@ -14491,10 +16481,7 @@
                 <a:pPr/>
                 <a14:m>
                   <m:oMathPara xmlns:m="http://schemas.openxmlformats.org/officeDocument/2006/math">
-                    <m:oMathParaPr>
-                      <m:jc m:val="centerGroup"/>
-                    </m:oMathParaPr>
-                    <m:oMath xmlns:m="http://schemas.openxmlformats.org/officeDocument/2006/math">
+                    <m:oMath>
                       <m:sSub>
                         <m:sSubPr>
                           <m:ctrlPr>
@@ -14617,10 +16604,7 @@
                 <a:pPr/>
                 <a14:m>
                   <m:oMathPara xmlns:m="http://schemas.openxmlformats.org/officeDocument/2006/math">
-                    <m:oMathParaPr>
-                      <m:jc m:val="centerGroup"/>
-                    </m:oMathParaPr>
-                    <m:oMath xmlns:m="http://schemas.openxmlformats.org/officeDocument/2006/math">
+                    <m:oMath>
                       <m:sSub>
                         <m:sSubPr>
                           <m:ctrlPr>
@@ -14743,10 +16727,7 @@
                 <a:pPr/>
                 <a14:m>
                   <m:oMathPara xmlns:m="http://schemas.openxmlformats.org/officeDocument/2006/math">
-                    <m:oMathParaPr>
-                      <m:jc m:val="centerGroup"/>
-                    </m:oMathParaPr>
-                    <m:oMath xmlns:m="http://schemas.openxmlformats.org/officeDocument/2006/math">
+                    <m:oMath>
                       <m:sSub>
                         <m:sSubPr>
                           <m:ctrlPr>
@@ -14913,10 +16894,7 @@
                 <a:pPr/>
                 <a14:m>
                   <m:oMathPara xmlns:m="http://schemas.openxmlformats.org/officeDocument/2006/math">
-                    <m:oMathParaPr>
-                      <m:jc m:val="centerGroup"/>
-                    </m:oMathParaPr>
-                    <m:oMath xmlns:m="http://schemas.openxmlformats.org/officeDocument/2006/math">
+                    <m:oMath>
                       <m:sSub>
                         <m:sSubPr>
                           <m:ctrlPr>
@@ -16115,10 +18093,7 @@
                 <a:pPr/>
                 <a14:m>
                   <m:oMathPara xmlns:m="http://schemas.openxmlformats.org/officeDocument/2006/math">
-                    <m:oMathParaPr>
-                      <m:jc m:val="centerGroup"/>
-                    </m:oMathParaPr>
-                    <m:oMath xmlns:m="http://schemas.openxmlformats.org/officeDocument/2006/math">
+                    <m:oMath>
                       <m:r>
                         <a:rPr lang="en-US" sz="2000" b="0" i="1" smtClean="0">
                           <a:latin typeface="Cambria Math" panose="02040503050406030204" pitchFamily="18" charset="0"/>
@@ -16211,10 +18186,7 @@
                 <a:pPr/>
                 <a14:m>
                   <m:oMathPara xmlns:m="http://schemas.openxmlformats.org/officeDocument/2006/math">
-                    <m:oMathParaPr>
-                      <m:jc m:val="centerGroup"/>
-                    </m:oMathParaPr>
-                    <m:oMath xmlns:m="http://schemas.openxmlformats.org/officeDocument/2006/math">
+                    <m:oMath>
                       <m:r>
                         <a:rPr lang="en-US" sz="2000" b="0" i="1" smtClean="0">
                           <a:latin typeface="Cambria Math" panose="02040503050406030204" pitchFamily="18" charset="0"/>
@@ -16301,10 +18273,7 @@
                 <a:pPr/>
                 <a14:m>
                   <m:oMathPara xmlns:m="http://schemas.openxmlformats.org/officeDocument/2006/math">
-                    <m:oMathParaPr>
-                      <m:jc m:val="centerGroup"/>
-                    </m:oMathParaPr>
-                    <m:oMath xmlns:m="http://schemas.openxmlformats.org/officeDocument/2006/math">
+                    <m:oMath>
                       <m:r>
                         <a:rPr lang="en-US" sz="2000" b="0" i="1" smtClean="0">
                           <a:latin typeface="Cambria Math" panose="02040503050406030204" pitchFamily="18" charset="0"/>
@@ -16385,10 +18354,7 @@
                 <a:pPr/>
                 <a14:m>
                   <m:oMathPara xmlns:m="http://schemas.openxmlformats.org/officeDocument/2006/math">
-                    <m:oMathParaPr>
-                      <m:jc m:val="centerGroup"/>
-                    </m:oMathParaPr>
-                    <m:oMath xmlns:m="http://schemas.openxmlformats.org/officeDocument/2006/math">
+                    <m:oMath>
                       <m:r>
                         <a:rPr lang="en-US" sz="2000" b="0" i="1" smtClean="0">
                           <a:latin typeface="Cambria Math" panose="02040503050406030204" pitchFamily="18" charset="0"/>
@@ -16469,10 +18435,7 @@
                 <a:pPr/>
                 <a14:m>
                   <m:oMathPara xmlns:m="http://schemas.openxmlformats.org/officeDocument/2006/math">
-                    <m:oMathParaPr>
-                      <m:jc m:val="centerGroup"/>
-                    </m:oMathParaPr>
-                    <m:oMath xmlns:m="http://schemas.openxmlformats.org/officeDocument/2006/math">
+                    <m:oMath>
                       <m:r>
                         <a:rPr lang="en-US" sz="2000" b="0" i="1" smtClean="0">
                           <a:latin typeface="Cambria Math" panose="02040503050406030204" pitchFamily="18" charset="0"/>
@@ -16565,10 +18528,7 @@
                 <a:pPr/>
                 <a14:m>
                   <m:oMathPara xmlns:m="http://schemas.openxmlformats.org/officeDocument/2006/math">
-                    <m:oMathParaPr>
-                      <m:jc m:val="centerGroup"/>
-                    </m:oMathParaPr>
-                    <m:oMath xmlns:m="http://schemas.openxmlformats.org/officeDocument/2006/math">
+                    <m:oMath>
                       <m:r>
                         <a:rPr lang="en-US" sz="2000" b="0" i="1" smtClean="0">
                           <a:latin typeface="Cambria Math" panose="02040503050406030204" pitchFamily="18" charset="0"/>
@@ -16661,10 +18621,7 @@
                 <a:pPr/>
                 <a14:m>
                   <m:oMathPara xmlns:m="http://schemas.openxmlformats.org/officeDocument/2006/math">
-                    <m:oMathParaPr>
-                      <m:jc m:val="centerGroup"/>
-                    </m:oMathParaPr>
-                    <m:oMath xmlns:m="http://schemas.openxmlformats.org/officeDocument/2006/math">
+                    <m:oMath>
                       <m:r>
                         <a:rPr lang="en-US" sz="2000" b="0" i="1" smtClean="0">
                           <a:latin typeface="Cambria Math" panose="02040503050406030204" pitchFamily="18" charset="0"/>
@@ -16757,10 +18714,7 @@
                 <a:pPr/>
                 <a14:m>
                   <m:oMathPara xmlns:m="http://schemas.openxmlformats.org/officeDocument/2006/math">
-                    <m:oMathParaPr>
-                      <m:jc m:val="centerGroup"/>
-                    </m:oMathParaPr>
-                    <m:oMath xmlns:m="http://schemas.openxmlformats.org/officeDocument/2006/math">
+                    <m:oMath>
                       <m:r>
                         <a:rPr lang="en-US" sz="2000" b="0" i="1" smtClean="0">
                           <a:latin typeface="Cambria Math" panose="02040503050406030204" pitchFamily="18" charset="0"/>
@@ -16952,10 +18906,7 @@
                 <a:pPr/>
                 <a14:m>
                   <m:oMathPara xmlns:m="http://schemas.openxmlformats.org/officeDocument/2006/math">
-                    <m:oMathParaPr>
-                      <m:jc m:val="centerGroup"/>
-                    </m:oMathParaPr>
-                    <m:oMath xmlns:m="http://schemas.openxmlformats.org/officeDocument/2006/math">
+                    <m:oMath>
                       <m:d>
                         <m:dPr>
                           <m:begChr m:val="⟨"/>
@@ -17216,10 +19167,7 @@
                 <a:pPr/>
                 <a14:m>
                   <m:oMathPara xmlns:m="http://schemas.openxmlformats.org/officeDocument/2006/math">
-                    <m:oMathParaPr>
-                      <m:jc m:val="centerGroup"/>
-                    </m:oMathParaPr>
-                    <m:oMath xmlns:m="http://schemas.openxmlformats.org/officeDocument/2006/math">
+                    <m:oMath>
                       <m:r>
                         <a:rPr lang="en-US" sz="2800" i="1" smtClean="0">
                           <a:latin typeface="Cambria Math" panose="02040503050406030204" pitchFamily="18" charset="0"/>
@@ -17334,10 +19282,7 @@
                 <a:pPr/>
                 <a14:m>
                   <m:oMathPara xmlns:m="http://schemas.openxmlformats.org/officeDocument/2006/math">
-                    <m:oMathParaPr>
-                      <m:jc m:val="centerGroup"/>
-                    </m:oMathParaPr>
-                    <m:oMath xmlns:m="http://schemas.openxmlformats.org/officeDocument/2006/math">
+                    <m:oMath>
                       <m:d>
                         <m:dPr>
                           <m:begChr m:val="⟨"/>
@@ -17431,10 +19376,7 @@
                 <a:pPr/>
                 <a14:m>
                   <m:oMathPara xmlns:m="http://schemas.openxmlformats.org/officeDocument/2006/math">
-                    <m:oMathParaPr>
-                      <m:jc m:val="centerGroup"/>
-                    </m:oMathParaPr>
-                    <m:oMath xmlns:m="http://schemas.openxmlformats.org/officeDocument/2006/math">
+                    <m:oMath>
                       <m:d>
                         <m:dPr>
                           <m:begChr m:val="⟨"/>
@@ -17567,10 +19509,7 @@
                 <a:pPr/>
                 <a14:m>
                   <m:oMathPara xmlns:m="http://schemas.openxmlformats.org/officeDocument/2006/math">
-                    <m:oMathParaPr>
-                      <m:jc m:val="centerGroup"/>
-                    </m:oMathParaPr>
-                    <m:oMath xmlns:m="http://schemas.openxmlformats.org/officeDocument/2006/math">
+                    <m:oMath>
                       <m:sSub>
                         <m:sSubPr>
                           <m:ctrlPr>
@@ -18020,10 +19959,7 @@
                 <a:pPr/>
                 <a14:m>
                   <m:oMathPara xmlns:m="http://schemas.openxmlformats.org/officeDocument/2006/math">
-                    <m:oMathParaPr>
-                      <m:jc m:val="centerGroup"/>
-                    </m:oMathParaPr>
-                    <m:oMath xmlns:m="http://schemas.openxmlformats.org/officeDocument/2006/math">
+                    <m:oMath>
                       <m:r>
                         <a:rPr lang="en-US" sz="2400" b="0" i="1" smtClean="0">
                           <a:solidFill>
@@ -18107,10 +20043,7 @@
                 <a:pPr/>
                 <a14:m>
                   <m:oMathPara xmlns:m="http://schemas.openxmlformats.org/officeDocument/2006/math">
-                    <m:oMathParaPr>
-                      <m:jc m:val="centerGroup"/>
-                    </m:oMathParaPr>
-                    <m:oMath xmlns:m="http://schemas.openxmlformats.org/officeDocument/2006/math">
+                    <m:oMath>
                       <m:r>
                         <a:rPr lang="en-US" sz="2400" b="0" i="1" smtClean="0">
                           <a:solidFill>
@@ -18203,10 +20136,7 @@
                 <a:pPr/>
                 <a14:m>
                   <m:oMathPara xmlns:m="http://schemas.openxmlformats.org/officeDocument/2006/math">
-                    <m:oMathParaPr>
-                      <m:jc m:val="centerGroup"/>
-                    </m:oMathParaPr>
-                    <m:oMath xmlns:m="http://schemas.openxmlformats.org/officeDocument/2006/math">
+                    <m:oMath>
                       <m:r>
                         <a:rPr lang="en-US" sz="2400" b="0" i="1" smtClean="0">
                           <a:solidFill>
@@ -18429,10 +20359,7 @@
                 <a:pPr/>
                 <a14:m>
                   <m:oMathPara xmlns:m="http://schemas.openxmlformats.org/officeDocument/2006/math">
-                    <m:oMathParaPr>
-                      <m:jc m:val="centerGroup"/>
-                    </m:oMathParaPr>
-                    <m:oMath xmlns:m="http://schemas.openxmlformats.org/officeDocument/2006/math">
+                    <m:oMath>
                       <m:r>
                         <a:rPr lang="en-US" sz="2400" b="0" i="1" smtClean="0">
                           <a:latin typeface="Cambria Math" panose="02040503050406030204" pitchFamily="18" charset="0"/>
@@ -18616,10 +20543,7 @@
                 <a:pPr/>
                 <a14:m>
                   <m:oMathPara xmlns:m="http://schemas.openxmlformats.org/officeDocument/2006/math">
-                    <m:oMathParaPr>
-                      <m:jc m:val="centerGroup"/>
-                    </m:oMathParaPr>
-                    <m:oMath xmlns:m="http://schemas.openxmlformats.org/officeDocument/2006/math">
+                    <m:oMath>
                       <m:r>
                         <a:rPr lang="en-US" sz="2400" b="0" i="1" smtClean="0">
                           <a:latin typeface="Cambria Math" panose="02040503050406030204" pitchFamily="18" charset="0"/>
@@ -18642,7 +20566,7 @@
                       <m:f>
                         <m:fPr>
                           <m:ctrlPr>
-                            <a:rPr lang="en-US" sz="2400" b="0" i="1" smtClean="0">
+                            <a:rPr lang="en-US" sz="2400" b="0" i="0" smtClean="0">
                               <a:latin typeface="Cambria Math" panose="02040503050406030204" pitchFamily="18" charset="0"/>
                             </a:rPr>
                           </m:ctrlPr>
@@ -18756,10 +20680,7 @@
                 <a:pPr/>
                 <a14:m>
                   <m:oMathPara xmlns:m="http://schemas.openxmlformats.org/officeDocument/2006/math">
-                    <m:oMathParaPr>
-                      <m:jc m:val="centerGroup"/>
-                    </m:oMathParaPr>
-                    <m:oMath xmlns:m="http://schemas.openxmlformats.org/officeDocument/2006/math">
+                    <m:oMath>
                       <m:r>
                         <a:rPr lang="en-US" sz="2400" i="1">
                           <a:latin typeface="Cambria Math" panose="02040503050406030204" pitchFamily="18" charset="0"/>
@@ -19113,10 +21034,7 @@
                 <a:pPr/>
                 <a14:m>
                   <m:oMathPara xmlns:m="http://schemas.openxmlformats.org/officeDocument/2006/math">
-                    <m:oMathParaPr>
-                      <m:jc m:val="centerGroup"/>
-                    </m:oMathParaPr>
-                    <m:oMath xmlns:m="http://schemas.openxmlformats.org/officeDocument/2006/math">
+                    <m:oMath>
                       <m:r>
                         <a:rPr lang="en-US" sz="2400" b="0" i="1" smtClean="0">
                           <a:latin typeface="Cambria Math" panose="02040503050406030204" pitchFamily="18" charset="0"/>
@@ -19139,7 +21057,7 @@
                       <m:f>
                         <m:fPr>
                           <m:ctrlPr>
-                            <a:rPr lang="en-US" sz="2400" b="0" i="1" smtClean="0">
+                            <a:rPr lang="en-US" sz="2400" b="0" i="0" smtClean="0">
                               <a:latin typeface="Cambria Math" panose="02040503050406030204" pitchFamily="18" charset="0"/>
                             </a:rPr>
                           </m:ctrlPr>
@@ -19848,10 +21766,7 @@
                 <a:pPr/>
                 <a14:m>
                   <m:oMathPara xmlns:m="http://schemas.openxmlformats.org/officeDocument/2006/math">
-                    <m:oMathParaPr>
-                      <m:jc m:val="centerGroup"/>
-                    </m:oMathParaPr>
-                    <m:oMath xmlns:m="http://schemas.openxmlformats.org/officeDocument/2006/math">
+                    <m:oMath>
                       <m:r>
                         <a:rPr lang="en-US" sz="2400" b="0" i="1" smtClean="0">
                           <a:solidFill>
@@ -19935,10 +21850,7 @@
                 <a:pPr/>
                 <a14:m>
                   <m:oMathPara xmlns:m="http://schemas.openxmlformats.org/officeDocument/2006/math">
-                    <m:oMathParaPr>
-                      <m:jc m:val="centerGroup"/>
-                    </m:oMathParaPr>
-                    <m:oMath xmlns:m="http://schemas.openxmlformats.org/officeDocument/2006/math">
+                    <m:oMath>
                       <m:r>
                         <a:rPr lang="en-US" sz="2400" b="0" i="1" smtClean="0">
                           <a:solidFill>
@@ -20031,10 +21943,7 @@
                 <a:pPr/>
                 <a14:m>
                   <m:oMathPara xmlns:m="http://schemas.openxmlformats.org/officeDocument/2006/math">
-                    <m:oMathParaPr>
-                      <m:jc m:val="centerGroup"/>
-                    </m:oMathParaPr>
-                    <m:oMath xmlns:m="http://schemas.openxmlformats.org/officeDocument/2006/math">
+                    <m:oMath>
                       <m:r>
                         <a:rPr lang="en-US" sz="2400" b="0" i="1" smtClean="0">
                           <a:solidFill>
@@ -20118,10 +22027,7 @@
                 <a:pPr/>
                 <a14:m>
                   <m:oMathPara xmlns:m="http://schemas.openxmlformats.org/officeDocument/2006/math">
-                    <m:oMathParaPr>
-                      <m:jc m:val="centerGroup"/>
-                    </m:oMathParaPr>
-                    <m:oMath xmlns:m="http://schemas.openxmlformats.org/officeDocument/2006/math">
+                    <m:oMath>
                       <m:r>
                         <m:rPr>
                           <m:sty m:val="p"/>
@@ -20304,10 +22210,7 @@
                 <a:pPr/>
                 <a14:m>
                   <m:oMathPara xmlns:m="http://schemas.openxmlformats.org/officeDocument/2006/math">
-                    <m:oMathParaPr>
-                      <m:jc m:val="centerGroup"/>
-                    </m:oMathParaPr>
-                    <m:oMath xmlns:m="http://schemas.openxmlformats.org/officeDocument/2006/math">
+                    <m:oMath>
                       <m:r>
                         <a:rPr lang="en-US" sz="2400" b="0" i="1" smtClean="0">
                           <a:solidFill>
@@ -20391,10 +22294,7 @@
                 <a:pPr/>
                 <a14:m>
                   <m:oMathPara xmlns:m="http://schemas.openxmlformats.org/officeDocument/2006/math">
-                    <m:oMathParaPr>
-                      <m:jc m:val="centerGroup"/>
-                    </m:oMathParaPr>
-                    <m:oMath xmlns:m="http://schemas.openxmlformats.org/officeDocument/2006/math">
+                    <m:oMath>
                       <m:r>
                         <m:rPr>
                           <m:sty m:val="p"/>
